--- a/ppt/PPT SEMHAS.pptx
+++ b/ppt/PPT SEMHAS.pptx
@@ -5,10 +5,10 @@
     <p:sldMasterId id="2147483648" r:id="rId4"/>
   </p:sldMasterIdLst>
   <p:notesMasterIdLst>
-    <p:notesMasterId r:id="rId43"/>
+    <p:notesMasterId r:id="rId44"/>
   </p:notesMasterIdLst>
   <p:handoutMasterIdLst>
-    <p:handoutMasterId r:id="rId44"/>
+    <p:handoutMasterId r:id="rId45"/>
   </p:handoutMasterIdLst>
   <p:sldIdLst>
     <p:sldId id="256" r:id="rId5"/>
@@ -45,10 +45,11 @@
     <p:sldId id="293" r:id="rId36"/>
     <p:sldId id="294" r:id="rId37"/>
     <p:sldId id="298" r:id="rId38"/>
-    <p:sldId id="295" r:id="rId39"/>
-    <p:sldId id="296" r:id="rId40"/>
-    <p:sldId id="297" r:id="rId41"/>
-    <p:sldId id="275" r:id="rId42"/>
+    <p:sldId id="296" r:id="rId39"/>
+    <p:sldId id="299" r:id="rId40"/>
+    <p:sldId id="295" r:id="rId41"/>
+    <p:sldId id="297" r:id="rId42"/>
+    <p:sldId id="275" r:id="rId43"/>
   </p:sldIdLst>
   <p:sldSz cx="12192000" cy="6858000"/>
   <p:notesSz cx="6858000" cy="9144000"/>
@@ -266,7 +267,7 @@
             <a:pPr rtl="0"/>
             <a:fld id="{AB1BF87F-531B-4BDC-A663-C6A67C7BEC47}" type="datetime1">
               <a:rPr lang="id-ID" smtClean="0"/>
-              <a:t>10/09/2025</a:t>
+              <a:t>11/09/2025</a:t>
             </a:fld>
             <a:endParaRPr lang="id-ID" dirty="0"/>
           </a:p>
@@ -447,7 +448,7 @@
             <a:fld id="{7B08E6FE-7462-41B9-93AA-C863C0ADF1B6}" type="datetime1">
               <a:rPr lang="id-ID" smtClean="0"/>
               <a:pPr/>
-              <a:t>10/09/2025</a:t>
+              <a:t>11/09/2025</a:t>
             </a:fld>
             <a:endParaRPr lang="id-ID" dirty="0"/>
           </a:p>
@@ -3630,7 +3631,7 @@
             <a:pPr rtl="0"/>
             <a:fld id="{F97DC217-DF71-1A49-B3EA-559F1F43B0FF}" type="slidenum">
               <a:rPr lang="id-ID" smtClean="0"/>
-              <a:t>35</a:t>
+              <a:t>37</a:t>
             </a:fld>
             <a:endParaRPr lang="id-ID"/>
           </a:p>
@@ -3715,7 +3716,7 @@
             <a:pPr rtl="0"/>
             <a:fld id="{F97DC217-DF71-1A49-B3EA-559F1F43B0FF}" type="slidenum">
               <a:rPr lang="id-ID" smtClean="0"/>
-              <a:t>38</a:t>
+              <a:t>39</a:t>
             </a:fld>
             <a:endParaRPr lang="id-ID"/>
           </a:p>
@@ -5660,7 +5661,7 @@
             <a:pPr rtl="0"/>
             <a:fld id="{5FB06667-F309-4D31-9192-FA935AFD6E2C}" type="datetime1">
               <a:rPr lang="id-ID" noProof="0" smtClean="0"/>
-              <a:t>10/09/2025</a:t>
+              <a:t>11/09/2025</a:t>
             </a:fld>
             <a:endParaRPr lang="id-ID" noProof="0"/>
           </a:p>
@@ -6547,7 +6548,7 @@
             <a:pPr rtl="0"/>
             <a:fld id="{864F080E-00EF-45FB-879B-543FC5219789}" type="datetime1">
               <a:rPr lang="id-ID" noProof="0" smtClean="0"/>
-              <a:t>10/09/2025</a:t>
+              <a:t>11/09/2025</a:t>
             </a:fld>
             <a:endParaRPr lang="id-ID" noProof="0"/>
           </a:p>
@@ -7723,7 +7724,7 @@
             <a:pPr rtl="0"/>
             <a:fld id="{FED39403-5B82-4458-B314-3455B2B980C6}" type="datetime1">
               <a:rPr lang="id-ID" noProof="0" smtClean="0"/>
-              <a:t>10/09/2025</a:t>
+              <a:t>11/09/2025</a:t>
             </a:fld>
             <a:endParaRPr lang="id-ID" noProof="0"/>
           </a:p>
@@ -9802,7 +9803,7 @@
             <a:pPr rtl="0"/>
             <a:fld id="{51A9B3F0-40B4-402B-BD3D-2ECBD63B1A7A}" type="datetime1">
               <a:rPr lang="id-ID" noProof="0" smtClean="0"/>
-              <a:t>10/09/2025</a:t>
+              <a:t>11/09/2025</a:t>
             </a:fld>
             <a:endParaRPr lang="id-ID" noProof="0"/>
           </a:p>
@@ -10523,7 +10524,7 @@
             <a:pPr rtl="0"/>
             <a:fld id="{C66938A1-13E2-4EB3-A9CB-9E58C4A52052}" type="datetime1">
               <a:rPr lang="id-ID" noProof="0" smtClean="0"/>
-              <a:t>10/09/2025</a:t>
+              <a:t>11/09/2025</a:t>
             </a:fld>
             <a:endParaRPr lang="id-ID" noProof="0"/>
           </a:p>
@@ -11755,7 +11756,7 @@
             <a:pPr rtl="0"/>
             <a:fld id="{8E39C280-D1CE-4C14-BB73-A42EFC7AA47C}" type="datetime1">
               <a:rPr lang="id-ID" noProof="0" smtClean="0"/>
-              <a:t>10/09/2025</a:t>
+              <a:t>11/09/2025</a:t>
             </a:fld>
             <a:endParaRPr lang="id-ID" noProof="0"/>
           </a:p>
@@ -12349,7 +12350,7 @@
             <a:pPr rtl="0"/>
             <a:fld id="{7CF46B1F-6981-4F1A-BBFE-32021A818C89}" type="datetime1">
               <a:rPr lang="id-ID" noProof="0" smtClean="0"/>
-              <a:t>10/09/2025</a:t>
+              <a:t>11/09/2025</a:t>
             </a:fld>
             <a:endParaRPr lang="id-ID" noProof="0"/>
           </a:p>
@@ -12825,7 +12826,7 @@
             <a:pPr rtl="0"/>
             <a:fld id="{84E9CC79-66B9-422C-A06E-4D4DCD64D4AF}" type="datetime1">
               <a:rPr lang="id-ID" noProof="0" smtClean="0"/>
-              <a:t>10/09/2025</a:t>
+              <a:t>11/09/2025</a:t>
             </a:fld>
             <a:endParaRPr lang="id-ID" noProof="0"/>
           </a:p>
@@ -13682,7 +13683,7 @@
             <a:pPr rtl="0"/>
             <a:fld id="{7B48DF3E-AD03-4E2F-9529-7FF1401E86D2}" type="datetime1">
               <a:rPr lang="id-ID" noProof="0" smtClean="0"/>
-              <a:t>10/09/2025</a:t>
+              <a:t>11/09/2025</a:t>
             </a:fld>
             <a:endParaRPr lang="id-ID" noProof="0"/>
           </a:p>
@@ -15918,7 +15919,7 @@
             <a:pPr rtl="0"/>
             <a:fld id="{0313E8A0-0BEB-4298-AEE4-B7CCF6490583}" type="datetime1">
               <a:rPr lang="id-ID" noProof="0" smtClean="0"/>
-              <a:t>10/09/2025</a:t>
+              <a:t>11/09/2025</a:t>
             </a:fld>
             <a:endParaRPr lang="id-ID" noProof="0"/>
           </a:p>
@@ -16190,7 +16191,7 @@
             <a:pPr rtl="0"/>
             <a:fld id="{C829E6E2-2665-481C-9621-3949D48D67CF}" type="datetime1">
               <a:rPr lang="id-ID" noProof="0" smtClean="0"/>
-              <a:t>10/09/2025</a:t>
+              <a:t>11/09/2025</a:t>
             </a:fld>
             <a:endParaRPr lang="id-ID" noProof="0"/>
           </a:p>
@@ -17452,7 +17453,7 @@
             <a:pPr rtl="0"/>
             <a:fld id="{423EE75F-42B8-4E1A-83C6-1B72B3C0E408}" type="datetime1">
               <a:rPr lang="id-ID" smtClean="0"/>
-              <a:t>10/09/2025</a:t>
+              <a:t>11/09/2025</a:t>
             </a:fld>
             <a:endParaRPr lang="id-ID"/>
           </a:p>
@@ -18502,7 +18503,7 @@
             <a:pPr rtl="0"/>
             <a:fld id="{A808DD98-197B-46F5-A6AA-BDA332D7E685}" type="datetime1">
               <a:rPr lang="id-ID" smtClean="0"/>
-              <a:t>10/09/2025</a:t>
+              <a:t>11/09/2025</a:t>
             </a:fld>
             <a:endParaRPr lang="id-ID"/>
           </a:p>
@@ -20427,7 +20428,7 @@
             <a:pPr rtl="0"/>
             <a:fld id="{A808DD98-197B-46F5-A6AA-BDA332D7E685}" type="datetime1">
               <a:rPr lang="id-ID" smtClean="0"/>
-              <a:t>10/09/2025</a:t>
+              <a:t>11/09/2025</a:t>
             </a:fld>
             <a:endParaRPr lang="id-ID"/>
           </a:p>
@@ -21674,7 +21675,7 @@
             <a:pPr rtl="0"/>
             <a:fld id="{A808DD98-197B-46F5-A6AA-BDA332D7E685}" type="datetime1">
               <a:rPr lang="id-ID" smtClean="0"/>
-              <a:t>10/09/2025</a:t>
+              <a:t>11/09/2025</a:t>
             </a:fld>
             <a:endParaRPr lang="id-ID"/>
           </a:p>
@@ -21885,7 +21886,7 @@
             <a:pPr rtl="0"/>
             <a:fld id="{70C69C4D-CAFD-4E0E-94E0-4B1709D96441}" type="datetime1">
               <a:rPr lang="id-ID" smtClean="0"/>
-              <a:t>10/09/2025</a:t>
+              <a:t>11/09/2025</a:t>
             </a:fld>
             <a:endParaRPr lang="id-ID"/>
           </a:p>
@@ -22932,7 +22933,7 @@
             <a:pPr rtl="0"/>
             <a:fld id="{423EE75F-42B8-4E1A-83C6-1B72B3C0E408}" type="datetime1">
               <a:rPr lang="id-ID" smtClean="0"/>
-              <a:t>10/09/2025</a:t>
+              <a:t>11/09/2025</a:t>
             </a:fld>
             <a:endParaRPr lang="id-ID"/>
           </a:p>
@@ -26155,7 +26156,7 @@
             <a:pPr rtl="0"/>
             <a:fld id="{423EE75F-42B8-4E1A-83C6-1B72B3C0E408}" type="datetime1">
               <a:rPr lang="id-ID" smtClean="0"/>
-              <a:t>10/09/2025</a:t>
+              <a:t>11/09/2025</a:t>
             </a:fld>
             <a:endParaRPr lang="id-ID"/>
           </a:p>
@@ -26512,7 +26513,7 @@
             <a:pPr rtl="0"/>
             <a:fld id="{423EE75F-42B8-4E1A-83C6-1B72B3C0E408}" type="datetime1">
               <a:rPr lang="id-ID" smtClean="0"/>
-              <a:t>10/09/2025</a:t>
+              <a:t>11/09/2025</a:t>
             </a:fld>
             <a:endParaRPr lang="id-ID"/>
           </a:p>
@@ -28036,7 +28037,7 @@
             <a:pPr rtl="0"/>
             <a:fld id="{423EE75F-42B8-4E1A-83C6-1B72B3C0E408}" type="datetime1">
               <a:rPr lang="id-ID" smtClean="0"/>
-              <a:t>10/09/2025</a:t>
+              <a:t>11/09/2025</a:t>
             </a:fld>
             <a:endParaRPr lang="id-ID"/>
           </a:p>
@@ -28405,7 +28406,7 @@
             <a:pPr rtl="0"/>
             <a:fld id="{423EE75F-42B8-4E1A-83C6-1B72B3C0E408}" type="datetime1">
               <a:rPr lang="id-ID" smtClean="0"/>
-              <a:t>10/09/2025</a:t>
+              <a:t>11/09/2025</a:t>
             </a:fld>
             <a:endParaRPr lang="id-ID"/>
           </a:p>
@@ -30061,7 +30062,7 @@
             <a:pPr rtl="0"/>
             <a:fld id="{0313E8A0-0BEB-4298-AEE4-B7CCF6490583}" type="datetime1">
               <a:rPr lang="id-ID" noProof="0" smtClean="0"/>
-              <a:t>10/09/2025</a:t>
+              <a:t>11/09/2025</a:t>
             </a:fld>
             <a:endParaRPr lang="id-ID" noProof="0"/>
           </a:p>
@@ -30239,6 +30240,400 @@
   <p:cSld>
     <p:spTree>
       <p:nvGrpSpPr>
+        <p:cNvPr id="1" name=""/>
+        <p:cNvGrpSpPr/>
+        <p:nvPr/>
+      </p:nvGrpSpPr>
+      <p:grpSpPr>
+        <a:xfrm>
+          <a:off x="0" y="0"/>
+          <a:ext cx="0" cy="0"/>
+          <a:chOff x="0" y="0"/>
+          <a:chExt cx="0" cy="0"/>
+        </a:xfrm>
+      </p:grpSpPr>
+      <p:sp>
+        <p:nvSpPr>
+          <p:cNvPr id="2" name="Title 1">
+            <a:extLst>
+              <a:ext uri="{FF2B5EF4-FFF2-40B4-BE49-F238E27FC236}">
+                <a16:creationId xmlns:a16="http://schemas.microsoft.com/office/drawing/2014/main" id="{D8868684-22D9-EC9A-202B-95C87705678F}"/>
+              </a:ext>
+            </a:extLst>
+          </p:cNvPr>
+          <p:cNvSpPr>
+            <a:spLocks noGrp="1"/>
+          </p:cNvSpPr>
+          <p:nvPr>
+            <p:ph type="title"/>
+          </p:nvPr>
+        </p:nvSpPr>
+        <p:spPr/>
+        <p:txBody>
+          <a:bodyPr/>
+          <a:lstStyle/>
+          <a:p>
+            <a:r>
+              <a:rPr lang="en-GB" dirty="0" err="1"/>
+              <a:t>Keterbatasan</a:t>
+            </a:r>
+            <a:r>
+              <a:rPr lang="en-GB" dirty="0"/>
+              <a:t> </a:t>
+            </a:r>
+            <a:r>
+              <a:rPr lang="en-GB" dirty="0" err="1"/>
+              <a:t>Penelitian</a:t>
+            </a:r>
+            <a:endParaRPr lang="id-ID" dirty="0"/>
+          </a:p>
+        </p:txBody>
+      </p:sp>
+      <p:sp>
+        <p:nvSpPr>
+          <p:cNvPr id="3" name="Content Placeholder 2">
+            <a:extLst>
+              <a:ext uri="{FF2B5EF4-FFF2-40B4-BE49-F238E27FC236}">
+                <a16:creationId xmlns:a16="http://schemas.microsoft.com/office/drawing/2014/main" id="{65200710-C666-F71E-CCCE-06ED514FA3A4}"/>
+              </a:ext>
+            </a:extLst>
+          </p:cNvPr>
+          <p:cNvSpPr>
+            <a:spLocks noGrp="1"/>
+          </p:cNvSpPr>
+          <p:nvPr>
+            <p:ph idx="1"/>
+          </p:nvPr>
+        </p:nvSpPr>
+        <p:spPr>
+          <a:xfrm>
+            <a:off x="1167493" y="1887795"/>
+            <a:ext cx="9613578" cy="3469022"/>
+          </a:xfrm>
+        </p:spPr>
+        <p:txBody>
+          <a:bodyPr/>
+          <a:lstStyle/>
+          <a:p>
+            <a:r>
+              <a:rPr lang="id-ID" sz="2800" dirty="0"/>
+              <a:t>Penelitian ini memiliki keterbatasan pada cakupan data yang hanya mencakup liga tertentu dan ketersediaan fitur kontekstual seperti posisi kiper. Selain itu, validitas model juga perlu diuji lebih lanjut pada kompetisi dengan gaya bermain yang berbeda untuk memastikan generalisasi.</a:t>
+            </a:r>
+          </a:p>
+        </p:txBody>
+      </p:sp>
+      <p:sp>
+        <p:nvSpPr>
+          <p:cNvPr id="4" name="Date Placeholder 3">
+            <a:extLst>
+              <a:ext uri="{FF2B5EF4-FFF2-40B4-BE49-F238E27FC236}">
+                <a16:creationId xmlns:a16="http://schemas.microsoft.com/office/drawing/2014/main" id="{B888C59B-68A0-3591-5974-34464134CCEC}"/>
+              </a:ext>
+            </a:extLst>
+          </p:cNvPr>
+          <p:cNvSpPr>
+            <a:spLocks noGrp="1"/>
+          </p:cNvSpPr>
+          <p:nvPr>
+            <p:ph type="dt" sz="half" idx="2"/>
+          </p:nvPr>
+        </p:nvSpPr>
+        <p:spPr/>
+        <p:txBody>
+          <a:bodyPr/>
+          <a:lstStyle/>
+          <a:p>
+            <a:pPr rtl="0"/>
+            <a:fld id="{864F080E-00EF-45FB-879B-543FC5219789}" type="datetime1">
+              <a:rPr lang="id-ID" noProof="0" smtClean="0"/>
+              <a:t>11/09/2025</a:t>
+            </a:fld>
+            <a:endParaRPr lang="id-ID" noProof="0"/>
+          </a:p>
+        </p:txBody>
+      </p:sp>
+      <p:sp>
+        <p:nvSpPr>
+          <p:cNvPr id="5" name="Footer Placeholder 4">
+            <a:extLst>
+              <a:ext uri="{FF2B5EF4-FFF2-40B4-BE49-F238E27FC236}">
+                <a16:creationId xmlns:a16="http://schemas.microsoft.com/office/drawing/2014/main" id="{0154EC9F-46CD-7CBD-1E30-B6D18FFFE3D0}"/>
+              </a:ext>
+            </a:extLst>
+          </p:cNvPr>
+          <p:cNvSpPr>
+            <a:spLocks noGrp="1"/>
+          </p:cNvSpPr>
+          <p:nvPr>
+            <p:ph type="ftr" sz="quarter" idx="3"/>
+          </p:nvPr>
+        </p:nvSpPr>
+        <p:spPr/>
+        <p:txBody>
+          <a:bodyPr/>
+          <a:lstStyle/>
+          <a:p>
+            <a:pPr rtl="0"/>
+            <a:r>
+              <a:rPr lang="id-ID" noProof="0"/>
+              <a:t>JUDUL PRESENTASI</a:t>
+            </a:r>
+          </a:p>
+        </p:txBody>
+      </p:sp>
+      <p:sp>
+        <p:nvSpPr>
+          <p:cNvPr id="6" name="Slide Number Placeholder 5">
+            <a:extLst>
+              <a:ext uri="{FF2B5EF4-FFF2-40B4-BE49-F238E27FC236}">
+                <a16:creationId xmlns:a16="http://schemas.microsoft.com/office/drawing/2014/main" id="{D1F630AB-4019-E7C5-9C7A-83CA11B8ED47}"/>
+              </a:ext>
+            </a:extLst>
+          </p:cNvPr>
+          <p:cNvSpPr>
+            <a:spLocks noGrp="1"/>
+          </p:cNvSpPr>
+          <p:nvPr>
+            <p:ph type="sldNum" sz="quarter" idx="4"/>
+          </p:nvPr>
+        </p:nvSpPr>
+        <p:spPr/>
+        <p:txBody>
+          <a:bodyPr/>
+          <a:lstStyle/>
+          <a:p>
+            <a:pPr rtl="0"/>
+            <a:fld id="{294A09A9-5501-47C1-A89A-A340965A2BE2}" type="slidenum">
+              <a:rPr lang="id-ID" noProof="0" smtClean="0"/>
+              <a:pPr rtl="0"/>
+              <a:t>35</a:t>
+            </a:fld>
+            <a:endParaRPr lang="id-ID" noProof="0"/>
+          </a:p>
+        </p:txBody>
+      </p:sp>
+    </p:spTree>
+    <p:extLst>
+      <p:ext uri="{BB962C8B-B14F-4D97-AF65-F5344CB8AC3E}">
+        <p14:creationId xmlns:p14="http://schemas.microsoft.com/office/powerpoint/2010/main" val="3278069340"/>
+      </p:ext>
+    </p:extLst>
+  </p:cSld>
+  <p:clrMapOvr>
+    <a:masterClrMapping/>
+  </p:clrMapOvr>
+</p:sld>
+</file>
+
+<file path=ppt/slides/slide36.xml><?xml version="1.0" encoding="utf-8"?>
+<p:sld xmlns:a="http://schemas.openxmlformats.org/drawingml/2006/main" xmlns:r="http://schemas.openxmlformats.org/officeDocument/2006/relationships" xmlns:p="http://schemas.openxmlformats.org/presentationml/2006/main">
+  <p:cSld>
+    <p:spTree>
+      <p:nvGrpSpPr>
+        <p:cNvPr id="1" name="">
+          <a:extLst>
+            <a:ext uri="{FF2B5EF4-FFF2-40B4-BE49-F238E27FC236}">
+              <a16:creationId xmlns:a16="http://schemas.microsoft.com/office/drawing/2014/main" id="{E7787F26-D841-9E3A-EA2F-E7883150B068}"/>
+            </a:ext>
+          </a:extLst>
+        </p:cNvPr>
+        <p:cNvGrpSpPr/>
+        <p:nvPr/>
+      </p:nvGrpSpPr>
+      <p:grpSpPr>
+        <a:xfrm>
+          <a:off x="0" y="0"/>
+          <a:ext cx="0" cy="0"/>
+          <a:chOff x="0" y="0"/>
+          <a:chExt cx="0" cy="0"/>
+        </a:xfrm>
+      </p:grpSpPr>
+      <p:sp>
+        <p:nvSpPr>
+          <p:cNvPr id="2" name="Title 1">
+            <a:extLst>
+              <a:ext uri="{FF2B5EF4-FFF2-40B4-BE49-F238E27FC236}">
+                <a16:creationId xmlns:a16="http://schemas.microsoft.com/office/drawing/2014/main" id="{CB8A2974-B241-0900-1380-741A476B6087}"/>
+              </a:ext>
+            </a:extLst>
+          </p:cNvPr>
+          <p:cNvSpPr>
+            <a:spLocks noGrp="1"/>
+          </p:cNvSpPr>
+          <p:nvPr>
+            <p:ph type="title"/>
+          </p:nvPr>
+        </p:nvSpPr>
+        <p:spPr/>
+        <p:txBody>
+          <a:bodyPr/>
+          <a:lstStyle/>
+          <a:p>
+            <a:r>
+              <a:rPr lang="en-GB" dirty="0" err="1"/>
+              <a:t>Implikasi</a:t>
+            </a:r>
+            <a:r>
+              <a:rPr lang="en-GB" dirty="0"/>
+              <a:t> </a:t>
+            </a:r>
+            <a:r>
+              <a:rPr lang="en-GB" dirty="0" err="1"/>
+              <a:t>Penelitian</a:t>
+            </a:r>
+            <a:endParaRPr lang="id-ID" dirty="0"/>
+          </a:p>
+        </p:txBody>
+      </p:sp>
+      <p:sp>
+        <p:nvSpPr>
+          <p:cNvPr id="3" name="Content Placeholder 2">
+            <a:extLst>
+              <a:ext uri="{FF2B5EF4-FFF2-40B4-BE49-F238E27FC236}">
+                <a16:creationId xmlns:a16="http://schemas.microsoft.com/office/drawing/2014/main" id="{FFA5EB44-CA36-DAB3-792E-C7D6B4809106}"/>
+              </a:ext>
+            </a:extLst>
+          </p:cNvPr>
+          <p:cNvSpPr>
+            <a:spLocks noGrp="1"/>
+          </p:cNvSpPr>
+          <p:nvPr>
+            <p:ph idx="1"/>
+          </p:nvPr>
+        </p:nvSpPr>
+        <p:spPr>
+          <a:xfrm>
+            <a:off x="1167493" y="1887795"/>
+            <a:ext cx="9613578" cy="3469022"/>
+          </a:xfrm>
+        </p:spPr>
+        <p:txBody>
+          <a:bodyPr/>
+          <a:lstStyle/>
+          <a:p>
+            <a:r>
+              <a:rPr lang="id-ID" sz="2800" dirty="0"/>
+              <a:t>Secara teoritis, penelitian ini memvalidasi superioritas </a:t>
+            </a:r>
+            <a:r>
+              <a:rPr lang="id-ID" sz="2800" dirty="0" err="1"/>
+              <a:t>LightGBM</a:t>
+            </a:r>
+            <a:r>
+              <a:rPr lang="id-ID" sz="2800" dirty="0"/>
+              <a:t> untuk data olahraga yang non-linear. Secara praktis, model dan aplikasi yang dikembangkan dapat menjadi alat bantu objektif bagi klub, analis, media, hingga untuk pembinaan pemain muda.</a:t>
+            </a:r>
+          </a:p>
+        </p:txBody>
+      </p:sp>
+      <p:sp>
+        <p:nvSpPr>
+          <p:cNvPr id="4" name="Date Placeholder 3">
+            <a:extLst>
+              <a:ext uri="{FF2B5EF4-FFF2-40B4-BE49-F238E27FC236}">
+                <a16:creationId xmlns:a16="http://schemas.microsoft.com/office/drawing/2014/main" id="{072C9778-C49D-CCFE-6948-462E42E34B6E}"/>
+              </a:ext>
+            </a:extLst>
+          </p:cNvPr>
+          <p:cNvSpPr>
+            <a:spLocks noGrp="1"/>
+          </p:cNvSpPr>
+          <p:nvPr>
+            <p:ph type="dt" sz="half" idx="2"/>
+          </p:nvPr>
+        </p:nvSpPr>
+        <p:spPr/>
+        <p:txBody>
+          <a:bodyPr/>
+          <a:lstStyle/>
+          <a:p>
+            <a:pPr rtl="0"/>
+            <a:fld id="{864F080E-00EF-45FB-879B-543FC5219789}" type="datetime1">
+              <a:rPr lang="id-ID" noProof="0" smtClean="0"/>
+              <a:t>11/09/2025</a:t>
+            </a:fld>
+            <a:endParaRPr lang="id-ID" noProof="0"/>
+          </a:p>
+        </p:txBody>
+      </p:sp>
+      <p:sp>
+        <p:nvSpPr>
+          <p:cNvPr id="5" name="Footer Placeholder 4">
+            <a:extLst>
+              <a:ext uri="{FF2B5EF4-FFF2-40B4-BE49-F238E27FC236}">
+                <a16:creationId xmlns:a16="http://schemas.microsoft.com/office/drawing/2014/main" id="{B70DF352-A6E6-FF2C-D294-5A5A7277AF15}"/>
+              </a:ext>
+            </a:extLst>
+          </p:cNvPr>
+          <p:cNvSpPr>
+            <a:spLocks noGrp="1"/>
+          </p:cNvSpPr>
+          <p:nvPr>
+            <p:ph type="ftr" sz="quarter" idx="3"/>
+          </p:nvPr>
+        </p:nvSpPr>
+        <p:spPr/>
+        <p:txBody>
+          <a:bodyPr/>
+          <a:lstStyle/>
+          <a:p>
+            <a:pPr rtl="0"/>
+            <a:r>
+              <a:rPr lang="id-ID" noProof="0"/>
+              <a:t>JUDUL PRESENTASI</a:t>
+            </a:r>
+          </a:p>
+        </p:txBody>
+      </p:sp>
+      <p:sp>
+        <p:nvSpPr>
+          <p:cNvPr id="6" name="Slide Number Placeholder 5">
+            <a:extLst>
+              <a:ext uri="{FF2B5EF4-FFF2-40B4-BE49-F238E27FC236}">
+                <a16:creationId xmlns:a16="http://schemas.microsoft.com/office/drawing/2014/main" id="{8994C8F1-21C7-2222-1E2E-3AFA407C758C}"/>
+              </a:ext>
+            </a:extLst>
+          </p:cNvPr>
+          <p:cNvSpPr>
+            <a:spLocks noGrp="1"/>
+          </p:cNvSpPr>
+          <p:nvPr>
+            <p:ph type="sldNum" sz="quarter" idx="4"/>
+          </p:nvPr>
+        </p:nvSpPr>
+        <p:spPr/>
+        <p:txBody>
+          <a:bodyPr/>
+          <a:lstStyle/>
+          <a:p>
+            <a:pPr rtl="0"/>
+            <a:fld id="{294A09A9-5501-47C1-A89A-A340965A2BE2}" type="slidenum">
+              <a:rPr lang="id-ID" noProof="0" smtClean="0"/>
+              <a:pPr rtl="0"/>
+              <a:t>36</a:t>
+            </a:fld>
+            <a:endParaRPr lang="id-ID" noProof="0"/>
+          </a:p>
+        </p:txBody>
+      </p:sp>
+    </p:spTree>
+    <p:extLst>
+      <p:ext uri="{BB962C8B-B14F-4D97-AF65-F5344CB8AC3E}">
+        <p14:creationId xmlns:p14="http://schemas.microsoft.com/office/powerpoint/2010/main" val="3068875868"/>
+      </p:ext>
+    </p:extLst>
+  </p:cSld>
+  <p:clrMapOvr>
+    <a:masterClrMapping/>
+  </p:clrMapOvr>
+</p:sld>
+</file>
+
+<file path=ppt/slides/slide37.xml><?xml version="1.0" encoding="utf-8"?>
+<p:sld xmlns:a="http://schemas.openxmlformats.org/drawingml/2006/main" xmlns:r="http://schemas.openxmlformats.org/officeDocument/2006/relationships" xmlns:p="http://schemas.openxmlformats.org/presentationml/2006/main">
+  <p:cSld>
+    <p:spTree>
+      <p:nvGrpSpPr>
         <p:cNvPr id="1" name="">
           <a:extLst>
             <a:ext uri="{FF2B5EF4-FFF2-40B4-BE49-F238E27FC236}">
@@ -30315,13 +30710,13 @@
         </p:spPr>
         <p:txBody>
           <a:bodyPr vert="horz" lIns="91440" tIns="45720" rIns="91440" bIns="45720" rtlCol="0" anchor="t">
-            <a:normAutofit/>
+            <a:normAutofit lnSpcReduction="10000"/>
           </a:bodyPr>
           <a:lstStyle/>
           <a:p>
             <a:r>
               <a:rPr lang="id-ID" sz="3200" dirty="0"/>
-              <a:t>Kesimpulannya, penerapan </a:t>
+              <a:t>Penerapan </a:t>
             </a:r>
             <a:r>
               <a:rPr lang="id-ID" sz="3200" dirty="0" err="1"/>
@@ -30337,7 +30732,15 @@
             </a:r>
             <a:r>
               <a:rPr lang="id-ID" sz="3200" dirty="0"/>
-              <a:t> yang sangat akurat dan efisien. </a:t>
+              <a:t> dengan akurasi dan keandalan probabilitas yang sangat tinggi. Dari segi komputasi, </a:t>
+            </a:r>
+            <a:r>
+              <a:rPr lang="id-ID" sz="3200" dirty="0" err="1"/>
+              <a:t>LightGBM</a:t>
+            </a:r>
+            <a:r>
+              <a:rPr lang="id-ID" sz="3200" dirty="0"/>
+              <a:t> juga terbukti jauh lebih efisien. Luaran dari penelitian ini tidak hanya berupa model, tetapi juga sebuah antarmuka aplikasi web interaktif yang fungsional untuk penerapan praktis.</a:t>
             </a:r>
           </a:p>
         </p:txBody>
@@ -30372,7 +30775,7 @@
             <a:fld id="{294A09A9-5501-47C1-A89A-A340965A2BE2}" type="slidenum">
               <a:rPr lang="id-ID" smtClean="0"/>
               <a:pPr rtl="0"/>
-              <a:t>35</a:t>
+              <a:t>37</a:t>
             </a:fld>
             <a:endParaRPr lang="id-ID" dirty="0"/>
           </a:p>
@@ -30391,7 +30794,7 @@
 </p:sld>
 </file>
 
-<file path=ppt/slides/slide36.xml><?xml version="1.0" encoding="utf-8"?>
+<file path=ppt/slides/slide38.xml><?xml version="1.0" encoding="utf-8"?>
 <p:sld xmlns:a="http://schemas.openxmlformats.org/drawingml/2006/main" xmlns:r="http://schemas.openxmlformats.org/officeDocument/2006/relationships" xmlns:p="http://schemas.openxmlformats.org/presentationml/2006/main">
   <p:cSld>
     <p:spTree>
@@ -30413,185 +30816,6 @@
           <p:cNvPr id="2" name="Title 1">
             <a:extLst>
               <a:ext uri="{FF2B5EF4-FFF2-40B4-BE49-F238E27FC236}">
-                <a16:creationId xmlns:a16="http://schemas.microsoft.com/office/drawing/2014/main" id="{D8868684-22D9-EC9A-202B-95C87705678F}"/>
-              </a:ext>
-            </a:extLst>
-          </p:cNvPr>
-          <p:cNvSpPr>
-            <a:spLocks noGrp="1"/>
-          </p:cNvSpPr>
-          <p:nvPr>
-            <p:ph type="title"/>
-          </p:nvPr>
-        </p:nvSpPr>
-        <p:spPr/>
-        <p:txBody>
-          <a:bodyPr/>
-          <a:lstStyle/>
-          <a:p>
-            <a:r>
-              <a:rPr lang="en-GB" dirty="0" err="1"/>
-              <a:t>Keterbatasan</a:t>
-            </a:r>
-            <a:endParaRPr lang="id-ID" dirty="0"/>
-          </a:p>
-        </p:txBody>
-      </p:sp>
-      <p:sp>
-        <p:nvSpPr>
-          <p:cNvPr id="3" name="Content Placeholder 2">
-            <a:extLst>
-              <a:ext uri="{FF2B5EF4-FFF2-40B4-BE49-F238E27FC236}">
-                <a16:creationId xmlns:a16="http://schemas.microsoft.com/office/drawing/2014/main" id="{65200710-C666-F71E-CCCE-06ED514FA3A4}"/>
-              </a:ext>
-            </a:extLst>
-          </p:cNvPr>
-          <p:cNvSpPr>
-            <a:spLocks noGrp="1"/>
-          </p:cNvSpPr>
-          <p:nvPr>
-            <p:ph idx="1"/>
-          </p:nvPr>
-        </p:nvSpPr>
-        <p:spPr>
-          <a:xfrm>
-            <a:off x="1167493" y="1887795"/>
-            <a:ext cx="9613578" cy="3469022"/>
-          </a:xfrm>
-        </p:spPr>
-        <p:txBody>
-          <a:bodyPr/>
-          <a:lstStyle/>
-          <a:p>
-            <a:endParaRPr lang="id-ID" dirty="0"/>
-          </a:p>
-        </p:txBody>
-      </p:sp>
-      <p:sp>
-        <p:nvSpPr>
-          <p:cNvPr id="4" name="Date Placeholder 3">
-            <a:extLst>
-              <a:ext uri="{FF2B5EF4-FFF2-40B4-BE49-F238E27FC236}">
-                <a16:creationId xmlns:a16="http://schemas.microsoft.com/office/drawing/2014/main" id="{B888C59B-68A0-3591-5974-34464134CCEC}"/>
-              </a:ext>
-            </a:extLst>
-          </p:cNvPr>
-          <p:cNvSpPr>
-            <a:spLocks noGrp="1"/>
-          </p:cNvSpPr>
-          <p:nvPr>
-            <p:ph type="dt" sz="half" idx="2"/>
-          </p:nvPr>
-        </p:nvSpPr>
-        <p:spPr/>
-        <p:txBody>
-          <a:bodyPr/>
-          <a:lstStyle/>
-          <a:p>
-            <a:pPr rtl="0"/>
-            <a:fld id="{864F080E-00EF-45FB-879B-543FC5219789}" type="datetime1">
-              <a:rPr lang="id-ID" noProof="0" smtClean="0"/>
-              <a:t>10/09/2025</a:t>
-            </a:fld>
-            <a:endParaRPr lang="id-ID" noProof="0"/>
-          </a:p>
-        </p:txBody>
-      </p:sp>
-      <p:sp>
-        <p:nvSpPr>
-          <p:cNvPr id="5" name="Footer Placeholder 4">
-            <a:extLst>
-              <a:ext uri="{FF2B5EF4-FFF2-40B4-BE49-F238E27FC236}">
-                <a16:creationId xmlns:a16="http://schemas.microsoft.com/office/drawing/2014/main" id="{0154EC9F-46CD-7CBD-1E30-B6D18FFFE3D0}"/>
-              </a:ext>
-            </a:extLst>
-          </p:cNvPr>
-          <p:cNvSpPr>
-            <a:spLocks noGrp="1"/>
-          </p:cNvSpPr>
-          <p:nvPr>
-            <p:ph type="ftr" sz="quarter" idx="3"/>
-          </p:nvPr>
-        </p:nvSpPr>
-        <p:spPr/>
-        <p:txBody>
-          <a:bodyPr/>
-          <a:lstStyle/>
-          <a:p>
-            <a:pPr rtl="0"/>
-            <a:r>
-              <a:rPr lang="id-ID" noProof="0"/>
-              <a:t>JUDUL PRESENTASI</a:t>
-            </a:r>
-          </a:p>
-        </p:txBody>
-      </p:sp>
-      <p:sp>
-        <p:nvSpPr>
-          <p:cNvPr id="6" name="Slide Number Placeholder 5">
-            <a:extLst>
-              <a:ext uri="{FF2B5EF4-FFF2-40B4-BE49-F238E27FC236}">
-                <a16:creationId xmlns:a16="http://schemas.microsoft.com/office/drawing/2014/main" id="{D1F630AB-4019-E7C5-9C7A-83CA11B8ED47}"/>
-              </a:ext>
-            </a:extLst>
-          </p:cNvPr>
-          <p:cNvSpPr>
-            <a:spLocks noGrp="1"/>
-          </p:cNvSpPr>
-          <p:nvPr>
-            <p:ph type="sldNum" sz="quarter" idx="4"/>
-          </p:nvPr>
-        </p:nvSpPr>
-        <p:spPr/>
-        <p:txBody>
-          <a:bodyPr/>
-          <a:lstStyle/>
-          <a:p>
-            <a:pPr rtl="0"/>
-            <a:fld id="{294A09A9-5501-47C1-A89A-A340965A2BE2}" type="slidenum">
-              <a:rPr lang="id-ID" noProof="0" smtClean="0"/>
-              <a:pPr rtl="0"/>
-              <a:t>36</a:t>
-            </a:fld>
-            <a:endParaRPr lang="id-ID" noProof="0"/>
-          </a:p>
-        </p:txBody>
-      </p:sp>
-    </p:spTree>
-    <p:extLst>
-      <p:ext uri="{BB962C8B-B14F-4D97-AF65-F5344CB8AC3E}">
-        <p14:creationId xmlns:p14="http://schemas.microsoft.com/office/powerpoint/2010/main" val="3278069340"/>
-      </p:ext>
-    </p:extLst>
-  </p:cSld>
-  <p:clrMapOvr>
-    <a:masterClrMapping/>
-  </p:clrMapOvr>
-</p:sld>
-</file>
-
-<file path=ppt/slides/slide37.xml><?xml version="1.0" encoding="utf-8"?>
-<p:sld xmlns:a="http://schemas.openxmlformats.org/drawingml/2006/main" xmlns:r="http://schemas.openxmlformats.org/officeDocument/2006/relationships" xmlns:p="http://schemas.openxmlformats.org/presentationml/2006/main">
-  <p:cSld>
-    <p:spTree>
-      <p:nvGrpSpPr>
-        <p:cNvPr id="1" name=""/>
-        <p:cNvGrpSpPr/>
-        <p:nvPr/>
-      </p:nvGrpSpPr>
-      <p:grpSpPr>
-        <a:xfrm>
-          <a:off x="0" y="0"/>
-          <a:ext cx="0" cy="0"/>
-          <a:chOff x="0" y="0"/>
-          <a:chExt cx="0" cy="0"/>
-        </a:xfrm>
-      </p:grpSpPr>
-      <p:sp>
-        <p:nvSpPr>
-          <p:cNvPr id="2" name="Title 1">
-            <a:extLst>
-              <a:ext uri="{FF2B5EF4-FFF2-40B4-BE49-F238E27FC236}">
                 <a16:creationId xmlns:a16="http://schemas.microsoft.com/office/drawing/2014/main" id="{B9466093-D4AA-F632-85B3-59570CEDC2CE}"/>
               </a:ext>
             </a:extLst>
@@ -30642,7 +30866,10 @@
           <a:bodyPr/>
           <a:lstStyle/>
           <a:p>
-            <a:endParaRPr lang="id-ID" dirty="0"/>
+            <a:r>
+              <a:rPr lang="id-ID" sz="2800" dirty="0"/>
+              <a:t>Untuk penelitian selanjutnya, disarankan untuk memperkaya model dengan fitur yang lebih detail, seperti data posisi pemain bertahan saat tembakan terjadi. Pengembangan aplikasi juga dapat dilanjutkan dengan menambahkan fitur analisis performa pemain atau perbandingan taktik tim.</a:t>
+            </a:r>
           </a:p>
         </p:txBody>
       </p:sp>
@@ -30670,7 +30897,7 @@
             <a:pPr rtl="0"/>
             <a:fld id="{864F080E-00EF-45FB-879B-543FC5219789}" type="datetime1">
               <a:rPr lang="id-ID" noProof="0" smtClean="0"/>
-              <a:t>10/09/2025</a:t>
+              <a:t>11/09/2025</a:t>
             </a:fld>
             <a:endParaRPr lang="id-ID" noProof="0"/>
           </a:p>
@@ -30730,7 +30957,7 @@
             <a:fld id="{294A09A9-5501-47C1-A89A-A340965A2BE2}" type="slidenum">
               <a:rPr lang="id-ID" noProof="0" smtClean="0"/>
               <a:pPr rtl="0"/>
-              <a:t>37</a:t>
+              <a:t>38</a:t>
             </a:fld>
             <a:endParaRPr lang="id-ID" noProof="0"/>
           </a:p>
@@ -30749,7 +30976,7 @@
 </p:sld>
 </file>
 
-<file path=ppt/slides/slide38.xml><?xml version="1.0" encoding="utf-8"?>
+<file path=ppt/slides/slide39.xml><?xml version="1.0" encoding="utf-8"?>
 <p:sld xmlns:a="http://schemas.openxmlformats.org/drawingml/2006/main" xmlns:r="http://schemas.openxmlformats.org/officeDocument/2006/relationships" xmlns:p="http://schemas.openxmlformats.org/presentationml/2006/main">
   <p:cSld>
     <p:spTree>
@@ -31372,7 +31599,7 @@
             <a:pPr rtl="0"/>
             <a:fld id="{70C69C4D-CAFD-4E0E-94E0-4B1709D96441}" type="datetime1">
               <a:rPr lang="id-ID" smtClean="0"/>
-              <a:t>10/09/2025</a:t>
+              <a:t>11/09/2025</a:t>
             </a:fld>
             <a:endParaRPr lang="id-ID"/>
           </a:p>
@@ -34329,6 +34556,15 @@
 </file>
 
 <file path=customXml/item1.xml><?xml version="1.0" encoding="utf-8"?>
+<?mso-contentType ?>
+<FormTemplates xmlns="http://schemas.microsoft.com/sharepoint/v3/contenttype/forms">
+  <Display>DocumentLibraryForm</Display>
+  <Edit>DocumentLibraryForm</Edit>
+  <New>DocumentLibraryForm</New>
+</FormTemplates>
+</file>
+
+<file path=customXml/item2.xml><?xml version="1.0" encoding="utf-8"?>
 <p:properties xmlns:p="http://schemas.microsoft.com/office/2006/metadata/properties" xmlns:xsi="http://www.w3.org/2001/XMLSchema-instance" xmlns:pc="http://schemas.microsoft.com/office/infopath/2007/PartnerControls">
   <documentManagement>
     <_ip_UnifiedCompliancePolicyUIAction xmlns="http://schemas.microsoft.com/sharepoint/v3" xsi:nil="true"/>
@@ -34345,15 +34581,6 @@
     <MediaServiceKeyPoints xmlns="71af3243-3dd4-4a8d-8c0d-dd76da1f02a5" xsi:nil="true"/>
   </documentManagement>
 </p:properties>
-</file>
-
-<file path=customXml/item2.xml><?xml version="1.0" encoding="utf-8"?>
-<?mso-contentType ?>
-<FormTemplates xmlns="http://schemas.microsoft.com/sharepoint/v3/contenttype/forms">
-  <Display>DocumentLibraryForm</Display>
-  <Edit>DocumentLibraryForm</Edit>
-  <New>DocumentLibraryForm</New>
-</FormTemplates>
 </file>
 
 <file path=customXml/item3.xml><?xml version="1.0" encoding="utf-8"?>
@@ -34639,6 +34866,14 @@
 </file>
 
 <file path=customXml/itemProps1.xml><?xml version="1.0" encoding="utf-8"?>
+<ds:datastoreItem xmlns:ds="http://schemas.openxmlformats.org/officeDocument/2006/customXml" ds:itemID="{85334180-0405-413B-834A-44FA9E05ADB7}">
+  <ds:schemaRefs>
+    <ds:schemaRef ds:uri="http://schemas.microsoft.com/sharepoint/v3/contenttype/forms"/>
+  </ds:schemaRefs>
+</ds:datastoreItem>
+</file>
+
+<file path=customXml/itemProps2.xml><?xml version="1.0" encoding="utf-8"?>
 <ds:datastoreItem xmlns:ds="http://schemas.openxmlformats.org/officeDocument/2006/customXml" ds:itemID="{4D5BAB77-79E1-4739-AA51-10C9079186D6}">
   <ds:schemaRefs>
     <ds:schemaRef ds:uri="http://schemas.microsoft.com/office/2006/metadata/properties"/>
@@ -34646,14 +34881,6 @@
     <ds:schemaRef ds:uri="http://schemas.microsoft.com/sharepoint/v3"/>
     <ds:schemaRef ds:uri="71af3243-3dd4-4a8d-8c0d-dd76da1f02a5"/>
     <ds:schemaRef ds:uri="230e9df3-be65-4c73-a93b-d1236ebd677e"/>
-  </ds:schemaRefs>
-</ds:datastoreItem>
-</file>
-
-<file path=customXml/itemProps2.xml><?xml version="1.0" encoding="utf-8"?>
-<ds:datastoreItem xmlns:ds="http://schemas.openxmlformats.org/officeDocument/2006/customXml" ds:itemID="{85334180-0405-413B-834A-44FA9E05ADB7}">
-  <ds:schemaRefs>
-    <ds:schemaRef ds:uri="http://schemas.microsoft.com/sharepoint/v3/contenttype/forms"/>
   </ds:schemaRefs>
 </ds:datastoreItem>
 </file>

--- a/ppt/PPT SEMHAS.pptx
+++ b/ppt/PPT SEMHAS.pptx
@@ -5,10 +5,10 @@
     <p:sldMasterId id="2147483648" r:id="rId4"/>
   </p:sldMasterIdLst>
   <p:notesMasterIdLst>
-    <p:notesMasterId r:id="rId44"/>
+    <p:notesMasterId r:id="rId45"/>
   </p:notesMasterIdLst>
   <p:handoutMasterIdLst>
-    <p:handoutMasterId r:id="rId45"/>
+    <p:handoutMasterId r:id="rId46"/>
   </p:handoutMasterIdLst>
   <p:sldIdLst>
     <p:sldId id="256" r:id="rId5"/>
@@ -37,19 +37,20 @@
     <p:sldId id="285" r:id="rId28"/>
     <p:sldId id="286" r:id="rId29"/>
     <p:sldId id="287" r:id="rId30"/>
-    <p:sldId id="288" r:id="rId31"/>
-    <p:sldId id="289" r:id="rId32"/>
-    <p:sldId id="291" r:id="rId33"/>
-    <p:sldId id="290" r:id="rId34"/>
-    <p:sldId id="292" r:id="rId35"/>
-    <p:sldId id="293" r:id="rId36"/>
-    <p:sldId id="294" r:id="rId37"/>
-    <p:sldId id="298" r:id="rId38"/>
-    <p:sldId id="296" r:id="rId39"/>
-    <p:sldId id="299" r:id="rId40"/>
-    <p:sldId id="295" r:id="rId41"/>
-    <p:sldId id="297" r:id="rId42"/>
-    <p:sldId id="275" r:id="rId43"/>
+    <p:sldId id="300" r:id="rId31"/>
+    <p:sldId id="288" r:id="rId32"/>
+    <p:sldId id="289" r:id="rId33"/>
+    <p:sldId id="291" r:id="rId34"/>
+    <p:sldId id="290" r:id="rId35"/>
+    <p:sldId id="292" r:id="rId36"/>
+    <p:sldId id="293" r:id="rId37"/>
+    <p:sldId id="294" r:id="rId38"/>
+    <p:sldId id="298" r:id="rId39"/>
+    <p:sldId id="296" r:id="rId40"/>
+    <p:sldId id="299" r:id="rId41"/>
+    <p:sldId id="295" r:id="rId42"/>
+    <p:sldId id="297" r:id="rId43"/>
+    <p:sldId id="275" r:id="rId44"/>
   </p:sldIdLst>
   <p:sldSz cx="12192000" cy="6858000"/>
   <p:notesSz cx="6858000" cy="9144000"/>
@@ -2677,6 +2678,115 @@
         <p:cNvPr id="1" name="">
           <a:extLst>
             <a:ext uri="{FF2B5EF4-FFF2-40B4-BE49-F238E27FC236}">
+              <a16:creationId xmlns:a16="http://schemas.microsoft.com/office/drawing/2014/main" id="{82DEB1B7-19BC-B078-D0AD-153A8C20BDE5}"/>
+            </a:ext>
+          </a:extLst>
+        </p:cNvPr>
+        <p:cNvGrpSpPr/>
+        <p:nvPr/>
+      </p:nvGrpSpPr>
+      <p:grpSpPr>
+        <a:xfrm>
+          <a:off x="0" y="0"/>
+          <a:ext cx="0" cy="0"/>
+          <a:chOff x="0" y="0"/>
+          <a:chExt cx="0" cy="0"/>
+        </a:xfrm>
+      </p:grpSpPr>
+      <p:sp>
+        <p:nvSpPr>
+          <p:cNvPr id="2" name="Tampungan Gambar Slide 1">
+            <a:extLst>
+              <a:ext uri="{FF2B5EF4-FFF2-40B4-BE49-F238E27FC236}">
+                <a16:creationId xmlns:a16="http://schemas.microsoft.com/office/drawing/2014/main" id="{F967AFDD-86A9-52FD-C3F1-BD347CB69419}"/>
+              </a:ext>
+            </a:extLst>
+          </p:cNvPr>
+          <p:cNvSpPr>
+            <a:spLocks noGrp="1" noRot="1" noChangeAspect="1"/>
+          </p:cNvSpPr>
+          <p:nvPr>
+            <p:ph type="sldImg"/>
+          </p:nvPr>
+        </p:nvSpPr>
+        <p:spPr/>
+      </p:sp>
+      <p:sp>
+        <p:nvSpPr>
+          <p:cNvPr id="3" name="Tampungan Catatan 2">
+            <a:extLst>
+              <a:ext uri="{FF2B5EF4-FFF2-40B4-BE49-F238E27FC236}">
+                <a16:creationId xmlns:a16="http://schemas.microsoft.com/office/drawing/2014/main" id="{8EB11A8A-FC21-4260-8712-E9DD872F544E}"/>
+              </a:ext>
+            </a:extLst>
+          </p:cNvPr>
+          <p:cNvSpPr>
+            <a:spLocks noGrp="1"/>
+          </p:cNvSpPr>
+          <p:nvPr>
+            <p:ph type="body" idx="1"/>
+          </p:nvPr>
+        </p:nvSpPr>
+        <p:spPr/>
+        <p:txBody>
+          <a:bodyPr/>
+          <a:lstStyle/>
+          <a:p>
+            <a:endParaRPr lang="id-ID" noProof="0" dirty="0"/>
+          </a:p>
+        </p:txBody>
+      </p:sp>
+      <p:sp>
+        <p:nvSpPr>
+          <p:cNvPr id="4" name="Tampungan Nomor Slide 3">
+            <a:extLst>
+              <a:ext uri="{FF2B5EF4-FFF2-40B4-BE49-F238E27FC236}">
+                <a16:creationId xmlns:a16="http://schemas.microsoft.com/office/drawing/2014/main" id="{0976C79B-646C-1AA8-0451-938F3D1F4322}"/>
+              </a:ext>
+            </a:extLst>
+          </p:cNvPr>
+          <p:cNvSpPr>
+            <a:spLocks noGrp="1"/>
+          </p:cNvSpPr>
+          <p:nvPr>
+            <p:ph type="sldNum" sz="quarter" idx="5"/>
+          </p:nvPr>
+        </p:nvSpPr>
+        <p:spPr/>
+        <p:txBody>
+          <a:bodyPr/>
+          <a:lstStyle/>
+          <a:p>
+            <a:pPr rtl="0"/>
+            <a:fld id="{F97DC217-DF71-1A49-B3EA-559F1F43B0FF}" type="slidenum">
+              <a:rPr lang="id-ID" smtClean="0"/>
+              <a:t>27</a:t>
+            </a:fld>
+            <a:endParaRPr lang="id-ID"/>
+          </a:p>
+        </p:txBody>
+      </p:sp>
+    </p:spTree>
+    <p:extLst>
+      <p:ext uri="{BB962C8B-B14F-4D97-AF65-F5344CB8AC3E}">
+        <p14:creationId xmlns:p14="http://schemas.microsoft.com/office/powerpoint/2010/main" val="3437276945"/>
+      </p:ext>
+    </p:extLst>
+  </p:cSld>
+  <p:clrMapOvr>
+    <a:masterClrMapping/>
+  </p:clrMapOvr>
+</p:notes>
+</file>
+
+<file path=ppt/notesSlides/notesSlide28.xml><?xml version="1.0" encoding="utf-8"?>
+<p:notes xmlns:a="http://schemas.openxmlformats.org/drawingml/2006/main" xmlns:r="http://schemas.openxmlformats.org/officeDocument/2006/relationships" xmlns:p="http://schemas.openxmlformats.org/presentationml/2006/main">
+  <p:cSld>
+    <p:spTree>
+      <p:nvGrpSpPr>
+        <p:cNvPr id="1" name="">
+          <a:extLst>
+            <a:ext uri="{FF2B5EF4-FFF2-40B4-BE49-F238E27FC236}">
               <a16:creationId xmlns:a16="http://schemas.microsoft.com/office/drawing/2014/main" id="{7F5103B4-6316-C102-28B7-9ADB255EC9C7}"/>
             </a:ext>
           </a:extLst>
@@ -2759,7 +2869,7 @@
             <a:pPr rtl="0"/>
             <a:fld id="{F97DC217-DF71-1A49-B3EA-559F1F43B0FF}" type="slidenum">
               <a:rPr lang="id-ID" smtClean="0"/>
-              <a:t>27</a:t>
+              <a:t>28</a:t>
             </a:fld>
             <a:endParaRPr lang="id-ID"/>
           </a:p>
@@ -2778,7 +2888,7 @@
 </p:notes>
 </file>
 
-<file path=ppt/notesSlides/notesSlide28.xml><?xml version="1.0" encoding="utf-8"?>
+<file path=ppt/notesSlides/notesSlide29.xml><?xml version="1.0" encoding="utf-8"?>
 <p:notes xmlns:a="http://schemas.openxmlformats.org/drawingml/2006/main" xmlns:r="http://schemas.openxmlformats.org/officeDocument/2006/relationships" xmlns:p="http://schemas.openxmlformats.org/presentationml/2006/main">
   <p:cSld>
     <p:spTree>
@@ -2868,7 +2978,7 @@
             <a:pPr rtl="0"/>
             <a:fld id="{F97DC217-DF71-1A49-B3EA-559F1F43B0FF}" type="slidenum">
               <a:rPr lang="id-ID" smtClean="0"/>
-              <a:t>28</a:t>
+              <a:t>29</a:t>
             </a:fld>
             <a:endParaRPr lang="id-ID"/>
           </a:p>
@@ -2878,115 +2988,6 @@
     <p:extLst>
       <p:ext uri="{BB962C8B-B14F-4D97-AF65-F5344CB8AC3E}">
         <p14:creationId xmlns:p14="http://schemas.microsoft.com/office/powerpoint/2010/main" val="1698883112"/>
-      </p:ext>
-    </p:extLst>
-  </p:cSld>
-  <p:clrMapOvr>
-    <a:masterClrMapping/>
-  </p:clrMapOvr>
-</p:notes>
-</file>
-
-<file path=ppt/notesSlides/notesSlide29.xml><?xml version="1.0" encoding="utf-8"?>
-<p:notes xmlns:a="http://schemas.openxmlformats.org/drawingml/2006/main" xmlns:r="http://schemas.openxmlformats.org/officeDocument/2006/relationships" xmlns:p="http://schemas.openxmlformats.org/presentationml/2006/main">
-  <p:cSld>
-    <p:spTree>
-      <p:nvGrpSpPr>
-        <p:cNvPr id="1" name="">
-          <a:extLst>
-            <a:ext uri="{FF2B5EF4-FFF2-40B4-BE49-F238E27FC236}">
-              <a16:creationId xmlns:a16="http://schemas.microsoft.com/office/drawing/2014/main" id="{000340DB-EE9E-9A90-4778-D60C17B8CA93}"/>
-            </a:ext>
-          </a:extLst>
-        </p:cNvPr>
-        <p:cNvGrpSpPr/>
-        <p:nvPr/>
-      </p:nvGrpSpPr>
-      <p:grpSpPr>
-        <a:xfrm>
-          <a:off x="0" y="0"/>
-          <a:ext cx="0" cy="0"/>
-          <a:chOff x="0" y="0"/>
-          <a:chExt cx="0" cy="0"/>
-        </a:xfrm>
-      </p:grpSpPr>
-      <p:sp>
-        <p:nvSpPr>
-          <p:cNvPr id="2" name="Tampungan Gambar Slide 1">
-            <a:extLst>
-              <a:ext uri="{FF2B5EF4-FFF2-40B4-BE49-F238E27FC236}">
-                <a16:creationId xmlns:a16="http://schemas.microsoft.com/office/drawing/2014/main" id="{F572379B-194F-E5F5-BCC4-F21A7764649C}"/>
-              </a:ext>
-            </a:extLst>
-          </p:cNvPr>
-          <p:cNvSpPr>
-            <a:spLocks noGrp="1" noRot="1" noChangeAspect="1"/>
-          </p:cNvSpPr>
-          <p:nvPr>
-            <p:ph type="sldImg"/>
-          </p:nvPr>
-        </p:nvSpPr>
-        <p:spPr/>
-      </p:sp>
-      <p:sp>
-        <p:nvSpPr>
-          <p:cNvPr id="3" name="Tampungan Catatan 2">
-            <a:extLst>
-              <a:ext uri="{FF2B5EF4-FFF2-40B4-BE49-F238E27FC236}">
-                <a16:creationId xmlns:a16="http://schemas.microsoft.com/office/drawing/2014/main" id="{89E95FE7-E790-DC5D-0A90-3D04BB5DBDB4}"/>
-              </a:ext>
-            </a:extLst>
-          </p:cNvPr>
-          <p:cNvSpPr>
-            <a:spLocks noGrp="1"/>
-          </p:cNvSpPr>
-          <p:nvPr>
-            <p:ph type="body" idx="1"/>
-          </p:nvPr>
-        </p:nvSpPr>
-        <p:spPr/>
-        <p:txBody>
-          <a:bodyPr/>
-          <a:lstStyle/>
-          <a:p>
-            <a:endParaRPr lang="id-ID" noProof="0" dirty="0"/>
-          </a:p>
-        </p:txBody>
-      </p:sp>
-      <p:sp>
-        <p:nvSpPr>
-          <p:cNvPr id="4" name="Tampungan Nomor Slide 3">
-            <a:extLst>
-              <a:ext uri="{FF2B5EF4-FFF2-40B4-BE49-F238E27FC236}">
-                <a16:creationId xmlns:a16="http://schemas.microsoft.com/office/drawing/2014/main" id="{97DE9D11-7D05-B9D2-B356-F098222E1D04}"/>
-              </a:ext>
-            </a:extLst>
-          </p:cNvPr>
-          <p:cNvSpPr>
-            <a:spLocks noGrp="1"/>
-          </p:cNvSpPr>
-          <p:nvPr>
-            <p:ph type="sldNum" sz="quarter" idx="5"/>
-          </p:nvPr>
-        </p:nvSpPr>
-        <p:spPr/>
-        <p:txBody>
-          <a:bodyPr/>
-          <a:lstStyle/>
-          <a:p>
-            <a:pPr rtl="0"/>
-            <a:fld id="{F97DC217-DF71-1A49-B3EA-559F1F43B0FF}" type="slidenum">
-              <a:rPr lang="id-ID" smtClean="0"/>
-              <a:t>29</a:t>
-            </a:fld>
-            <a:endParaRPr lang="id-ID"/>
-          </a:p>
-        </p:txBody>
-      </p:sp>
-    </p:spTree>
-    <p:extLst>
-      <p:ext uri="{BB962C8B-B14F-4D97-AF65-F5344CB8AC3E}">
-        <p14:creationId xmlns:p14="http://schemas.microsoft.com/office/powerpoint/2010/main" val="2041099210"/>
       </p:ext>
     </p:extLst>
   </p:cSld>
@@ -3113,6 +3114,115 @@
         <p:cNvPr id="1" name="">
           <a:extLst>
             <a:ext uri="{FF2B5EF4-FFF2-40B4-BE49-F238E27FC236}">
+              <a16:creationId xmlns:a16="http://schemas.microsoft.com/office/drawing/2014/main" id="{000340DB-EE9E-9A90-4778-D60C17B8CA93}"/>
+            </a:ext>
+          </a:extLst>
+        </p:cNvPr>
+        <p:cNvGrpSpPr/>
+        <p:nvPr/>
+      </p:nvGrpSpPr>
+      <p:grpSpPr>
+        <a:xfrm>
+          <a:off x="0" y="0"/>
+          <a:ext cx="0" cy="0"/>
+          <a:chOff x="0" y="0"/>
+          <a:chExt cx="0" cy="0"/>
+        </a:xfrm>
+      </p:grpSpPr>
+      <p:sp>
+        <p:nvSpPr>
+          <p:cNvPr id="2" name="Tampungan Gambar Slide 1">
+            <a:extLst>
+              <a:ext uri="{FF2B5EF4-FFF2-40B4-BE49-F238E27FC236}">
+                <a16:creationId xmlns:a16="http://schemas.microsoft.com/office/drawing/2014/main" id="{F572379B-194F-E5F5-BCC4-F21A7764649C}"/>
+              </a:ext>
+            </a:extLst>
+          </p:cNvPr>
+          <p:cNvSpPr>
+            <a:spLocks noGrp="1" noRot="1" noChangeAspect="1"/>
+          </p:cNvSpPr>
+          <p:nvPr>
+            <p:ph type="sldImg"/>
+          </p:nvPr>
+        </p:nvSpPr>
+        <p:spPr/>
+      </p:sp>
+      <p:sp>
+        <p:nvSpPr>
+          <p:cNvPr id="3" name="Tampungan Catatan 2">
+            <a:extLst>
+              <a:ext uri="{FF2B5EF4-FFF2-40B4-BE49-F238E27FC236}">
+                <a16:creationId xmlns:a16="http://schemas.microsoft.com/office/drawing/2014/main" id="{89E95FE7-E790-DC5D-0A90-3D04BB5DBDB4}"/>
+              </a:ext>
+            </a:extLst>
+          </p:cNvPr>
+          <p:cNvSpPr>
+            <a:spLocks noGrp="1"/>
+          </p:cNvSpPr>
+          <p:nvPr>
+            <p:ph type="body" idx="1"/>
+          </p:nvPr>
+        </p:nvSpPr>
+        <p:spPr/>
+        <p:txBody>
+          <a:bodyPr/>
+          <a:lstStyle/>
+          <a:p>
+            <a:endParaRPr lang="id-ID" noProof="0" dirty="0"/>
+          </a:p>
+        </p:txBody>
+      </p:sp>
+      <p:sp>
+        <p:nvSpPr>
+          <p:cNvPr id="4" name="Tampungan Nomor Slide 3">
+            <a:extLst>
+              <a:ext uri="{FF2B5EF4-FFF2-40B4-BE49-F238E27FC236}">
+                <a16:creationId xmlns:a16="http://schemas.microsoft.com/office/drawing/2014/main" id="{97DE9D11-7D05-B9D2-B356-F098222E1D04}"/>
+              </a:ext>
+            </a:extLst>
+          </p:cNvPr>
+          <p:cNvSpPr>
+            <a:spLocks noGrp="1"/>
+          </p:cNvSpPr>
+          <p:nvPr>
+            <p:ph type="sldNum" sz="quarter" idx="5"/>
+          </p:nvPr>
+        </p:nvSpPr>
+        <p:spPr/>
+        <p:txBody>
+          <a:bodyPr/>
+          <a:lstStyle/>
+          <a:p>
+            <a:pPr rtl="0"/>
+            <a:fld id="{F97DC217-DF71-1A49-B3EA-559F1F43B0FF}" type="slidenum">
+              <a:rPr lang="id-ID" smtClean="0"/>
+              <a:t>30</a:t>
+            </a:fld>
+            <a:endParaRPr lang="id-ID"/>
+          </a:p>
+        </p:txBody>
+      </p:sp>
+    </p:spTree>
+    <p:extLst>
+      <p:ext uri="{BB962C8B-B14F-4D97-AF65-F5344CB8AC3E}">
+        <p14:creationId xmlns:p14="http://schemas.microsoft.com/office/powerpoint/2010/main" val="2041099210"/>
+      </p:ext>
+    </p:extLst>
+  </p:cSld>
+  <p:clrMapOvr>
+    <a:masterClrMapping/>
+  </p:clrMapOvr>
+</p:notes>
+</file>
+
+<file path=ppt/notesSlides/notesSlide31.xml><?xml version="1.0" encoding="utf-8"?>
+<p:notes xmlns:a="http://schemas.openxmlformats.org/drawingml/2006/main" xmlns:r="http://schemas.openxmlformats.org/officeDocument/2006/relationships" xmlns:p="http://schemas.openxmlformats.org/presentationml/2006/main">
+  <p:cSld>
+    <p:spTree>
+      <p:nvGrpSpPr>
+        <p:cNvPr id="1" name="">
+          <a:extLst>
+            <a:ext uri="{FF2B5EF4-FFF2-40B4-BE49-F238E27FC236}">
               <a16:creationId xmlns:a16="http://schemas.microsoft.com/office/drawing/2014/main" id="{243FA241-315C-BFE1-228C-C626423CD47A}"/>
             </a:ext>
           </a:extLst>
@@ -3195,7 +3305,7 @@
             <a:pPr rtl="0"/>
             <a:fld id="{F97DC217-DF71-1A49-B3EA-559F1F43B0FF}" type="slidenum">
               <a:rPr lang="id-ID" smtClean="0"/>
-              <a:t>30</a:t>
+              <a:t>31</a:t>
             </a:fld>
             <a:endParaRPr lang="id-ID"/>
           </a:p>
@@ -3214,7 +3324,7 @@
 </p:notes>
 </file>
 
-<file path=ppt/notesSlides/notesSlide31.xml><?xml version="1.0" encoding="utf-8"?>
+<file path=ppt/notesSlides/notesSlide32.xml><?xml version="1.0" encoding="utf-8"?>
 <p:notes xmlns:a="http://schemas.openxmlformats.org/drawingml/2006/main" xmlns:r="http://schemas.openxmlformats.org/officeDocument/2006/relationships" xmlns:p="http://schemas.openxmlformats.org/presentationml/2006/main">
   <p:cSld>
     <p:spTree>
@@ -3304,7 +3414,7 @@
             <a:pPr rtl="0"/>
             <a:fld id="{F97DC217-DF71-1A49-B3EA-559F1F43B0FF}" type="slidenum">
               <a:rPr lang="id-ID" smtClean="0"/>
-              <a:t>31</a:t>
+              <a:t>32</a:t>
             </a:fld>
             <a:endParaRPr lang="id-ID"/>
           </a:p>
@@ -3323,7 +3433,7 @@
 </p:notes>
 </file>
 
-<file path=ppt/notesSlides/notesSlide32.xml><?xml version="1.0" encoding="utf-8"?>
+<file path=ppt/notesSlides/notesSlide33.xml><?xml version="1.0" encoding="utf-8"?>
 <p:notes xmlns:a="http://schemas.openxmlformats.org/drawingml/2006/main" xmlns:r="http://schemas.openxmlformats.org/officeDocument/2006/relationships" xmlns:p="http://schemas.openxmlformats.org/presentationml/2006/main">
   <p:cSld>
     <p:spTree>
@@ -3413,7 +3523,7 @@
             <a:pPr rtl="0"/>
             <a:fld id="{F97DC217-DF71-1A49-B3EA-559F1F43B0FF}" type="slidenum">
               <a:rPr lang="id-ID" smtClean="0"/>
-              <a:t>32</a:t>
+              <a:t>33</a:t>
             </a:fld>
             <a:endParaRPr lang="id-ID"/>
           </a:p>
@@ -3432,7 +3542,7 @@
 </p:notes>
 </file>
 
-<file path=ppt/notesSlides/notesSlide33.xml><?xml version="1.0" encoding="utf-8"?>
+<file path=ppt/notesSlides/notesSlide34.xml><?xml version="1.0" encoding="utf-8"?>
 <p:notes xmlns:a="http://schemas.openxmlformats.org/drawingml/2006/main" xmlns:r="http://schemas.openxmlformats.org/officeDocument/2006/relationships" xmlns:p="http://schemas.openxmlformats.org/presentationml/2006/main">
   <p:cSld>
     <p:spTree>
@@ -3522,7 +3632,7 @@
             <a:pPr rtl="0"/>
             <a:fld id="{F97DC217-DF71-1A49-B3EA-559F1F43B0FF}" type="slidenum">
               <a:rPr lang="id-ID" smtClean="0"/>
-              <a:t>33</a:t>
+              <a:t>34</a:t>
             </a:fld>
             <a:endParaRPr lang="id-ID"/>
           </a:p>
@@ -3541,7 +3651,7 @@
 </p:notes>
 </file>
 
-<file path=ppt/notesSlides/notesSlide34.xml><?xml version="1.0" encoding="utf-8"?>
+<file path=ppt/notesSlides/notesSlide35.xml><?xml version="1.0" encoding="utf-8"?>
 <p:notes xmlns:a="http://schemas.openxmlformats.org/drawingml/2006/main" xmlns:r="http://schemas.openxmlformats.org/officeDocument/2006/relationships" xmlns:p="http://schemas.openxmlformats.org/presentationml/2006/main">
   <p:cSld>
     <p:spTree>
@@ -3631,7 +3741,7 @@
             <a:pPr rtl="0"/>
             <a:fld id="{F97DC217-DF71-1A49-B3EA-559F1F43B0FF}" type="slidenum">
               <a:rPr lang="id-ID" smtClean="0"/>
-              <a:t>37</a:t>
+              <a:t>38</a:t>
             </a:fld>
             <a:endParaRPr lang="id-ID"/>
           </a:p>
@@ -3650,7 +3760,7 @@
 </p:notes>
 </file>
 
-<file path=ppt/notesSlides/notesSlide35.xml><?xml version="1.0" encoding="utf-8"?>
+<file path=ppt/notesSlides/notesSlide36.xml><?xml version="1.0" encoding="utf-8"?>
 <p:notes xmlns:a="http://schemas.openxmlformats.org/drawingml/2006/main" xmlns:r="http://schemas.openxmlformats.org/officeDocument/2006/relationships" xmlns:p="http://schemas.openxmlformats.org/presentationml/2006/main">
   <p:cSld>
     <p:spTree>
@@ -3716,7 +3826,7 @@
             <a:pPr rtl="0"/>
             <a:fld id="{F97DC217-DF71-1A49-B3EA-559F1F43B0FF}" type="slidenum">
               <a:rPr lang="id-ID" smtClean="0"/>
-              <a:t>39</a:t>
+              <a:t>40</a:t>
             </a:fld>
             <a:endParaRPr lang="id-ID"/>
           </a:p>
@@ -19245,42 +19355,42 @@
           <a:p>
             <a:pPr marL="914400" lvl="1" indent="-457200"/>
             <a:r>
-              <a:rPr lang="id-ID" sz="2000" dirty="0" err="1"/>
+              <a:rPr lang="id-ID" dirty="0" err="1"/>
               <a:t>Selection</a:t>
             </a:r>
-            <a:endParaRPr lang="en-GB" sz="2000" dirty="0"/>
+            <a:endParaRPr lang="en-GB" dirty="0"/>
           </a:p>
           <a:p>
             <a:pPr marL="914400" lvl="1" indent="-457200"/>
             <a:r>
-              <a:rPr lang="id-ID" sz="2000" dirty="0" err="1"/>
+              <a:rPr lang="id-ID" dirty="0" err="1"/>
               <a:t>Preprocessing</a:t>
             </a:r>
-            <a:endParaRPr lang="en-GB" sz="2000" dirty="0"/>
+            <a:endParaRPr lang="en-GB" dirty="0"/>
           </a:p>
           <a:p>
             <a:pPr marL="914400" lvl="1" indent="-457200"/>
             <a:r>
-              <a:rPr lang="id-ID" sz="2000" dirty="0" err="1"/>
+              <a:rPr lang="id-ID" dirty="0" err="1"/>
               <a:t>Transformation</a:t>
             </a:r>
-            <a:endParaRPr lang="en-GB" sz="2000" dirty="0"/>
+            <a:endParaRPr lang="en-GB" dirty="0"/>
           </a:p>
           <a:p>
             <a:pPr marL="914400" lvl="1" indent="-457200"/>
             <a:r>
-              <a:rPr lang="id-ID" sz="2000" dirty="0"/>
+              <a:rPr lang="id-ID" dirty="0"/>
               <a:t>Data Mining</a:t>
             </a:r>
-            <a:endParaRPr lang="en-GB" sz="2000" dirty="0"/>
+            <a:endParaRPr lang="en-GB" dirty="0"/>
           </a:p>
           <a:p>
             <a:pPr marL="914400" lvl="1" indent="-457200"/>
             <a:r>
-              <a:rPr lang="id-ID" sz="2000" dirty="0" err="1"/>
+              <a:rPr lang="id-ID" dirty="0" err="1"/>
               <a:t>Evaluation</a:t>
             </a:r>
-            <a:endParaRPr lang="id-ID" sz="2000" dirty="0"/>
+            <a:endParaRPr lang="id-ID" dirty="0"/>
           </a:p>
         </p:txBody>
       </p:sp>
@@ -21632,7 +21742,7 @@
         </p:nvSpPr>
         <p:spPr>
           <a:xfrm>
-            <a:off x="844141" y="1803307"/>
+            <a:off x="578670" y="1803307"/>
             <a:ext cx="4265150" cy="2810460"/>
           </a:xfrm>
         </p:spPr>
@@ -24631,6 +24741,140 @@
         <p:cNvPr id="1" name="">
           <a:extLst>
             <a:ext uri="{FF2B5EF4-FFF2-40B4-BE49-F238E27FC236}">
+              <a16:creationId xmlns:a16="http://schemas.microsoft.com/office/drawing/2014/main" id="{CE71379A-E791-D42E-5A75-43FF040711BF}"/>
+            </a:ext>
+          </a:extLst>
+        </p:cNvPr>
+        <p:cNvGrpSpPr/>
+        <p:nvPr/>
+      </p:nvGrpSpPr>
+      <p:grpSpPr>
+        <a:xfrm>
+          <a:off x="0" y="0"/>
+          <a:ext cx="0" cy="0"/>
+          <a:chOff x="0" y="0"/>
+          <a:chExt cx="0" cy="0"/>
+        </a:xfrm>
+      </p:grpSpPr>
+      <p:sp>
+        <p:nvSpPr>
+          <p:cNvPr id="2" name="Judul 1">
+            <a:extLst>
+              <a:ext uri="{FF2B5EF4-FFF2-40B4-BE49-F238E27FC236}">
+                <a16:creationId xmlns:a16="http://schemas.microsoft.com/office/drawing/2014/main" id="{A482DFB0-1A62-3C42-CF4D-A7A9ABF9DD74}"/>
+              </a:ext>
+            </a:extLst>
+          </p:cNvPr>
+          <p:cNvSpPr>
+            <a:spLocks noGrp="1"/>
+          </p:cNvSpPr>
+          <p:nvPr>
+            <p:ph type="title"/>
+          </p:nvPr>
+        </p:nvSpPr>
+        <p:spPr>
+          <a:xfrm>
+            <a:off x="3661083" y="1832803"/>
+            <a:ext cx="4265150" cy="2810460"/>
+          </a:xfrm>
+        </p:spPr>
+        <p:txBody>
+          <a:bodyPr rtlCol="0">
+            <a:normAutofit/>
+          </a:bodyPr>
+          <a:lstStyle/>
+          <a:p>
+            <a:pPr rtl="0"/>
+            <a:r>
+              <a:rPr lang="en-GB" sz="4800" dirty="0"/>
+              <a:t>INTERPRETASI HASIL</a:t>
+            </a:r>
+            <a:endParaRPr lang="id-ID" sz="4800" dirty="0"/>
+          </a:p>
+        </p:txBody>
+      </p:sp>
+      <p:sp>
+        <p:nvSpPr>
+          <p:cNvPr id="3" name="Tampungan Tanggal 2">
+            <a:extLst>
+              <a:ext uri="{FF2B5EF4-FFF2-40B4-BE49-F238E27FC236}">
+                <a16:creationId xmlns:a16="http://schemas.microsoft.com/office/drawing/2014/main" id="{A1D3405C-120A-03F9-8F6F-DE1746765F64}"/>
+              </a:ext>
+            </a:extLst>
+          </p:cNvPr>
+          <p:cNvSpPr>
+            <a:spLocks noGrp="1"/>
+          </p:cNvSpPr>
+          <p:nvPr>
+            <p:ph type="dt" sz="half" idx="10"/>
+          </p:nvPr>
+        </p:nvSpPr>
+        <p:spPr/>
+        <p:txBody>
+          <a:bodyPr rtlCol="0"/>
+          <a:lstStyle/>
+          <a:p>
+            <a:pPr rtl="0"/>
+            <a:fld id="{A808DD98-197B-46F5-A6AA-BDA332D7E685}" type="datetime1">
+              <a:rPr lang="id-ID" smtClean="0"/>
+              <a:t>15/09/2025</a:t>
+            </a:fld>
+            <a:endParaRPr lang="id-ID"/>
+          </a:p>
+        </p:txBody>
+      </p:sp>
+      <p:sp>
+        <p:nvSpPr>
+          <p:cNvPr id="5" name="Tampungan Nomor Slide 4">
+            <a:extLst>
+              <a:ext uri="{FF2B5EF4-FFF2-40B4-BE49-F238E27FC236}">
+                <a16:creationId xmlns:a16="http://schemas.microsoft.com/office/drawing/2014/main" id="{36B818EF-7BDD-99AA-D8D9-DD08A43D5723}"/>
+              </a:ext>
+            </a:extLst>
+          </p:cNvPr>
+          <p:cNvSpPr>
+            <a:spLocks noGrp="1"/>
+          </p:cNvSpPr>
+          <p:nvPr>
+            <p:ph type="sldNum" sz="quarter" idx="12"/>
+          </p:nvPr>
+        </p:nvSpPr>
+        <p:spPr/>
+        <p:txBody>
+          <a:bodyPr rtlCol="0"/>
+          <a:lstStyle/>
+          <a:p>
+            <a:pPr rtl="0"/>
+            <a:fld id="{294A09A9-5501-47C1-A89A-A340965A2BE2}" type="slidenum">
+              <a:rPr lang="id-ID" smtClean="0"/>
+              <a:pPr rtl="0"/>
+              <a:t>27</a:t>
+            </a:fld>
+            <a:endParaRPr lang="id-ID"/>
+          </a:p>
+        </p:txBody>
+      </p:sp>
+    </p:spTree>
+    <p:extLst>
+      <p:ext uri="{BB962C8B-B14F-4D97-AF65-F5344CB8AC3E}">
+        <p14:creationId xmlns:p14="http://schemas.microsoft.com/office/powerpoint/2010/main" val="1556925327"/>
+      </p:ext>
+    </p:extLst>
+  </p:cSld>
+  <p:clrMapOvr>
+    <a:masterClrMapping/>
+  </p:clrMapOvr>
+</p:sld>
+</file>
+
+<file path=ppt/slides/slide28.xml><?xml version="1.0" encoding="utf-8"?>
+<p:sld xmlns:a="http://schemas.openxmlformats.org/drawingml/2006/main" xmlns:r="http://schemas.openxmlformats.org/officeDocument/2006/relationships" xmlns:p="http://schemas.openxmlformats.org/presentationml/2006/main">
+  <p:cSld>
+    <p:spTree>
+      <p:nvGrpSpPr>
+        <p:cNvPr id="1" name="">
+          <a:extLst>
+            <a:ext uri="{FF2B5EF4-FFF2-40B4-BE49-F238E27FC236}">
               <a16:creationId xmlns:a16="http://schemas.microsoft.com/office/drawing/2014/main" id="{080BE9B2-BD9E-3829-CDA3-16F34DE214A4}"/>
             </a:ext>
           </a:extLst>
@@ -24761,7 +25005,7 @@
             <a:fld id="{294A09A9-5501-47C1-A89A-A340965A2BE2}" type="slidenum">
               <a:rPr lang="id-ID" smtClean="0"/>
               <a:pPr rtl="0"/>
-              <a:t>27</a:t>
+              <a:t>28</a:t>
             </a:fld>
             <a:endParaRPr lang="id-ID"/>
           </a:p>
@@ -24780,7 +25024,7 @@
 </p:sld>
 </file>
 
-<file path=ppt/slides/slide28.xml><?xml version="1.0" encoding="utf-8"?>
+<file path=ppt/slides/slide29.xml><?xml version="1.0" encoding="utf-8"?>
 <p:sld xmlns:a="http://schemas.openxmlformats.org/drawingml/2006/main" xmlns:r="http://schemas.openxmlformats.org/officeDocument/2006/relationships" xmlns:p="http://schemas.openxmlformats.org/presentationml/2006/main">
   <p:cSld>
     <p:spTree>
@@ -24875,7 +25119,7 @@
             <a:fld id="{294A09A9-5501-47C1-A89A-A340965A2BE2}" type="slidenum">
               <a:rPr lang="id-ID" smtClean="0"/>
               <a:pPr rtl="0"/>
-              <a:t>28</a:t>
+              <a:t>29</a:t>
             </a:fld>
             <a:endParaRPr lang="id-ID"/>
           </a:p>
@@ -25534,7 +25778,241 @@
 </p:sld>
 </file>
 
-<file path=ppt/slides/slide29.xml><?xml version="1.0" encoding="utf-8"?>
+<file path=ppt/slides/slide3.xml><?xml version="1.0" encoding="utf-8"?>
+<p:sld xmlns:a="http://schemas.openxmlformats.org/drawingml/2006/main" xmlns:r="http://schemas.openxmlformats.org/officeDocument/2006/relationships" xmlns:p="http://schemas.openxmlformats.org/presentationml/2006/main">
+  <p:cSld>
+    <p:spTree>
+      <p:nvGrpSpPr>
+        <p:cNvPr id="1" name="">
+          <a:extLst>
+            <a:ext uri="{FF2B5EF4-FFF2-40B4-BE49-F238E27FC236}">
+              <a16:creationId xmlns:a16="http://schemas.microsoft.com/office/drawing/2014/main" id="{390592A4-A83C-D7D6-419C-0F7740BA27C4}"/>
+            </a:ext>
+          </a:extLst>
+        </p:cNvPr>
+        <p:cNvGrpSpPr/>
+        <p:nvPr/>
+      </p:nvGrpSpPr>
+      <p:grpSpPr>
+        <a:xfrm>
+          <a:off x="0" y="0"/>
+          <a:ext cx="0" cy="0"/>
+          <a:chOff x="0" y="0"/>
+          <a:chExt cx="0" cy="0"/>
+        </a:xfrm>
+      </p:grpSpPr>
+      <p:sp>
+        <p:nvSpPr>
+          <p:cNvPr id="2" name="Judul 1">
+            <a:extLst>
+              <a:ext uri="{FF2B5EF4-FFF2-40B4-BE49-F238E27FC236}">
+                <a16:creationId xmlns:a16="http://schemas.microsoft.com/office/drawing/2014/main" id="{A13E8637-FC4E-C738-E35F-C628071DF34C}"/>
+              </a:ext>
+            </a:extLst>
+          </p:cNvPr>
+          <p:cNvSpPr>
+            <a:spLocks noGrp="1"/>
+          </p:cNvSpPr>
+          <p:nvPr>
+            <p:ph type="title"/>
+          </p:nvPr>
+        </p:nvSpPr>
+        <p:spPr>
+          <a:xfrm>
+            <a:off x="1167492" y="381000"/>
+            <a:ext cx="9779183" cy="1325563"/>
+          </a:xfrm>
+        </p:spPr>
+        <p:txBody>
+          <a:bodyPr rtlCol="0"/>
+          <a:lstStyle/>
+          <a:p>
+            <a:pPr rtl="0"/>
+            <a:r>
+              <a:rPr lang="en-GB" dirty="0" err="1"/>
+              <a:t>Abstrak</a:t>
+            </a:r>
+            <a:endParaRPr lang="id-ID" dirty="0"/>
+          </a:p>
+        </p:txBody>
+      </p:sp>
+      <p:sp>
+        <p:nvSpPr>
+          <p:cNvPr id="3" name="Tampungan Konten 2">
+            <a:extLst>
+              <a:ext uri="{FF2B5EF4-FFF2-40B4-BE49-F238E27FC236}">
+                <a16:creationId xmlns:a16="http://schemas.microsoft.com/office/drawing/2014/main" id="{E3DD77AE-85EC-FB89-4756-4BF51E470805}"/>
+              </a:ext>
+            </a:extLst>
+          </p:cNvPr>
+          <p:cNvSpPr>
+            <a:spLocks noGrp="1"/>
+          </p:cNvSpPr>
+          <p:nvPr>
+            <p:ph type="body" idx="1"/>
+          </p:nvPr>
+        </p:nvSpPr>
+        <p:spPr>
+          <a:xfrm>
+            <a:off x="430892" y="2409371"/>
+            <a:ext cx="10991851" cy="3946979"/>
+          </a:xfrm>
+        </p:spPr>
+        <p:txBody>
+          <a:bodyPr vert="horz" lIns="91440" tIns="45720" rIns="91440" bIns="45720" rtlCol="0" anchor="t">
+            <a:normAutofit fontScale="85000" lnSpcReduction="10000"/>
+          </a:bodyPr>
+          <a:lstStyle/>
+          <a:p>
+            <a:r>
+              <a:rPr lang="id-ID" dirty="0"/>
+              <a:t>Model </a:t>
+            </a:r>
+            <a:r>
+              <a:rPr lang="id-ID" i="1" dirty="0" err="1"/>
+              <a:t>Expected</a:t>
+            </a:r>
+            <a:r>
+              <a:rPr lang="id-ID" i="1" dirty="0"/>
+              <a:t> </a:t>
+            </a:r>
+            <a:r>
+              <a:rPr lang="id-ID" i="1" dirty="0" err="1"/>
+              <a:t>Goals</a:t>
+            </a:r>
+            <a:r>
+              <a:rPr lang="id-ID" dirty="0"/>
+              <a:t> (</a:t>
+            </a:r>
+            <a:r>
+              <a:rPr lang="id-ID" dirty="0" err="1"/>
+              <a:t>xG</a:t>
+            </a:r>
+            <a:r>
+              <a:rPr lang="id-ID" dirty="0"/>
+              <a:t>) yang ada saat ini </a:t>
+            </a:r>
+            <a:r>
+              <a:rPr lang="id-ID" dirty="0" err="1"/>
+              <a:t>seringkali</a:t>
+            </a:r>
+            <a:r>
+              <a:rPr lang="id-ID" dirty="0"/>
+              <a:t> menghadapi dilema antara akurasi dan efisiensi komputasi. Penelitian ini bertujuan untuk mengevaluasi penerapan algoritma </a:t>
+            </a:r>
+            <a:r>
+              <a:rPr lang="id-ID" dirty="0" err="1"/>
+              <a:t>LightGBM</a:t>
+            </a:r>
+            <a:r>
+              <a:rPr lang="id-ID" dirty="0"/>
+              <a:t> untuk membangun model prediksi </a:t>
+            </a:r>
+            <a:r>
+              <a:rPr lang="id-ID" dirty="0" err="1"/>
+              <a:t>xG</a:t>
+            </a:r>
+            <a:r>
+              <a:rPr lang="id-ID" dirty="0"/>
+              <a:t> yang akurat sekaligus efisien. Penelitian ini </a:t>
+            </a:r>
+            <a:r>
+              <a:rPr lang="en-GB" dirty="0"/>
+              <a:t>m</a:t>
+            </a:r>
+            <a:r>
+              <a:rPr lang="id-ID" dirty="0" err="1"/>
+              <a:t>enggunakan</a:t>
+            </a:r>
+            <a:r>
+              <a:rPr lang="id-ID" dirty="0"/>
+              <a:t> pendekatan kuantitatif dengan kerangka kerja KDD, model </a:t>
+            </a:r>
+            <a:r>
+              <a:rPr lang="id-ID" dirty="0" err="1"/>
+              <a:t>LightGBM</a:t>
+            </a:r>
+            <a:r>
+              <a:rPr lang="id-ID" dirty="0"/>
+              <a:t> akan dibangun dan dioptimalkan menggunakan data publik dari </a:t>
+            </a:r>
+            <a:r>
+              <a:rPr lang="id-ID" dirty="0" err="1"/>
+              <a:t>StatsBomb</a:t>
+            </a:r>
+            <a:r>
+              <a:rPr lang="id-ID" dirty="0"/>
+              <a:t>. Kinerja model akan dievaluasi secara komprehensif dari sisi akurasi, menggunakan metrik seperti ROC AUC dan </a:t>
+            </a:r>
+            <a:r>
+              <a:rPr lang="id-ID" dirty="0" err="1"/>
+              <a:t>Brier</a:t>
+            </a:r>
+            <a:r>
+              <a:rPr lang="id-ID" dirty="0"/>
+              <a:t> </a:t>
+            </a:r>
+            <a:r>
+              <a:rPr lang="id-ID" dirty="0" err="1"/>
+              <a:t>Score</a:t>
+            </a:r>
+            <a:r>
+              <a:rPr lang="id-ID" dirty="0"/>
+              <a:t>, serta efisiensi komputasi yang diukur melalui waktu pelatihan. Penelitian ini diharapkan dapat menetapkan sebuah tolok ukur baru, menyediakan alat analisis yang lebih andal dan praktis untuk pengambilan keputusan strategis di industri sepak bola.</a:t>
+            </a:r>
+          </a:p>
+        </p:txBody>
+      </p:sp>
+      <p:sp>
+        <p:nvSpPr>
+          <p:cNvPr id="6" name="Tampungan Nomor Slide 5">
+            <a:extLst>
+              <a:ext uri="{FF2B5EF4-FFF2-40B4-BE49-F238E27FC236}">
+                <a16:creationId xmlns:a16="http://schemas.microsoft.com/office/drawing/2014/main" id="{F3551556-18E9-0B9C-4819-F6CC308D5003}"/>
+              </a:ext>
+            </a:extLst>
+          </p:cNvPr>
+          <p:cNvSpPr>
+            <a:spLocks noGrp="1"/>
+          </p:cNvSpPr>
+          <p:nvPr>
+            <p:ph type="sldNum" sz="quarter" idx="12"/>
+          </p:nvPr>
+        </p:nvSpPr>
+        <p:spPr>
+          <a:xfrm>
+            <a:off x="10206318" y="6356350"/>
+            <a:ext cx="1604682" cy="365125"/>
+          </a:xfrm>
+        </p:spPr>
+        <p:txBody>
+          <a:bodyPr rtlCol="0"/>
+          <a:lstStyle/>
+          <a:p>
+            <a:pPr rtl="0"/>
+            <a:fld id="{294A09A9-5501-47C1-A89A-A340965A2BE2}" type="slidenum">
+              <a:rPr lang="id-ID" smtClean="0"/>
+              <a:pPr rtl="0"/>
+              <a:t>3</a:t>
+            </a:fld>
+            <a:endParaRPr lang="id-ID"/>
+          </a:p>
+        </p:txBody>
+      </p:sp>
+    </p:spTree>
+    <p:extLst>
+      <p:ext uri="{BB962C8B-B14F-4D97-AF65-F5344CB8AC3E}">
+        <p14:creationId xmlns:p14="http://schemas.microsoft.com/office/powerpoint/2010/main" val="517861623"/>
+      </p:ext>
+    </p:extLst>
+  </p:cSld>
+  <p:clrMapOvr>
+    <a:masterClrMapping/>
+  </p:clrMapOvr>
+</p:sld>
+</file>
+
+<file path=ppt/slides/slide30.xml><?xml version="1.0" encoding="utf-8"?>
 <p:sld xmlns:a="http://schemas.openxmlformats.org/drawingml/2006/main" xmlns:r="http://schemas.openxmlformats.org/officeDocument/2006/relationships" xmlns:p="http://schemas.openxmlformats.org/presentationml/2006/main">
   <p:cSld>
     <p:spTree>
@@ -25629,7 +26107,7 @@
             <a:fld id="{294A09A9-5501-47C1-A89A-A340965A2BE2}" type="slidenum">
               <a:rPr lang="id-ID" smtClean="0"/>
               <a:pPr rtl="0"/>
-              <a:t>29</a:t>
+              <a:t>30</a:t>
             </a:fld>
             <a:endParaRPr lang="id-ID"/>
           </a:p>
@@ -25828,241 +26306,7 @@
 </p:sld>
 </file>
 
-<file path=ppt/slides/slide3.xml><?xml version="1.0" encoding="utf-8"?>
-<p:sld xmlns:a="http://schemas.openxmlformats.org/drawingml/2006/main" xmlns:r="http://schemas.openxmlformats.org/officeDocument/2006/relationships" xmlns:p="http://schemas.openxmlformats.org/presentationml/2006/main">
-  <p:cSld>
-    <p:spTree>
-      <p:nvGrpSpPr>
-        <p:cNvPr id="1" name="">
-          <a:extLst>
-            <a:ext uri="{FF2B5EF4-FFF2-40B4-BE49-F238E27FC236}">
-              <a16:creationId xmlns:a16="http://schemas.microsoft.com/office/drawing/2014/main" id="{390592A4-A83C-D7D6-419C-0F7740BA27C4}"/>
-            </a:ext>
-          </a:extLst>
-        </p:cNvPr>
-        <p:cNvGrpSpPr/>
-        <p:nvPr/>
-      </p:nvGrpSpPr>
-      <p:grpSpPr>
-        <a:xfrm>
-          <a:off x="0" y="0"/>
-          <a:ext cx="0" cy="0"/>
-          <a:chOff x="0" y="0"/>
-          <a:chExt cx="0" cy="0"/>
-        </a:xfrm>
-      </p:grpSpPr>
-      <p:sp>
-        <p:nvSpPr>
-          <p:cNvPr id="2" name="Judul 1">
-            <a:extLst>
-              <a:ext uri="{FF2B5EF4-FFF2-40B4-BE49-F238E27FC236}">
-                <a16:creationId xmlns:a16="http://schemas.microsoft.com/office/drawing/2014/main" id="{A13E8637-FC4E-C738-E35F-C628071DF34C}"/>
-              </a:ext>
-            </a:extLst>
-          </p:cNvPr>
-          <p:cNvSpPr>
-            <a:spLocks noGrp="1"/>
-          </p:cNvSpPr>
-          <p:nvPr>
-            <p:ph type="title"/>
-          </p:nvPr>
-        </p:nvSpPr>
-        <p:spPr>
-          <a:xfrm>
-            <a:off x="1167492" y="381000"/>
-            <a:ext cx="9779183" cy="1325563"/>
-          </a:xfrm>
-        </p:spPr>
-        <p:txBody>
-          <a:bodyPr rtlCol="0"/>
-          <a:lstStyle/>
-          <a:p>
-            <a:pPr rtl="0"/>
-            <a:r>
-              <a:rPr lang="en-GB" dirty="0" err="1"/>
-              <a:t>Abstrak</a:t>
-            </a:r>
-            <a:endParaRPr lang="id-ID" dirty="0"/>
-          </a:p>
-        </p:txBody>
-      </p:sp>
-      <p:sp>
-        <p:nvSpPr>
-          <p:cNvPr id="3" name="Tampungan Konten 2">
-            <a:extLst>
-              <a:ext uri="{FF2B5EF4-FFF2-40B4-BE49-F238E27FC236}">
-                <a16:creationId xmlns:a16="http://schemas.microsoft.com/office/drawing/2014/main" id="{E3DD77AE-85EC-FB89-4756-4BF51E470805}"/>
-              </a:ext>
-            </a:extLst>
-          </p:cNvPr>
-          <p:cNvSpPr>
-            <a:spLocks noGrp="1"/>
-          </p:cNvSpPr>
-          <p:nvPr>
-            <p:ph type="body" idx="1"/>
-          </p:nvPr>
-        </p:nvSpPr>
-        <p:spPr>
-          <a:xfrm>
-            <a:off x="430892" y="2409371"/>
-            <a:ext cx="10991851" cy="3946979"/>
-          </a:xfrm>
-        </p:spPr>
-        <p:txBody>
-          <a:bodyPr vert="horz" lIns="91440" tIns="45720" rIns="91440" bIns="45720" rtlCol="0" anchor="t">
-            <a:normAutofit fontScale="85000" lnSpcReduction="10000"/>
-          </a:bodyPr>
-          <a:lstStyle/>
-          <a:p>
-            <a:r>
-              <a:rPr lang="id-ID" dirty="0"/>
-              <a:t>Model </a:t>
-            </a:r>
-            <a:r>
-              <a:rPr lang="id-ID" i="1" dirty="0" err="1"/>
-              <a:t>Expected</a:t>
-            </a:r>
-            <a:r>
-              <a:rPr lang="id-ID" i="1" dirty="0"/>
-              <a:t> </a:t>
-            </a:r>
-            <a:r>
-              <a:rPr lang="id-ID" i="1" dirty="0" err="1"/>
-              <a:t>Goals</a:t>
-            </a:r>
-            <a:r>
-              <a:rPr lang="id-ID" dirty="0"/>
-              <a:t> (</a:t>
-            </a:r>
-            <a:r>
-              <a:rPr lang="id-ID" dirty="0" err="1"/>
-              <a:t>xG</a:t>
-            </a:r>
-            <a:r>
-              <a:rPr lang="id-ID" dirty="0"/>
-              <a:t>) yang ada saat ini </a:t>
-            </a:r>
-            <a:r>
-              <a:rPr lang="id-ID" dirty="0" err="1"/>
-              <a:t>seringkali</a:t>
-            </a:r>
-            <a:r>
-              <a:rPr lang="id-ID" dirty="0"/>
-              <a:t> menghadapi dilema antara akurasi dan efisiensi komputasi. Penelitian ini bertujuan untuk mengevaluasi penerapan algoritma </a:t>
-            </a:r>
-            <a:r>
-              <a:rPr lang="id-ID" dirty="0" err="1"/>
-              <a:t>LightGBM</a:t>
-            </a:r>
-            <a:r>
-              <a:rPr lang="id-ID" dirty="0"/>
-              <a:t> untuk membangun model prediksi </a:t>
-            </a:r>
-            <a:r>
-              <a:rPr lang="id-ID" dirty="0" err="1"/>
-              <a:t>xG</a:t>
-            </a:r>
-            <a:r>
-              <a:rPr lang="id-ID" dirty="0"/>
-              <a:t> yang akurat sekaligus efisien. Penelitian ini </a:t>
-            </a:r>
-            <a:r>
-              <a:rPr lang="en-GB" dirty="0"/>
-              <a:t>m</a:t>
-            </a:r>
-            <a:r>
-              <a:rPr lang="id-ID" dirty="0" err="1"/>
-              <a:t>enggunakan</a:t>
-            </a:r>
-            <a:r>
-              <a:rPr lang="id-ID" dirty="0"/>
-              <a:t> pendekatan kuantitatif dengan kerangka kerja KDD, model </a:t>
-            </a:r>
-            <a:r>
-              <a:rPr lang="id-ID" dirty="0" err="1"/>
-              <a:t>LightGBM</a:t>
-            </a:r>
-            <a:r>
-              <a:rPr lang="id-ID" dirty="0"/>
-              <a:t> akan dibangun dan dioptimalkan menggunakan data publik dari </a:t>
-            </a:r>
-            <a:r>
-              <a:rPr lang="id-ID" dirty="0" err="1"/>
-              <a:t>StatsBomb</a:t>
-            </a:r>
-            <a:r>
-              <a:rPr lang="id-ID" dirty="0"/>
-              <a:t>. Kinerja model akan dievaluasi secara komprehensif dari sisi akurasi, menggunakan metrik seperti ROC AUC dan </a:t>
-            </a:r>
-            <a:r>
-              <a:rPr lang="id-ID" dirty="0" err="1"/>
-              <a:t>Brier</a:t>
-            </a:r>
-            <a:r>
-              <a:rPr lang="id-ID" dirty="0"/>
-              <a:t> </a:t>
-            </a:r>
-            <a:r>
-              <a:rPr lang="id-ID" dirty="0" err="1"/>
-              <a:t>Score</a:t>
-            </a:r>
-            <a:r>
-              <a:rPr lang="id-ID" dirty="0"/>
-              <a:t>, serta efisiensi komputasi yang diukur melalui waktu pelatihan. Penelitian ini diharapkan dapat menetapkan sebuah tolok ukur baru, menyediakan alat analisis yang lebih andal dan praktis untuk pengambilan keputusan strategis di industri sepak bola.</a:t>
-            </a:r>
-          </a:p>
-        </p:txBody>
-      </p:sp>
-      <p:sp>
-        <p:nvSpPr>
-          <p:cNvPr id="6" name="Tampungan Nomor Slide 5">
-            <a:extLst>
-              <a:ext uri="{FF2B5EF4-FFF2-40B4-BE49-F238E27FC236}">
-                <a16:creationId xmlns:a16="http://schemas.microsoft.com/office/drawing/2014/main" id="{F3551556-18E9-0B9C-4819-F6CC308D5003}"/>
-              </a:ext>
-            </a:extLst>
-          </p:cNvPr>
-          <p:cNvSpPr>
-            <a:spLocks noGrp="1"/>
-          </p:cNvSpPr>
-          <p:nvPr>
-            <p:ph type="sldNum" sz="quarter" idx="12"/>
-          </p:nvPr>
-        </p:nvSpPr>
-        <p:spPr>
-          <a:xfrm>
-            <a:off x="10206318" y="6356350"/>
-            <a:ext cx="1604682" cy="365125"/>
-          </a:xfrm>
-        </p:spPr>
-        <p:txBody>
-          <a:bodyPr rtlCol="0"/>
-          <a:lstStyle/>
-          <a:p>
-            <a:pPr rtl="0"/>
-            <a:fld id="{294A09A9-5501-47C1-A89A-A340965A2BE2}" type="slidenum">
-              <a:rPr lang="id-ID" smtClean="0"/>
-              <a:pPr rtl="0"/>
-              <a:t>3</a:t>
-            </a:fld>
-            <a:endParaRPr lang="id-ID"/>
-          </a:p>
-        </p:txBody>
-      </p:sp>
-    </p:spTree>
-    <p:extLst>
-      <p:ext uri="{BB962C8B-B14F-4D97-AF65-F5344CB8AC3E}">
-        <p14:creationId xmlns:p14="http://schemas.microsoft.com/office/powerpoint/2010/main" val="517861623"/>
-      </p:ext>
-    </p:extLst>
-  </p:cSld>
-  <p:clrMapOvr>
-    <a:masterClrMapping/>
-  </p:clrMapOvr>
-</p:sld>
-</file>
-
-<file path=ppt/slides/slide30.xml><?xml version="1.0" encoding="utf-8"?>
+<file path=ppt/slides/slide31.xml><?xml version="1.0" encoding="utf-8"?>
 <p:sld xmlns:a="http://schemas.openxmlformats.org/drawingml/2006/main" xmlns:r="http://schemas.openxmlformats.org/officeDocument/2006/relationships" xmlns:p="http://schemas.openxmlformats.org/presentationml/2006/main">
   <p:cSld>
     <p:spTree>
@@ -26192,7 +26436,7 @@
             <a:fld id="{294A09A9-5501-47C1-A89A-A340965A2BE2}" type="slidenum">
               <a:rPr lang="id-ID" smtClean="0"/>
               <a:pPr rtl="0"/>
-              <a:t>30</a:t>
+              <a:t>31</a:t>
             </a:fld>
             <a:endParaRPr lang="id-ID"/>
           </a:p>
@@ -26419,7 +26663,7 @@
 </p:sld>
 </file>
 
-<file path=ppt/slides/slide31.xml><?xml version="1.0" encoding="utf-8"?>
+<file path=ppt/slides/slide32.xml><?xml version="1.0" encoding="utf-8"?>
 <p:sld xmlns:a="http://schemas.openxmlformats.org/drawingml/2006/main" xmlns:r="http://schemas.openxmlformats.org/officeDocument/2006/relationships" xmlns:p="http://schemas.openxmlformats.org/presentationml/2006/main">
   <p:cSld>
     <p:spTree>
@@ -26549,7 +26793,7 @@
             <a:fld id="{294A09A9-5501-47C1-A89A-A340965A2BE2}" type="slidenum">
               <a:rPr lang="id-ID" smtClean="0"/>
               <a:pPr rtl="0"/>
-              <a:t>31</a:t>
+              <a:t>32</a:t>
             </a:fld>
             <a:endParaRPr lang="id-ID"/>
           </a:p>
@@ -27947,7 +28191,7 @@
 </p:sld>
 </file>
 
-<file path=ppt/slides/slide32.xml><?xml version="1.0" encoding="utf-8"?>
+<file path=ppt/slides/slide33.xml><?xml version="1.0" encoding="utf-8"?>
 <p:sld xmlns:a="http://schemas.openxmlformats.org/drawingml/2006/main" xmlns:r="http://schemas.openxmlformats.org/officeDocument/2006/relationships" xmlns:p="http://schemas.openxmlformats.org/presentationml/2006/main">
   <p:cSld>
     <p:spTree>
@@ -28073,7 +28317,7 @@
             <a:fld id="{294A09A9-5501-47C1-A89A-A340965A2BE2}" type="slidenum">
               <a:rPr lang="id-ID" smtClean="0"/>
               <a:pPr rtl="0"/>
-              <a:t>32</a:t>
+              <a:t>33</a:t>
             </a:fld>
             <a:endParaRPr lang="id-ID"/>
           </a:p>
@@ -28316,7 +28560,7 @@
 </p:sld>
 </file>
 
-<file path=ppt/slides/slide33.xml><?xml version="1.0" encoding="utf-8"?>
+<file path=ppt/slides/slide34.xml><?xml version="1.0" encoding="utf-8"?>
 <p:sld xmlns:a="http://schemas.openxmlformats.org/drawingml/2006/main" xmlns:r="http://schemas.openxmlformats.org/officeDocument/2006/relationships" xmlns:p="http://schemas.openxmlformats.org/presentationml/2006/main">
   <p:cSld>
     <p:spTree>
@@ -28442,7 +28686,7 @@
             <a:fld id="{294A09A9-5501-47C1-A89A-A340965A2BE2}" type="slidenum">
               <a:rPr lang="id-ID" smtClean="0"/>
               <a:pPr rtl="0"/>
-              <a:t>33</a:t>
+              <a:t>34</a:t>
             </a:fld>
             <a:endParaRPr lang="id-ID"/>
           </a:p>
@@ -29987,7 +30231,7 @@
 </p:sld>
 </file>
 
-<file path=ppt/slides/slide34.xml><?xml version="1.0" encoding="utf-8"?>
+<file path=ppt/slides/slide35.xml><?xml version="1.0" encoding="utf-8"?>
 <p:sld xmlns:a="http://schemas.openxmlformats.org/drawingml/2006/main" xmlns:r="http://schemas.openxmlformats.org/officeDocument/2006/relationships" xmlns:p="http://schemas.openxmlformats.org/presentationml/2006/main">
   <p:cSld>
     <p:spTree>
@@ -30070,35 +30314,6 @@
       </p:sp>
       <p:sp>
         <p:nvSpPr>
-          <p:cNvPr id="28" name="Footer Placeholder 27">
-            <a:extLst>
-              <a:ext uri="{FF2B5EF4-FFF2-40B4-BE49-F238E27FC236}">
-                <a16:creationId xmlns:a16="http://schemas.microsoft.com/office/drawing/2014/main" id="{C9DE7650-7897-43D4-38C0-47513D25B996}"/>
-              </a:ext>
-            </a:extLst>
-          </p:cNvPr>
-          <p:cNvSpPr>
-            <a:spLocks noGrp="1"/>
-          </p:cNvSpPr>
-          <p:nvPr>
-            <p:ph type="ftr" sz="quarter" idx="26"/>
-          </p:nvPr>
-        </p:nvSpPr>
-        <p:spPr/>
-        <p:txBody>
-          <a:bodyPr/>
-          <a:lstStyle/>
-          <a:p>
-            <a:pPr rtl="0"/>
-            <a:r>
-              <a:rPr lang="id-ID" noProof="0"/>
-              <a:t>JUDUL PRESENTASI</a:t>
-            </a:r>
-          </a:p>
-        </p:txBody>
-      </p:sp>
-      <p:sp>
-        <p:nvSpPr>
           <p:cNvPr id="29" name="Slide Number Placeholder 28">
             <a:extLst>
               <a:ext uri="{FF2B5EF4-FFF2-40B4-BE49-F238E27FC236}">
@@ -30122,7 +30337,7 @@
             <a:fld id="{294A09A9-5501-47C1-A89A-A340965A2BE2}" type="slidenum">
               <a:rPr lang="id-ID" noProof="0" smtClean="0"/>
               <a:pPr rtl="0"/>
-              <a:t>34</a:t>
+              <a:t>35</a:t>
             </a:fld>
             <a:endParaRPr lang="id-ID" noProof="0"/>
           </a:p>
@@ -30235,7 +30450,7 @@
 </p:sld>
 </file>
 
-<file path=ppt/slides/slide35.xml><?xml version="1.0" encoding="utf-8"?>
+<file path=ppt/slides/slide36.xml><?xml version="1.0" encoding="utf-8"?>
 <p:sld xmlns:a="http://schemas.openxmlformats.org/drawingml/2006/main" xmlns:r="http://schemas.openxmlformats.org/officeDocument/2006/relationships" xmlns:p="http://schemas.openxmlformats.org/presentationml/2006/main">
   <p:cSld>
     <p:spTree>
@@ -30354,35 +30569,6 @@
       </p:sp>
       <p:sp>
         <p:nvSpPr>
-          <p:cNvPr id="5" name="Footer Placeholder 4">
-            <a:extLst>
-              <a:ext uri="{FF2B5EF4-FFF2-40B4-BE49-F238E27FC236}">
-                <a16:creationId xmlns:a16="http://schemas.microsoft.com/office/drawing/2014/main" id="{0154EC9F-46CD-7CBD-1E30-B6D18FFFE3D0}"/>
-              </a:ext>
-            </a:extLst>
-          </p:cNvPr>
-          <p:cNvSpPr>
-            <a:spLocks noGrp="1"/>
-          </p:cNvSpPr>
-          <p:nvPr>
-            <p:ph type="ftr" sz="quarter" idx="3"/>
-          </p:nvPr>
-        </p:nvSpPr>
-        <p:spPr/>
-        <p:txBody>
-          <a:bodyPr/>
-          <a:lstStyle/>
-          <a:p>
-            <a:pPr rtl="0"/>
-            <a:r>
-              <a:rPr lang="id-ID" noProof="0"/>
-              <a:t>JUDUL PRESENTASI</a:t>
-            </a:r>
-          </a:p>
-        </p:txBody>
-      </p:sp>
-      <p:sp>
-        <p:nvSpPr>
           <p:cNvPr id="6" name="Slide Number Placeholder 5">
             <a:extLst>
               <a:ext uri="{FF2B5EF4-FFF2-40B4-BE49-F238E27FC236}">
@@ -30406,7 +30592,7 @@
             <a:fld id="{294A09A9-5501-47C1-A89A-A340965A2BE2}" type="slidenum">
               <a:rPr lang="id-ID" noProof="0" smtClean="0"/>
               <a:pPr rtl="0"/>
-              <a:t>35</a:t>
+              <a:t>36</a:t>
             </a:fld>
             <a:endParaRPr lang="id-ID" noProof="0"/>
           </a:p>
@@ -30425,7 +30611,7 @@
 </p:sld>
 </file>
 
-<file path=ppt/slides/slide36.xml><?xml version="1.0" encoding="utf-8"?>
+<file path=ppt/slides/slide37.xml><?xml version="1.0" encoding="utf-8"?>
 <p:sld xmlns:a="http://schemas.openxmlformats.org/drawingml/2006/main" xmlns:r="http://schemas.openxmlformats.org/officeDocument/2006/relationships" xmlns:p="http://schemas.openxmlformats.org/presentationml/2006/main">
   <p:cSld>
     <p:spTree>
@@ -30558,35 +30744,6 @@
       </p:sp>
       <p:sp>
         <p:nvSpPr>
-          <p:cNvPr id="5" name="Footer Placeholder 4">
-            <a:extLst>
-              <a:ext uri="{FF2B5EF4-FFF2-40B4-BE49-F238E27FC236}">
-                <a16:creationId xmlns:a16="http://schemas.microsoft.com/office/drawing/2014/main" id="{B70DF352-A6E6-FF2C-D294-5A5A7277AF15}"/>
-              </a:ext>
-            </a:extLst>
-          </p:cNvPr>
-          <p:cNvSpPr>
-            <a:spLocks noGrp="1"/>
-          </p:cNvSpPr>
-          <p:nvPr>
-            <p:ph type="ftr" sz="quarter" idx="3"/>
-          </p:nvPr>
-        </p:nvSpPr>
-        <p:spPr/>
-        <p:txBody>
-          <a:bodyPr/>
-          <a:lstStyle/>
-          <a:p>
-            <a:pPr rtl="0"/>
-            <a:r>
-              <a:rPr lang="id-ID" noProof="0"/>
-              <a:t>JUDUL PRESENTASI</a:t>
-            </a:r>
-          </a:p>
-        </p:txBody>
-      </p:sp>
-      <p:sp>
-        <p:nvSpPr>
           <p:cNvPr id="6" name="Slide Number Placeholder 5">
             <a:extLst>
               <a:ext uri="{FF2B5EF4-FFF2-40B4-BE49-F238E27FC236}">
@@ -30610,7 +30767,7 @@
             <a:fld id="{294A09A9-5501-47C1-A89A-A340965A2BE2}" type="slidenum">
               <a:rPr lang="id-ID" noProof="0" smtClean="0"/>
               <a:pPr rtl="0"/>
-              <a:t>36</a:t>
+              <a:t>37</a:t>
             </a:fld>
             <a:endParaRPr lang="id-ID" noProof="0"/>
           </a:p>
@@ -30629,7 +30786,7 @@
 </p:sld>
 </file>
 
-<file path=ppt/slides/slide37.xml><?xml version="1.0" encoding="utf-8"?>
+<file path=ppt/slides/slide38.xml><?xml version="1.0" encoding="utf-8"?>
 <p:sld xmlns:a="http://schemas.openxmlformats.org/drawingml/2006/main" xmlns:r="http://schemas.openxmlformats.org/officeDocument/2006/relationships" xmlns:p="http://schemas.openxmlformats.org/presentationml/2006/main">
   <p:cSld>
     <p:spTree>
@@ -30775,7 +30932,7 @@
             <a:fld id="{294A09A9-5501-47C1-A89A-A340965A2BE2}" type="slidenum">
               <a:rPr lang="id-ID" smtClean="0"/>
               <a:pPr rtl="0"/>
-              <a:t>37</a:t>
+              <a:t>38</a:t>
             </a:fld>
             <a:endParaRPr lang="id-ID" dirty="0"/>
           </a:p>
@@ -30785,188 +30942,6 @@
     <p:extLst>
       <p:ext uri="{BB962C8B-B14F-4D97-AF65-F5344CB8AC3E}">
         <p14:creationId xmlns:p14="http://schemas.microsoft.com/office/powerpoint/2010/main" val="467050395"/>
-      </p:ext>
-    </p:extLst>
-  </p:cSld>
-  <p:clrMapOvr>
-    <a:masterClrMapping/>
-  </p:clrMapOvr>
-</p:sld>
-</file>
-
-<file path=ppt/slides/slide38.xml><?xml version="1.0" encoding="utf-8"?>
-<p:sld xmlns:a="http://schemas.openxmlformats.org/drawingml/2006/main" xmlns:r="http://schemas.openxmlformats.org/officeDocument/2006/relationships" xmlns:p="http://schemas.openxmlformats.org/presentationml/2006/main">
-  <p:cSld>
-    <p:spTree>
-      <p:nvGrpSpPr>
-        <p:cNvPr id="1" name=""/>
-        <p:cNvGrpSpPr/>
-        <p:nvPr/>
-      </p:nvGrpSpPr>
-      <p:grpSpPr>
-        <a:xfrm>
-          <a:off x="0" y="0"/>
-          <a:ext cx="0" cy="0"/>
-          <a:chOff x="0" y="0"/>
-          <a:chExt cx="0" cy="0"/>
-        </a:xfrm>
-      </p:grpSpPr>
-      <p:sp>
-        <p:nvSpPr>
-          <p:cNvPr id="2" name="Title 1">
-            <a:extLst>
-              <a:ext uri="{FF2B5EF4-FFF2-40B4-BE49-F238E27FC236}">
-                <a16:creationId xmlns:a16="http://schemas.microsoft.com/office/drawing/2014/main" id="{B9466093-D4AA-F632-85B3-59570CEDC2CE}"/>
-              </a:ext>
-            </a:extLst>
-          </p:cNvPr>
-          <p:cNvSpPr>
-            <a:spLocks noGrp="1"/>
-          </p:cNvSpPr>
-          <p:nvPr>
-            <p:ph type="title"/>
-          </p:nvPr>
-        </p:nvSpPr>
-        <p:spPr/>
-        <p:txBody>
-          <a:bodyPr/>
-          <a:lstStyle/>
-          <a:p>
-            <a:r>
-              <a:rPr lang="en-GB" dirty="0"/>
-              <a:t>Saran</a:t>
-            </a:r>
-            <a:endParaRPr lang="id-ID" dirty="0"/>
-          </a:p>
-        </p:txBody>
-      </p:sp>
-      <p:sp>
-        <p:nvSpPr>
-          <p:cNvPr id="3" name="Content Placeholder 2">
-            <a:extLst>
-              <a:ext uri="{FF2B5EF4-FFF2-40B4-BE49-F238E27FC236}">
-                <a16:creationId xmlns:a16="http://schemas.microsoft.com/office/drawing/2014/main" id="{79D8D027-F1C0-BD15-68D4-DC8C613ADD28}"/>
-              </a:ext>
-            </a:extLst>
-          </p:cNvPr>
-          <p:cNvSpPr>
-            <a:spLocks noGrp="1"/>
-          </p:cNvSpPr>
-          <p:nvPr>
-            <p:ph idx="1"/>
-          </p:nvPr>
-        </p:nvSpPr>
-        <p:spPr>
-          <a:xfrm>
-            <a:off x="1167492" y="1706563"/>
-            <a:ext cx="9893797" cy="3650253"/>
-          </a:xfrm>
-        </p:spPr>
-        <p:txBody>
-          <a:bodyPr/>
-          <a:lstStyle/>
-          <a:p>
-            <a:r>
-              <a:rPr lang="id-ID" sz="2800" dirty="0"/>
-              <a:t>Untuk penelitian selanjutnya, disarankan untuk memperkaya model dengan fitur yang lebih detail, seperti data posisi pemain bertahan saat tembakan terjadi. Pengembangan aplikasi juga dapat dilanjutkan dengan menambahkan fitur analisis performa pemain atau perbandingan taktik tim.</a:t>
-            </a:r>
-          </a:p>
-        </p:txBody>
-      </p:sp>
-      <p:sp>
-        <p:nvSpPr>
-          <p:cNvPr id="4" name="Date Placeholder 3">
-            <a:extLst>
-              <a:ext uri="{FF2B5EF4-FFF2-40B4-BE49-F238E27FC236}">
-                <a16:creationId xmlns:a16="http://schemas.microsoft.com/office/drawing/2014/main" id="{3CA90C15-EF3A-B529-724E-20961D1EA568}"/>
-              </a:ext>
-            </a:extLst>
-          </p:cNvPr>
-          <p:cNvSpPr>
-            <a:spLocks noGrp="1"/>
-          </p:cNvSpPr>
-          <p:nvPr>
-            <p:ph type="dt" sz="half" idx="2"/>
-          </p:nvPr>
-        </p:nvSpPr>
-        <p:spPr/>
-        <p:txBody>
-          <a:bodyPr/>
-          <a:lstStyle/>
-          <a:p>
-            <a:pPr rtl="0"/>
-            <a:fld id="{864F080E-00EF-45FB-879B-543FC5219789}" type="datetime1">
-              <a:rPr lang="id-ID" noProof="0" smtClean="0"/>
-              <a:t>11/09/2025</a:t>
-            </a:fld>
-            <a:endParaRPr lang="id-ID" noProof="0"/>
-          </a:p>
-        </p:txBody>
-      </p:sp>
-      <p:sp>
-        <p:nvSpPr>
-          <p:cNvPr id="5" name="Footer Placeholder 4">
-            <a:extLst>
-              <a:ext uri="{FF2B5EF4-FFF2-40B4-BE49-F238E27FC236}">
-                <a16:creationId xmlns:a16="http://schemas.microsoft.com/office/drawing/2014/main" id="{45C82320-0C57-E9FB-D206-8B5081F93743}"/>
-              </a:ext>
-            </a:extLst>
-          </p:cNvPr>
-          <p:cNvSpPr>
-            <a:spLocks noGrp="1"/>
-          </p:cNvSpPr>
-          <p:nvPr>
-            <p:ph type="ftr" sz="quarter" idx="3"/>
-          </p:nvPr>
-        </p:nvSpPr>
-        <p:spPr/>
-        <p:txBody>
-          <a:bodyPr/>
-          <a:lstStyle/>
-          <a:p>
-            <a:pPr rtl="0"/>
-            <a:r>
-              <a:rPr lang="id-ID" noProof="0"/>
-              <a:t>JUDUL PRESENTASI</a:t>
-            </a:r>
-          </a:p>
-        </p:txBody>
-      </p:sp>
-      <p:sp>
-        <p:nvSpPr>
-          <p:cNvPr id="6" name="Slide Number Placeholder 5">
-            <a:extLst>
-              <a:ext uri="{FF2B5EF4-FFF2-40B4-BE49-F238E27FC236}">
-                <a16:creationId xmlns:a16="http://schemas.microsoft.com/office/drawing/2014/main" id="{3BCA0E54-BD5E-43D9-25A3-856FF970BBC2}"/>
-              </a:ext>
-            </a:extLst>
-          </p:cNvPr>
-          <p:cNvSpPr>
-            <a:spLocks noGrp="1"/>
-          </p:cNvSpPr>
-          <p:nvPr>
-            <p:ph type="sldNum" sz="quarter" idx="4"/>
-          </p:nvPr>
-        </p:nvSpPr>
-        <p:spPr/>
-        <p:txBody>
-          <a:bodyPr/>
-          <a:lstStyle/>
-          <a:p>
-            <a:pPr rtl="0"/>
-            <a:fld id="{294A09A9-5501-47C1-A89A-A340965A2BE2}" type="slidenum">
-              <a:rPr lang="id-ID" noProof="0" smtClean="0"/>
-              <a:pPr rtl="0"/>
-              <a:t>38</a:t>
-            </a:fld>
-            <a:endParaRPr lang="id-ID" noProof="0"/>
-          </a:p>
-        </p:txBody>
-      </p:sp>
-    </p:spTree>
-    <p:extLst>
-      <p:ext uri="{BB962C8B-B14F-4D97-AF65-F5344CB8AC3E}">
-        <p14:creationId xmlns:p14="http://schemas.microsoft.com/office/powerpoint/2010/main" val="1657666987"/>
       </p:ext>
     </p:extLst>
   </p:cSld>
@@ -30995,10 +30970,10 @@
       </p:grpSpPr>
       <p:sp>
         <p:nvSpPr>
-          <p:cNvPr id="2" name="Judul 1">
-            <a:extLst>
-              <a:ext uri="{FF2B5EF4-FFF2-40B4-BE49-F238E27FC236}">
-                <a16:creationId xmlns:a16="http://schemas.microsoft.com/office/drawing/2014/main" id="{69FAE308-3076-43DB-B834-DA0B0AE19AF9}"/>
+          <p:cNvPr id="2" name="Title 1">
+            <a:extLst>
+              <a:ext uri="{FF2B5EF4-FFF2-40B4-BE49-F238E27FC236}">
+                <a16:creationId xmlns:a16="http://schemas.microsoft.com/office/drawing/2014/main" id="{B9466093-D4AA-F632-85B3-59570CEDC2CE}"/>
               </a:ext>
             </a:extLst>
           </p:cNvPr>
@@ -31006,31 +30981,120 @@
             <a:spLocks noGrp="1"/>
           </p:cNvSpPr>
           <p:nvPr>
-            <p:ph type="ctrTitle"/>
+            <p:ph type="title"/>
+          </p:nvPr>
+        </p:nvSpPr>
+        <p:spPr/>
+        <p:txBody>
+          <a:bodyPr/>
+          <a:lstStyle/>
+          <a:p>
+            <a:r>
+              <a:rPr lang="en-GB" dirty="0"/>
+              <a:t>Saran</a:t>
+            </a:r>
+            <a:endParaRPr lang="id-ID" dirty="0"/>
+          </a:p>
+        </p:txBody>
+      </p:sp>
+      <p:sp>
+        <p:nvSpPr>
+          <p:cNvPr id="3" name="Content Placeholder 2">
+            <a:extLst>
+              <a:ext uri="{FF2B5EF4-FFF2-40B4-BE49-F238E27FC236}">
+                <a16:creationId xmlns:a16="http://schemas.microsoft.com/office/drawing/2014/main" id="{79D8D027-F1C0-BD15-68D4-DC8C613ADD28}"/>
+              </a:ext>
+            </a:extLst>
+          </p:cNvPr>
+          <p:cNvSpPr>
+            <a:spLocks noGrp="1"/>
+          </p:cNvSpPr>
+          <p:nvPr>
+            <p:ph idx="1"/>
           </p:nvPr>
         </p:nvSpPr>
         <p:spPr>
           <a:xfrm>
-            <a:off x="1167494" y="1122363"/>
-            <a:ext cx="6220278" cy="2387600"/>
+            <a:off x="1167492" y="1706563"/>
+            <a:ext cx="9893797" cy="3650253"/>
           </a:xfrm>
         </p:spPr>
         <p:txBody>
-          <a:bodyPr rtlCol="0"/>
+          <a:bodyPr/>
           <a:lstStyle/>
           <a:p>
+            <a:r>
+              <a:rPr lang="id-ID" sz="2800" dirty="0"/>
+              <a:t>Untuk penelitian selanjutnya, disarankan untuk memperkaya model dengan fitur yang lebih detail, seperti data posisi pemain bertahan saat tembakan terjadi. Pengembangan aplikasi juga dapat dilanjutkan dengan menambahkan fitur analisis performa pemain atau perbandingan taktik tim.</a:t>
+            </a:r>
+          </a:p>
+        </p:txBody>
+      </p:sp>
+      <p:sp>
+        <p:nvSpPr>
+          <p:cNvPr id="4" name="Date Placeholder 3">
+            <a:extLst>
+              <a:ext uri="{FF2B5EF4-FFF2-40B4-BE49-F238E27FC236}">
+                <a16:creationId xmlns:a16="http://schemas.microsoft.com/office/drawing/2014/main" id="{3CA90C15-EF3A-B529-724E-20961D1EA568}"/>
+              </a:ext>
+            </a:extLst>
+          </p:cNvPr>
+          <p:cNvSpPr>
+            <a:spLocks noGrp="1"/>
+          </p:cNvSpPr>
+          <p:nvPr>
+            <p:ph type="dt" sz="half" idx="2"/>
+          </p:nvPr>
+        </p:nvSpPr>
+        <p:spPr/>
+        <p:txBody>
+          <a:bodyPr/>
+          <a:lstStyle/>
+          <a:p>
             <a:pPr rtl="0"/>
-            <a:r>
-              <a:rPr lang="id-ID"/>
-              <a:t>Terima kasih</a:t>
-            </a:r>
+            <a:fld id="{864F080E-00EF-45FB-879B-543FC5219789}" type="datetime1">
+              <a:rPr lang="id-ID" noProof="0" smtClean="0"/>
+              <a:t>11/09/2025</a:t>
+            </a:fld>
+            <a:endParaRPr lang="id-ID" noProof="0"/>
+          </a:p>
+        </p:txBody>
+      </p:sp>
+      <p:sp>
+        <p:nvSpPr>
+          <p:cNvPr id="6" name="Slide Number Placeholder 5">
+            <a:extLst>
+              <a:ext uri="{FF2B5EF4-FFF2-40B4-BE49-F238E27FC236}">
+                <a16:creationId xmlns:a16="http://schemas.microsoft.com/office/drawing/2014/main" id="{3BCA0E54-BD5E-43D9-25A3-856FF970BBC2}"/>
+              </a:ext>
+            </a:extLst>
+          </p:cNvPr>
+          <p:cNvSpPr>
+            <a:spLocks noGrp="1"/>
+          </p:cNvSpPr>
+          <p:nvPr>
+            <p:ph type="sldNum" sz="quarter" idx="4"/>
+          </p:nvPr>
+        </p:nvSpPr>
+        <p:spPr/>
+        <p:txBody>
+          <a:bodyPr/>
+          <a:lstStyle/>
+          <a:p>
+            <a:pPr rtl="0"/>
+            <a:fld id="{294A09A9-5501-47C1-A89A-A340965A2BE2}" type="slidenum">
+              <a:rPr lang="id-ID" noProof="0" smtClean="0"/>
+              <a:pPr rtl="0"/>
+              <a:t>39</a:t>
+            </a:fld>
+            <a:endParaRPr lang="id-ID" noProof="0"/>
           </a:p>
         </p:txBody>
       </p:sp>
     </p:spTree>
     <p:extLst>
       <p:ext uri="{BB962C8B-B14F-4D97-AF65-F5344CB8AC3E}">
-        <p14:creationId xmlns:p14="http://schemas.microsoft.com/office/powerpoint/2010/main" val="926184573"/>
+        <p14:creationId xmlns:p14="http://schemas.microsoft.com/office/powerpoint/2010/main" val="1657666987"/>
       </p:ext>
     </p:extLst>
   </p:cSld>
@@ -31267,6 +31331,70 @@
     <p:extLst>
       <p:ext uri="{BB962C8B-B14F-4D97-AF65-F5344CB8AC3E}">
         <p14:creationId xmlns:p14="http://schemas.microsoft.com/office/powerpoint/2010/main" val="1639799154"/>
+      </p:ext>
+    </p:extLst>
+  </p:cSld>
+  <p:clrMapOvr>
+    <a:masterClrMapping/>
+  </p:clrMapOvr>
+</p:sld>
+</file>
+
+<file path=ppt/slides/slide40.xml><?xml version="1.0" encoding="utf-8"?>
+<p:sld xmlns:a="http://schemas.openxmlformats.org/drawingml/2006/main" xmlns:r="http://schemas.openxmlformats.org/officeDocument/2006/relationships" xmlns:p="http://schemas.openxmlformats.org/presentationml/2006/main">
+  <p:cSld>
+    <p:spTree>
+      <p:nvGrpSpPr>
+        <p:cNvPr id="1" name=""/>
+        <p:cNvGrpSpPr/>
+        <p:nvPr/>
+      </p:nvGrpSpPr>
+      <p:grpSpPr>
+        <a:xfrm>
+          <a:off x="0" y="0"/>
+          <a:ext cx="0" cy="0"/>
+          <a:chOff x="0" y="0"/>
+          <a:chExt cx="0" cy="0"/>
+        </a:xfrm>
+      </p:grpSpPr>
+      <p:sp>
+        <p:nvSpPr>
+          <p:cNvPr id="2" name="Judul 1">
+            <a:extLst>
+              <a:ext uri="{FF2B5EF4-FFF2-40B4-BE49-F238E27FC236}">
+                <a16:creationId xmlns:a16="http://schemas.microsoft.com/office/drawing/2014/main" id="{69FAE308-3076-43DB-B834-DA0B0AE19AF9}"/>
+              </a:ext>
+            </a:extLst>
+          </p:cNvPr>
+          <p:cNvSpPr>
+            <a:spLocks noGrp="1"/>
+          </p:cNvSpPr>
+          <p:nvPr>
+            <p:ph type="ctrTitle"/>
+          </p:nvPr>
+        </p:nvSpPr>
+        <p:spPr>
+          <a:xfrm>
+            <a:off x="1167494" y="1122363"/>
+            <a:ext cx="6220278" cy="2387600"/>
+          </a:xfrm>
+        </p:spPr>
+        <p:txBody>
+          <a:bodyPr rtlCol="0"/>
+          <a:lstStyle/>
+          <a:p>
+            <a:pPr rtl="0"/>
+            <a:r>
+              <a:rPr lang="id-ID"/>
+              <a:t>Terima kasih</a:t>
+            </a:r>
+          </a:p>
+        </p:txBody>
+      </p:sp>
+    </p:spTree>
+    <p:extLst>
+      <p:ext uri="{BB962C8B-B14F-4D97-AF65-F5344CB8AC3E}">
+        <p14:creationId xmlns:p14="http://schemas.microsoft.com/office/powerpoint/2010/main" val="926184573"/>
       </p:ext>
     </p:extLst>
   </p:cSld>
@@ -34556,15 +34684,6 @@
 </file>
 
 <file path=customXml/item1.xml><?xml version="1.0" encoding="utf-8"?>
-<?mso-contentType ?>
-<FormTemplates xmlns="http://schemas.microsoft.com/sharepoint/v3/contenttype/forms">
-  <Display>DocumentLibraryForm</Display>
-  <Edit>DocumentLibraryForm</Edit>
-  <New>DocumentLibraryForm</New>
-</FormTemplates>
-</file>
-
-<file path=customXml/item2.xml><?xml version="1.0" encoding="utf-8"?>
 <p:properties xmlns:p="http://schemas.microsoft.com/office/2006/metadata/properties" xmlns:xsi="http://www.w3.org/2001/XMLSchema-instance" xmlns:pc="http://schemas.microsoft.com/office/infopath/2007/PartnerControls">
   <documentManagement>
     <_ip_UnifiedCompliancePolicyUIAction xmlns="http://schemas.microsoft.com/sharepoint/v3" xsi:nil="true"/>
@@ -34581,6 +34700,15 @@
     <MediaServiceKeyPoints xmlns="71af3243-3dd4-4a8d-8c0d-dd76da1f02a5" xsi:nil="true"/>
   </documentManagement>
 </p:properties>
+</file>
+
+<file path=customXml/item2.xml><?xml version="1.0" encoding="utf-8"?>
+<?mso-contentType ?>
+<FormTemplates xmlns="http://schemas.microsoft.com/sharepoint/v3/contenttype/forms">
+  <Display>DocumentLibraryForm</Display>
+  <Edit>DocumentLibraryForm</Edit>
+  <New>DocumentLibraryForm</New>
+</FormTemplates>
 </file>
 
 <file path=customXml/item3.xml><?xml version="1.0" encoding="utf-8"?>
@@ -34866,14 +34994,6 @@
 </file>
 
 <file path=customXml/itemProps1.xml><?xml version="1.0" encoding="utf-8"?>
-<ds:datastoreItem xmlns:ds="http://schemas.openxmlformats.org/officeDocument/2006/customXml" ds:itemID="{85334180-0405-413B-834A-44FA9E05ADB7}">
-  <ds:schemaRefs>
-    <ds:schemaRef ds:uri="http://schemas.microsoft.com/sharepoint/v3/contenttype/forms"/>
-  </ds:schemaRefs>
-</ds:datastoreItem>
-</file>
-
-<file path=customXml/itemProps2.xml><?xml version="1.0" encoding="utf-8"?>
 <ds:datastoreItem xmlns:ds="http://schemas.openxmlformats.org/officeDocument/2006/customXml" ds:itemID="{4D5BAB77-79E1-4739-AA51-10C9079186D6}">
   <ds:schemaRefs>
     <ds:schemaRef ds:uri="http://schemas.microsoft.com/office/2006/metadata/properties"/>
@@ -34881,6 +35001,14 @@
     <ds:schemaRef ds:uri="http://schemas.microsoft.com/sharepoint/v3"/>
     <ds:schemaRef ds:uri="71af3243-3dd4-4a8d-8c0d-dd76da1f02a5"/>
     <ds:schemaRef ds:uri="230e9df3-be65-4c73-a93b-d1236ebd677e"/>
+  </ds:schemaRefs>
+</ds:datastoreItem>
+</file>
+
+<file path=customXml/itemProps2.xml><?xml version="1.0" encoding="utf-8"?>
+<ds:datastoreItem xmlns:ds="http://schemas.openxmlformats.org/officeDocument/2006/customXml" ds:itemID="{85334180-0405-413B-834A-44FA9E05ADB7}">
+  <ds:schemaRefs>
+    <ds:schemaRef ds:uri="http://schemas.microsoft.com/sharepoint/v3/contenttype/forms"/>
   </ds:schemaRefs>
 </ds:datastoreItem>
 </file>

--- a/ppt/PPT SEMHAS.pptx
+++ b/ppt/PPT SEMHAS.pptx
@@ -5,52 +5,54 @@
     <p:sldMasterId id="2147483648" r:id="rId4"/>
   </p:sldMasterIdLst>
   <p:notesMasterIdLst>
-    <p:notesMasterId r:id="rId45"/>
+    <p:notesMasterId r:id="rId47"/>
   </p:notesMasterIdLst>
   <p:handoutMasterIdLst>
-    <p:handoutMasterId r:id="rId46"/>
+    <p:handoutMasterId r:id="rId48"/>
   </p:handoutMasterIdLst>
   <p:sldIdLst>
     <p:sldId id="256" r:id="rId5"/>
     <p:sldId id="278" r:id="rId6"/>
-    <p:sldId id="279" r:id="rId7"/>
-    <p:sldId id="258" r:id="rId8"/>
-    <p:sldId id="257" r:id="rId9"/>
-    <p:sldId id="261" r:id="rId10"/>
-    <p:sldId id="281" r:id="rId11"/>
-    <p:sldId id="265" r:id="rId12"/>
-    <p:sldId id="260" r:id="rId13"/>
-    <p:sldId id="269" r:id="rId14"/>
-    <p:sldId id="259" r:id="rId15"/>
-    <p:sldId id="271" r:id="rId16"/>
-    <p:sldId id="280" r:id="rId17"/>
-    <p:sldId id="264" r:id="rId18"/>
-    <p:sldId id="277" r:id="rId19"/>
-    <p:sldId id="266" r:id="rId20"/>
-    <p:sldId id="273" r:id="rId21"/>
-    <p:sldId id="267" r:id="rId22"/>
-    <p:sldId id="270" r:id="rId23"/>
-    <p:sldId id="276" r:id="rId24"/>
-    <p:sldId id="282" r:id="rId25"/>
-    <p:sldId id="283" r:id="rId26"/>
-    <p:sldId id="284" r:id="rId27"/>
-    <p:sldId id="285" r:id="rId28"/>
-    <p:sldId id="286" r:id="rId29"/>
-    <p:sldId id="287" r:id="rId30"/>
-    <p:sldId id="300" r:id="rId31"/>
-    <p:sldId id="288" r:id="rId32"/>
-    <p:sldId id="289" r:id="rId33"/>
-    <p:sldId id="291" r:id="rId34"/>
-    <p:sldId id="290" r:id="rId35"/>
-    <p:sldId id="292" r:id="rId36"/>
-    <p:sldId id="293" r:id="rId37"/>
-    <p:sldId id="294" r:id="rId38"/>
-    <p:sldId id="298" r:id="rId39"/>
-    <p:sldId id="296" r:id="rId40"/>
-    <p:sldId id="299" r:id="rId41"/>
-    <p:sldId id="295" r:id="rId42"/>
-    <p:sldId id="297" r:id="rId43"/>
-    <p:sldId id="275" r:id="rId44"/>
+    <p:sldId id="258" r:id="rId7"/>
+    <p:sldId id="273" r:id="rId8"/>
+    <p:sldId id="302" r:id="rId9"/>
+    <p:sldId id="257" r:id="rId10"/>
+    <p:sldId id="301" r:id="rId11"/>
+    <p:sldId id="261" r:id="rId12"/>
+    <p:sldId id="281" r:id="rId13"/>
+    <p:sldId id="265" r:id="rId14"/>
+    <p:sldId id="260" r:id="rId15"/>
+    <p:sldId id="269" r:id="rId16"/>
+    <p:sldId id="259" r:id="rId17"/>
+    <p:sldId id="271" r:id="rId18"/>
+    <p:sldId id="280" r:id="rId19"/>
+    <p:sldId id="264" r:id="rId20"/>
+    <p:sldId id="277" r:id="rId21"/>
+    <p:sldId id="266" r:id="rId22"/>
+    <p:sldId id="303" r:id="rId23"/>
+    <p:sldId id="267" r:id="rId24"/>
+    <p:sldId id="270" r:id="rId25"/>
+    <p:sldId id="276" r:id="rId26"/>
+    <p:sldId id="282" r:id="rId27"/>
+    <p:sldId id="283" r:id="rId28"/>
+    <p:sldId id="284" r:id="rId29"/>
+    <p:sldId id="285" r:id="rId30"/>
+    <p:sldId id="286" r:id="rId31"/>
+    <p:sldId id="287" r:id="rId32"/>
+    <p:sldId id="300" r:id="rId33"/>
+    <p:sldId id="288" r:id="rId34"/>
+    <p:sldId id="289" r:id="rId35"/>
+    <p:sldId id="291" r:id="rId36"/>
+    <p:sldId id="290" r:id="rId37"/>
+    <p:sldId id="292" r:id="rId38"/>
+    <p:sldId id="293" r:id="rId39"/>
+    <p:sldId id="294" r:id="rId40"/>
+    <p:sldId id="298" r:id="rId41"/>
+    <p:sldId id="296" r:id="rId42"/>
+    <p:sldId id="299" r:id="rId43"/>
+    <p:sldId id="295" r:id="rId44"/>
+    <p:sldId id="297" r:id="rId45"/>
+    <p:sldId id="275" r:id="rId46"/>
   </p:sldIdLst>
   <p:sldSz cx="12192000" cy="6858000"/>
   <p:notesSz cx="6858000" cy="9144000"/>
@@ -268,7 +270,7 @@
             <a:pPr rtl="0"/>
             <a:fld id="{AB1BF87F-531B-4BDC-A663-C6A67C7BEC47}" type="datetime1">
               <a:rPr lang="id-ID" smtClean="0"/>
-              <a:t>11/09/2025</a:t>
+              <a:t>14/10/2025</a:t>
             </a:fld>
             <a:endParaRPr lang="id-ID" dirty="0"/>
           </a:p>
@@ -449,7 +451,7 @@
             <a:fld id="{7B08E6FE-7462-41B9-93AA-C863C0ADF1B6}" type="datetime1">
               <a:rPr lang="id-ID" smtClean="0"/>
               <a:pPr/>
-              <a:t>11/09/2025</a:t>
+              <a:t>14/10/2025</a:t>
             </a:fld>
             <a:endParaRPr lang="id-ID" dirty="0"/>
           </a:p>
@@ -880,7 +882,7 @@
     </p:spTree>
     <p:extLst>
       <p:ext uri="{BB962C8B-B14F-4D97-AF65-F5344CB8AC3E}">
-        <p14:creationId xmlns:p14="http://schemas.microsoft.com/office/powerpoint/2010/main" val="795855725"/>
+        <p14:creationId xmlns:p14="http://schemas.microsoft.com/office/powerpoint/2010/main" val="1032157980"/>
       </p:ext>
     </p:extLst>
   </p:cSld>
@@ -965,7 +967,7 @@
     </p:spTree>
     <p:extLst>
       <p:ext uri="{BB962C8B-B14F-4D97-AF65-F5344CB8AC3E}">
-        <p14:creationId xmlns:p14="http://schemas.microsoft.com/office/powerpoint/2010/main" val="1503017092"/>
+        <p14:creationId xmlns:p14="http://schemas.microsoft.com/office/powerpoint/2010/main" val="4266338347"/>
       </p:ext>
     </p:extLst>
   </p:cSld>
@@ -1050,7 +1052,7 @@
     </p:spTree>
     <p:extLst>
       <p:ext uri="{BB962C8B-B14F-4D97-AF65-F5344CB8AC3E}">
-        <p14:creationId xmlns:p14="http://schemas.microsoft.com/office/powerpoint/2010/main" val="637688276"/>
+        <p14:creationId xmlns:p14="http://schemas.microsoft.com/office/powerpoint/2010/main" val="795855725"/>
       </p:ext>
     </p:extLst>
   </p:cSld>
@@ -1065,13 +1067,7 @@
   <p:cSld>
     <p:spTree>
       <p:nvGrpSpPr>
-        <p:cNvPr id="1" name="">
-          <a:extLst>
-            <a:ext uri="{FF2B5EF4-FFF2-40B4-BE49-F238E27FC236}">
-              <a16:creationId xmlns:a16="http://schemas.microsoft.com/office/drawing/2014/main" id="{C5B5B642-E96E-F3AC-CE7C-2EC3AD50A8A9}"/>
-            </a:ext>
-          </a:extLst>
-        </p:cNvPr>
+        <p:cNvPr id="1" name=""/>
         <p:cNvGrpSpPr/>
         <p:nvPr/>
       </p:nvGrpSpPr>
@@ -1085,13 +1081,7 @@
       </p:grpSpPr>
       <p:sp>
         <p:nvSpPr>
-          <p:cNvPr id="2" name="Tampungan Gambar Slide 1">
-            <a:extLst>
-              <a:ext uri="{FF2B5EF4-FFF2-40B4-BE49-F238E27FC236}">
-                <a16:creationId xmlns:a16="http://schemas.microsoft.com/office/drawing/2014/main" id="{CE6463BE-1CE6-F75F-2C5B-80BF03B9ECD6}"/>
-              </a:ext>
-            </a:extLst>
-          </p:cNvPr>
+          <p:cNvPr id="2" name="Tampungan Gambar Slide 1"/>
           <p:cNvSpPr>
             <a:spLocks noGrp="1" noRot="1" noChangeAspect="1"/>
           </p:cNvSpPr>
@@ -1103,13 +1093,7 @@
       </p:sp>
       <p:sp>
         <p:nvSpPr>
-          <p:cNvPr id="3" name="Tampungan Catatan 2">
-            <a:extLst>
-              <a:ext uri="{FF2B5EF4-FFF2-40B4-BE49-F238E27FC236}">
-                <a16:creationId xmlns:a16="http://schemas.microsoft.com/office/drawing/2014/main" id="{57C810DF-4682-6C66-B78F-B74B62A7DDAE}"/>
-              </a:ext>
-            </a:extLst>
-          </p:cNvPr>
+          <p:cNvPr id="3" name="Tampungan Catatan 2"/>
           <p:cNvSpPr>
             <a:spLocks noGrp="1"/>
           </p:cNvSpPr>
@@ -1128,13 +1112,7 @@
       </p:sp>
       <p:sp>
         <p:nvSpPr>
-          <p:cNvPr id="4" name="Tampungan Nomor Slide 3">
-            <a:extLst>
-              <a:ext uri="{FF2B5EF4-FFF2-40B4-BE49-F238E27FC236}">
-                <a16:creationId xmlns:a16="http://schemas.microsoft.com/office/drawing/2014/main" id="{D56A2654-792D-196C-61C7-16D5960B8092}"/>
-              </a:ext>
-            </a:extLst>
-          </p:cNvPr>
+          <p:cNvPr id="4" name="Tampungan Nomor Slide 3"/>
           <p:cNvSpPr>
             <a:spLocks noGrp="1"/>
           </p:cNvSpPr>
@@ -1159,7 +1137,7 @@
     </p:spTree>
     <p:extLst>
       <p:ext uri="{BB962C8B-B14F-4D97-AF65-F5344CB8AC3E}">
-        <p14:creationId xmlns:p14="http://schemas.microsoft.com/office/powerpoint/2010/main" val="2241906981"/>
+        <p14:creationId xmlns:p14="http://schemas.microsoft.com/office/powerpoint/2010/main" val="1503017092"/>
       </p:ext>
     </p:extLst>
   </p:cSld>
@@ -1213,101 +1191,6 @@
           <a:bodyPr/>
           <a:lstStyle/>
           <a:p>
-            <a:r>
-              <a:rPr lang="id-ID" dirty="0"/>
-              <a:t>Artinya, ia secara cerdas hanya fokus mengembangkan bagian dari pohon keputusan yang paling menjanjikan untuk meningkatkan akurasi, sehingga proses pelatihan menjadi jauh lebih cepat. </a:t>
-            </a:r>
-            <a:endParaRPr lang="en-GB" dirty="0"/>
-          </a:p>
-          <a:p>
-            <a:endParaRPr lang="en-GB" noProof="0" dirty="0"/>
-          </a:p>
-          <a:p>
-            <a:pPr marL="0" lvl="0" indent="0">
-              <a:buFont typeface="Arial" panose="020B0604020202020204" pitchFamily="34" charset="0"/>
-              <a:buNone/>
-            </a:pPr>
-            <a:r>
-              <a:rPr lang="id-ID" sz="2400" b="1" dirty="0"/>
-              <a:t>GOSS (</a:t>
-            </a:r>
-            <a:r>
-              <a:rPr lang="id-ID" sz="2400" b="1" dirty="0" err="1"/>
-              <a:t>Gradient-based</a:t>
-            </a:r>
-            <a:r>
-              <a:rPr lang="id-ID" sz="2400" b="1" dirty="0"/>
-              <a:t> One-</a:t>
-            </a:r>
-            <a:r>
-              <a:rPr lang="id-ID" sz="2400" b="1" dirty="0" err="1"/>
-              <a:t>Side</a:t>
-            </a:r>
-            <a:r>
-              <a:rPr lang="id-ID" sz="2400" b="1" dirty="0"/>
-              <a:t> Sampling):</a:t>
-            </a:r>
-            <a:r>
-              <a:rPr lang="id-ID" sz="2400" dirty="0"/>
-              <a:t> Memprioritaskan data yang "sulit" diprediksi, sehingga proses belajar lebih efisien.</a:t>
-            </a:r>
-            <a:endParaRPr lang="en-GB" sz="2400" dirty="0"/>
-          </a:p>
-          <a:p>
-            <a:pPr marL="0" lvl="0" indent="0">
-              <a:buFont typeface="Arial" panose="020B0604020202020204" pitchFamily="34" charset="0"/>
-              <a:buNone/>
-            </a:pPr>
-            <a:r>
-              <a:rPr lang="id-ID" sz="2400" b="1" dirty="0"/>
-              <a:t>EFB (</a:t>
-            </a:r>
-            <a:r>
-              <a:rPr lang="id-ID" sz="2400" b="1" dirty="0" err="1"/>
-              <a:t>Exclusive</a:t>
-            </a:r>
-            <a:r>
-              <a:rPr lang="id-ID" sz="2400" b="1" dirty="0"/>
-              <a:t> </a:t>
-            </a:r>
-            <a:r>
-              <a:rPr lang="id-ID" sz="2400" b="1" dirty="0" err="1"/>
-              <a:t>Feature</a:t>
-            </a:r>
-            <a:r>
-              <a:rPr lang="id-ID" sz="2400" b="1" dirty="0"/>
-              <a:t> </a:t>
-            </a:r>
-            <a:r>
-              <a:rPr lang="id-ID" sz="2400" b="1" dirty="0" err="1"/>
-              <a:t>Bundling</a:t>
-            </a:r>
-            <a:r>
-              <a:rPr lang="id-ID" sz="2400" b="1" dirty="0"/>
-              <a:t>):</a:t>
-            </a:r>
-            <a:r>
-              <a:rPr lang="id-ID" sz="2400" dirty="0"/>
-              <a:t> Menggabungkan banyak fitur menjadi satu untuk menyederhanakan data tanpa kehilangan informasi penting. (Ke </a:t>
-            </a:r>
-            <a:r>
-              <a:rPr lang="id-ID" sz="2400" dirty="0" err="1"/>
-              <a:t>et</a:t>
-            </a:r>
-            <a:r>
-              <a:rPr lang="id-ID" sz="2400" dirty="0"/>
-              <a:t> </a:t>
-            </a:r>
-            <a:r>
-              <a:rPr lang="id-ID" sz="2400" dirty="0" err="1"/>
-              <a:t>al.</a:t>
-            </a:r>
-            <a:r>
-              <a:rPr lang="id-ID" sz="2400" dirty="0"/>
-              <a:t>, 2017).</a:t>
-            </a:r>
-          </a:p>
-          <a:p>
             <a:endParaRPr lang="id-ID" noProof="0" dirty="0"/>
           </a:p>
         </p:txBody>
@@ -1339,7 +1222,7 @@
     </p:spTree>
     <p:extLst>
       <p:ext uri="{BB962C8B-B14F-4D97-AF65-F5344CB8AC3E}">
-        <p14:creationId xmlns:p14="http://schemas.microsoft.com/office/powerpoint/2010/main" val="3477681250"/>
+        <p14:creationId xmlns:p14="http://schemas.microsoft.com/office/powerpoint/2010/main" val="637688276"/>
       </p:ext>
     </p:extLst>
   </p:cSld>
@@ -1357,7 +1240,7 @@
         <p:cNvPr id="1" name="">
           <a:extLst>
             <a:ext uri="{FF2B5EF4-FFF2-40B4-BE49-F238E27FC236}">
-              <a16:creationId xmlns:a16="http://schemas.microsoft.com/office/drawing/2014/main" id="{750CE7C0-8485-8FB6-E5B2-19CC6B45686B}"/>
+              <a16:creationId xmlns:a16="http://schemas.microsoft.com/office/drawing/2014/main" id="{C5B5B642-E96E-F3AC-CE7C-2EC3AD50A8A9}"/>
             </a:ext>
           </a:extLst>
         </p:cNvPr>
@@ -1377,7 +1260,7 @@
           <p:cNvPr id="2" name="Tampungan Gambar Slide 1">
             <a:extLst>
               <a:ext uri="{FF2B5EF4-FFF2-40B4-BE49-F238E27FC236}">
-                <a16:creationId xmlns:a16="http://schemas.microsoft.com/office/drawing/2014/main" id="{E19CFBF1-15A7-5650-F008-D8C9767CB23A}"/>
+                <a16:creationId xmlns:a16="http://schemas.microsoft.com/office/drawing/2014/main" id="{CE6463BE-1CE6-F75F-2C5B-80BF03B9ECD6}"/>
               </a:ext>
             </a:extLst>
           </p:cNvPr>
@@ -1395,7 +1278,7 @@
           <p:cNvPr id="3" name="Tampungan Catatan 2">
             <a:extLst>
               <a:ext uri="{FF2B5EF4-FFF2-40B4-BE49-F238E27FC236}">
-                <a16:creationId xmlns:a16="http://schemas.microsoft.com/office/drawing/2014/main" id="{31A8D515-7FEB-4CB3-92A8-ABE517A49D2E}"/>
+                <a16:creationId xmlns:a16="http://schemas.microsoft.com/office/drawing/2014/main" id="{57C810DF-4682-6C66-B78F-B74B62A7DDAE}"/>
               </a:ext>
             </a:extLst>
           </p:cNvPr>
@@ -1420,7 +1303,7 @@
           <p:cNvPr id="4" name="Tampungan Nomor Slide 3">
             <a:extLst>
               <a:ext uri="{FF2B5EF4-FFF2-40B4-BE49-F238E27FC236}">
-                <a16:creationId xmlns:a16="http://schemas.microsoft.com/office/drawing/2014/main" id="{42551A57-F930-238C-7531-04329F3790D1}"/>
+                <a16:creationId xmlns:a16="http://schemas.microsoft.com/office/drawing/2014/main" id="{D56A2654-792D-196C-61C7-16D5960B8092}"/>
               </a:ext>
             </a:extLst>
           </p:cNvPr>
@@ -1448,7 +1331,7 @@
     </p:spTree>
     <p:extLst>
       <p:ext uri="{BB962C8B-B14F-4D97-AF65-F5344CB8AC3E}">
-        <p14:creationId xmlns:p14="http://schemas.microsoft.com/office/powerpoint/2010/main" val="3192030204"/>
+        <p14:creationId xmlns:p14="http://schemas.microsoft.com/office/powerpoint/2010/main" val="2241906981"/>
       </p:ext>
     </p:extLst>
   </p:cSld>
@@ -1502,6 +1385,101 @@
           <a:bodyPr/>
           <a:lstStyle/>
           <a:p>
+            <a:r>
+              <a:rPr lang="id-ID" dirty="0"/>
+              <a:t>Artinya, ia secara cerdas hanya fokus mengembangkan bagian dari pohon keputusan yang paling menjanjikan untuk meningkatkan akurasi, sehingga proses pelatihan menjadi jauh lebih cepat. </a:t>
+            </a:r>
+            <a:endParaRPr lang="en-GB" dirty="0"/>
+          </a:p>
+          <a:p>
+            <a:endParaRPr lang="en-GB" noProof="0" dirty="0"/>
+          </a:p>
+          <a:p>
+            <a:pPr marL="0" lvl="0" indent="0">
+              <a:buFont typeface="Arial" panose="020B0604020202020204" pitchFamily="34" charset="0"/>
+              <a:buNone/>
+            </a:pPr>
+            <a:r>
+              <a:rPr lang="id-ID" sz="2400" b="1" dirty="0"/>
+              <a:t>GOSS (</a:t>
+            </a:r>
+            <a:r>
+              <a:rPr lang="id-ID" sz="2400" b="1" dirty="0" err="1"/>
+              <a:t>Gradient-based</a:t>
+            </a:r>
+            <a:r>
+              <a:rPr lang="id-ID" sz="2400" b="1" dirty="0"/>
+              <a:t> One-</a:t>
+            </a:r>
+            <a:r>
+              <a:rPr lang="id-ID" sz="2400" b="1" dirty="0" err="1"/>
+              <a:t>Side</a:t>
+            </a:r>
+            <a:r>
+              <a:rPr lang="id-ID" sz="2400" b="1" dirty="0"/>
+              <a:t> Sampling):</a:t>
+            </a:r>
+            <a:r>
+              <a:rPr lang="id-ID" sz="2400" dirty="0"/>
+              <a:t> Memprioritaskan data yang "sulit" diprediksi, sehingga proses belajar lebih efisien.</a:t>
+            </a:r>
+            <a:endParaRPr lang="en-GB" sz="2400" dirty="0"/>
+          </a:p>
+          <a:p>
+            <a:pPr marL="0" lvl="0" indent="0">
+              <a:buFont typeface="Arial" panose="020B0604020202020204" pitchFamily="34" charset="0"/>
+              <a:buNone/>
+            </a:pPr>
+            <a:r>
+              <a:rPr lang="id-ID" sz="2400" b="1" dirty="0"/>
+              <a:t>EFB (</a:t>
+            </a:r>
+            <a:r>
+              <a:rPr lang="id-ID" sz="2400" b="1" dirty="0" err="1"/>
+              <a:t>Exclusive</a:t>
+            </a:r>
+            <a:r>
+              <a:rPr lang="id-ID" sz="2400" b="1" dirty="0"/>
+              <a:t> </a:t>
+            </a:r>
+            <a:r>
+              <a:rPr lang="id-ID" sz="2400" b="1" dirty="0" err="1"/>
+              <a:t>Feature</a:t>
+            </a:r>
+            <a:r>
+              <a:rPr lang="id-ID" sz="2400" b="1" dirty="0"/>
+              <a:t> </a:t>
+            </a:r>
+            <a:r>
+              <a:rPr lang="id-ID" sz="2400" b="1" dirty="0" err="1"/>
+              <a:t>Bundling</a:t>
+            </a:r>
+            <a:r>
+              <a:rPr lang="id-ID" sz="2400" b="1" dirty="0"/>
+              <a:t>):</a:t>
+            </a:r>
+            <a:r>
+              <a:rPr lang="id-ID" sz="2400" dirty="0"/>
+              <a:t> Menggabungkan banyak fitur menjadi satu untuk menyederhanakan data tanpa kehilangan informasi penting. (Ke </a:t>
+            </a:r>
+            <a:r>
+              <a:rPr lang="id-ID" sz="2400" dirty="0" err="1"/>
+              <a:t>et</a:t>
+            </a:r>
+            <a:r>
+              <a:rPr lang="id-ID" sz="2400" dirty="0"/>
+              <a:t> </a:t>
+            </a:r>
+            <a:r>
+              <a:rPr lang="id-ID" sz="2400" dirty="0" err="1"/>
+              <a:t>al.</a:t>
+            </a:r>
+            <a:r>
+              <a:rPr lang="id-ID" sz="2400" dirty="0"/>
+              <a:t>, 2017).</a:t>
+            </a:r>
+          </a:p>
+          <a:p>
             <a:endParaRPr lang="id-ID" noProof="0" dirty="0"/>
           </a:p>
         </p:txBody>
@@ -1533,7 +1511,7 @@
     </p:spTree>
     <p:extLst>
       <p:ext uri="{BB962C8B-B14F-4D97-AF65-F5344CB8AC3E}">
-        <p14:creationId xmlns:p14="http://schemas.microsoft.com/office/powerpoint/2010/main" val="1470767662"/>
+        <p14:creationId xmlns:p14="http://schemas.microsoft.com/office/powerpoint/2010/main" val="3477681250"/>
       </p:ext>
     </p:extLst>
   </p:cSld>
@@ -1548,7 +1526,13 @@
   <p:cSld>
     <p:spTree>
       <p:nvGrpSpPr>
-        <p:cNvPr id="1" name=""/>
+        <p:cNvPr id="1" name="">
+          <a:extLst>
+            <a:ext uri="{FF2B5EF4-FFF2-40B4-BE49-F238E27FC236}">
+              <a16:creationId xmlns:a16="http://schemas.microsoft.com/office/drawing/2014/main" id="{750CE7C0-8485-8FB6-E5B2-19CC6B45686B}"/>
+            </a:ext>
+          </a:extLst>
+        </p:cNvPr>
         <p:cNvGrpSpPr/>
         <p:nvPr/>
       </p:nvGrpSpPr>
@@ -1562,7 +1546,13 @@
       </p:grpSpPr>
       <p:sp>
         <p:nvSpPr>
-          <p:cNvPr id="2" name="Tampungan Gambar Slide 1"/>
+          <p:cNvPr id="2" name="Tampungan Gambar Slide 1">
+            <a:extLst>
+              <a:ext uri="{FF2B5EF4-FFF2-40B4-BE49-F238E27FC236}">
+                <a16:creationId xmlns:a16="http://schemas.microsoft.com/office/drawing/2014/main" id="{E19CFBF1-15A7-5650-F008-D8C9767CB23A}"/>
+              </a:ext>
+            </a:extLst>
+          </p:cNvPr>
           <p:cNvSpPr>
             <a:spLocks noGrp="1" noRot="1" noChangeAspect="1"/>
           </p:cNvSpPr>
@@ -1574,7 +1564,13 @@
       </p:sp>
       <p:sp>
         <p:nvSpPr>
-          <p:cNvPr id="3" name="Tampungan Catatan 2"/>
+          <p:cNvPr id="3" name="Tampungan Catatan 2">
+            <a:extLst>
+              <a:ext uri="{FF2B5EF4-FFF2-40B4-BE49-F238E27FC236}">
+                <a16:creationId xmlns:a16="http://schemas.microsoft.com/office/drawing/2014/main" id="{31A8D515-7FEB-4CB3-92A8-ABE517A49D2E}"/>
+              </a:ext>
+            </a:extLst>
+          </p:cNvPr>
           <p:cNvSpPr>
             <a:spLocks noGrp="1"/>
           </p:cNvSpPr>
@@ -1593,7 +1589,13 @@
       </p:sp>
       <p:sp>
         <p:nvSpPr>
-          <p:cNvPr id="4" name="Tampungan Nomor Slide 3"/>
+          <p:cNvPr id="4" name="Tampungan Nomor Slide 3">
+            <a:extLst>
+              <a:ext uri="{FF2B5EF4-FFF2-40B4-BE49-F238E27FC236}">
+                <a16:creationId xmlns:a16="http://schemas.microsoft.com/office/drawing/2014/main" id="{42551A57-F930-238C-7531-04329F3790D1}"/>
+              </a:ext>
+            </a:extLst>
+          </p:cNvPr>
           <p:cNvSpPr>
             <a:spLocks noGrp="1"/>
           </p:cNvSpPr>
@@ -1618,7 +1620,7 @@
     </p:spTree>
     <p:extLst>
       <p:ext uri="{BB962C8B-B14F-4D97-AF65-F5344CB8AC3E}">
-        <p14:creationId xmlns:p14="http://schemas.microsoft.com/office/powerpoint/2010/main" val="3293267610"/>
+        <p14:creationId xmlns:p14="http://schemas.microsoft.com/office/powerpoint/2010/main" val="3192030204"/>
       </p:ext>
     </p:extLst>
   </p:cSld>
@@ -1703,7 +1705,7 @@
     </p:spTree>
     <p:extLst>
       <p:ext uri="{BB962C8B-B14F-4D97-AF65-F5344CB8AC3E}">
-        <p14:creationId xmlns:p14="http://schemas.microsoft.com/office/powerpoint/2010/main" val="703596108"/>
+        <p14:creationId xmlns:p14="http://schemas.microsoft.com/office/powerpoint/2010/main" val="1470767662"/>
       </p:ext>
     </p:extLst>
   </p:cSld>
@@ -1718,7 +1720,13 @@
   <p:cSld>
     <p:spTree>
       <p:nvGrpSpPr>
-        <p:cNvPr id="1" name=""/>
+        <p:cNvPr id="1" name="">
+          <a:extLst>
+            <a:ext uri="{FF2B5EF4-FFF2-40B4-BE49-F238E27FC236}">
+              <a16:creationId xmlns:a16="http://schemas.microsoft.com/office/drawing/2014/main" id="{F84D1D70-0EE9-9C20-B06A-E91ABA709CA2}"/>
+            </a:ext>
+          </a:extLst>
+        </p:cNvPr>
         <p:cNvGrpSpPr/>
         <p:nvPr/>
       </p:nvGrpSpPr>
@@ -1732,7 +1740,13 @@
       </p:grpSpPr>
       <p:sp>
         <p:nvSpPr>
-          <p:cNvPr id="2" name="Tampungan Gambar Slide 1"/>
+          <p:cNvPr id="2" name="Tampungan Gambar Slide 1">
+            <a:extLst>
+              <a:ext uri="{FF2B5EF4-FFF2-40B4-BE49-F238E27FC236}">
+                <a16:creationId xmlns:a16="http://schemas.microsoft.com/office/drawing/2014/main" id="{808DCA60-BA37-5704-C129-92DE099A28CC}"/>
+              </a:ext>
+            </a:extLst>
+          </p:cNvPr>
           <p:cNvSpPr>
             <a:spLocks noGrp="1" noRot="1" noChangeAspect="1"/>
           </p:cNvSpPr>
@@ -1744,7 +1758,13 @@
       </p:sp>
       <p:sp>
         <p:nvSpPr>
-          <p:cNvPr id="3" name="Tampungan Catatan 2"/>
+          <p:cNvPr id="3" name="Tampungan Catatan 2">
+            <a:extLst>
+              <a:ext uri="{FF2B5EF4-FFF2-40B4-BE49-F238E27FC236}">
+                <a16:creationId xmlns:a16="http://schemas.microsoft.com/office/drawing/2014/main" id="{A219A069-7CD1-AAA2-17D9-25CDF032D637}"/>
+              </a:ext>
+            </a:extLst>
+          </p:cNvPr>
           <p:cNvSpPr>
             <a:spLocks noGrp="1"/>
           </p:cNvSpPr>
@@ -1763,7 +1783,13 @@
       </p:sp>
       <p:sp>
         <p:nvSpPr>
-          <p:cNvPr id="4" name="Tampungan Nomor Slide 3"/>
+          <p:cNvPr id="4" name="Tampungan Nomor Slide 3">
+            <a:extLst>
+              <a:ext uri="{FF2B5EF4-FFF2-40B4-BE49-F238E27FC236}">
+                <a16:creationId xmlns:a16="http://schemas.microsoft.com/office/drawing/2014/main" id="{326697DF-CCC5-BF8A-43FC-7446083B5373}"/>
+              </a:ext>
+            </a:extLst>
+          </p:cNvPr>
           <p:cNvSpPr>
             <a:spLocks noGrp="1"/>
           </p:cNvSpPr>
@@ -1788,7 +1814,7 @@
     </p:spTree>
     <p:extLst>
       <p:ext uri="{BB962C8B-B14F-4D97-AF65-F5344CB8AC3E}">
-        <p14:creationId xmlns:p14="http://schemas.microsoft.com/office/powerpoint/2010/main" val="489342786"/>
+        <p14:creationId xmlns:p14="http://schemas.microsoft.com/office/powerpoint/2010/main" val="2164924479"/>
       </p:ext>
     </p:extLst>
   </p:cSld>
@@ -1912,6 +1938,176 @@
   <p:cSld>
     <p:spTree>
       <p:nvGrpSpPr>
+        <p:cNvPr id="1" name=""/>
+        <p:cNvGrpSpPr/>
+        <p:nvPr/>
+      </p:nvGrpSpPr>
+      <p:grpSpPr>
+        <a:xfrm>
+          <a:off x="0" y="0"/>
+          <a:ext cx="0" cy="0"/>
+          <a:chOff x="0" y="0"/>
+          <a:chExt cx="0" cy="0"/>
+        </a:xfrm>
+      </p:grpSpPr>
+      <p:sp>
+        <p:nvSpPr>
+          <p:cNvPr id="2" name="Tampungan Gambar Slide 1"/>
+          <p:cNvSpPr>
+            <a:spLocks noGrp="1" noRot="1" noChangeAspect="1"/>
+          </p:cNvSpPr>
+          <p:nvPr>
+            <p:ph type="sldImg"/>
+          </p:nvPr>
+        </p:nvSpPr>
+        <p:spPr/>
+      </p:sp>
+      <p:sp>
+        <p:nvSpPr>
+          <p:cNvPr id="3" name="Tampungan Catatan 2"/>
+          <p:cNvSpPr>
+            <a:spLocks noGrp="1"/>
+          </p:cNvSpPr>
+          <p:nvPr>
+            <p:ph type="body" idx="1"/>
+          </p:nvPr>
+        </p:nvSpPr>
+        <p:spPr/>
+        <p:txBody>
+          <a:bodyPr/>
+          <a:lstStyle/>
+          <a:p>
+            <a:endParaRPr lang="id-ID" noProof="0" dirty="0"/>
+          </a:p>
+        </p:txBody>
+      </p:sp>
+      <p:sp>
+        <p:nvSpPr>
+          <p:cNvPr id="4" name="Tampungan Nomor Slide 3"/>
+          <p:cNvSpPr>
+            <a:spLocks noGrp="1"/>
+          </p:cNvSpPr>
+          <p:nvPr>
+            <p:ph type="sldNum" sz="quarter" idx="5"/>
+          </p:nvPr>
+        </p:nvSpPr>
+        <p:spPr/>
+        <p:txBody>
+          <a:bodyPr/>
+          <a:lstStyle/>
+          <a:p>
+            <a:pPr rtl="0"/>
+            <a:fld id="{F97DC217-DF71-1A49-B3EA-559F1F43B0FF}" type="slidenum">
+              <a:rPr lang="id-ID" smtClean="0"/>
+              <a:t>20</a:t>
+            </a:fld>
+            <a:endParaRPr lang="id-ID"/>
+          </a:p>
+        </p:txBody>
+      </p:sp>
+    </p:spTree>
+    <p:extLst>
+      <p:ext uri="{BB962C8B-B14F-4D97-AF65-F5344CB8AC3E}">
+        <p14:creationId xmlns:p14="http://schemas.microsoft.com/office/powerpoint/2010/main" val="703596108"/>
+      </p:ext>
+    </p:extLst>
+  </p:cSld>
+  <p:clrMapOvr>
+    <a:masterClrMapping/>
+  </p:clrMapOvr>
+</p:notes>
+</file>
+
+<file path=ppt/notesSlides/notesSlide21.xml><?xml version="1.0" encoding="utf-8"?>
+<p:notes xmlns:a="http://schemas.openxmlformats.org/drawingml/2006/main" xmlns:r="http://schemas.openxmlformats.org/officeDocument/2006/relationships" xmlns:p="http://schemas.openxmlformats.org/presentationml/2006/main">
+  <p:cSld>
+    <p:spTree>
+      <p:nvGrpSpPr>
+        <p:cNvPr id="1" name=""/>
+        <p:cNvGrpSpPr/>
+        <p:nvPr/>
+      </p:nvGrpSpPr>
+      <p:grpSpPr>
+        <a:xfrm>
+          <a:off x="0" y="0"/>
+          <a:ext cx="0" cy="0"/>
+          <a:chOff x="0" y="0"/>
+          <a:chExt cx="0" cy="0"/>
+        </a:xfrm>
+      </p:grpSpPr>
+      <p:sp>
+        <p:nvSpPr>
+          <p:cNvPr id="2" name="Tampungan Gambar Slide 1"/>
+          <p:cNvSpPr>
+            <a:spLocks noGrp="1" noRot="1" noChangeAspect="1"/>
+          </p:cNvSpPr>
+          <p:nvPr>
+            <p:ph type="sldImg"/>
+          </p:nvPr>
+        </p:nvSpPr>
+        <p:spPr/>
+      </p:sp>
+      <p:sp>
+        <p:nvSpPr>
+          <p:cNvPr id="3" name="Tampungan Catatan 2"/>
+          <p:cNvSpPr>
+            <a:spLocks noGrp="1"/>
+          </p:cNvSpPr>
+          <p:nvPr>
+            <p:ph type="body" idx="1"/>
+          </p:nvPr>
+        </p:nvSpPr>
+        <p:spPr/>
+        <p:txBody>
+          <a:bodyPr/>
+          <a:lstStyle/>
+          <a:p>
+            <a:endParaRPr lang="id-ID" noProof="0" dirty="0"/>
+          </a:p>
+        </p:txBody>
+      </p:sp>
+      <p:sp>
+        <p:nvSpPr>
+          <p:cNvPr id="4" name="Tampungan Nomor Slide 3"/>
+          <p:cNvSpPr>
+            <a:spLocks noGrp="1"/>
+          </p:cNvSpPr>
+          <p:nvPr>
+            <p:ph type="sldNum" sz="quarter" idx="5"/>
+          </p:nvPr>
+        </p:nvSpPr>
+        <p:spPr/>
+        <p:txBody>
+          <a:bodyPr/>
+          <a:lstStyle/>
+          <a:p>
+            <a:pPr rtl="0"/>
+            <a:fld id="{F97DC217-DF71-1A49-B3EA-559F1F43B0FF}" type="slidenum">
+              <a:rPr lang="id-ID" smtClean="0"/>
+              <a:t>21</a:t>
+            </a:fld>
+            <a:endParaRPr lang="id-ID"/>
+          </a:p>
+        </p:txBody>
+      </p:sp>
+    </p:spTree>
+    <p:extLst>
+      <p:ext uri="{BB962C8B-B14F-4D97-AF65-F5344CB8AC3E}">
+        <p14:creationId xmlns:p14="http://schemas.microsoft.com/office/powerpoint/2010/main" val="489342786"/>
+      </p:ext>
+    </p:extLst>
+  </p:cSld>
+  <p:clrMapOvr>
+    <a:masterClrMapping/>
+  </p:clrMapOvr>
+</p:notes>
+</file>
+
+<file path=ppt/notesSlides/notesSlide22.xml><?xml version="1.0" encoding="utf-8"?>
+<p:notes xmlns:a="http://schemas.openxmlformats.org/drawingml/2006/main" xmlns:r="http://schemas.openxmlformats.org/officeDocument/2006/relationships" xmlns:p="http://schemas.openxmlformats.org/presentationml/2006/main">
+  <p:cSld>
+    <p:spTree>
+      <p:nvGrpSpPr>
         <p:cNvPr id="1" name="">
           <a:extLst>
             <a:ext uri="{FF2B5EF4-FFF2-40B4-BE49-F238E27FC236}">
@@ -1997,7 +2193,7 @@
             <a:pPr rtl="0"/>
             <a:fld id="{F97DC217-DF71-1A49-B3EA-559F1F43B0FF}" type="slidenum">
               <a:rPr lang="id-ID" smtClean="0"/>
-              <a:t>20</a:t>
+              <a:t>22</a:t>
             </a:fld>
             <a:endParaRPr lang="id-ID"/>
           </a:p>
@@ -2016,7 +2212,7 @@
 </p:notes>
 </file>
 
-<file path=ppt/notesSlides/notesSlide21.xml><?xml version="1.0" encoding="utf-8"?>
+<file path=ppt/notesSlides/notesSlide23.xml><?xml version="1.0" encoding="utf-8"?>
 <p:notes xmlns:a="http://schemas.openxmlformats.org/drawingml/2006/main" xmlns:r="http://schemas.openxmlformats.org/officeDocument/2006/relationships" xmlns:p="http://schemas.openxmlformats.org/presentationml/2006/main">
   <p:cSld>
     <p:spTree>
@@ -2106,7 +2302,7 @@
             <a:pPr rtl="0"/>
             <a:fld id="{F97DC217-DF71-1A49-B3EA-559F1F43B0FF}" type="slidenum">
               <a:rPr lang="id-ID" smtClean="0"/>
-              <a:t>21</a:t>
+              <a:t>23</a:t>
             </a:fld>
             <a:endParaRPr lang="id-ID"/>
           </a:p>
@@ -2125,7 +2321,7 @@
 </p:notes>
 </file>
 
-<file path=ppt/notesSlides/notesSlide22.xml><?xml version="1.0" encoding="utf-8"?>
+<file path=ppt/notesSlides/notesSlide24.xml><?xml version="1.0" encoding="utf-8"?>
 <p:notes xmlns:a="http://schemas.openxmlformats.org/drawingml/2006/main" xmlns:r="http://schemas.openxmlformats.org/officeDocument/2006/relationships" xmlns:p="http://schemas.openxmlformats.org/presentationml/2006/main">
   <p:cSld>
     <p:spTree>
@@ -2215,7 +2411,7 @@
             <a:pPr rtl="0"/>
             <a:fld id="{F97DC217-DF71-1A49-B3EA-559F1F43B0FF}" type="slidenum">
               <a:rPr lang="id-ID" smtClean="0"/>
-              <a:t>22</a:t>
+              <a:t>24</a:t>
             </a:fld>
             <a:endParaRPr lang="id-ID"/>
           </a:p>
@@ -2234,7 +2430,7 @@
 </p:notes>
 </file>
 
-<file path=ppt/notesSlides/notesSlide23.xml><?xml version="1.0" encoding="utf-8"?>
+<file path=ppt/notesSlides/notesSlide25.xml><?xml version="1.0" encoding="utf-8"?>
 <p:notes xmlns:a="http://schemas.openxmlformats.org/drawingml/2006/main" xmlns:r="http://schemas.openxmlformats.org/officeDocument/2006/relationships" xmlns:p="http://schemas.openxmlformats.org/presentationml/2006/main">
   <p:cSld>
     <p:spTree>
@@ -2324,7 +2520,7 @@
             <a:pPr rtl="0"/>
             <a:fld id="{F97DC217-DF71-1A49-B3EA-559F1F43B0FF}" type="slidenum">
               <a:rPr lang="id-ID" smtClean="0"/>
-              <a:t>23</a:t>
+              <a:t>25</a:t>
             </a:fld>
             <a:endParaRPr lang="id-ID"/>
           </a:p>
@@ -2343,7 +2539,7 @@
 </p:notes>
 </file>
 
-<file path=ppt/notesSlides/notesSlide24.xml><?xml version="1.0" encoding="utf-8"?>
+<file path=ppt/notesSlides/notesSlide26.xml><?xml version="1.0" encoding="utf-8"?>
 <p:notes xmlns:a="http://schemas.openxmlformats.org/drawingml/2006/main" xmlns:r="http://schemas.openxmlformats.org/officeDocument/2006/relationships" xmlns:p="http://schemas.openxmlformats.org/presentationml/2006/main">
   <p:cSld>
     <p:spTree>
@@ -2433,7 +2629,7 @@
             <a:pPr rtl="0"/>
             <a:fld id="{F97DC217-DF71-1A49-B3EA-559F1F43B0FF}" type="slidenum">
               <a:rPr lang="id-ID" smtClean="0"/>
-              <a:t>24</a:t>
+              <a:t>26</a:t>
             </a:fld>
             <a:endParaRPr lang="id-ID"/>
           </a:p>
@@ -2452,7 +2648,7 @@
 </p:notes>
 </file>
 
-<file path=ppt/notesSlides/notesSlide25.xml><?xml version="1.0" encoding="utf-8"?>
+<file path=ppt/notesSlides/notesSlide27.xml><?xml version="1.0" encoding="utf-8"?>
 <p:notes xmlns:a="http://schemas.openxmlformats.org/drawingml/2006/main" xmlns:r="http://schemas.openxmlformats.org/officeDocument/2006/relationships" xmlns:p="http://schemas.openxmlformats.org/presentationml/2006/main">
   <p:cSld>
     <p:spTree>
@@ -2542,7 +2738,7 @@
             <a:pPr rtl="0"/>
             <a:fld id="{F97DC217-DF71-1A49-B3EA-559F1F43B0FF}" type="slidenum">
               <a:rPr lang="id-ID" smtClean="0"/>
-              <a:t>25</a:t>
+              <a:t>27</a:t>
             </a:fld>
             <a:endParaRPr lang="id-ID"/>
           </a:p>
@@ -2561,7 +2757,7 @@
 </p:notes>
 </file>
 
-<file path=ppt/notesSlides/notesSlide26.xml><?xml version="1.0" encoding="utf-8"?>
+<file path=ppt/notesSlides/notesSlide28.xml><?xml version="1.0" encoding="utf-8"?>
 <p:notes xmlns:a="http://schemas.openxmlformats.org/drawingml/2006/main" xmlns:r="http://schemas.openxmlformats.org/officeDocument/2006/relationships" xmlns:p="http://schemas.openxmlformats.org/presentationml/2006/main">
   <p:cSld>
     <p:spTree>
@@ -2651,7 +2847,7 @@
             <a:pPr rtl="0"/>
             <a:fld id="{F97DC217-DF71-1A49-B3EA-559F1F43B0FF}" type="slidenum">
               <a:rPr lang="id-ID" smtClean="0"/>
-              <a:t>26</a:t>
+              <a:t>28</a:t>
             </a:fld>
             <a:endParaRPr lang="id-ID"/>
           </a:p>
@@ -2670,7 +2866,7 @@
 </p:notes>
 </file>
 
-<file path=ppt/notesSlides/notesSlide27.xml><?xml version="1.0" encoding="utf-8"?>
+<file path=ppt/notesSlides/notesSlide29.xml><?xml version="1.0" encoding="utf-8"?>
 <p:notes xmlns:a="http://schemas.openxmlformats.org/drawingml/2006/main" xmlns:r="http://schemas.openxmlformats.org/officeDocument/2006/relationships" xmlns:p="http://schemas.openxmlformats.org/presentationml/2006/main">
   <p:cSld>
     <p:spTree>
@@ -2760,7 +2956,7 @@
             <a:pPr rtl="0"/>
             <a:fld id="{F97DC217-DF71-1A49-B3EA-559F1F43B0FF}" type="slidenum">
               <a:rPr lang="id-ID" smtClean="0"/>
-              <a:t>27</a:t>
+              <a:t>29</a:t>
             </a:fld>
             <a:endParaRPr lang="id-ID"/>
           </a:p>
@@ -2779,7 +2975,92 @@
 </p:notes>
 </file>
 
-<file path=ppt/notesSlides/notesSlide28.xml><?xml version="1.0" encoding="utf-8"?>
+<file path=ppt/notesSlides/notesSlide3.xml><?xml version="1.0" encoding="utf-8"?>
+<p:notes xmlns:a="http://schemas.openxmlformats.org/drawingml/2006/main" xmlns:r="http://schemas.openxmlformats.org/officeDocument/2006/relationships" xmlns:p="http://schemas.openxmlformats.org/presentationml/2006/main">
+  <p:cSld>
+    <p:spTree>
+      <p:nvGrpSpPr>
+        <p:cNvPr id="1" name=""/>
+        <p:cNvGrpSpPr/>
+        <p:nvPr/>
+      </p:nvGrpSpPr>
+      <p:grpSpPr>
+        <a:xfrm>
+          <a:off x="0" y="0"/>
+          <a:ext cx="0" cy="0"/>
+          <a:chOff x="0" y="0"/>
+          <a:chExt cx="0" cy="0"/>
+        </a:xfrm>
+      </p:grpSpPr>
+      <p:sp>
+        <p:nvSpPr>
+          <p:cNvPr id="2" name="Tampungan Gambar Slide 1"/>
+          <p:cNvSpPr>
+            <a:spLocks noGrp="1" noRot="1" noChangeAspect="1"/>
+          </p:cNvSpPr>
+          <p:nvPr>
+            <p:ph type="sldImg"/>
+          </p:nvPr>
+        </p:nvSpPr>
+        <p:spPr/>
+      </p:sp>
+      <p:sp>
+        <p:nvSpPr>
+          <p:cNvPr id="3" name="Tampungan Catatan 2"/>
+          <p:cNvSpPr>
+            <a:spLocks noGrp="1"/>
+          </p:cNvSpPr>
+          <p:nvPr>
+            <p:ph type="body" idx="1"/>
+          </p:nvPr>
+        </p:nvSpPr>
+        <p:spPr/>
+        <p:txBody>
+          <a:bodyPr/>
+          <a:lstStyle/>
+          <a:p>
+            <a:endParaRPr lang="id-ID" noProof="0" dirty="0"/>
+          </a:p>
+        </p:txBody>
+      </p:sp>
+      <p:sp>
+        <p:nvSpPr>
+          <p:cNvPr id="4" name="Tampungan Nomor Slide 3"/>
+          <p:cNvSpPr>
+            <a:spLocks noGrp="1"/>
+          </p:cNvSpPr>
+          <p:nvPr>
+            <p:ph type="sldNum" sz="quarter" idx="5"/>
+          </p:nvPr>
+        </p:nvSpPr>
+        <p:spPr/>
+        <p:txBody>
+          <a:bodyPr/>
+          <a:lstStyle/>
+          <a:p>
+            <a:pPr rtl="0"/>
+            <a:fld id="{F97DC217-DF71-1A49-B3EA-559F1F43B0FF}" type="slidenum">
+              <a:rPr lang="id-ID" smtClean="0"/>
+              <a:t>3</a:t>
+            </a:fld>
+            <a:endParaRPr lang="id-ID"/>
+          </a:p>
+        </p:txBody>
+      </p:sp>
+    </p:spTree>
+    <p:extLst>
+      <p:ext uri="{BB962C8B-B14F-4D97-AF65-F5344CB8AC3E}">
+        <p14:creationId xmlns:p14="http://schemas.microsoft.com/office/powerpoint/2010/main" val="843057564"/>
+      </p:ext>
+    </p:extLst>
+  </p:cSld>
+  <p:clrMapOvr>
+    <a:masterClrMapping/>
+  </p:clrMapOvr>
+</p:notes>
+</file>
+
+<file path=ppt/notesSlides/notesSlide30.xml><?xml version="1.0" encoding="utf-8"?>
 <p:notes xmlns:a="http://schemas.openxmlformats.org/drawingml/2006/main" xmlns:r="http://schemas.openxmlformats.org/officeDocument/2006/relationships" xmlns:p="http://schemas.openxmlformats.org/presentationml/2006/main">
   <p:cSld>
     <p:spTree>
@@ -2869,7 +3150,7 @@
             <a:pPr rtl="0"/>
             <a:fld id="{F97DC217-DF71-1A49-B3EA-559F1F43B0FF}" type="slidenum">
               <a:rPr lang="id-ID" smtClean="0"/>
-              <a:t>28</a:t>
+              <a:t>30</a:t>
             </a:fld>
             <a:endParaRPr lang="id-ID"/>
           </a:p>
@@ -2888,7 +3169,7 @@
 </p:notes>
 </file>
 
-<file path=ppt/notesSlides/notesSlide29.xml><?xml version="1.0" encoding="utf-8"?>
+<file path=ppt/notesSlides/notesSlide31.xml><?xml version="1.0" encoding="utf-8"?>
 <p:notes xmlns:a="http://schemas.openxmlformats.org/drawingml/2006/main" xmlns:r="http://schemas.openxmlformats.org/officeDocument/2006/relationships" xmlns:p="http://schemas.openxmlformats.org/presentationml/2006/main">
   <p:cSld>
     <p:spTree>
@@ -2978,7 +3259,7 @@
             <a:pPr rtl="0"/>
             <a:fld id="{F97DC217-DF71-1A49-B3EA-559F1F43B0FF}" type="slidenum">
               <a:rPr lang="id-ID" smtClean="0"/>
-              <a:t>29</a:t>
+              <a:t>31</a:t>
             </a:fld>
             <a:endParaRPr lang="id-ID"/>
           </a:p>
@@ -2997,116 +3278,7 @@
 </p:notes>
 </file>
 
-<file path=ppt/notesSlides/notesSlide3.xml><?xml version="1.0" encoding="utf-8"?>
-<p:notes xmlns:a="http://schemas.openxmlformats.org/drawingml/2006/main" xmlns:r="http://schemas.openxmlformats.org/officeDocument/2006/relationships" xmlns:p="http://schemas.openxmlformats.org/presentationml/2006/main">
-  <p:cSld>
-    <p:spTree>
-      <p:nvGrpSpPr>
-        <p:cNvPr id="1" name="">
-          <a:extLst>
-            <a:ext uri="{FF2B5EF4-FFF2-40B4-BE49-F238E27FC236}">
-              <a16:creationId xmlns:a16="http://schemas.microsoft.com/office/drawing/2014/main" id="{5FC1B80D-2D14-7AD7-8724-20DC4B39775A}"/>
-            </a:ext>
-          </a:extLst>
-        </p:cNvPr>
-        <p:cNvGrpSpPr/>
-        <p:nvPr/>
-      </p:nvGrpSpPr>
-      <p:grpSpPr>
-        <a:xfrm>
-          <a:off x="0" y="0"/>
-          <a:ext cx="0" cy="0"/>
-          <a:chOff x="0" y="0"/>
-          <a:chExt cx="0" cy="0"/>
-        </a:xfrm>
-      </p:grpSpPr>
-      <p:sp>
-        <p:nvSpPr>
-          <p:cNvPr id="2" name="Tampungan Gambar Slide 1">
-            <a:extLst>
-              <a:ext uri="{FF2B5EF4-FFF2-40B4-BE49-F238E27FC236}">
-                <a16:creationId xmlns:a16="http://schemas.microsoft.com/office/drawing/2014/main" id="{EB40F546-5EC5-4DEC-71EF-9207A018B2F1}"/>
-              </a:ext>
-            </a:extLst>
-          </p:cNvPr>
-          <p:cNvSpPr>
-            <a:spLocks noGrp="1" noRot="1" noChangeAspect="1"/>
-          </p:cNvSpPr>
-          <p:nvPr>
-            <p:ph type="sldImg"/>
-          </p:nvPr>
-        </p:nvSpPr>
-        <p:spPr/>
-      </p:sp>
-      <p:sp>
-        <p:nvSpPr>
-          <p:cNvPr id="3" name="Tampungan Catatan 2">
-            <a:extLst>
-              <a:ext uri="{FF2B5EF4-FFF2-40B4-BE49-F238E27FC236}">
-                <a16:creationId xmlns:a16="http://schemas.microsoft.com/office/drawing/2014/main" id="{68E6FFC7-19A7-F01A-2525-7E822E813928}"/>
-              </a:ext>
-            </a:extLst>
-          </p:cNvPr>
-          <p:cNvSpPr>
-            <a:spLocks noGrp="1"/>
-          </p:cNvSpPr>
-          <p:nvPr>
-            <p:ph type="body" idx="1"/>
-          </p:nvPr>
-        </p:nvSpPr>
-        <p:spPr/>
-        <p:txBody>
-          <a:bodyPr/>
-          <a:lstStyle/>
-          <a:p>
-            <a:endParaRPr lang="id-ID" noProof="0" dirty="0"/>
-          </a:p>
-        </p:txBody>
-      </p:sp>
-      <p:sp>
-        <p:nvSpPr>
-          <p:cNvPr id="4" name="Tampungan Nomor Slide 3">
-            <a:extLst>
-              <a:ext uri="{FF2B5EF4-FFF2-40B4-BE49-F238E27FC236}">
-                <a16:creationId xmlns:a16="http://schemas.microsoft.com/office/drawing/2014/main" id="{61B3472B-1A2A-1D92-805B-6D9ECA163CCA}"/>
-              </a:ext>
-            </a:extLst>
-          </p:cNvPr>
-          <p:cNvSpPr>
-            <a:spLocks noGrp="1"/>
-          </p:cNvSpPr>
-          <p:nvPr>
-            <p:ph type="sldNum" sz="quarter" idx="5"/>
-          </p:nvPr>
-        </p:nvSpPr>
-        <p:spPr/>
-        <p:txBody>
-          <a:bodyPr/>
-          <a:lstStyle/>
-          <a:p>
-            <a:pPr rtl="0"/>
-            <a:fld id="{F97DC217-DF71-1A49-B3EA-559F1F43B0FF}" type="slidenum">
-              <a:rPr lang="id-ID" smtClean="0"/>
-              <a:t>3</a:t>
-            </a:fld>
-            <a:endParaRPr lang="id-ID"/>
-          </a:p>
-        </p:txBody>
-      </p:sp>
-    </p:spTree>
-    <p:extLst>
-      <p:ext uri="{BB962C8B-B14F-4D97-AF65-F5344CB8AC3E}">
-        <p14:creationId xmlns:p14="http://schemas.microsoft.com/office/powerpoint/2010/main" val="574222582"/>
-      </p:ext>
-    </p:extLst>
-  </p:cSld>
-  <p:clrMapOvr>
-    <a:masterClrMapping/>
-  </p:clrMapOvr>
-</p:notes>
-</file>
-
-<file path=ppt/notesSlides/notesSlide30.xml><?xml version="1.0" encoding="utf-8"?>
+<file path=ppt/notesSlides/notesSlide32.xml><?xml version="1.0" encoding="utf-8"?>
 <p:notes xmlns:a="http://schemas.openxmlformats.org/drawingml/2006/main" xmlns:r="http://schemas.openxmlformats.org/officeDocument/2006/relationships" xmlns:p="http://schemas.openxmlformats.org/presentationml/2006/main">
   <p:cSld>
     <p:spTree>
@@ -3196,7 +3368,7 @@
             <a:pPr rtl="0"/>
             <a:fld id="{F97DC217-DF71-1A49-B3EA-559F1F43B0FF}" type="slidenum">
               <a:rPr lang="id-ID" smtClean="0"/>
-              <a:t>30</a:t>
+              <a:t>32</a:t>
             </a:fld>
             <a:endParaRPr lang="id-ID"/>
           </a:p>
@@ -3215,7 +3387,7 @@
 </p:notes>
 </file>
 
-<file path=ppt/notesSlides/notesSlide31.xml><?xml version="1.0" encoding="utf-8"?>
+<file path=ppt/notesSlides/notesSlide33.xml><?xml version="1.0" encoding="utf-8"?>
 <p:notes xmlns:a="http://schemas.openxmlformats.org/drawingml/2006/main" xmlns:r="http://schemas.openxmlformats.org/officeDocument/2006/relationships" xmlns:p="http://schemas.openxmlformats.org/presentationml/2006/main">
   <p:cSld>
     <p:spTree>
@@ -3305,7 +3477,7 @@
             <a:pPr rtl="0"/>
             <a:fld id="{F97DC217-DF71-1A49-B3EA-559F1F43B0FF}" type="slidenum">
               <a:rPr lang="id-ID" smtClean="0"/>
-              <a:t>31</a:t>
+              <a:t>33</a:t>
             </a:fld>
             <a:endParaRPr lang="id-ID"/>
           </a:p>
@@ -3324,7 +3496,7 @@
 </p:notes>
 </file>
 
-<file path=ppt/notesSlides/notesSlide32.xml><?xml version="1.0" encoding="utf-8"?>
+<file path=ppt/notesSlides/notesSlide34.xml><?xml version="1.0" encoding="utf-8"?>
 <p:notes xmlns:a="http://schemas.openxmlformats.org/drawingml/2006/main" xmlns:r="http://schemas.openxmlformats.org/officeDocument/2006/relationships" xmlns:p="http://schemas.openxmlformats.org/presentationml/2006/main">
   <p:cSld>
     <p:spTree>
@@ -3414,7 +3586,7 @@
             <a:pPr rtl="0"/>
             <a:fld id="{F97DC217-DF71-1A49-B3EA-559F1F43B0FF}" type="slidenum">
               <a:rPr lang="id-ID" smtClean="0"/>
-              <a:t>32</a:t>
+              <a:t>34</a:t>
             </a:fld>
             <a:endParaRPr lang="id-ID"/>
           </a:p>
@@ -3433,7 +3605,7 @@
 </p:notes>
 </file>
 
-<file path=ppt/notesSlides/notesSlide33.xml><?xml version="1.0" encoding="utf-8"?>
+<file path=ppt/notesSlides/notesSlide35.xml><?xml version="1.0" encoding="utf-8"?>
 <p:notes xmlns:a="http://schemas.openxmlformats.org/drawingml/2006/main" xmlns:r="http://schemas.openxmlformats.org/officeDocument/2006/relationships" xmlns:p="http://schemas.openxmlformats.org/presentationml/2006/main">
   <p:cSld>
     <p:spTree>
@@ -3523,7 +3695,7 @@
             <a:pPr rtl="0"/>
             <a:fld id="{F97DC217-DF71-1A49-B3EA-559F1F43B0FF}" type="slidenum">
               <a:rPr lang="id-ID" smtClean="0"/>
-              <a:t>33</a:t>
+              <a:t>35</a:t>
             </a:fld>
             <a:endParaRPr lang="id-ID"/>
           </a:p>
@@ -3542,7 +3714,7 @@
 </p:notes>
 </file>
 
-<file path=ppt/notesSlides/notesSlide34.xml><?xml version="1.0" encoding="utf-8"?>
+<file path=ppt/notesSlides/notesSlide36.xml><?xml version="1.0" encoding="utf-8"?>
 <p:notes xmlns:a="http://schemas.openxmlformats.org/drawingml/2006/main" xmlns:r="http://schemas.openxmlformats.org/officeDocument/2006/relationships" xmlns:p="http://schemas.openxmlformats.org/presentationml/2006/main">
   <p:cSld>
     <p:spTree>
@@ -3632,7 +3804,7 @@
             <a:pPr rtl="0"/>
             <a:fld id="{F97DC217-DF71-1A49-B3EA-559F1F43B0FF}" type="slidenum">
               <a:rPr lang="id-ID" smtClean="0"/>
-              <a:t>34</a:t>
+              <a:t>36</a:t>
             </a:fld>
             <a:endParaRPr lang="id-ID"/>
           </a:p>
@@ -3651,7 +3823,7 @@
 </p:notes>
 </file>
 
-<file path=ppt/notesSlides/notesSlide35.xml><?xml version="1.0" encoding="utf-8"?>
+<file path=ppt/notesSlides/notesSlide37.xml><?xml version="1.0" encoding="utf-8"?>
 <p:notes xmlns:a="http://schemas.openxmlformats.org/drawingml/2006/main" xmlns:r="http://schemas.openxmlformats.org/officeDocument/2006/relationships" xmlns:p="http://schemas.openxmlformats.org/presentationml/2006/main">
   <p:cSld>
     <p:spTree>
@@ -3741,7 +3913,7 @@
             <a:pPr rtl="0"/>
             <a:fld id="{F97DC217-DF71-1A49-B3EA-559F1F43B0FF}" type="slidenum">
               <a:rPr lang="id-ID" smtClean="0"/>
-              <a:t>38</a:t>
+              <a:t>40</a:t>
             </a:fld>
             <a:endParaRPr lang="id-ID"/>
           </a:p>
@@ -3760,7 +3932,7 @@
 </p:notes>
 </file>
 
-<file path=ppt/notesSlides/notesSlide36.xml><?xml version="1.0" encoding="utf-8"?>
+<file path=ppt/notesSlides/notesSlide38.xml><?xml version="1.0" encoding="utf-8"?>
 <p:notes xmlns:a="http://schemas.openxmlformats.org/drawingml/2006/main" xmlns:r="http://schemas.openxmlformats.org/officeDocument/2006/relationships" xmlns:p="http://schemas.openxmlformats.org/presentationml/2006/main">
   <p:cSld>
     <p:spTree>
@@ -3826,7 +3998,7 @@
             <a:pPr rtl="0"/>
             <a:fld id="{F97DC217-DF71-1A49-B3EA-559F1F43B0FF}" type="slidenum">
               <a:rPr lang="id-ID" smtClean="0"/>
-              <a:t>40</a:t>
+              <a:t>42</a:t>
             </a:fld>
             <a:endParaRPr lang="id-ID"/>
           </a:p>
@@ -3920,7 +4092,7 @@
     </p:spTree>
     <p:extLst>
       <p:ext uri="{BB962C8B-B14F-4D97-AF65-F5344CB8AC3E}">
-        <p14:creationId xmlns:p14="http://schemas.microsoft.com/office/powerpoint/2010/main" val="843057564"/>
+        <p14:creationId xmlns:p14="http://schemas.microsoft.com/office/powerpoint/2010/main" val="3293267610"/>
       </p:ext>
     </p:extLst>
   </p:cSld>
@@ -3935,7 +4107,13 @@
   <p:cSld>
     <p:spTree>
       <p:nvGrpSpPr>
-        <p:cNvPr id="1" name=""/>
+        <p:cNvPr id="1" name="">
+          <a:extLst>
+            <a:ext uri="{FF2B5EF4-FFF2-40B4-BE49-F238E27FC236}">
+              <a16:creationId xmlns:a16="http://schemas.microsoft.com/office/drawing/2014/main" id="{173908C7-28C5-4134-98B6-1AF1CD0246F9}"/>
+            </a:ext>
+          </a:extLst>
+        </p:cNvPr>
         <p:cNvGrpSpPr/>
         <p:nvPr/>
       </p:nvGrpSpPr>
@@ -3949,7 +4127,13 @@
       </p:grpSpPr>
       <p:sp>
         <p:nvSpPr>
-          <p:cNvPr id="2" name="Tampungan Gambar Slide 1"/>
+          <p:cNvPr id="2" name="Tampungan Gambar Slide 1">
+            <a:extLst>
+              <a:ext uri="{FF2B5EF4-FFF2-40B4-BE49-F238E27FC236}">
+                <a16:creationId xmlns:a16="http://schemas.microsoft.com/office/drawing/2014/main" id="{88429200-6288-A071-69DE-DBA448E1021A}"/>
+              </a:ext>
+            </a:extLst>
+          </p:cNvPr>
           <p:cNvSpPr>
             <a:spLocks noGrp="1" noRot="1" noChangeAspect="1"/>
           </p:cNvSpPr>
@@ -3961,7 +4145,13 @@
       </p:sp>
       <p:sp>
         <p:nvSpPr>
-          <p:cNvPr id="3" name="Tampungan Catatan 2"/>
+          <p:cNvPr id="3" name="Tampungan Catatan 2">
+            <a:extLst>
+              <a:ext uri="{FF2B5EF4-FFF2-40B4-BE49-F238E27FC236}">
+                <a16:creationId xmlns:a16="http://schemas.microsoft.com/office/drawing/2014/main" id="{889D7286-91CE-FC7F-620E-1903F81076B6}"/>
+              </a:ext>
+            </a:extLst>
+          </p:cNvPr>
           <p:cNvSpPr>
             <a:spLocks noGrp="1"/>
           </p:cNvSpPr>
@@ -3980,7 +4170,13 @@
       </p:sp>
       <p:sp>
         <p:nvSpPr>
-          <p:cNvPr id="4" name="Tampungan Nomor Slide 3"/>
+          <p:cNvPr id="4" name="Tampungan Nomor Slide 3">
+            <a:extLst>
+              <a:ext uri="{FF2B5EF4-FFF2-40B4-BE49-F238E27FC236}">
+                <a16:creationId xmlns:a16="http://schemas.microsoft.com/office/drawing/2014/main" id="{54C99C8B-F241-7E67-466E-A1FB21FB8816}"/>
+              </a:ext>
+            </a:extLst>
+          </p:cNvPr>
           <p:cNvSpPr>
             <a:spLocks noGrp="1"/>
           </p:cNvSpPr>
@@ -4005,7 +4201,7 @@
     </p:spTree>
     <p:extLst>
       <p:ext uri="{BB962C8B-B14F-4D97-AF65-F5344CB8AC3E}">
-        <p14:creationId xmlns:p14="http://schemas.microsoft.com/office/powerpoint/2010/main" val="1309841113"/>
+        <p14:creationId xmlns:p14="http://schemas.microsoft.com/office/powerpoint/2010/main" val="2040530170"/>
       </p:ext>
     </p:extLst>
   </p:cSld>
@@ -4090,7 +4286,7 @@
     </p:spTree>
     <p:extLst>
       <p:ext uri="{BB962C8B-B14F-4D97-AF65-F5344CB8AC3E}">
-        <p14:creationId xmlns:p14="http://schemas.microsoft.com/office/powerpoint/2010/main" val="1555156174"/>
+        <p14:creationId xmlns:p14="http://schemas.microsoft.com/office/powerpoint/2010/main" val="1309841113"/>
       </p:ext>
     </p:extLst>
   </p:cSld>
@@ -4108,7 +4304,7 @@
         <p:cNvPr id="1" name="">
           <a:extLst>
             <a:ext uri="{FF2B5EF4-FFF2-40B4-BE49-F238E27FC236}">
-              <a16:creationId xmlns:a16="http://schemas.microsoft.com/office/drawing/2014/main" id="{5181BF22-1BB9-D048-1CFB-3C1DF02758D7}"/>
+              <a16:creationId xmlns:a16="http://schemas.microsoft.com/office/drawing/2014/main" id="{83FDED19-6554-6E0B-5B51-1450829882A0}"/>
             </a:ext>
           </a:extLst>
         </p:cNvPr>
@@ -4128,7 +4324,7 @@
           <p:cNvPr id="2" name="Tampungan Gambar Slide 1">
             <a:extLst>
               <a:ext uri="{FF2B5EF4-FFF2-40B4-BE49-F238E27FC236}">
-                <a16:creationId xmlns:a16="http://schemas.microsoft.com/office/drawing/2014/main" id="{9256DC50-EC76-B917-E3B3-3FAAD82BD9D4}"/>
+                <a16:creationId xmlns:a16="http://schemas.microsoft.com/office/drawing/2014/main" id="{4F5C460D-6A70-534A-DD3D-E2670BBE3762}"/>
               </a:ext>
             </a:extLst>
           </p:cNvPr>
@@ -4146,7 +4342,7 @@
           <p:cNvPr id="3" name="Tampungan Catatan 2">
             <a:extLst>
               <a:ext uri="{FF2B5EF4-FFF2-40B4-BE49-F238E27FC236}">
-                <a16:creationId xmlns:a16="http://schemas.microsoft.com/office/drawing/2014/main" id="{C39FD7C8-C3D3-B8D0-81C6-D3ECF4FBAE14}"/>
+                <a16:creationId xmlns:a16="http://schemas.microsoft.com/office/drawing/2014/main" id="{1EB904C7-47F1-2AC0-C97B-73C72738AB07}"/>
               </a:ext>
             </a:extLst>
           </p:cNvPr>
@@ -4171,7 +4367,7 @@
           <p:cNvPr id="4" name="Tampungan Nomor Slide 3">
             <a:extLst>
               <a:ext uri="{FF2B5EF4-FFF2-40B4-BE49-F238E27FC236}">
-                <a16:creationId xmlns:a16="http://schemas.microsoft.com/office/drawing/2014/main" id="{35E08082-2FC5-A1EF-C69E-7059E3797046}"/>
+                <a16:creationId xmlns:a16="http://schemas.microsoft.com/office/drawing/2014/main" id="{A7E69038-FF26-A1BD-2214-951ACFB26ECA}"/>
               </a:ext>
             </a:extLst>
           </p:cNvPr>
@@ -4199,7 +4395,7 @@
     </p:spTree>
     <p:extLst>
       <p:ext uri="{BB962C8B-B14F-4D97-AF65-F5344CB8AC3E}">
-        <p14:creationId xmlns:p14="http://schemas.microsoft.com/office/powerpoint/2010/main" val="3671457054"/>
+        <p14:creationId xmlns:p14="http://schemas.microsoft.com/office/powerpoint/2010/main" val="1018746622"/>
       </p:ext>
     </p:extLst>
   </p:cSld>
@@ -4284,7 +4480,7 @@
     </p:spTree>
     <p:extLst>
       <p:ext uri="{BB962C8B-B14F-4D97-AF65-F5344CB8AC3E}">
-        <p14:creationId xmlns:p14="http://schemas.microsoft.com/office/powerpoint/2010/main" val="1032157980"/>
+        <p14:creationId xmlns:p14="http://schemas.microsoft.com/office/powerpoint/2010/main" val="1555156174"/>
       </p:ext>
     </p:extLst>
   </p:cSld>
@@ -4299,7 +4495,13 @@
   <p:cSld>
     <p:spTree>
       <p:nvGrpSpPr>
-        <p:cNvPr id="1" name=""/>
+        <p:cNvPr id="1" name="">
+          <a:extLst>
+            <a:ext uri="{FF2B5EF4-FFF2-40B4-BE49-F238E27FC236}">
+              <a16:creationId xmlns:a16="http://schemas.microsoft.com/office/drawing/2014/main" id="{5181BF22-1BB9-D048-1CFB-3C1DF02758D7}"/>
+            </a:ext>
+          </a:extLst>
+        </p:cNvPr>
         <p:cNvGrpSpPr/>
         <p:nvPr/>
       </p:nvGrpSpPr>
@@ -4313,7 +4515,13 @@
       </p:grpSpPr>
       <p:sp>
         <p:nvSpPr>
-          <p:cNvPr id="2" name="Tampungan Gambar Slide 1"/>
+          <p:cNvPr id="2" name="Tampungan Gambar Slide 1">
+            <a:extLst>
+              <a:ext uri="{FF2B5EF4-FFF2-40B4-BE49-F238E27FC236}">
+                <a16:creationId xmlns:a16="http://schemas.microsoft.com/office/drawing/2014/main" id="{9256DC50-EC76-B917-E3B3-3FAAD82BD9D4}"/>
+              </a:ext>
+            </a:extLst>
+          </p:cNvPr>
           <p:cNvSpPr>
             <a:spLocks noGrp="1" noRot="1" noChangeAspect="1"/>
           </p:cNvSpPr>
@@ -4325,7 +4533,13 @@
       </p:sp>
       <p:sp>
         <p:nvSpPr>
-          <p:cNvPr id="3" name="Tampungan Catatan 2"/>
+          <p:cNvPr id="3" name="Tampungan Catatan 2">
+            <a:extLst>
+              <a:ext uri="{FF2B5EF4-FFF2-40B4-BE49-F238E27FC236}">
+                <a16:creationId xmlns:a16="http://schemas.microsoft.com/office/drawing/2014/main" id="{C39FD7C8-C3D3-B8D0-81C6-D3ECF4FBAE14}"/>
+              </a:ext>
+            </a:extLst>
+          </p:cNvPr>
           <p:cNvSpPr>
             <a:spLocks noGrp="1"/>
           </p:cNvSpPr>
@@ -4344,7 +4558,13 @@
       </p:sp>
       <p:sp>
         <p:nvSpPr>
-          <p:cNvPr id="4" name="Tampungan Nomor Slide 3"/>
+          <p:cNvPr id="4" name="Tampungan Nomor Slide 3">
+            <a:extLst>
+              <a:ext uri="{FF2B5EF4-FFF2-40B4-BE49-F238E27FC236}">
+                <a16:creationId xmlns:a16="http://schemas.microsoft.com/office/drawing/2014/main" id="{35E08082-2FC5-A1EF-C69E-7059E3797046}"/>
+              </a:ext>
+            </a:extLst>
+          </p:cNvPr>
           <p:cNvSpPr>
             <a:spLocks noGrp="1"/>
           </p:cNvSpPr>
@@ -4369,7 +4589,7 @@
     </p:spTree>
     <p:extLst>
       <p:ext uri="{BB962C8B-B14F-4D97-AF65-F5344CB8AC3E}">
-        <p14:creationId xmlns:p14="http://schemas.microsoft.com/office/powerpoint/2010/main" val="4266338347"/>
+        <p14:creationId xmlns:p14="http://schemas.microsoft.com/office/powerpoint/2010/main" val="3671457054"/>
       </p:ext>
     </p:extLst>
   </p:cSld>
@@ -5771,7 +5991,7 @@
             <a:pPr rtl="0"/>
             <a:fld id="{5FB06667-F309-4D31-9192-FA935AFD6E2C}" type="datetime1">
               <a:rPr lang="id-ID" noProof="0" smtClean="0"/>
-              <a:t>11/09/2025</a:t>
+              <a:t>14/10/2025</a:t>
             </a:fld>
             <a:endParaRPr lang="id-ID" noProof="0"/>
           </a:p>
@@ -6658,7 +6878,7 @@
             <a:pPr rtl="0"/>
             <a:fld id="{864F080E-00EF-45FB-879B-543FC5219789}" type="datetime1">
               <a:rPr lang="id-ID" noProof="0" smtClean="0"/>
-              <a:t>11/09/2025</a:t>
+              <a:t>14/10/2025</a:t>
             </a:fld>
             <a:endParaRPr lang="id-ID" noProof="0"/>
           </a:p>
@@ -7834,7 +8054,7 @@
             <a:pPr rtl="0"/>
             <a:fld id="{FED39403-5B82-4458-B314-3455B2B980C6}" type="datetime1">
               <a:rPr lang="id-ID" noProof="0" smtClean="0"/>
-              <a:t>11/09/2025</a:t>
+              <a:t>14/10/2025</a:t>
             </a:fld>
             <a:endParaRPr lang="id-ID" noProof="0"/>
           </a:p>
@@ -9913,7 +10133,7 @@
             <a:pPr rtl="0"/>
             <a:fld id="{51A9B3F0-40B4-402B-BD3D-2ECBD63B1A7A}" type="datetime1">
               <a:rPr lang="id-ID" noProof="0" smtClean="0"/>
-              <a:t>11/09/2025</a:t>
+              <a:t>14/10/2025</a:t>
             </a:fld>
             <a:endParaRPr lang="id-ID" noProof="0"/>
           </a:p>
@@ -10634,7 +10854,7 @@
             <a:pPr rtl="0"/>
             <a:fld id="{C66938A1-13E2-4EB3-A9CB-9E58C4A52052}" type="datetime1">
               <a:rPr lang="id-ID" noProof="0" smtClean="0"/>
-              <a:t>11/09/2025</a:t>
+              <a:t>14/10/2025</a:t>
             </a:fld>
             <a:endParaRPr lang="id-ID" noProof="0"/>
           </a:p>
@@ -11866,7 +12086,7 @@
             <a:pPr rtl="0"/>
             <a:fld id="{8E39C280-D1CE-4C14-BB73-A42EFC7AA47C}" type="datetime1">
               <a:rPr lang="id-ID" noProof="0" smtClean="0"/>
-              <a:t>11/09/2025</a:t>
+              <a:t>14/10/2025</a:t>
             </a:fld>
             <a:endParaRPr lang="id-ID" noProof="0"/>
           </a:p>
@@ -12460,7 +12680,7 @@
             <a:pPr rtl="0"/>
             <a:fld id="{7CF46B1F-6981-4F1A-BBFE-32021A818C89}" type="datetime1">
               <a:rPr lang="id-ID" noProof="0" smtClean="0"/>
-              <a:t>11/09/2025</a:t>
+              <a:t>14/10/2025</a:t>
             </a:fld>
             <a:endParaRPr lang="id-ID" noProof="0"/>
           </a:p>
@@ -12936,7 +13156,7 @@
             <a:pPr rtl="0"/>
             <a:fld id="{84E9CC79-66B9-422C-A06E-4D4DCD64D4AF}" type="datetime1">
               <a:rPr lang="id-ID" noProof="0" smtClean="0"/>
-              <a:t>11/09/2025</a:t>
+              <a:t>14/10/2025</a:t>
             </a:fld>
             <a:endParaRPr lang="id-ID" noProof="0"/>
           </a:p>
@@ -13793,7 +14013,7 @@
             <a:pPr rtl="0"/>
             <a:fld id="{7B48DF3E-AD03-4E2F-9529-7FF1401E86D2}" type="datetime1">
               <a:rPr lang="id-ID" noProof="0" smtClean="0"/>
-              <a:t>11/09/2025</a:t>
+              <a:t>14/10/2025</a:t>
             </a:fld>
             <a:endParaRPr lang="id-ID" noProof="0"/>
           </a:p>
@@ -16029,7 +16249,7 @@
             <a:pPr rtl="0"/>
             <a:fld id="{0313E8A0-0BEB-4298-AEE4-B7CCF6490583}" type="datetime1">
               <a:rPr lang="id-ID" noProof="0" smtClean="0"/>
-              <a:t>11/09/2025</a:t>
+              <a:t>14/10/2025</a:t>
             </a:fld>
             <a:endParaRPr lang="id-ID" noProof="0"/>
           </a:p>
@@ -16301,7 +16521,7 @@
             <a:pPr rtl="0"/>
             <a:fld id="{C829E6E2-2665-481C-9621-3949D48D67CF}" type="datetime1">
               <a:rPr lang="id-ID" noProof="0" smtClean="0"/>
-              <a:t>11/09/2025</a:t>
+              <a:t>14/10/2025</a:t>
             </a:fld>
             <a:endParaRPr lang="id-ID" noProof="0"/>
           </a:p>
@@ -17497,10 +17717,248 @@
       </p:grpSpPr>
       <p:sp>
         <p:nvSpPr>
+          <p:cNvPr id="9" name="Tampungan Nomor Slide 8">
+            <a:extLst>
+              <a:ext uri="{FF2B5EF4-FFF2-40B4-BE49-F238E27FC236}">
+                <a16:creationId xmlns:a16="http://schemas.microsoft.com/office/drawing/2014/main" id="{6FD448B0-743E-0045-8131-69B4EEC58365}"/>
+              </a:ext>
+            </a:extLst>
+          </p:cNvPr>
+          <p:cNvSpPr>
+            <a:spLocks noGrp="1"/>
+          </p:cNvSpPr>
+          <p:nvPr>
+            <p:ph type="sldNum" sz="quarter" idx="4"/>
+          </p:nvPr>
+        </p:nvSpPr>
+        <p:spPr>
+          <a:xfrm>
+            <a:off x="10153276" y="6356350"/>
+            <a:ext cx="1657723" cy="365125"/>
+          </a:xfrm>
+        </p:spPr>
+        <p:txBody>
+          <a:bodyPr rtlCol="0"/>
+          <a:lstStyle/>
+          <a:p>
+            <a:pPr rtl="0"/>
+            <a:fld id="{294A09A9-5501-47C1-A89A-A340965A2BE2}" type="slidenum">
+              <a:rPr lang="id-ID" smtClean="0"/>
+              <a:pPr rtl="0"/>
+              <a:t>10</a:t>
+            </a:fld>
+            <a:endParaRPr lang="id-ID"/>
+          </a:p>
+        </p:txBody>
+      </p:sp>
+      <p:pic>
+        <p:nvPicPr>
+          <p:cNvPr id="8" name="Picture 7">
+            <a:extLst>
+              <a:ext uri="{FF2B5EF4-FFF2-40B4-BE49-F238E27FC236}">
+                <a16:creationId xmlns:a16="http://schemas.microsoft.com/office/drawing/2014/main" id="{AF94E4D4-116E-7319-DF5F-878836869AFA}"/>
+              </a:ext>
+            </a:extLst>
+          </p:cNvPr>
+          <p:cNvPicPr>
+            <a:picLocks noChangeAspect="1"/>
+          </p:cNvPicPr>
+          <p:nvPr/>
+        </p:nvPicPr>
+        <p:blipFill>
+          <a:blip r:embed="rId3">
+            <a:extLst>
+              <a:ext uri="{28A0092B-C50C-407E-A947-70E740481C1C}">
+                <a14:useLocalDpi xmlns:a14="http://schemas.microsoft.com/office/drawing/2010/main" val="0"/>
+              </a:ext>
+            </a:extLst>
+          </a:blip>
+          <a:srcRect/>
+          <a:stretch>
+            <a:fillRect/>
+          </a:stretch>
+        </p:blipFill>
+        <p:spPr bwMode="auto">
+          <a:xfrm>
+            <a:off x="1393641" y="265471"/>
+            <a:ext cx="7425893" cy="5213188"/>
+          </a:xfrm>
+          <a:prstGeom prst="rect">
+            <a:avLst/>
+          </a:prstGeom>
+          <a:noFill/>
+          <a:ln>
+            <a:noFill/>
+          </a:ln>
+        </p:spPr>
+      </p:pic>
+      <p:sp>
+        <p:nvSpPr>
+          <p:cNvPr id="10" name="Tampungan Kaki 4">
+            <a:extLst>
+              <a:ext uri="{FF2B5EF4-FFF2-40B4-BE49-F238E27FC236}">
+                <a16:creationId xmlns:a16="http://schemas.microsoft.com/office/drawing/2014/main" id="{A6CD7973-EAE2-95BD-DA58-D971E2D965C4}"/>
+              </a:ext>
+            </a:extLst>
+          </p:cNvPr>
+          <p:cNvSpPr txBox="1">
+            <a:spLocks/>
+          </p:cNvSpPr>
+          <p:nvPr/>
+        </p:nvSpPr>
+        <p:spPr>
+          <a:xfrm>
+            <a:off x="1902542" y="5533863"/>
+            <a:ext cx="6150078" cy="365125"/>
+          </a:xfrm>
+          <a:prstGeom prst="rect">
+            <a:avLst/>
+          </a:prstGeom>
+        </p:spPr>
+        <p:txBody>
+          <a:bodyPr vert="horz" lIns="91440" tIns="45720" rIns="91440" bIns="45720" rtlCol="0" anchor="ctr">
+            <a:noAutofit/>
+          </a:bodyPr>
+          <a:lstStyle>
+            <a:defPPr rtl="0">
+              <a:defRPr lang="id-ID"/>
+            </a:defPPr>
+            <a:lvl1pPr marL="0" algn="ctr" defTabSz="914400" rtl="0" eaLnBrk="1" latinLnBrk="0" hangingPunct="1">
+              <a:defRPr sz="1200" kern="1200">
+                <a:solidFill>
+                  <a:schemeClr val="accent3"/>
+                </a:solidFill>
+                <a:latin typeface="+mn-lt"/>
+                <a:ea typeface="+mn-ea"/>
+                <a:cs typeface="+mn-cs"/>
+              </a:defRPr>
+            </a:lvl1pPr>
+            <a:lvl2pPr marL="457200" algn="l" defTabSz="914400" rtl="0" eaLnBrk="1" latinLnBrk="0" hangingPunct="1">
+              <a:defRPr sz="1800" kern="1200">
+                <a:solidFill>
+                  <a:schemeClr val="tx1"/>
+                </a:solidFill>
+                <a:latin typeface="+mn-lt"/>
+                <a:ea typeface="+mn-ea"/>
+                <a:cs typeface="+mn-cs"/>
+              </a:defRPr>
+            </a:lvl2pPr>
+            <a:lvl3pPr marL="914400" algn="l" defTabSz="914400" rtl="0" eaLnBrk="1" latinLnBrk="0" hangingPunct="1">
+              <a:defRPr sz="1800" kern="1200">
+                <a:solidFill>
+                  <a:schemeClr val="tx1"/>
+                </a:solidFill>
+                <a:latin typeface="+mn-lt"/>
+                <a:ea typeface="+mn-ea"/>
+                <a:cs typeface="+mn-cs"/>
+              </a:defRPr>
+            </a:lvl3pPr>
+            <a:lvl4pPr marL="1371600" algn="l" defTabSz="914400" rtl="0" eaLnBrk="1" latinLnBrk="0" hangingPunct="1">
+              <a:defRPr sz="1800" kern="1200">
+                <a:solidFill>
+                  <a:schemeClr val="tx1"/>
+                </a:solidFill>
+                <a:latin typeface="+mn-lt"/>
+                <a:ea typeface="+mn-ea"/>
+                <a:cs typeface="+mn-cs"/>
+              </a:defRPr>
+            </a:lvl4pPr>
+            <a:lvl5pPr marL="1828800" algn="l" defTabSz="914400" rtl="0" eaLnBrk="1" latinLnBrk="0" hangingPunct="1">
+              <a:defRPr sz="1800" kern="1200">
+                <a:solidFill>
+                  <a:schemeClr val="tx1"/>
+                </a:solidFill>
+                <a:latin typeface="+mn-lt"/>
+                <a:ea typeface="+mn-ea"/>
+                <a:cs typeface="+mn-cs"/>
+              </a:defRPr>
+            </a:lvl5pPr>
+            <a:lvl6pPr marL="2286000" algn="l" defTabSz="914400" rtl="0" eaLnBrk="1" latinLnBrk="0" hangingPunct="1">
+              <a:defRPr sz="1800" kern="1200">
+                <a:solidFill>
+                  <a:schemeClr val="tx1"/>
+                </a:solidFill>
+                <a:latin typeface="+mn-lt"/>
+                <a:ea typeface="+mn-ea"/>
+                <a:cs typeface="+mn-cs"/>
+              </a:defRPr>
+            </a:lvl6pPr>
+            <a:lvl7pPr marL="2743200" algn="l" defTabSz="914400" rtl="0" eaLnBrk="1" latinLnBrk="0" hangingPunct="1">
+              <a:defRPr sz="1800" kern="1200">
+                <a:solidFill>
+                  <a:schemeClr val="tx1"/>
+                </a:solidFill>
+                <a:latin typeface="+mn-lt"/>
+                <a:ea typeface="+mn-ea"/>
+                <a:cs typeface="+mn-cs"/>
+              </a:defRPr>
+            </a:lvl7pPr>
+            <a:lvl8pPr marL="3200400" algn="l" defTabSz="914400" rtl="0" eaLnBrk="1" latinLnBrk="0" hangingPunct="1">
+              <a:defRPr sz="1800" kern="1200">
+                <a:solidFill>
+                  <a:schemeClr val="tx1"/>
+                </a:solidFill>
+                <a:latin typeface="+mn-lt"/>
+                <a:ea typeface="+mn-ea"/>
+                <a:cs typeface="+mn-cs"/>
+              </a:defRPr>
+            </a:lvl8pPr>
+            <a:lvl9pPr marL="3657600" algn="l" defTabSz="914400" rtl="0" eaLnBrk="1" latinLnBrk="0" hangingPunct="1">
+              <a:defRPr sz="1800" kern="1200">
+                <a:solidFill>
+                  <a:schemeClr val="tx1"/>
+                </a:solidFill>
+                <a:latin typeface="+mn-lt"/>
+                <a:ea typeface="+mn-ea"/>
+                <a:cs typeface="+mn-cs"/>
+              </a:defRPr>
+            </a:lvl9pPr>
+          </a:lstStyle>
+          <a:p>
+            <a:r>
+              <a:rPr lang="it-IT" sz="1800" dirty="0"/>
+              <a:t>Visualisasi Hubungan Non-Linear Data Sepak Bola (StatsBomb, 2022)</a:t>
+            </a:r>
+            <a:endParaRPr lang="id-ID" sz="1800" dirty="0"/>
+          </a:p>
+        </p:txBody>
+      </p:sp>
+    </p:spTree>
+    <p:extLst>
+      <p:ext uri="{BB962C8B-B14F-4D97-AF65-F5344CB8AC3E}">
+        <p14:creationId xmlns:p14="http://schemas.microsoft.com/office/powerpoint/2010/main" val="2563119616"/>
+      </p:ext>
+    </p:extLst>
+  </p:cSld>
+  <p:clrMapOvr>
+    <a:masterClrMapping/>
+  </p:clrMapOvr>
+</p:sld>
+</file>
+
+<file path=ppt/slides/slide11.xml><?xml version="1.0" encoding="utf-8"?>
+<p:sld xmlns:a="http://schemas.openxmlformats.org/drawingml/2006/main" xmlns:r="http://schemas.openxmlformats.org/officeDocument/2006/relationships" xmlns:p="http://schemas.openxmlformats.org/presentationml/2006/main">
+  <p:cSld>
+    <p:spTree>
+      <p:nvGrpSpPr>
+        <p:cNvPr id="1" name=""/>
+        <p:cNvGrpSpPr/>
+        <p:nvPr/>
+      </p:nvGrpSpPr>
+      <p:grpSpPr>
+        <a:xfrm>
+          <a:off x="0" y="0"/>
+          <a:ext cx="0" cy="0"/>
+          <a:chOff x="0" y="0"/>
+          <a:chExt cx="0" cy="0"/>
+        </a:xfrm>
+      </p:grpSpPr>
+      <p:sp>
+        <p:nvSpPr>
           <p:cNvPr id="2" name="Judul 1">
             <a:extLst>
               <a:ext uri="{FF2B5EF4-FFF2-40B4-BE49-F238E27FC236}">
-                <a16:creationId xmlns:a16="http://schemas.microsoft.com/office/drawing/2014/main" id="{27A6F7BB-30A8-4980-AD4A-2FB0B53FA6C9}"/>
+                <a16:creationId xmlns:a16="http://schemas.microsoft.com/office/drawing/2014/main" id="{F96F75DE-8A44-4EC5-83C6-95BDDF10DFD9}"/>
               </a:ext>
             </a:extLst>
           </p:cNvPr>
@@ -17513,6 +17971,166 @@
         </p:nvSpPr>
         <p:spPr>
           <a:xfrm>
+            <a:off x="1167492" y="522807"/>
+            <a:ext cx="9779183" cy="1325563"/>
+          </a:xfrm>
+        </p:spPr>
+        <p:txBody>
+          <a:bodyPr rtlCol="0"/>
+          <a:lstStyle/>
+          <a:p>
+            <a:pPr rtl="0"/>
+            <a:r>
+              <a:rPr lang="en-GB" sz="5400" dirty="0" err="1"/>
+              <a:t>Rumusan</a:t>
+            </a:r>
+            <a:r>
+              <a:rPr lang="en-GB" sz="5400" dirty="0"/>
+              <a:t> </a:t>
+            </a:r>
+            <a:r>
+              <a:rPr lang="en-GB" sz="5400" dirty="0" err="1"/>
+              <a:t>Masalah</a:t>
+            </a:r>
+            <a:endParaRPr lang="id-ID" sz="5400" dirty="0"/>
+          </a:p>
+        </p:txBody>
+      </p:sp>
+      <p:sp>
+        <p:nvSpPr>
+          <p:cNvPr id="6" name="Tampungan Nomor Slide 5">
+            <a:extLst>
+              <a:ext uri="{FF2B5EF4-FFF2-40B4-BE49-F238E27FC236}">
+                <a16:creationId xmlns:a16="http://schemas.microsoft.com/office/drawing/2014/main" id="{50B6C709-8794-DF4E-A15C-6E648F09DD12}"/>
+              </a:ext>
+            </a:extLst>
+          </p:cNvPr>
+          <p:cNvSpPr>
+            <a:spLocks noGrp="1"/>
+          </p:cNvSpPr>
+          <p:nvPr>
+            <p:ph type="sldNum" sz="quarter" idx="4"/>
+          </p:nvPr>
+        </p:nvSpPr>
+        <p:spPr/>
+        <p:txBody>
+          <a:bodyPr rtlCol="0"/>
+          <a:lstStyle/>
+          <a:p>
+            <a:pPr rtl="0"/>
+            <a:fld id="{294A09A9-5501-47C1-A89A-A340965A2BE2}" type="slidenum">
+              <a:rPr lang="id-ID" smtClean="0"/>
+              <a:pPr rtl="0"/>
+              <a:t>11</a:t>
+            </a:fld>
+            <a:endParaRPr lang="id-ID"/>
+          </a:p>
+        </p:txBody>
+      </p:sp>
+      <p:sp>
+        <p:nvSpPr>
+          <p:cNvPr id="8" name="Content Placeholder 7">
+            <a:extLst>
+              <a:ext uri="{FF2B5EF4-FFF2-40B4-BE49-F238E27FC236}">
+                <a16:creationId xmlns:a16="http://schemas.microsoft.com/office/drawing/2014/main" id="{5378EF9A-6DF2-1B01-4D25-5907CD183193}"/>
+              </a:ext>
+            </a:extLst>
+          </p:cNvPr>
+          <p:cNvSpPr>
+            <a:spLocks noGrp="1"/>
+          </p:cNvSpPr>
+          <p:nvPr>
+            <p:ph idx="1"/>
+          </p:nvPr>
+        </p:nvSpPr>
+        <p:spPr>
+          <a:xfrm>
+            <a:off x="1167493" y="2087563"/>
+            <a:ext cx="9437007" cy="2687637"/>
+          </a:xfrm>
+        </p:spPr>
+        <p:txBody>
+          <a:bodyPr/>
+          <a:lstStyle/>
+          <a:p>
+            <a:pPr marL="457200" indent="-457200">
+              <a:buFont typeface="Arial" panose="020B0604020202020204" pitchFamily="34" charset="0"/>
+              <a:buChar char="•"/>
+            </a:pPr>
+            <a:r>
+              <a:rPr lang="sv-SE" sz="4000" dirty="0"/>
+              <a:t>Bagaimana LightGBM dapat </a:t>
+            </a:r>
+            <a:r>
+              <a:rPr lang="sv-SE" sz="3600" dirty="0"/>
+              <a:t>meningkatkan</a:t>
+            </a:r>
+            <a:r>
+              <a:rPr lang="sv-SE" sz="4000" dirty="0"/>
+              <a:t> akurasi prediksi xG?</a:t>
+            </a:r>
+          </a:p>
+          <a:p>
+            <a:pPr marL="457200" indent="-457200">
+              <a:buFont typeface="Arial" panose="020B0604020202020204" pitchFamily="34" charset="0"/>
+              <a:buChar char="•"/>
+            </a:pPr>
+            <a:r>
+              <a:rPr lang="pt-BR" sz="4000" dirty="0"/>
+              <a:t>Seberapa efisien LightGBM dalam memproses data untuk prediksi xG?</a:t>
+            </a:r>
+            <a:endParaRPr lang="id-ID" sz="4000" dirty="0"/>
+          </a:p>
+        </p:txBody>
+      </p:sp>
+    </p:spTree>
+    <p:extLst>
+      <p:ext uri="{BB962C8B-B14F-4D97-AF65-F5344CB8AC3E}">
+        <p14:creationId xmlns:p14="http://schemas.microsoft.com/office/powerpoint/2010/main" val="4212917468"/>
+      </p:ext>
+    </p:extLst>
+  </p:cSld>
+  <p:clrMapOvr>
+    <a:masterClrMapping/>
+  </p:clrMapOvr>
+</p:sld>
+</file>
+
+<file path=ppt/slides/slide12.xml><?xml version="1.0" encoding="utf-8"?>
+<p:sld xmlns:a="http://schemas.openxmlformats.org/drawingml/2006/main" xmlns:r="http://schemas.openxmlformats.org/officeDocument/2006/relationships" xmlns:p="http://schemas.openxmlformats.org/presentationml/2006/main">
+  <p:cSld>
+    <p:spTree>
+      <p:nvGrpSpPr>
+        <p:cNvPr id="1" name=""/>
+        <p:cNvGrpSpPr/>
+        <p:nvPr/>
+      </p:nvGrpSpPr>
+      <p:grpSpPr>
+        <a:xfrm>
+          <a:off x="0" y="0"/>
+          <a:ext cx="0" cy="0"/>
+          <a:chOff x="0" y="0"/>
+          <a:chExt cx="0" cy="0"/>
+        </a:xfrm>
+      </p:grpSpPr>
+      <p:sp>
+        <p:nvSpPr>
+          <p:cNvPr id="2" name="Judul 1">
+            <a:extLst>
+              <a:ext uri="{FF2B5EF4-FFF2-40B4-BE49-F238E27FC236}">
+                <a16:creationId xmlns:a16="http://schemas.microsoft.com/office/drawing/2014/main" id="{27A6F7BB-30A8-4980-AD4A-2FB0B53FA6C9}"/>
+              </a:ext>
+            </a:extLst>
+          </p:cNvPr>
+          <p:cNvSpPr>
+            <a:spLocks noGrp="1"/>
+          </p:cNvSpPr>
+          <p:nvPr>
+            <p:ph type="title"/>
+          </p:nvPr>
+        </p:nvSpPr>
+        <p:spPr>
+          <a:xfrm>
             <a:off x="750430" y="381000"/>
             <a:ext cx="10678142" cy="1325563"/>
           </a:xfrm>
@@ -17563,7 +18181,7 @@
             <a:pPr rtl="0"/>
             <a:fld id="{423EE75F-42B8-4E1A-83C6-1B72B3C0E408}" type="datetime1">
               <a:rPr lang="id-ID" smtClean="0"/>
-              <a:t>11/09/2025</a:t>
+              <a:t>14/10/2025</a:t>
             </a:fld>
             <a:endParaRPr lang="id-ID"/>
           </a:p>
@@ -17633,7 +18251,7 @@
             <a:fld id="{294A09A9-5501-47C1-A89A-A340965A2BE2}" type="slidenum">
               <a:rPr lang="id-ID" smtClean="0"/>
               <a:pPr rtl="0"/>
-              <a:t>10</a:t>
+              <a:t>12</a:t>
             </a:fld>
             <a:endParaRPr lang="id-ID"/>
           </a:p>
@@ -17961,7 +18579,7 @@
 </p:sld>
 </file>
 
-<file path=ppt/slides/slide11.xml><?xml version="1.0" encoding="utf-8"?>
+<file path=ppt/slides/slide13.xml><?xml version="1.0" encoding="utf-8"?>
 <p:sld xmlns:a="http://schemas.openxmlformats.org/drawingml/2006/main" xmlns:r="http://schemas.openxmlformats.org/officeDocument/2006/relationships" xmlns:p="http://schemas.openxmlformats.org/presentationml/2006/main">
   <p:cSld>
     <p:spTree>
@@ -18130,7 +18748,7 @@
 </p:sld>
 </file>
 
-<file path=ppt/slides/slide12.xml><?xml version="1.0" encoding="utf-8"?>
+<file path=ppt/slides/slide14.xml><?xml version="1.0" encoding="utf-8"?>
 <p:sld xmlns:a="http://schemas.openxmlformats.org/drawingml/2006/main" xmlns:r="http://schemas.openxmlformats.org/officeDocument/2006/relationships" xmlns:p="http://schemas.openxmlformats.org/presentationml/2006/main">
   <p:cSld>
     <p:spTree>
@@ -18566,7 +19184,7 @@
 </p:sld>
 </file>
 
-<file path=ppt/slides/slide13.xml><?xml version="1.0" encoding="utf-8"?>
+<file path=ppt/slides/slide15.xml><?xml version="1.0" encoding="utf-8"?>
 <p:sld xmlns:a="http://schemas.openxmlformats.org/drawingml/2006/main" xmlns:r="http://schemas.openxmlformats.org/officeDocument/2006/relationships" xmlns:p="http://schemas.openxmlformats.org/presentationml/2006/main">
   <p:cSld>
     <p:spTree>
@@ -18613,7 +19231,7 @@
             <a:pPr rtl="0"/>
             <a:fld id="{A808DD98-197B-46F5-A6AA-BDA332D7E685}" type="datetime1">
               <a:rPr lang="id-ID" smtClean="0"/>
-              <a:t>11/09/2025</a:t>
+              <a:t>14/10/2025</a:t>
             </a:fld>
             <a:endParaRPr lang="id-ID"/>
           </a:p>
@@ -18678,7 +19296,7 @@
             <a:fld id="{294A09A9-5501-47C1-A89A-A340965A2BE2}" type="slidenum">
               <a:rPr lang="id-ID" smtClean="0"/>
               <a:pPr rtl="0"/>
-              <a:t>13</a:t>
+              <a:t>15</a:t>
             </a:fld>
             <a:endParaRPr lang="id-ID"/>
           </a:p>
@@ -18738,7 +19356,7 @@
 </p:sld>
 </file>
 
-<file path=ppt/slides/slide14.xml><?xml version="1.0" encoding="utf-8"?>
+<file path=ppt/slides/slide16.xml><?xml version="1.0" encoding="utf-8"?>
 <p:sld xmlns:a="http://schemas.openxmlformats.org/drawingml/2006/main" xmlns:r="http://schemas.openxmlformats.org/officeDocument/2006/relationships" xmlns:p="http://schemas.openxmlformats.org/presentationml/2006/main">
   <p:cSld>
     <p:spTree>
@@ -19031,7 +19649,7 @@
 </p:sld>
 </file>
 
-<file path=ppt/slides/slide15.xml><?xml version="1.0" encoding="utf-8"?>
+<file path=ppt/slides/slide17.xml><?xml version="1.0" encoding="utf-8"?>
 <p:sld xmlns:a="http://schemas.openxmlformats.org/drawingml/2006/main" xmlns:r="http://schemas.openxmlformats.org/officeDocument/2006/relationships" xmlns:p="http://schemas.openxmlformats.org/presentationml/2006/main">
   <p:cSld>
     <p:spTree>
@@ -19130,7 +19748,7 @@
             <a:fld id="{294A09A9-5501-47C1-A89A-A340965A2BE2}" type="slidenum">
               <a:rPr lang="id-ID" smtClean="0"/>
               <a:pPr rtl="0"/>
-              <a:t>15</a:t>
+              <a:t>17</a:t>
             </a:fld>
             <a:endParaRPr lang="id-ID"/>
           </a:p>
@@ -19437,7 +20055,7 @@
 </p:sld>
 </file>
 
-<file path=ppt/slides/slide16.xml><?xml version="1.0" encoding="utf-8"?>
+<file path=ppt/slides/slide18.xml><?xml version="1.0" encoding="utf-8"?>
 <p:sld xmlns:a="http://schemas.openxmlformats.org/drawingml/2006/main" xmlns:r="http://schemas.openxmlformats.org/officeDocument/2006/relationships" xmlns:p="http://schemas.openxmlformats.org/presentationml/2006/main">
   <p:cSld>
     <p:spTree>
@@ -19527,7 +20145,7 @@
             <a:fld id="{294A09A9-5501-47C1-A89A-A340965A2BE2}" type="slidenum">
               <a:rPr lang="id-ID" smtClean="0"/>
               <a:pPr rtl="0"/>
-              <a:t>16</a:t>
+              <a:t>18</a:t>
             </a:fld>
             <a:endParaRPr lang="id-ID"/>
           </a:p>
@@ -20460,12 +21078,18 @@
 </p:sld>
 </file>
 
-<file path=ppt/slides/slide17.xml><?xml version="1.0" encoding="utf-8"?>
+<file path=ppt/slides/slide19.xml><?xml version="1.0" encoding="utf-8"?>
 <p:sld xmlns:a="http://schemas.openxmlformats.org/drawingml/2006/main" xmlns:r="http://schemas.openxmlformats.org/officeDocument/2006/relationships" xmlns:p="http://schemas.openxmlformats.org/presentationml/2006/main">
   <p:cSld>
     <p:spTree>
       <p:nvGrpSpPr>
-        <p:cNvPr id="1" name=""/>
+        <p:cNvPr id="1" name="">
+          <a:extLst>
+            <a:ext uri="{FF2B5EF4-FFF2-40B4-BE49-F238E27FC236}">
+              <a16:creationId xmlns:a16="http://schemas.microsoft.com/office/drawing/2014/main" id="{CDC441C0-EFF5-6275-0516-D1095C5FB7D9}"/>
+            </a:ext>
+          </a:extLst>
+        </p:cNvPr>
         <p:cNvGrpSpPr/>
         <p:nvPr/>
       </p:nvGrpSpPr>
@@ -20482,7 +21106,7 @@
           <p:cNvPr id="2" name="Judul 1">
             <a:extLst>
               <a:ext uri="{FF2B5EF4-FFF2-40B4-BE49-F238E27FC236}">
-                <a16:creationId xmlns:a16="http://schemas.microsoft.com/office/drawing/2014/main" id="{33AF65A7-995A-9F45-891C-82D9B9D40801}"/>
+                <a16:creationId xmlns:a16="http://schemas.microsoft.com/office/drawing/2014/main" id="{95B12D43-6252-287A-5A04-723E6A852B22}"/>
               </a:ext>
             </a:extLst>
           </p:cNvPr>
@@ -20519,7 +21143,7 @@
           <p:cNvPr id="3" name="Tampungan Tanggal 2">
             <a:extLst>
               <a:ext uri="{FF2B5EF4-FFF2-40B4-BE49-F238E27FC236}">
-                <a16:creationId xmlns:a16="http://schemas.microsoft.com/office/drawing/2014/main" id="{8D3F7063-A64B-CB42-8BBF-BF52424269A8}"/>
+                <a16:creationId xmlns:a16="http://schemas.microsoft.com/office/drawing/2014/main" id="{F645C5A0-EC07-0352-097A-B1FF3FE3CA99}"/>
               </a:ext>
             </a:extLst>
           </p:cNvPr>
@@ -20538,7 +21162,7 @@
             <a:pPr rtl="0"/>
             <a:fld id="{A808DD98-197B-46F5-A6AA-BDA332D7E685}" type="datetime1">
               <a:rPr lang="id-ID" smtClean="0"/>
-              <a:t>11/09/2025</a:t>
+              <a:t>14/10/2025</a:t>
             </a:fld>
             <a:endParaRPr lang="id-ID"/>
           </a:p>
@@ -20549,7 +21173,7 @@
           <p:cNvPr id="5" name="Tampungan Nomor Slide 4">
             <a:extLst>
               <a:ext uri="{FF2B5EF4-FFF2-40B4-BE49-F238E27FC236}">
-                <a16:creationId xmlns:a16="http://schemas.microsoft.com/office/drawing/2014/main" id="{7003A5E2-8F37-D546-BCD9-24A2037BB54D}"/>
+                <a16:creationId xmlns:a16="http://schemas.microsoft.com/office/drawing/2014/main" id="{EEDDF600-206D-37A2-5704-42ADE2DC06CB}"/>
               </a:ext>
             </a:extLst>
           </p:cNvPr>
@@ -20569,7 +21193,7 @@
             <a:fld id="{294A09A9-5501-47C1-A89A-A340965A2BE2}" type="slidenum">
               <a:rPr lang="id-ID" smtClean="0"/>
               <a:pPr rtl="0"/>
-              <a:t>17</a:t>
+              <a:t>19</a:t>
             </a:fld>
             <a:endParaRPr lang="id-ID"/>
           </a:p>
@@ -20580,7 +21204,7 @@
           <p:cNvPr id="4" name="Picture 3">
             <a:extLst>
               <a:ext uri="{FF2B5EF4-FFF2-40B4-BE49-F238E27FC236}">
-                <a16:creationId xmlns:a16="http://schemas.microsoft.com/office/drawing/2014/main" id="{3F1ED756-FD95-7184-168D-5EB4178CF920}"/>
+                <a16:creationId xmlns:a16="http://schemas.microsoft.com/office/drawing/2014/main" id="{1137B5F6-817B-71B9-4E37-FF685014D703}"/>
               </a:ext>
             </a:extLst>
           </p:cNvPr>
@@ -20621,7 +21245,7 @@
     </p:spTree>
     <p:extLst>
       <p:ext uri="{BB962C8B-B14F-4D97-AF65-F5344CB8AC3E}">
-        <p14:creationId xmlns:p14="http://schemas.microsoft.com/office/powerpoint/2010/main" val="2639983765"/>
+        <p14:creationId xmlns:p14="http://schemas.microsoft.com/office/powerpoint/2010/main" val="397964921"/>
       </p:ext>
     </p:extLst>
   </p:cSld>
@@ -20631,7 +21255,214 @@
 </p:sld>
 </file>
 
-<file path=ppt/slides/slide18.xml><?xml version="1.0" encoding="utf-8"?>
+<file path=ppt/slides/slide2.xml><?xml version="1.0" encoding="utf-8"?>
+<p:sld xmlns:a="http://schemas.openxmlformats.org/drawingml/2006/main" xmlns:r="http://schemas.openxmlformats.org/officeDocument/2006/relationships" xmlns:p="http://schemas.openxmlformats.org/presentationml/2006/main">
+  <p:cSld>
+    <p:spTree>
+      <p:nvGrpSpPr>
+        <p:cNvPr id="1" name="">
+          <a:extLst>
+            <a:ext uri="{FF2B5EF4-FFF2-40B4-BE49-F238E27FC236}">
+              <a16:creationId xmlns:a16="http://schemas.microsoft.com/office/drawing/2014/main" id="{CAE7D148-4E9F-218D-0CAE-EFC01133DE41}"/>
+            </a:ext>
+          </a:extLst>
+        </p:cNvPr>
+        <p:cNvGrpSpPr/>
+        <p:nvPr/>
+      </p:nvGrpSpPr>
+      <p:grpSpPr>
+        <a:xfrm>
+          <a:off x="0" y="0"/>
+          <a:ext cx="0" cy="0"/>
+          <a:chOff x="0" y="0"/>
+          <a:chExt cx="0" cy="0"/>
+        </a:xfrm>
+      </p:grpSpPr>
+      <p:sp>
+        <p:nvSpPr>
+          <p:cNvPr id="2" name="Judul 1">
+            <a:extLst>
+              <a:ext uri="{FF2B5EF4-FFF2-40B4-BE49-F238E27FC236}">
+                <a16:creationId xmlns:a16="http://schemas.microsoft.com/office/drawing/2014/main" id="{F7B15747-D2A1-592F-EA5B-B41F5AAF2A8A}"/>
+              </a:ext>
+            </a:extLst>
+          </p:cNvPr>
+          <p:cNvSpPr>
+            <a:spLocks noGrp="1"/>
+          </p:cNvSpPr>
+          <p:nvPr>
+            <p:ph type="title"/>
+          </p:nvPr>
+        </p:nvSpPr>
+        <p:spPr>
+          <a:xfrm>
+            <a:off x="1167492" y="381000"/>
+            <a:ext cx="9779183" cy="1325563"/>
+          </a:xfrm>
+        </p:spPr>
+        <p:txBody>
+          <a:bodyPr rtlCol="0"/>
+          <a:lstStyle/>
+          <a:p>
+            <a:pPr rtl="0"/>
+            <a:r>
+              <a:rPr lang="en-GB" dirty="0"/>
+              <a:t>Al-</a:t>
+            </a:r>
+            <a:r>
+              <a:rPr lang="en-GB" dirty="0" err="1"/>
+              <a:t>Alaq</a:t>
+            </a:r>
+            <a:r>
+              <a:rPr lang="en-GB" dirty="0"/>
+              <a:t> 1-5</a:t>
+            </a:r>
+            <a:endParaRPr lang="id-ID" dirty="0"/>
+          </a:p>
+        </p:txBody>
+      </p:sp>
+      <p:sp>
+        <p:nvSpPr>
+          <p:cNvPr id="4" name="Tampungan Konten 3">
+            <a:extLst>
+              <a:ext uri="{FF2B5EF4-FFF2-40B4-BE49-F238E27FC236}">
+                <a16:creationId xmlns:a16="http://schemas.microsoft.com/office/drawing/2014/main" id="{735DD3C0-4274-8316-486D-64F0F6768A22}"/>
+              </a:ext>
+            </a:extLst>
+          </p:cNvPr>
+          <p:cNvSpPr>
+            <a:spLocks noGrp="1"/>
+          </p:cNvSpPr>
+          <p:nvPr>
+            <p:ph idx="1"/>
+          </p:nvPr>
+        </p:nvSpPr>
+        <p:spPr>
+          <a:xfrm>
+            <a:off x="1167492" y="2020529"/>
+            <a:ext cx="9157607" cy="3347884"/>
+          </a:xfrm>
+        </p:spPr>
+        <p:txBody>
+          <a:bodyPr vert="horz" lIns="91440" tIns="45720" rIns="91440" bIns="45720" rtlCol="0" anchor="t">
+            <a:normAutofit fontScale="85000" lnSpcReduction="10000"/>
+          </a:bodyPr>
+          <a:lstStyle/>
+          <a:p>
+            <a:pPr algn="r"/>
+            <a:r>
+              <a:rPr lang="ar-AE" sz="4800" dirty="0"/>
+              <a:t>ٱقْرَأْ بِٱسْمِ رَبِّكَ ٱلَّذِى خَلَقَ ١خَلَقَ ٱلْإِنسَـٰنَ مِنْ عَلَقٍ ٢ٱقْرَأْ وَرَبُّكَ ٱلْأَكْرَمُ ٣ٱلَّذِى عَلَّمَ بِٱلْقَلَمِ ٤عَلَّمَ ٱلْإِنسَـٰنَ مَا لَمْ يَعْلَمْ </a:t>
+            </a:r>
+            <a:r>
+              <a:rPr lang="ar-AE" sz="3200" dirty="0"/>
+              <a:t>٥</a:t>
+            </a:r>
+            <a:endParaRPr lang="en-GB" sz="3200" dirty="0"/>
+          </a:p>
+          <a:p>
+            <a:r>
+              <a:rPr lang="en-GB" sz="3200" dirty="0"/>
+              <a:t>1. </a:t>
+            </a:r>
+            <a:r>
+              <a:rPr lang="en-GB" sz="3200" dirty="0" err="1"/>
+              <a:t>Bacalah</a:t>
+            </a:r>
+            <a:r>
+              <a:rPr lang="en-GB" sz="3200" dirty="0"/>
+              <a:t> </a:t>
+            </a:r>
+            <a:r>
+              <a:rPr lang="en-GB" sz="3200" dirty="0" err="1"/>
+              <a:t>dengan</a:t>
+            </a:r>
+            <a:r>
+              <a:rPr lang="en-GB" sz="3200" dirty="0"/>
+              <a:t> (</a:t>
+            </a:r>
+            <a:r>
+              <a:rPr lang="en-GB" sz="3200" dirty="0" err="1"/>
+              <a:t>menyebut</a:t>
+            </a:r>
+            <a:r>
+              <a:rPr lang="en-GB" sz="3200" dirty="0"/>
+              <a:t>) nama </a:t>
+            </a:r>
+            <a:r>
+              <a:rPr lang="en-GB" sz="3200" dirty="0" err="1"/>
+              <a:t>Tuhanmu</a:t>
+            </a:r>
+            <a:r>
+              <a:rPr lang="en-GB" sz="3200" dirty="0"/>
+              <a:t> yang </a:t>
+            </a:r>
+            <a:r>
+              <a:rPr lang="en-GB" sz="3200" dirty="0" err="1"/>
+              <a:t>menciptakan</a:t>
+            </a:r>
+            <a:r>
+              <a:rPr lang="en-GB" sz="3200" dirty="0"/>
+              <a:t> 2. </a:t>
+            </a:r>
+            <a:r>
+              <a:rPr lang="pt-BR" sz="3200" dirty="0"/>
+              <a:t>Dia telah menciptakan manusia dari segumpal darah 3. Bacalah, dan Tuhanmulah Yang Mahamulia 4. Yang mengajar (manusia) dengan pena 5. Dia mengajarkan manusia apa yang tidak diketahuinya.</a:t>
+            </a:r>
+            <a:endParaRPr lang="ar-AE" sz="3200" dirty="0"/>
+          </a:p>
+        </p:txBody>
+      </p:sp>
+      <p:sp>
+        <p:nvSpPr>
+          <p:cNvPr id="9" name="Tampungan Nomor Slide 8">
+            <a:extLst>
+              <a:ext uri="{FF2B5EF4-FFF2-40B4-BE49-F238E27FC236}">
+                <a16:creationId xmlns:a16="http://schemas.microsoft.com/office/drawing/2014/main" id="{D67054B4-F7B9-3AEE-8A0C-375D9ADED946}"/>
+              </a:ext>
+            </a:extLst>
+          </p:cNvPr>
+          <p:cNvSpPr>
+            <a:spLocks noGrp="1"/>
+          </p:cNvSpPr>
+          <p:nvPr>
+            <p:ph type="sldNum" sz="quarter" idx="4"/>
+          </p:nvPr>
+        </p:nvSpPr>
+        <p:spPr>
+          <a:xfrm>
+            <a:off x="10153276" y="6356350"/>
+            <a:ext cx="1657723" cy="365125"/>
+          </a:xfrm>
+        </p:spPr>
+        <p:txBody>
+          <a:bodyPr rtlCol="0"/>
+          <a:lstStyle/>
+          <a:p>
+            <a:pPr rtl="0"/>
+            <a:fld id="{294A09A9-5501-47C1-A89A-A340965A2BE2}" type="slidenum">
+              <a:rPr lang="id-ID" smtClean="0"/>
+              <a:pPr rtl="0"/>
+              <a:t>2</a:t>
+            </a:fld>
+            <a:endParaRPr lang="id-ID"/>
+          </a:p>
+        </p:txBody>
+      </p:sp>
+    </p:spTree>
+    <p:extLst>
+      <p:ext uri="{BB962C8B-B14F-4D97-AF65-F5344CB8AC3E}">
+        <p14:creationId xmlns:p14="http://schemas.microsoft.com/office/powerpoint/2010/main" val="4192597707"/>
+      </p:ext>
+    </p:extLst>
+  </p:cSld>
+  <p:clrMapOvr>
+    <a:masterClrMapping/>
+  </p:clrMapOvr>
+</p:sld>
+</file>
+
+<file path=ppt/slides/slide20.xml><?xml version="1.0" encoding="utf-8"?>
 <p:sld xmlns:a="http://schemas.openxmlformats.org/drawingml/2006/main" xmlns:r="http://schemas.openxmlformats.org/officeDocument/2006/relationships" xmlns:p="http://schemas.openxmlformats.org/presentationml/2006/main">
   <p:cSld>
     <p:spTree>
@@ -20823,7 +21654,7 @@
             <a:fld id="{294A09A9-5501-47C1-A89A-A340965A2BE2}" type="slidenum">
               <a:rPr lang="id-ID" smtClean="0"/>
               <a:pPr rtl="0"/>
-              <a:t>18</a:t>
+              <a:t>20</a:t>
             </a:fld>
             <a:endParaRPr lang="id-ID"/>
           </a:p>
@@ -20885,7 +21716,7 @@
 </p:sld>
 </file>
 
-<file path=ppt/slides/slide19.xml><?xml version="1.0" encoding="utf-8"?>
+<file path=ppt/slides/slide21.xml><?xml version="1.0" encoding="utf-8"?>
 <p:sld xmlns:a="http://schemas.openxmlformats.org/drawingml/2006/main" xmlns:r="http://schemas.openxmlformats.org/officeDocument/2006/relationships" xmlns:p="http://schemas.openxmlformats.org/presentationml/2006/main">
   <p:cSld>
     <p:spTree>
@@ -20966,7 +21797,7 @@
             <a:pPr rtl="0"/>
             <a:fld id="{294A09A9-5501-47C1-A89A-A340965A2BE2}" type="slidenum">
               <a:rPr lang="id-ID" smtClean="0"/>
-              <a:t>19</a:t>
+              <a:t>21</a:t>
             </a:fld>
             <a:endParaRPr lang="id-ID" dirty="0"/>
           </a:p>
@@ -21253,214 +22084,7 @@
 </p:sld>
 </file>
 
-<file path=ppt/slides/slide2.xml><?xml version="1.0" encoding="utf-8"?>
-<p:sld xmlns:a="http://schemas.openxmlformats.org/drawingml/2006/main" xmlns:r="http://schemas.openxmlformats.org/officeDocument/2006/relationships" xmlns:p="http://schemas.openxmlformats.org/presentationml/2006/main">
-  <p:cSld>
-    <p:spTree>
-      <p:nvGrpSpPr>
-        <p:cNvPr id="1" name="">
-          <a:extLst>
-            <a:ext uri="{FF2B5EF4-FFF2-40B4-BE49-F238E27FC236}">
-              <a16:creationId xmlns:a16="http://schemas.microsoft.com/office/drawing/2014/main" id="{CAE7D148-4E9F-218D-0CAE-EFC01133DE41}"/>
-            </a:ext>
-          </a:extLst>
-        </p:cNvPr>
-        <p:cNvGrpSpPr/>
-        <p:nvPr/>
-      </p:nvGrpSpPr>
-      <p:grpSpPr>
-        <a:xfrm>
-          <a:off x="0" y="0"/>
-          <a:ext cx="0" cy="0"/>
-          <a:chOff x="0" y="0"/>
-          <a:chExt cx="0" cy="0"/>
-        </a:xfrm>
-      </p:grpSpPr>
-      <p:sp>
-        <p:nvSpPr>
-          <p:cNvPr id="2" name="Judul 1">
-            <a:extLst>
-              <a:ext uri="{FF2B5EF4-FFF2-40B4-BE49-F238E27FC236}">
-                <a16:creationId xmlns:a16="http://schemas.microsoft.com/office/drawing/2014/main" id="{F7B15747-D2A1-592F-EA5B-B41F5AAF2A8A}"/>
-              </a:ext>
-            </a:extLst>
-          </p:cNvPr>
-          <p:cNvSpPr>
-            <a:spLocks noGrp="1"/>
-          </p:cNvSpPr>
-          <p:nvPr>
-            <p:ph type="title"/>
-          </p:nvPr>
-        </p:nvSpPr>
-        <p:spPr>
-          <a:xfrm>
-            <a:off x="1167492" y="381000"/>
-            <a:ext cx="9779183" cy="1325563"/>
-          </a:xfrm>
-        </p:spPr>
-        <p:txBody>
-          <a:bodyPr rtlCol="0"/>
-          <a:lstStyle/>
-          <a:p>
-            <a:pPr rtl="0"/>
-            <a:r>
-              <a:rPr lang="en-GB" dirty="0"/>
-              <a:t>Al-</a:t>
-            </a:r>
-            <a:r>
-              <a:rPr lang="en-GB" dirty="0" err="1"/>
-              <a:t>Alaq</a:t>
-            </a:r>
-            <a:r>
-              <a:rPr lang="en-GB" dirty="0"/>
-              <a:t> 1-5</a:t>
-            </a:r>
-            <a:endParaRPr lang="id-ID" dirty="0"/>
-          </a:p>
-        </p:txBody>
-      </p:sp>
-      <p:sp>
-        <p:nvSpPr>
-          <p:cNvPr id="4" name="Tampungan Konten 3">
-            <a:extLst>
-              <a:ext uri="{FF2B5EF4-FFF2-40B4-BE49-F238E27FC236}">
-                <a16:creationId xmlns:a16="http://schemas.microsoft.com/office/drawing/2014/main" id="{735DD3C0-4274-8316-486D-64F0F6768A22}"/>
-              </a:ext>
-            </a:extLst>
-          </p:cNvPr>
-          <p:cNvSpPr>
-            <a:spLocks noGrp="1"/>
-          </p:cNvSpPr>
-          <p:nvPr>
-            <p:ph idx="1"/>
-          </p:nvPr>
-        </p:nvSpPr>
-        <p:spPr>
-          <a:xfrm>
-            <a:off x="1167492" y="2020529"/>
-            <a:ext cx="9157607" cy="3347884"/>
-          </a:xfrm>
-        </p:spPr>
-        <p:txBody>
-          <a:bodyPr vert="horz" lIns="91440" tIns="45720" rIns="91440" bIns="45720" rtlCol="0" anchor="t">
-            <a:normAutofit fontScale="85000" lnSpcReduction="10000"/>
-          </a:bodyPr>
-          <a:lstStyle/>
-          <a:p>
-            <a:pPr algn="r"/>
-            <a:r>
-              <a:rPr lang="ar-AE" sz="4800" dirty="0"/>
-              <a:t>ٱقْرَأْ بِٱسْمِ رَبِّكَ ٱلَّذِى خَلَقَ ١خَلَقَ ٱلْإِنسَـٰنَ مِنْ عَلَقٍ ٢ٱقْرَأْ وَرَبُّكَ ٱلْأَكْرَمُ ٣ٱلَّذِى عَلَّمَ بِٱلْقَلَمِ ٤عَلَّمَ ٱلْإِنسَـٰنَ مَا لَمْ يَعْلَمْ </a:t>
-            </a:r>
-            <a:r>
-              <a:rPr lang="ar-AE" sz="3200" dirty="0"/>
-              <a:t>٥</a:t>
-            </a:r>
-            <a:endParaRPr lang="en-GB" sz="3200" dirty="0"/>
-          </a:p>
-          <a:p>
-            <a:r>
-              <a:rPr lang="en-GB" sz="3200" dirty="0"/>
-              <a:t>1. </a:t>
-            </a:r>
-            <a:r>
-              <a:rPr lang="en-GB" sz="3200" dirty="0" err="1"/>
-              <a:t>Bacalah</a:t>
-            </a:r>
-            <a:r>
-              <a:rPr lang="en-GB" sz="3200" dirty="0"/>
-              <a:t> </a:t>
-            </a:r>
-            <a:r>
-              <a:rPr lang="en-GB" sz="3200" dirty="0" err="1"/>
-              <a:t>dengan</a:t>
-            </a:r>
-            <a:r>
-              <a:rPr lang="en-GB" sz="3200" dirty="0"/>
-              <a:t> (</a:t>
-            </a:r>
-            <a:r>
-              <a:rPr lang="en-GB" sz="3200" dirty="0" err="1"/>
-              <a:t>menyebut</a:t>
-            </a:r>
-            <a:r>
-              <a:rPr lang="en-GB" sz="3200" dirty="0"/>
-              <a:t>) nama </a:t>
-            </a:r>
-            <a:r>
-              <a:rPr lang="en-GB" sz="3200" dirty="0" err="1"/>
-              <a:t>Tuhanmu</a:t>
-            </a:r>
-            <a:r>
-              <a:rPr lang="en-GB" sz="3200" dirty="0"/>
-              <a:t> yang </a:t>
-            </a:r>
-            <a:r>
-              <a:rPr lang="en-GB" sz="3200" dirty="0" err="1"/>
-              <a:t>menciptakan</a:t>
-            </a:r>
-            <a:r>
-              <a:rPr lang="en-GB" sz="3200" dirty="0"/>
-              <a:t> 2. </a:t>
-            </a:r>
-            <a:r>
-              <a:rPr lang="pt-BR" sz="3200" dirty="0"/>
-              <a:t>Dia telah menciptakan manusia dari segumpal darah 3. Bacalah, dan Tuhanmulah Yang Mahamulia 4. Yang mengajar (manusia) dengan pena 5. Dia mengajarkan manusia apa yang tidak diketahuinya.</a:t>
-            </a:r>
-            <a:endParaRPr lang="ar-AE" sz="3200" dirty="0"/>
-          </a:p>
-        </p:txBody>
-      </p:sp>
-      <p:sp>
-        <p:nvSpPr>
-          <p:cNvPr id="9" name="Tampungan Nomor Slide 8">
-            <a:extLst>
-              <a:ext uri="{FF2B5EF4-FFF2-40B4-BE49-F238E27FC236}">
-                <a16:creationId xmlns:a16="http://schemas.microsoft.com/office/drawing/2014/main" id="{D67054B4-F7B9-3AEE-8A0C-375D9ADED946}"/>
-              </a:ext>
-            </a:extLst>
-          </p:cNvPr>
-          <p:cNvSpPr>
-            <a:spLocks noGrp="1"/>
-          </p:cNvSpPr>
-          <p:nvPr>
-            <p:ph type="sldNum" sz="quarter" idx="4"/>
-          </p:nvPr>
-        </p:nvSpPr>
-        <p:spPr>
-          <a:xfrm>
-            <a:off x="10153276" y="6356350"/>
-            <a:ext cx="1657723" cy="365125"/>
-          </a:xfrm>
-        </p:spPr>
-        <p:txBody>
-          <a:bodyPr rtlCol="0"/>
-          <a:lstStyle/>
-          <a:p>
-            <a:pPr rtl="0"/>
-            <a:fld id="{294A09A9-5501-47C1-A89A-A340965A2BE2}" type="slidenum">
-              <a:rPr lang="id-ID" smtClean="0"/>
-              <a:pPr rtl="0"/>
-              <a:t>2</a:t>
-            </a:fld>
-            <a:endParaRPr lang="id-ID"/>
-          </a:p>
-        </p:txBody>
-      </p:sp>
-    </p:spTree>
-    <p:extLst>
-      <p:ext uri="{BB962C8B-B14F-4D97-AF65-F5344CB8AC3E}">
-        <p14:creationId xmlns:p14="http://schemas.microsoft.com/office/powerpoint/2010/main" val="4192597707"/>
-      </p:ext>
-    </p:extLst>
-  </p:cSld>
-  <p:clrMapOvr>
-    <a:masterClrMapping/>
-  </p:clrMapOvr>
-</p:sld>
-</file>
-
-<file path=ppt/slides/slide20.xml><?xml version="1.0" encoding="utf-8"?>
+<file path=ppt/slides/slide22.xml><?xml version="1.0" encoding="utf-8"?>
 <p:sld xmlns:a="http://schemas.openxmlformats.org/drawingml/2006/main" xmlns:r="http://schemas.openxmlformats.org/officeDocument/2006/relationships" xmlns:p="http://schemas.openxmlformats.org/presentationml/2006/main">
   <p:cSld>
     <p:spTree>
@@ -21639,7 +22263,7 @@
             <a:fld id="{294A09A9-5501-47C1-A89A-A340965A2BE2}" type="slidenum">
               <a:rPr lang="id-ID" smtClean="0"/>
               <a:pPr rtl="0"/>
-              <a:t>20</a:t>
+              <a:t>22</a:t>
             </a:fld>
             <a:endParaRPr lang="id-ID"/>
           </a:p>
@@ -21701,7 +22325,7 @@
 </p:sld>
 </file>
 
-<file path=ppt/slides/slide21.xml><?xml version="1.0" encoding="utf-8"?>
+<file path=ppt/slides/slide23.xml><?xml version="1.0" encoding="utf-8"?>
 <p:sld xmlns:a="http://schemas.openxmlformats.org/drawingml/2006/main" xmlns:r="http://schemas.openxmlformats.org/officeDocument/2006/relationships" xmlns:p="http://schemas.openxmlformats.org/presentationml/2006/main">
   <p:cSld>
     <p:spTree>
@@ -21785,7 +22409,7 @@
             <a:pPr rtl="0"/>
             <a:fld id="{A808DD98-197B-46F5-A6AA-BDA332D7E685}" type="datetime1">
               <a:rPr lang="id-ID" smtClean="0"/>
-              <a:t>11/09/2025</a:t>
+              <a:t>14/10/2025</a:t>
             </a:fld>
             <a:endParaRPr lang="id-ID"/>
           </a:p>
@@ -21816,7 +22440,7 @@
             <a:fld id="{294A09A9-5501-47C1-A89A-A340965A2BE2}" type="slidenum">
               <a:rPr lang="id-ID" smtClean="0"/>
               <a:pPr rtl="0"/>
-              <a:t>21</a:t>
+              <a:t>23</a:t>
             </a:fld>
             <a:endParaRPr lang="id-ID"/>
           </a:p>
@@ -21866,7 +22490,7 @@
 </p:sld>
 </file>
 
-<file path=ppt/slides/slide22.xml><?xml version="1.0" encoding="utf-8"?>
+<file path=ppt/slides/slide24.xml><?xml version="1.0" encoding="utf-8"?>
 <p:sld xmlns:a="http://schemas.openxmlformats.org/drawingml/2006/main" xmlns:r="http://schemas.openxmlformats.org/officeDocument/2006/relationships" xmlns:p="http://schemas.openxmlformats.org/presentationml/2006/main">
   <p:cSld>
     <p:spTree>
@@ -21996,7 +22620,7 @@
             <a:pPr rtl="0"/>
             <a:fld id="{70C69C4D-CAFD-4E0E-94E0-4B1709D96441}" type="datetime1">
               <a:rPr lang="id-ID" smtClean="0"/>
-              <a:t>11/09/2025</a:t>
+              <a:t>14/10/2025</a:t>
             </a:fld>
             <a:endParaRPr lang="id-ID"/>
           </a:p>
@@ -22032,7 +22656,7 @@
             <a:fld id="{294A09A9-5501-47C1-A89A-A340965A2BE2}" type="slidenum">
               <a:rPr lang="id-ID" smtClean="0"/>
               <a:pPr rtl="0"/>
-              <a:t>22</a:t>
+              <a:t>24</a:t>
             </a:fld>
             <a:endParaRPr lang="id-ID"/>
           </a:p>
@@ -22524,7 +23148,7 @@
 </p:sld>
 </file>
 
-<file path=ppt/slides/slide23.xml><?xml version="1.0" encoding="utf-8"?>
+<file path=ppt/slides/slide25.xml><?xml version="1.0" encoding="utf-8"?>
 <p:sld xmlns:a="http://schemas.openxmlformats.org/drawingml/2006/main" xmlns:r="http://schemas.openxmlformats.org/officeDocument/2006/relationships" xmlns:p="http://schemas.openxmlformats.org/presentationml/2006/main">
   <p:cSld>
     <p:spTree>
@@ -22666,7 +23290,7 @@
             <a:fld id="{294A09A9-5501-47C1-A89A-A340965A2BE2}" type="slidenum">
               <a:rPr lang="id-ID" smtClean="0"/>
               <a:pPr rtl="0"/>
-              <a:t>23</a:t>
+              <a:t>25</a:t>
             </a:fld>
             <a:endParaRPr lang="id-ID"/>
           </a:p>
@@ -22715,7 +23339,7 @@
 </p:sld>
 </file>
 
-<file path=ppt/slides/slide24.xml><?xml version="1.0" encoding="utf-8"?>
+<file path=ppt/slides/slide26.xml><?xml version="1.0" encoding="utf-8"?>
 <p:sld xmlns:a="http://schemas.openxmlformats.org/drawingml/2006/main" xmlns:r="http://schemas.openxmlformats.org/officeDocument/2006/relationships" xmlns:p="http://schemas.openxmlformats.org/presentationml/2006/main">
   <p:cSld>
     <p:spTree>
@@ -22798,7 +23422,7 @@
             <a:fld id="{294A09A9-5501-47C1-A89A-A340965A2BE2}" type="slidenum">
               <a:rPr lang="id-ID" smtClean="0"/>
               <a:pPr rtl="0"/>
-              <a:t>24</a:t>
+              <a:t>26</a:t>
             </a:fld>
             <a:endParaRPr lang="id-ID"/>
           </a:p>
@@ -22958,7 +23582,7 @@
 </p:sld>
 </file>
 
-<file path=ppt/slides/slide25.xml><?xml version="1.0" encoding="utf-8"?>
+<file path=ppt/slides/slide27.xml><?xml version="1.0" encoding="utf-8"?>
 <p:sld xmlns:a="http://schemas.openxmlformats.org/drawingml/2006/main" xmlns:r="http://schemas.openxmlformats.org/officeDocument/2006/relationships" xmlns:p="http://schemas.openxmlformats.org/presentationml/2006/main">
   <p:cSld>
     <p:spTree>
@@ -23043,7 +23667,7 @@
             <a:pPr rtl="0"/>
             <a:fld id="{423EE75F-42B8-4E1A-83C6-1B72B3C0E408}" type="datetime1">
               <a:rPr lang="id-ID" smtClean="0"/>
-              <a:t>11/09/2025</a:t>
+              <a:t>14/10/2025</a:t>
             </a:fld>
             <a:endParaRPr lang="id-ID"/>
           </a:p>
@@ -23079,7 +23703,7 @@
             <a:fld id="{294A09A9-5501-47C1-A89A-A340965A2BE2}" type="slidenum">
               <a:rPr lang="id-ID" smtClean="0"/>
               <a:pPr rtl="0"/>
-              <a:t>25</a:t>
+              <a:t>27</a:t>
             </a:fld>
             <a:endParaRPr lang="id-ID"/>
           </a:p>
@@ -23839,7 +24463,7 @@
 </p:sld>
 </file>
 
-<file path=ppt/slides/slide26.xml><?xml version="1.0" encoding="utf-8"?>
+<file path=ppt/slides/slide28.xml><?xml version="1.0" encoding="utf-8"?>
 <p:sld xmlns:a="http://schemas.openxmlformats.org/drawingml/2006/main" xmlns:r="http://schemas.openxmlformats.org/officeDocument/2006/relationships" xmlns:p="http://schemas.openxmlformats.org/presentationml/2006/main">
   <p:cSld>
     <p:spTree>
@@ -23986,7 +24610,7 @@
             <a:fld id="{294A09A9-5501-47C1-A89A-A340965A2BE2}" type="slidenum">
               <a:rPr lang="id-ID" smtClean="0"/>
               <a:pPr rtl="0"/>
-              <a:t>26</a:t>
+              <a:t>28</a:t>
             </a:fld>
             <a:endParaRPr lang="id-ID"/>
           </a:p>
@@ -24733,7 +25357,7 @@
 </p:sld>
 </file>
 
-<file path=ppt/slides/slide27.xml><?xml version="1.0" encoding="utf-8"?>
+<file path=ppt/slides/slide29.xml><?xml version="1.0" encoding="utf-8"?>
 <p:sld xmlns:a="http://schemas.openxmlformats.org/drawingml/2006/main" xmlns:r="http://schemas.openxmlformats.org/officeDocument/2006/relationships" xmlns:p="http://schemas.openxmlformats.org/presentationml/2006/main">
   <p:cSld>
     <p:spTree>
@@ -24817,7 +25441,7 @@
             <a:pPr rtl="0"/>
             <a:fld id="{A808DD98-197B-46F5-A6AA-BDA332D7E685}" type="datetime1">
               <a:rPr lang="id-ID" smtClean="0"/>
-              <a:t>15/09/2025</a:t>
+              <a:t>14/10/2025</a:t>
             </a:fld>
             <a:endParaRPr lang="id-ID"/>
           </a:p>
@@ -24848,7 +25472,7 @@
             <a:fld id="{294A09A9-5501-47C1-A89A-A340965A2BE2}" type="slidenum">
               <a:rPr lang="id-ID" smtClean="0"/>
               <a:pPr rtl="0"/>
-              <a:t>27</a:t>
+              <a:t>29</a:t>
             </a:fld>
             <a:endParaRPr lang="id-ID"/>
           </a:p>
@@ -24867,7 +25491,191 @@
 </p:sld>
 </file>
 
-<file path=ppt/slides/slide28.xml><?xml version="1.0" encoding="utf-8"?>
+<file path=ppt/slides/slide3.xml><?xml version="1.0" encoding="utf-8"?>
+<p:sld xmlns:a="http://schemas.openxmlformats.org/drawingml/2006/main" xmlns:r="http://schemas.openxmlformats.org/officeDocument/2006/relationships" xmlns:p="http://schemas.openxmlformats.org/presentationml/2006/main">
+  <p:cSld>
+    <p:spTree>
+      <p:nvGrpSpPr>
+        <p:cNvPr id="1" name=""/>
+        <p:cNvGrpSpPr/>
+        <p:nvPr/>
+      </p:nvGrpSpPr>
+      <p:grpSpPr>
+        <a:xfrm>
+          <a:off x="0" y="0"/>
+          <a:ext cx="0" cy="0"/>
+          <a:chOff x="0" y="0"/>
+          <a:chExt cx="0" cy="0"/>
+        </a:xfrm>
+      </p:grpSpPr>
+      <p:sp>
+        <p:nvSpPr>
+          <p:cNvPr id="2" name="Judul 1">
+            <a:extLst>
+              <a:ext uri="{FF2B5EF4-FFF2-40B4-BE49-F238E27FC236}">
+                <a16:creationId xmlns:a16="http://schemas.microsoft.com/office/drawing/2014/main" id="{8C543F67-9C70-4748-8C0C-3A7863422F99}"/>
+              </a:ext>
+            </a:extLst>
+          </p:cNvPr>
+          <p:cNvSpPr>
+            <a:spLocks noGrp="1"/>
+          </p:cNvSpPr>
+          <p:nvPr>
+            <p:ph type="title"/>
+          </p:nvPr>
+        </p:nvSpPr>
+        <p:spPr>
+          <a:xfrm>
+            <a:off x="1167492" y="381000"/>
+            <a:ext cx="9779183" cy="1325563"/>
+          </a:xfrm>
+        </p:spPr>
+        <p:txBody>
+          <a:bodyPr rtlCol="0"/>
+          <a:lstStyle/>
+          <a:p>
+            <a:pPr rtl="0"/>
+            <a:r>
+              <a:rPr lang="en-GB" dirty="0"/>
+              <a:t>Agenda </a:t>
+            </a:r>
+            <a:r>
+              <a:rPr lang="en-GB" dirty="0" err="1"/>
+              <a:t>Presentasi</a:t>
+            </a:r>
+            <a:endParaRPr lang="id-ID" dirty="0"/>
+          </a:p>
+        </p:txBody>
+      </p:sp>
+      <p:sp>
+        <p:nvSpPr>
+          <p:cNvPr id="3" name="Tampungan Konten 2">
+            <a:extLst>
+              <a:ext uri="{FF2B5EF4-FFF2-40B4-BE49-F238E27FC236}">
+                <a16:creationId xmlns:a16="http://schemas.microsoft.com/office/drawing/2014/main" id="{95B371F2-DBA5-415A-82C8-651F587B857A}"/>
+              </a:ext>
+            </a:extLst>
+          </p:cNvPr>
+          <p:cNvSpPr>
+            <a:spLocks noGrp="1"/>
+          </p:cNvSpPr>
+          <p:nvPr>
+            <p:ph type="body" idx="1"/>
+          </p:nvPr>
+        </p:nvSpPr>
+        <p:spPr>
+          <a:xfrm>
+            <a:off x="1167492" y="2653167"/>
+            <a:ext cx="9779183" cy="3436483"/>
+          </a:xfrm>
+        </p:spPr>
+        <p:txBody>
+          <a:bodyPr vert="horz" lIns="91440" tIns="45720" rIns="91440" bIns="45720" rtlCol="0" anchor="t">
+            <a:normAutofit fontScale="92500" lnSpcReduction="10000"/>
+          </a:bodyPr>
+          <a:lstStyle/>
+          <a:p>
+            <a:pPr marL="457200" indent="-457200">
+              <a:buFont typeface="+mj-lt"/>
+              <a:buAutoNum type="arabicPeriod"/>
+            </a:pPr>
+            <a:r>
+              <a:rPr lang="en-GB" sz="2800" b="1" dirty="0"/>
+              <a:t>PENDAHULUAN</a:t>
+            </a:r>
+          </a:p>
+          <a:p>
+            <a:pPr marL="457200" indent="-457200">
+              <a:buFont typeface="+mj-lt"/>
+              <a:buAutoNum type="arabicPeriod"/>
+            </a:pPr>
+            <a:r>
+              <a:rPr lang="en-GB" sz="2800" b="1" dirty="0"/>
+              <a:t>TINJAUAN PUSTAKA</a:t>
+            </a:r>
+          </a:p>
+          <a:p>
+            <a:pPr marL="457200" indent="-457200">
+              <a:buFont typeface="+mj-lt"/>
+              <a:buAutoNum type="arabicPeriod"/>
+            </a:pPr>
+            <a:r>
+              <a:rPr lang="en-GB" sz="2800" b="1" dirty="0"/>
+              <a:t>METODOLOGI PENELITIAN</a:t>
+            </a:r>
+          </a:p>
+          <a:p>
+            <a:pPr marL="457200" indent="-457200">
+              <a:buFont typeface="+mj-lt"/>
+              <a:buAutoNum type="arabicPeriod"/>
+            </a:pPr>
+            <a:r>
+              <a:rPr lang="en-GB" sz="2800" b="1" dirty="0"/>
+              <a:t>HASIL DAN PEMBAHASAN</a:t>
+            </a:r>
+          </a:p>
+          <a:p>
+            <a:pPr marL="457200" indent="-457200">
+              <a:buFont typeface="+mj-lt"/>
+              <a:buAutoNum type="arabicPeriod"/>
+            </a:pPr>
+            <a:r>
+              <a:rPr lang="en-GB" sz="2800" b="1" dirty="0"/>
+              <a:t>PENUTUP</a:t>
+            </a:r>
+          </a:p>
+        </p:txBody>
+      </p:sp>
+      <p:sp>
+        <p:nvSpPr>
+          <p:cNvPr id="6" name="Tampungan Nomor Slide 5">
+            <a:extLst>
+              <a:ext uri="{FF2B5EF4-FFF2-40B4-BE49-F238E27FC236}">
+                <a16:creationId xmlns:a16="http://schemas.microsoft.com/office/drawing/2014/main" id="{134C72D2-EFDF-844A-8472-CB49A59B127B}"/>
+              </a:ext>
+            </a:extLst>
+          </p:cNvPr>
+          <p:cNvSpPr>
+            <a:spLocks noGrp="1"/>
+          </p:cNvSpPr>
+          <p:nvPr>
+            <p:ph type="sldNum" sz="quarter" idx="12"/>
+          </p:nvPr>
+        </p:nvSpPr>
+        <p:spPr>
+          <a:xfrm>
+            <a:off x="10206318" y="6356350"/>
+            <a:ext cx="1604682" cy="365125"/>
+          </a:xfrm>
+        </p:spPr>
+        <p:txBody>
+          <a:bodyPr rtlCol="0"/>
+          <a:lstStyle/>
+          <a:p>
+            <a:pPr rtl="0"/>
+            <a:fld id="{294A09A9-5501-47C1-A89A-A340965A2BE2}" type="slidenum">
+              <a:rPr lang="id-ID" smtClean="0"/>
+              <a:pPr rtl="0"/>
+              <a:t>3</a:t>
+            </a:fld>
+            <a:endParaRPr lang="id-ID"/>
+          </a:p>
+        </p:txBody>
+      </p:sp>
+    </p:spTree>
+    <p:extLst>
+      <p:ext uri="{BB962C8B-B14F-4D97-AF65-F5344CB8AC3E}">
+        <p14:creationId xmlns:p14="http://schemas.microsoft.com/office/powerpoint/2010/main" val="1639799154"/>
+      </p:ext>
+    </p:extLst>
+  </p:cSld>
+  <p:clrMapOvr>
+    <a:masterClrMapping/>
+  </p:clrMapOvr>
+</p:sld>
+</file>
+
+<file path=ppt/slides/slide30.xml><?xml version="1.0" encoding="utf-8"?>
 <p:sld xmlns:a="http://schemas.openxmlformats.org/drawingml/2006/main" xmlns:r="http://schemas.openxmlformats.org/officeDocument/2006/relationships" xmlns:p="http://schemas.openxmlformats.org/presentationml/2006/main">
   <p:cSld>
     <p:spTree>
@@ -25005,7 +25813,7 @@
             <a:fld id="{294A09A9-5501-47C1-A89A-A340965A2BE2}" type="slidenum">
               <a:rPr lang="id-ID" smtClean="0"/>
               <a:pPr rtl="0"/>
-              <a:t>28</a:t>
+              <a:t>30</a:t>
             </a:fld>
             <a:endParaRPr lang="id-ID"/>
           </a:p>
@@ -25024,7 +25832,7 @@
 </p:sld>
 </file>
 
-<file path=ppt/slides/slide29.xml><?xml version="1.0" encoding="utf-8"?>
+<file path=ppt/slides/slide31.xml><?xml version="1.0" encoding="utf-8"?>
 <p:sld xmlns:a="http://schemas.openxmlformats.org/drawingml/2006/main" xmlns:r="http://schemas.openxmlformats.org/officeDocument/2006/relationships" xmlns:p="http://schemas.openxmlformats.org/presentationml/2006/main">
   <p:cSld>
     <p:spTree>
@@ -25119,7 +25927,7 @@
             <a:fld id="{294A09A9-5501-47C1-A89A-A340965A2BE2}" type="slidenum">
               <a:rPr lang="id-ID" smtClean="0"/>
               <a:pPr rtl="0"/>
-              <a:t>29</a:t>
+              <a:t>31</a:t>
             </a:fld>
             <a:endParaRPr lang="id-ID"/>
           </a:p>
@@ -25778,241 +26586,7 @@
 </p:sld>
 </file>
 
-<file path=ppt/slides/slide3.xml><?xml version="1.0" encoding="utf-8"?>
-<p:sld xmlns:a="http://schemas.openxmlformats.org/drawingml/2006/main" xmlns:r="http://schemas.openxmlformats.org/officeDocument/2006/relationships" xmlns:p="http://schemas.openxmlformats.org/presentationml/2006/main">
-  <p:cSld>
-    <p:spTree>
-      <p:nvGrpSpPr>
-        <p:cNvPr id="1" name="">
-          <a:extLst>
-            <a:ext uri="{FF2B5EF4-FFF2-40B4-BE49-F238E27FC236}">
-              <a16:creationId xmlns:a16="http://schemas.microsoft.com/office/drawing/2014/main" id="{390592A4-A83C-D7D6-419C-0F7740BA27C4}"/>
-            </a:ext>
-          </a:extLst>
-        </p:cNvPr>
-        <p:cNvGrpSpPr/>
-        <p:nvPr/>
-      </p:nvGrpSpPr>
-      <p:grpSpPr>
-        <a:xfrm>
-          <a:off x="0" y="0"/>
-          <a:ext cx="0" cy="0"/>
-          <a:chOff x="0" y="0"/>
-          <a:chExt cx="0" cy="0"/>
-        </a:xfrm>
-      </p:grpSpPr>
-      <p:sp>
-        <p:nvSpPr>
-          <p:cNvPr id="2" name="Judul 1">
-            <a:extLst>
-              <a:ext uri="{FF2B5EF4-FFF2-40B4-BE49-F238E27FC236}">
-                <a16:creationId xmlns:a16="http://schemas.microsoft.com/office/drawing/2014/main" id="{A13E8637-FC4E-C738-E35F-C628071DF34C}"/>
-              </a:ext>
-            </a:extLst>
-          </p:cNvPr>
-          <p:cNvSpPr>
-            <a:spLocks noGrp="1"/>
-          </p:cNvSpPr>
-          <p:nvPr>
-            <p:ph type="title"/>
-          </p:nvPr>
-        </p:nvSpPr>
-        <p:spPr>
-          <a:xfrm>
-            <a:off x="1167492" y="381000"/>
-            <a:ext cx="9779183" cy="1325563"/>
-          </a:xfrm>
-        </p:spPr>
-        <p:txBody>
-          <a:bodyPr rtlCol="0"/>
-          <a:lstStyle/>
-          <a:p>
-            <a:pPr rtl="0"/>
-            <a:r>
-              <a:rPr lang="en-GB" dirty="0" err="1"/>
-              <a:t>Abstrak</a:t>
-            </a:r>
-            <a:endParaRPr lang="id-ID" dirty="0"/>
-          </a:p>
-        </p:txBody>
-      </p:sp>
-      <p:sp>
-        <p:nvSpPr>
-          <p:cNvPr id="3" name="Tampungan Konten 2">
-            <a:extLst>
-              <a:ext uri="{FF2B5EF4-FFF2-40B4-BE49-F238E27FC236}">
-                <a16:creationId xmlns:a16="http://schemas.microsoft.com/office/drawing/2014/main" id="{E3DD77AE-85EC-FB89-4756-4BF51E470805}"/>
-              </a:ext>
-            </a:extLst>
-          </p:cNvPr>
-          <p:cNvSpPr>
-            <a:spLocks noGrp="1"/>
-          </p:cNvSpPr>
-          <p:nvPr>
-            <p:ph type="body" idx="1"/>
-          </p:nvPr>
-        </p:nvSpPr>
-        <p:spPr>
-          <a:xfrm>
-            <a:off x="430892" y="2409371"/>
-            <a:ext cx="10991851" cy="3946979"/>
-          </a:xfrm>
-        </p:spPr>
-        <p:txBody>
-          <a:bodyPr vert="horz" lIns="91440" tIns="45720" rIns="91440" bIns="45720" rtlCol="0" anchor="t">
-            <a:normAutofit fontScale="85000" lnSpcReduction="10000"/>
-          </a:bodyPr>
-          <a:lstStyle/>
-          <a:p>
-            <a:r>
-              <a:rPr lang="id-ID" dirty="0"/>
-              <a:t>Model </a:t>
-            </a:r>
-            <a:r>
-              <a:rPr lang="id-ID" i="1" dirty="0" err="1"/>
-              <a:t>Expected</a:t>
-            </a:r>
-            <a:r>
-              <a:rPr lang="id-ID" i="1" dirty="0"/>
-              <a:t> </a:t>
-            </a:r>
-            <a:r>
-              <a:rPr lang="id-ID" i="1" dirty="0" err="1"/>
-              <a:t>Goals</a:t>
-            </a:r>
-            <a:r>
-              <a:rPr lang="id-ID" dirty="0"/>
-              <a:t> (</a:t>
-            </a:r>
-            <a:r>
-              <a:rPr lang="id-ID" dirty="0" err="1"/>
-              <a:t>xG</a:t>
-            </a:r>
-            <a:r>
-              <a:rPr lang="id-ID" dirty="0"/>
-              <a:t>) yang ada saat ini </a:t>
-            </a:r>
-            <a:r>
-              <a:rPr lang="id-ID" dirty="0" err="1"/>
-              <a:t>seringkali</a:t>
-            </a:r>
-            <a:r>
-              <a:rPr lang="id-ID" dirty="0"/>
-              <a:t> menghadapi dilema antara akurasi dan efisiensi komputasi. Penelitian ini bertujuan untuk mengevaluasi penerapan algoritma </a:t>
-            </a:r>
-            <a:r>
-              <a:rPr lang="id-ID" dirty="0" err="1"/>
-              <a:t>LightGBM</a:t>
-            </a:r>
-            <a:r>
-              <a:rPr lang="id-ID" dirty="0"/>
-              <a:t> untuk membangun model prediksi </a:t>
-            </a:r>
-            <a:r>
-              <a:rPr lang="id-ID" dirty="0" err="1"/>
-              <a:t>xG</a:t>
-            </a:r>
-            <a:r>
-              <a:rPr lang="id-ID" dirty="0"/>
-              <a:t> yang akurat sekaligus efisien. Penelitian ini </a:t>
-            </a:r>
-            <a:r>
-              <a:rPr lang="en-GB" dirty="0"/>
-              <a:t>m</a:t>
-            </a:r>
-            <a:r>
-              <a:rPr lang="id-ID" dirty="0" err="1"/>
-              <a:t>enggunakan</a:t>
-            </a:r>
-            <a:r>
-              <a:rPr lang="id-ID" dirty="0"/>
-              <a:t> pendekatan kuantitatif dengan kerangka kerja KDD, model </a:t>
-            </a:r>
-            <a:r>
-              <a:rPr lang="id-ID" dirty="0" err="1"/>
-              <a:t>LightGBM</a:t>
-            </a:r>
-            <a:r>
-              <a:rPr lang="id-ID" dirty="0"/>
-              <a:t> akan dibangun dan dioptimalkan menggunakan data publik dari </a:t>
-            </a:r>
-            <a:r>
-              <a:rPr lang="id-ID" dirty="0" err="1"/>
-              <a:t>StatsBomb</a:t>
-            </a:r>
-            <a:r>
-              <a:rPr lang="id-ID" dirty="0"/>
-              <a:t>. Kinerja model akan dievaluasi secara komprehensif dari sisi akurasi, menggunakan metrik seperti ROC AUC dan </a:t>
-            </a:r>
-            <a:r>
-              <a:rPr lang="id-ID" dirty="0" err="1"/>
-              <a:t>Brier</a:t>
-            </a:r>
-            <a:r>
-              <a:rPr lang="id-ID" dirty="0"/>
-              <a:t> </a:t>
-            </a:r>
-            <a:r>
-              <a:rPr lang="id-ID" dirty="0" err="1"/>
-              <a:t>Score</a:t>
-            </a:r>
-            <a:r>
-              <a:rPr lang="id-ID" dirty="0"/>
-              <a:t>, serta efisiensi komputasi yang diukur melalui waktu pelatihan. Penelitian ini diharapkan dapat menetapkan sebuah tolok ukur baru, menyediakan alat analisis yang lebih andal dan praktis untuk pengambilan keputusan strategis di industri sepak bola.</a:t>
-            </a:r>
-          </a:p>
-        </p:txBody>
-      </p:sp>
-      <p:sp>
-        <p:nvSpPr>
-          <p:cNvPr id="6" name="Tampungan Nomor Slide 5">
-            <a:extLst>
-              <a:ext uri="{FF2B5EF4-FFF2-40B4-BE49-F238E27FC236}">
-                <a16:creationId xmlns:a16="http://schemas.microsoft.com/office/drawing/2014/main" id="{F3551556-18E9-0B9C-4819-F6CC308D5003}"/>
-              </a:ext>
-            </a:extLst>
-          </p:cNvPr>
-          <p:cNvSpPr>
-            <a:spLocks noGrp="1"/>
-          </p:cNvSpPr>
-          <p:nvPr>
-            <p:ph type="sldNum" sz="quarter" idx="12"/>
-          </p:nvPr>
-        </p:nvSpPr>
-        <p:spPr>
-          <a:xfrm>
-            <a:off x="10206318" y="6356350"/>
-            <a:ext cx="1604682" cy="365125"/>
-          </a:xfrm>
-        </p:spPr>
-        <p:txBody>
-          <a:bodyPr rtlCol="0"/>
-          <a:lstStyle/>
-          <a:p>
-            <a:pPr rtl="0"/>
-            <a:fld id="{294A09A9-5501-47C1-A89A-A340965A2BE2}" type="slidenum">
-              <a:rPr lang="id-ID" smtClean="0"/>
-              <a:pPr rtl="0"/>
-              <a:t>3</a:t>
-            </a:fld>
-            <a:endParaRPr lang="id-ID"/>
-          </a:p>
-        </p:txBody>
-      </p:sp>
-    </p:spTree>
-    <p:extLst>
-      <p:ext uri="{BB962C8B-B14F-4D97-AF65-F5344CB8AC3E}">
-        <p14:creationId xmlns:p14="http://schemas.microsoft.com/office/powerpoint/2010/main" val="517861623"/>
-      </p:ext>
-    </p:extLst>
-  </p:cSld>
-  <p:clrMapOvr>
-    <a:masterClrMapping/>
-  </p:clrMapOvr>
-</p:sld>
-</file>
-
-<file path=ppt/slides/slide30.xml><?xml version="1.0" encoding="utf-8"?>
+<file path=ppt/slides/slide32.xml><?xml version="1.0" encoding="utf-8"?>
 <p:sld xmlns:a="http://schemas.openxmlformats.org/drawingml/2006/main" xmlns:r="http://schemas.openxmlformats.org/officeDocument/2006/relationships" xmlns:p="http://schemas.openxmlformats.org/presentationml/2006/main">
   <p:cSld>
     <p:spTree>
@@ -26107,7 +26681,7 @@
             <a:fld id="{294A09A9-5501-47C1-A89A-A340965A2BE2}" type="slidenum">
               <a:rPr lang="id-ID" smtClean="0"/>
               <a:pPr rtl="0"/>
-              <a:t>30</a:t>
+              <a:t>32</a:t>
             </a:fld>
             <a:endParaRPr lang="id-ID"/>
           </a:p>
@@ -26306,7 +26880,7 @@
 </p:sld>
 </file>
 
-<file path=ppt/slides/slide31.xml><?xml version="1.0" encoding="utf-8"?>
+<file path=ppt/slides/slide33.xml><?xml version="1.0" encoding="utf-8"?>
 <p:sld xmlns:a="http://schemas.openxmlformats.org/drawingml/2006/main" xmlns:r="http://schemas.openxmlformats.org/officeDocument/2006/relationships" xmlns:p="http://schemas.openxmlformats.org/presentationml/2006/main">
   <p:cSld>
     <p:spTree>
@@ -26400,7 +26974,7 @@
             <a:pPr rtl="0"/>
             <a:fld id="{423EE75F-42B8-4E1A-83C6-1B72B3C0E408}" type="datetime1">
               <a:rPr lang="id-ID" smtClean="0"/>
-              <a:t>11/09/2025</a:t>
+              <a:t>14/10/2025</a:t>
             </a:fld>
             <a:endParaRPr lang="id-ID"/>
           </a:p>
@@ -26436,7 +27010,7 @@
             <a:fld id="{294A09A9-5501-47C1-A89A-A340965A2BE2}" type="slidenum">
               <a:rPr lang="id-ID" smtClean="0"/>
               <a:pPr rtl="0"/>
-              <a:t>31</a:t>
+              <a:t>33</a:t>
             </a:fld>
             <a:endParaRPr lang="id-ID"/>
           </a:p>
@@ -26663,7 +27237,7 @@
 </p:sld>
 </file>
 
-<file path=ppt/slides/slide32.xml><?xml version="1.0" encoding="utf-8"?>
+<file path=ppt/slides/slide34.xml><?xml version="1.0" encoding="utf-8"?>
 <p:sld xmlns:a="http://schemas.openxmlformats.org/drawingml/2006/main" xmlns:r="http://schemas.openxmlformats.org/officeDocument/2006/relationships" xmlns:p="http://schemas.openxmlformats.org/presentationml/2006/main">
   <p:cSld>
     <p:spTree>
@@ -26757,7 +27331,7 @@
             <a:pPr rtl="0"/>
             <a:fld id="{423EE75F-42B8-4E1A-83C6-1B72B3C0E408}" type="datetime1">
               <a:rPr lang="id-ID" smtClean="0"/>
-              <a:t>11/09/2025</a:t>
+              <a:t>14/10/2025</a:t>
             </a:fld>
             <a:endParaRPr lang="id-ID"/>
           </a:p>
@@ -26793,7 +27367,7 @@
             <a:fld id="{294A09A9-5501-47C1-A89A-A340965A2BE2}" type="slidenum">
               <a:rPr lang="id-ID" smtClean="0"/>
               <a:pPr rtl="0"/>
-              <a:t>32</a:t>
+              <a:t>34</a:t>
             </a:fld>
             <a:endParaRPr lang="id-ID"/>
           </a:p>
@@ -28191,7 +28765,7 @@
 </p:sld>
 </file>
 
-<file path=ppt/slides/slide33.xml><?xml version="1.0" encoding="utf-8"?>
+<file path=ppt/slides/slide35.xml><?xml version="1.0" encoding="utf-8"?>
 <p:sld xmlns:a="http://schemas.openxmlformats.org/drawingml/2006/main" xmlns:r="http://schemas.openxmlformats.org/officeDocument/2006/relationships" xmlns:p="http://schemas.openxmlformats.org/presentationml/2006/main">
   <p:cSld>
     <p:spTree>
@@ -28281,7 +28855,7 @@
             <a:pPr rtl="0"/>
             <a:fld id="{423EE75F-42B8-4E1A-83C6-1B72B3C0E408}" type="datetime1">
               <a:rPr lang="id-ID" smtClean="0"/>
-              <a:t>11/09/2025</a:t>
+              <a:t>14/10/2025</a:t>
             </a:fld>
             <a:endParaRPr lang="id-ID"/>
           </a:p>
@@ -28317,7 +28891,7 @@
             <a:fld id="{294A09A9-5501-47C1-A89A-A340965A2BE2}" type="slidenum">
               <a:rPr lang="id-ID" smtClean="0"/>
               <a:pPr rtl="0"/>
-              <a:t>33</a:t>
+              <a:t>35</a:t>
             </a:fld>
             <a:endParaRPr lang="id-ID"/>
           </a:p>
@@ -28560,7 +29134,7 @@
 </p:sld>
 </file>
 
-<file path=ppt/slides/slide34.xml><?xml version="1.0" encoding="utf-8"?>
+<file path=ppt/slides/slide36.xml><?xml version="1.0" encoding="utf-8"?>
 <p:sld xmlns:a="http://schemas.openxmlformats.org/drawingml/2006/main" xmlns:r="http://schemas.openxmlformats.org/officeDocument/2006/relationships" xmlns:p="http://schemas.openxmlformats.org/presentationml/2006/main">
   <p:cSld>
     <p:spTree>
@@ -28650,7 +29224,7 @@
             <a:pPr rtl="0"/>
             <a:fld id="{423EE75F-42B8-4E1A-83C6-1B72B3C0E408}" type="datetime1">
               <a:rPr lang="id-ID" smtClean="0"/>
-              <a:t>11/09/2025</a:t>
+              <a:t>14/10/2025</a:t>
             </a:fld>
             <a:endParaRPr lang="id-ID"/>
           </a:p>
@@ -28686,7 +29260,7 @@
             <a:fld id="{294A09A9-5501-47C1-A89A-A340965A2BE2}" type="slidenum">
               <a:rPr lang="id-ID" smtClean="0"/>
               <a:pPr rtl="0"/>
-              <a:t>34</a:t>
+              <a:t>36</a:t>
             </a:fld>
             <a:endParaRPr lang="id-ID"/>
           </a:p>
@@ -30231,7 +30805,7 @@
 </p:sld>
 </file>
 
-<file path=ppt/slides/slide35.xml><?xml version="1.0" encoding="utf-8"?>
+<file path=ppt/slides/slide37.xml><?xml version="1.0" encoding="utf-8"?>
 <p:sld xmlns:a="http://schemas.openxmlformats.org/drawingml/2006/main" xmlns:r="http://schemas.openxmlformats.org/officeDocument/2006/relationships" xmlns:p="http://schemas.openxmlformats.org/presentationml/2006/main">
   <p:cSld>
     <p:spTree>
@@ -30306,7 +30880,7 @@
             <a:pPr rtl="0"/>
             <a:fld id="{0313E8A0-0BEB-4298-AEE4-B7CCF6490583}" type="datetime1">
               <a:rPr lang="id-ID" noProof="0" smtClean="0"/>
-              <a:t>11/09/2025</a:t>
+              <a:t>14/10/2025</a:t>
             </a:fld>
             <a:endParaRPr lang="id-ID" noProof="0"/>
           </a:p>
@@ -30337,7 +30911,7 @@
             <a:fld id="{294A09A9-5501-47C1-A89A-A340965A2BE2}" type="slidenum">
               <a:rPr lang="id-ID" noProof="0" smtClean="0"/>
               <a:pPr rtl="0"/>
-              <a:t>35</a:t>
+              <a:t>37</a:t>
             </a:fld>
             <a:endParaRPr lang="id-ID" noProof="0"/>
           </a:p>
@@ -30450,7 +31024,7 @@
 </p:sld>
 </file>
 
-<file path=ppt/slides/slide36.xml><?xml version="1.0" encoding="utf-8"?>
+<file path=ppt/slides/slide38.xml><?xml version="1.0" encoding="utf-8"?>
 <p:sld xmlns:a="http://schemas.openxmlformats.org/drawingml/2006/main" xmlns:r="http://schemas.openxmlformats.org/officeDocument/2006/relationships" xmlns:p="http://schemas.openxmlformats.org/presentationml/2006/main">
   <p:cSld>
     <p:spTree>
@@ -30561,7 +31135,7 @@
             <a:pPr rtl="0"/>
             <a:fld id="{864F080E-00EF-45FB-879B-543FC5219789}" type="datetime1">
               <a:rPr lang="id-ID" noProof="0" smtClean="0"/>
-              <a:t>11/09/2025</a:t>
+              <a:t>14/10/2025</a:t>
             </a:fld>
             <a:endParaRPr lang="id-ID" noProof="0"/>
           </a:p>
@@ -30592,7 +31166,7 @@
             <a:fld id="{294A09A9-5501-47C1-A89A-A340965A2BE2}" type="slidenum">
               <a:rPr lang="id-ID" noProof="0" smtClean="0"/>
               <a:pPr rtl="0"/>
-              <a:t>36</a:t>
+              <a:t>38</a:t>
             </a:fld>
             <a:endParaRPr lang="id-ID" noProof="0"/>
           </a:p>
@@ -30611,7 +31185,7 @@
 </p:sld>
 </file>
 
-<file path=ppt/slides/slide37.xml><?xml version="1.0" encoding="utf-8"?>
+<file path=ppt/slides/slide39.xml><?xml version="1.0" encoding="utf-8"?>
 <p:sld xmlns:a="http://schemas.openxmlformats.org/drawingml/2006/main" xmlns:r="http://schemas.openxmlformats.org/officeDocument/2006/relationships" xmlns:p="http://schemas.openxmlformats.org/presentationml/2006/main">
   <p:cSld>
     <p:spTree>
@@ -30736,7 +31310,7 @@
             <a:pPr rtl="0"/>
             <a:fld id="{864F080E-00EF-45FB-879B-543FC5219789}" type="datetime1">
               <a:rPr lang="id-ID" noProof="0" smtClean="0"/>
-              <a:t>11/09/2025</a:t>
+              <a:t>14/10/2025</a:t>
             </a:fld>
             <a:endParaRPr lang="id-ID" noProof="0"/>
           </a:p>
@@ -30748,324 +31322,6 @@
             <a:extLst>
               <a:ext uri="{FF2B5EF4-FFF2-40B4-BE49-F238E27FC236}">
                 <a16:creationId xmlns:a16="http://schemas.microsoft.com/office/drawing/2014/main" id="{8994C8F1-21C7-2222-1E2E-3AFA407C758C}"/>
-              </a:ext>
-            </a:extLst>
-          </p:cNvPr>
-          <p:cNvSpPr>
-            <a:spLocks noGrp="1"/>
-          </p:cNvSpPr>
-          <p:nvPr>
-            <p:ph type="sldNum" sz="quarter" idx="4"/>
-          </p:nvPr>
-        </p:nvSpPr>
-        <p:spPr/>
-        <p:txBody>
-          <a:bodyPr/>
-          <a:lstStyle/>
-          <a:p>
-            <a:pPr rtl="0"/>
-            <a:fld id="{294A09A9-5501-47C1-A89A-A340965A2BE2}" type="slidenum">
-              <a:rPr lang="id-ID" noProof="0" smtClean="0"/>
-              <a:pPr rtl="0"/>
-              <a:t>37</a:t>
-            </a:fld>
-            <a:endParaRPr lang="id-ID" noProof="0"/>
-          </a:p>
-        </p:txBody>
-      </p:sp>
-    </p:spTree>
-    <p:extLst>
-      <p:ext uri="{BB962C8B-B14F-4D97-AF65-F5344CB8AC3E}">
-        <p14:creationId xmlns:p14="http://schemas.microsoft.com/office/powerpoint/2010/main" val="3068875868"/>
-      </p:ext>
-    </p:extLst>
-  </p:cSld>
-  <p:clrMapOvr>
-    <a:masterClrMapping/>
-  </p:clrMapOvr>
-</p:sld>
-</file>
-
-<file path=ppt/slides/slide38.xml><?xml version="1.0" encoding="utf-8"?>
-<p:sld xmlns:a="http://schemas.openxmlformats.org/drawingml/2006/main" xmlns:r="http://schemas.openxmlformats.org/officeDocument/2006/relationships" xmlns:p="http://schemas.openxmlformats.org/presentationml/2006/main">
-  <p:cSld>
-    <p:spTree>
-      <p:nvGrpSpPr>
-        <p:cNvPr id="1" name="">
-          <a:extLst>
-            <a:ext uri="{FF2B5EF4-FFF2-40B4-BE49-F238E27FC236}">
-              <a16:creationId xmlns:a16="http://schemas.microsoft.com/office/drawing/2014/main" id="{30D4E6D6-66B3-4C11-4071-9A1616A23A52}"/>
-            </a:ext>
-          </a:extLst>
-        </p:cNvPr>
-        <p:cNvGrpSpPr/>
-        <p:nvPr/>
-      </p:nvGrpSpPr>
-      <p:grpSpPr>
-        <a:xfrm>
-          <a:off x="0" y="0"/>
-          <a:ext cx="0" cy="0"/>
-          <a:chOff x="0" y="0"/>
-          <a:chExt cx="0" cy="0"/>
-        </a:xfrm>
-      </p:grpSpPr>
-      <p:sp>
-        <p:nvSpPr>
-          <p:cNvPr id="2" name="Judul 1">
-            <a:extLst>
-              <a:ext uri="{FF2B5EF4-FFF2-40B4-BE49-F238E27FC236}">
-                <a16:creationId xmlns:a16="http://schemas.microsoft.com/office/drawing/2014/main" id="{EE6B2CF1-4B47-BF0E-656E-FE21F300D2EB}"/>
-              </a:ext>
-            </a:extLst>
-          </p:cNvPr>
-          <p:cNvSpPr>
-            <a:spLocks noGrp="1"/>
-          </p:cNvSpPr>
-          <p:nvPr>
-            <p:ph type="title"/>
-          </p:nvPr>
-        </p:nvSpPr>
-        <p:spPr>
-          <a:xfrm>
-            <a:off x="1167492" y="381000"/>
-            <a:ext cx="9779183" cy="1325563"/>
-          </a:xfrm>
-        </p:spPr>
-        <p:txBody>
-          <a:bodyPr rtlCol="0"/>
-          <a:lstStyle/>
-          <a:p>
-            <a:r>
-              <a:rPr lang="en-GB" dirty="0"/>
-              <a:t>Kesimpulan</a:t>
-            </a:r>
-            <a:endParaRPr lang="id-ID" dirty="0"/>
-          </a:p>
-        </p:txBody>
-      </p:sp>
-      <p:sp>
-        <p:nvSpPr>
-          <p:cNvPr id="4" name="Tampungan Konten 3">
-            <a:extLst>
-              <a:ext uri="{FF2B5EF4-FFF2-40B4-BE49-F238E27FC236}">
-                <a16:creationId xmlns:a16="http://schemas.microsoft.com/office/drawing/2014/main" id="{1DC8A93A-C50E-D83E-71CB-29084D6A9B5F}"/>
-              </a:ext>
-            </a:extLst>
-          </p:cNvPr>
-          <p:cNvSpPr>
-            <a:spLocks noGrp="1"/>
-          </p:cNvSpPr>
-          <p:nvPr>
-            <p:ph idx="1"/>
-          </p:nvPr>
-        </p:nvSpPr>
-        <p:spPr>
-          <a:xfrm>
-            <a:off x="1167492" y="2020529"/>
-            <a:ext cx="7888017" cy="3657600"/>
-          </a:xfrm>
-        </p:spPr>
-        <p:txBody>
-          <a:bodyPr vert="horz" lIns="91440" tIns="45720" rIns="91440" bIns="45720" rtlCol="0" anchor="t">
-            <a:normAutofit lnSpcReduction="10000"/>
-          </a:bodyPr>
-          <a:lstStyle/>
-          <a:p>
-            <a:r>
-              <a:rPr lang="id-ID" sz="3200" dirty="0"/>
-              <a:t>Penerapan </a:t>
-            </a:r>
-            <a:r>
-              <a:rPr lang="id-ID" sz="3200" dirty="0" err="1"/>
-              <a:t>LightGBM</a:t>
-            </a:r>
-            <a:r>
-              <a:rPr lang="id-ID" sz="3200" dirty="0"/>
-              <a:t> yang dioptimalkan berhasil menghasilkan model prediksi </a:t>
-            </a:r>
-            <a:r>
-              <a:rPr lang="id-ID" sz="3200" dirty="0" err="1"/>
-              <a:t>xG</a:t>
-            </a:r>
-            <a:r>
-              <a:rPr lang="id-ID" sz="3200" dirty="0"/>
-              <a:t> dengan akurasi dan keandalan probabilitas yang sangat tinggi. Dari segi komputasi, </a:t>
-            </a:r>
-            <a:r>
-              <a:rPr lang="id-ID" sz="3200" dirty="0" err="1"/>
-              <a:t>LightGBM</a:t>
-            </a:r>
-            <a:r>
-              <a:rPr lang="id-ID" sz="3200" dirty="0"/>
-              <a:t> juga terbukti jauh lebih efisien. Luaran dari penelitian ini tidak hanya berupa model, tetapi juga sebuah antarmuka aplikasi web interaktif yang fungsional untuk penerapan praktis.</a:t>
-            </a:r>
-          </a:p>
-        </p:txBody>
-      </p:sp>
-      <p:sp>
-        <p:nvSpPr>
-          <p:cNvPr id="9" name="Tampungan Nomor Slide 8">
-            <a:extLst>
-              <a:ext uri="{FF2B5EF4-FFF2-40B4-BE49-F238E27FC236}">
-                <a16:creationId xmlns:a16="http://schemas.microsoft.com/office/drawing/2014/main" id="{414C40D9-956D-F3DE-C569-43226D763FB1}"/>
-              </a:ext>
-            </a:extLst>
-          </p:cNvPr>
-          <p:cNvSpPr>
-            <a:spLocks noGrp="1"/>
-          </p:cNvSpPr>
-          <p:nvPr>
-            <p:ph type="sldNum" sz="quarter" idx="4"/>
-          </p:nvPr>
-        </p:nvSpPr>
-        <p:spPr>
-          <a:xfrm>
-            <a:off x="10153276" y="6356350"/>
-            <a:ext cx="1657723" cy="365125"/>
-          </a:xfrm>
-        </p:spPr>
-        <p:txBody>
-          <a:bodyPr rtlCol="0"/>
-          <a:lstStyle/>
-          <a:p>
-            <a:pPr rtl="0"/>
-            <a:fld id="{294A09A9-5501-47C1-A89A-A340965A2BE2}" type="slidenum">
-              <a:rPr lang="id-ID" smtClean="0"/>
-              <a:pPr rtl="0"/>
-              <a:t>38</a:t>
-            </a:fld>
-            <a:endParaRPr lang="id-ID" dirty="0"/>
-          </a:p>
-        </p:txBody>
-      </p:sp>
-    </p:spTree>
-    <p:extLst>
-      <p:ext uri="{BB962C8B-B14F-4D97-AF65-F5344CB8AC3E}">
-        <p14:creationId xmlns:p14="http://schemas.microsoft.com/office/powerpoint/2010/main" val="467050395"/>
-      </p:ext>
-    </p:extLst>
-  </p:cSld>
-  <p:clrMapOvr>
-    <a:masterClrMapping/>
-  </p:clrMapOvr>
-</p:sld>
-</file>
-
-<file path=ppt/slides/slide39.xml><?xml version="1.0" encoding="utf-8"?>
-<p:sld xmlns:a="http://schemas.openxmlformats.org/drawingml/2006/main" xmlns:r="http://schemas.openxmlformats.org/officeDocument/2006/relationships" xmlns:p="http://schemas.openxmlformats.org/presentationml/2006/main">
-  <p:cSld>
-    <p:spTree>
-      <p:nvGrpSpPr>
-        <p:cNvPr id="1" name=""/>
-        <p:cNvGrpSpPr/>
-        <p:nvPr/>
-      </p:nvGrpSpPr>
-      <p:grpSpPr>
-        <a:xfrm>
-          <a:off x="0" y="0"/>
-          <a:ext cx="0" cy="0"/>
-          <a:chOff x="0" y="0"/>
-          <a:chExt cx="0" cy="0"/>
-        </a:xfrm>
-      </p:grpSpPr>
-      <p:sp>
-        <p:nvSpPr>
-          <p:cNvPr id="2" name="Title 1">
-            <a:extLst>
-              <a:ext uri="{FF2B5EF4-FFF2-40B4-BE49-F238E27FC236}">
-                <a16:creationId xmlns:a16="http://schemas.microsoft.com/office/drawing/2014/main" id="{B9466093-D4AA-F632-85B3-59570CEDC2CE}"/>
-              </a:ext>
-            </a:extLst>
-          </p:cNvPr>
-          <p:cNvSpPr>
-            <a:spLocks noGrp="1"/>
-          </p:cNvSpPr>
-          <p:nvPr>
-            <p:ph type="title"/>
-          </p:nvPr>
-        </p:nvSpPr>
-        <p:spPr/>
-        <p:txBody>
-          <a:bodyPr/>
-          <a:lstStyle/>
-          <a:p>
-            <a:r>
-              <a:rPr lang="en-GB" dirty="0"/>
-              <a:t>Saran</a:t>
-            </a:r>
-            <a:endParaRPr lang="id-ID" dirty="0"/>
-          </a:p>
-        </p:txBody>
-      </p:sp>
-      <p:sp>
-        <p:nvSpPr>
-          <p:cNvPr id="3" name="Content Placeholder 2">
-            <a:extLst>
-              <a:ext uri="{FF2B5EF4-FFF2-40B4-BE49-F238E27FC236}">
-                <a16:creationId xmlns:a16="http://schemas.microsoft.com/office/drawing/2014/main" id="{79D8D027-F1C0-BD15-68D4-DC8C613ADD28}"/>
-              </a:ext>
-            </a:extLst>
-          </p:cNvPr>
-          <p:cNvSpPr>
-            <a:spLocks noGrp="1"/>
-          </p:cNvSpPr>
-          <p:nvPr>
-            <p:ph idx="1"/>
-          </p:nvPr>
-        </p:nvSpPr>
-        <p:spPr>
-          <a:xfrm>
-            <a:off x="1167492" y="1706563"/>
-            <a:ext cx="9893797" cy="3650253"/>
-          </a:xfrm>
-        </p:spPr>
-        <p:txBody>
-          <a:bodyPr/>
-          <a:lstStyle/>
-          <a:p>
-            <a:r>
-              <a:rPr lang="id-ID" sz="2800" dirty="0"/>
-              <a:t>Untuk penelitian selanjutnya, disarankan untuk memperkaya model dengan fitur yang lebih detail, seperti data posisi pemain bertahan saat tembakan terjadi. Pengembangan aplikasi juga dapat dilanjutkan dengan menambahkan fitur analisis performa pemain atau perbandingan taktik tim.</a:t>
-            </a:r>
-          </a:p>
-        </p:txBody>
-      </p:sp>
-      <p:sp>
-        <p:nvSpPr>
-          <p:cNvPr id="4" name="Date Placeholder 3">
-            <a:extLst>
-              <a:ext uri="{FF2B5EF4-FFF2-40B4-BE49-F238E27FC236}">
-                <a16:creationId xmlns:a16="http://schemas.microsoft.com/office/drawing/2014/main" id="{3CA90C15-EF3A-B529-724E-20961D1EA568}"/>
-              </a:ext>
-            </a:extLst>
-          </p:cNvPr>
-          <p:cNvSpPr>
-            <a:spLocks noGrp="1"/>
-          </p:cNvSpPr>
-          <p:nvPr>
-            <p:ph type="dt" sz="half" idx="2"/>
-          </p:nvPr>
-        </p:nvSpPr>
-        <p:spPr/>
-        <p:txBody>
-          <a:bodyPr/>
-          <a:lstStyle/>
-          <a:p>
-            <a:pPr rtl="0"/>
-            <a:fld id="{864F080E-00EF-45FB-879B-543FC5219789}" type="datetime1">
-              <a:rPr lang="id-ID" noProof="0" smtClean="0"/>
-              <a:t>11/09/2025</a:t>
-            </a:fld>
-            <a:endParaRPr lang="id-ID" noProof="0"/>
-          </a:p>
-        </p:txBody>
-      </p:sp>
-      <p:sp>
-        <p:nvSpPr>
-          <p:cNvPr id="6" name="Slide Number Placeholder 5">
-            <a:extLst>
-              <a:ext uri="{FF2B5EF4-FFF2-40B4-BE49-F238E27FC236}">
-                <a16:creationId xmlns:a16="http://schemas.microsoft.com/office/drawing/2014/main" id="{3BCA0E54-BD5E-43D9-25A3-856FF970BBC2}"/>
               </a:ext>
             </a:extLst>
           </p:cNvPr>
@@ -31094,7 +31350,7 @@
     </p:spTree>
     <p:extLst>
       <p:ext uri="{BB962C8B-B14F-4D97-AF65-F5344CB8AC3E}">
-        <p14:creationId xmlns:p14="http://schemas.microsoft.com/office/powerpoint/2010/main" val="1657666987"/>
+        <p14:creationId xmlns:p14="http://schemas.microsoft.com/office/powerpoint/2010/main" val="3068875868"/>
       </p:ext>
     </p:extLst>
   </p:cSld>
@@ -31126,7 +31382,7 @@
           <p:cNvPr id="2" name="Judul 1">
             <a:extLst>
               <a:ext uri="{FF2B5EF4-FFF2-40B4-BE49-F238E27FC236}">
-                <a16:creationId xmlns:a16="http://schemas.microsoft.com/office/drawing/2014/main" id="{8C543F67-9C70-4748-8C0C-3A7863422F99}"/>
+                <a16:creationId xmlns:a16="http://schemas.microsoft.com/office/drawing/2014/main" id="{33AF65A7-995A-9F45-891C-82D9B9D40801}"/>
               </a:ext>
             </a:extLst>
           </p:cNvPr>
@@ -31139,33 +31395,31 @@
         </p:nvSpPr>
         <p:spPr>
           <a:xfrm>
-            <a:off x="1167492" y="381000"/>
-            <a:ext cx="9779183" cy="1325563"/>
+            <a:off x="3366114" y="1729567"/>
+            <a:ext cx="5459771" cy="2810460"/>
           </a:xfrm>
         </p:spPr>
         <p:txBody>
-          <a:bodyPr rtlCol="0"/>
+          <a:bodyPr rtlCol="0">
+            <a:normAutofit/>
+          </a:bodyPr>
           <a:lstStyle/>
           <a:p>
             <a:pPr rtl="0"/>
             <a:r>
-              <a:rPr lang="en-GB" dirty="0"/>
-              <a:t>Latar </a:t>
-            </a:r>
-            <a:r>
-              <a:rPr lang="en-GB" dirty="0" err="1"/>
-              <a:t>Belakang</a:t>
-            </a:r>
-            <a:endParaRPr lang="id-ID" dirty="0"/>
-          </a:p>
-        </p:txBody>
-      </p:sp>
-      <p:sp>
-        <p:nvSpPr>
-          <p:cNvPr id="3" name="Tampungan Konten 2">
-            <a:extLst>
-              <a:ext uri="{FF2B5EF4-FFF2-40B4-BE49-F238E27FC236}">
-                <a16:creationId xmlns:a16="http://schemas.microsoft.com/office/drawing/2014/main" id="{95B371F2-DBA5-415A-82C8-651F587B857A}"/>
+              <a:rPr lang="en-GB" sz="4800" dirty="0"/>
+              <a:t>PENDAHULUAN</a:t>
+            </a:r>
+            <a:endParaRPr lang="id-ID" sz="4800" dirty="0"/>
+          </a:p>
+        </p:txBody>
+      </p:sp>
+      <p:sp>
+        <p:nvSpPr>
+          <p:cNvPr id="3" name="Tampungan Tanggal 2">
+            <a:extLst>
+              <a:ext uri="{FF2B5EF4-FFF2-40B4-BE49-F238E27FC236}">
+                <a16:creationId xmlns:a16="http://schemas.microsoft.com/office/drawing/2014/main" id="{8D3F7063-A64B-CB42-8BBF-BF52424269A8}"/>
               </a:ext>
             </a:extLst>
           </p:cNvPr>
@@ -31173,130 +31427,29 @@
             <a:spLocks noGrp="1"/>
           </p:cNvSpPr>
           <p:nvPr>
-            <p:ph type="body" idx="1"/>
+            <p:ph type="dt" sz="half" idx="10"/>
           </p:nvPr>
         </p:nvSpPr>
-        <p:spPr>
-          <a:xfrm>
-            <a:off x="1167492" y="2653167"/>
-            <a:ext cx="9779183" cy="3436483"/>
-          </a:xfrm>
-        </p:spPr>
-        <p:txBody>
-          <a:bodyPr vert="horz" lIns="91440" tIns="45720" rIns="91440" bIns="45720" rtlCol="0" anchor="t">
-            <a:normAutofit fontScale="85000" lnSpcReduction="20000"/>
-          </a:bodyPr>
+        <p:spPr/>
+        <p:txBody>
+          <a:bodyPr rtlCol="0"/>
           <a:lstStyle/>
           <a:p>
-            <a:pPr marL="342900" indent="-342900">
-              <a:buFont typeface="Arial" panose="020B0604020202020204" pitchFamily="34" charset="0"/>
-              <a:buChar char="•"/>
-            </a:pPr>
-            <a:r>
-              <a:rPr lang="id-ID" dirty="0"/>
-              <a:t>Sepak bola modern telah bertransformasi menjadi industri global di mana analisis data</a:t>
-            </a:r>
-            <a:r>
-              <a:rPr lang="en-GB" dirty="0"/>
-              <a:t> (data-driven)</a:t>
-            </a:r>
-            <a:r>
-              <a:rPr lang="id-ID" dirty="0"/>
-              <a:t> menjadi kunci untuk meraih keunggulan kompetitif. Dalam konteks ini, metrik analitis seperti </a:t>
-            </a:r>
-            <a:r>
-              <a:rPr lang="id-ID" i="1" dirty="0" err="1"/>
-              <a:t>Expected</a:t>
-            </a:r>
-            <a:r>
-              <a:rPr lang="id-ID" i="1" dirty="0"/>
-              <a:t> </a:t>
-            </a:r>
-            <a:r>
-              <a:rPr lang="id-ID" i="1" dirty="0" err="1"/>
-              <a:t>Goals</a:t>
-            </a:r>
-            <a:r>
-              <a:rPr lang="id-ID" dirty="0"/>
-              <a:t> (</a:t>
-            </a:r>
-            <a:r>
-              <a:rPr lang="id-ID" dirty="0" err="1"/>
-              <a:t>xG</a:t>
-            </a:r>
-            <a:r>
-              <a:rPr lang="id-ID" dirty="0"/>
-              <a:t>) menjadi fundamental.</a:t>
-            </a:r>
-            <a:endParaRPr lang="en-GB" dirty="0"/>
-          </a:p>
-          <a:p>
-            <a:pPr marL="342900" indent="-342900">
-              <a:buFont typeface="Arial" panose="020B0604020202020204" pitchFamily="34" charset="0"/>
-              <a:buChar char="•"/>
-            </a:pPr>
-            <a:r>
-              <a:rPr lang="id-ID" dirty="0"/>
-              <a:t>Secara sederhana, </a:t>
-            </a:r>
-            <a:r>
-              <a:rPr lang="id-ID" dirty="0" err="1"/>
-              <a:t>xG</a:t>
-            </a:r>
-            <a:r>
-              <a:rPr lang="id-ID" dirty="0"/>
-              <a:t> adalah skor yang mengukur kualitas sebuah peluang, dengan nilai </a:t>
-            </a:r>
-            <a:r>
-              <a:rPr lang="id-ID" b="1" dirty="0"/>
-              <a:t>dari</a:t>
-            </a:r>
-            <a:r>
-              <a:rPr lang="id-ID" dirty="0"/>
-              <a:t> 0 (tidak mungkin gol) </a:t>
-            </a:r>
-            <a:r>
-              <a:rPr lang="id-ID" b="1" dirty="0"/>
-              <a:t>hingga</a:t>
-            </a:r>
-            <a:r>
-              <a:rPr lang="id-ID" dirty="0"/>
-              <a:t> 1 (pasti gol). Skor ini dihitung dengan menganalisis ribuan data tembakan sejenis untuk menjawab pertanyaan: </a:t>
-            </a:r>
-            <a:r>
-              <a:rPr lang="id-ID" i="1" dirty="0"/>
-              <a:t>"Seberapa besar kemungkinan tembakan dari posisi dan situasi ini menjadi gol?"</a:t>
-            </a:r>
-            <a:r>
-              <a:rPr lang="id-ID" dirty="0"/>
-              <a:t> (</a:t>
-            </a:r>
-            <a:r>
-              <a:rPr lang="id-ID" dirty="0" err="1"/>
-              <a:t>Rathke</a:t>
-            </a:r>
-            <a:r>
-              <a:rPr lang="id-ID" dirty="0"/>
-              <a:t>, 2017; </a:t>
-            </a:r>
-            <a:r>
-              <a:rPr lang="id-ID" dirty="0" err="1"/>
-              <a:t>Eggels</a:t>
-            </a:r>
-            <a:r>
-              <a:rPr lang="id-ID" dirty="0"/>
-              <a:t>, 2016).</a:t>
-            </a:r>
-            <a:endParaRPr lang="en-GB" dirty="0"/>
-          </a:p>
-        </p:txBody>
-      </p:sp>
-      <p:sp>
-        <p:nvSpPr>
-          <p:cNvPr id="6" name="Tampungan Nomor Slide 5">
-            <a:extLst>
-              <a:ext uri="{FF2B5EF4-FFF2-40B4-BE49-F238E27FC236}">
-                <a16:creationId xmlns:a16="http://schemas.microsoft.com/office/drawing/2014/main" id="{134C72D2-EFDF-844A-8472-CB49A59B127B}"/>
+            <a:pPr rtl="0"/>
+            <a:fld id="{A808DD98-197B-46F5-A6AA-BDA332D7E685}" type="datetime1">
+              <a:rPr lang="id-ID" smtClean="0"/>
+              <a:t>14/10/2025</a:t>
+            </a:fld>
+            <a:endParaRPr lang="id-ID"/>
+          </a:p>
+        </p:txBody>
+      </p:sp>
+      <p:sp>
+        <p:nvSpPr>
+          <p:cNvPr id="5" name="Tampungan Nomor Slide 4">
+            <a:extLst>
+              <a:ext uri="{FF2B5EF4-FFF2-40B4-BE49-F238E27FC236}">
+                <a16:creationId xmlns:a16="http://schemas.microsoft.com/office/drawing/2014/main" id="{7003A5E2-8F37-D546-BCD9-24A2037BB54D}"/>
               </a:ext>
             </a:extLst>
           </p:cNvPr>
@@ -31307,12 +31460,7 @@
             <p:ph type="sldNum" sz="quarter" idx="12"/>
           </p:nvPr>
         </p:nvSpPr>
-        <p:spPr>
-          <a:xfrm>
-            <a:off x="10206318" y="6356350"/>
-            <a:ext cx="1604682" cy="365125"/>
-          </a:xfrm>
-        </p:spPr>
+        <p:spPr/>
         <p:txBody>
           <a:bodyPr rtlCol="0"/>
           <a:lstStyle/>
@@ -31330,7 +31478,7 @@
     </p:spTree>
     <p:extLst>
       <p:ext uri="{BB962C8B-B14F-4D97-AF65-F5344CB8AC3E}">
-        <p14:creationId xmlns:p14="http://schemas.microsoft.com/office/powerpoint/2010/main" val="1639799154"/>
+        <p14:creationId xmlns:p14="http://schemas.microsoft.com/office/powerpoint/2010/main" val="2639983765"/>
       </p:ext>
     </p:extLst>
   </p:cSld>
@@ -31341,6 +31489,324 @@
 </file>
 
 <file path=ppt/slides/slide40.xml><?xml version="1.0" encoding="utf-8"?>
+<p:sld xmlns:a="http://schemas.openxmlformats.org/drawingml/2006/main" xmlns:r="http://schemas.openxmlformats.org/officeDocument/2006/relationships" xmlns:p="http://schemas.openxmlformats.org/presentationml/2006/main">
+  <p:cSld>
+    <p:spTree>
+      <p:nvGrpSpPr>
+        <p:cNvPr id="1" name="">
+          <a:extLst>
+            <a:ext uri="{FF2B5EF4-FFF2-40B4-BE49-F238E27FC236}">
+              <a16:creationId xmlns:a16="http://schemas.microsoft.com/office/drawing/2014/main" id="{30D4E6D6-66B3-4C11-4071-9A1616A23A52}"/>
+            </a:ext>
+          </a:extLst>
+        </p:cNvPr>
+        <p:cNvGrpSpPr/>
+        <p:nvPr/>
+      </p:nvGrpSpPr>
+      <p:grpSpPr>
+        <a:xfrm>
+          <a:off x="0" y="0"/>
+          <a:ext cx="0" cy="0"/>
+          <a:chOff x="0" y="0"/>
+          <a:chExt cx="0" cy="0"/>
+        </a:xfrm>
+      </p:grpSpPr>
+      <p:sp>
+        <p:nvSpPr>
+          <p:cNvPr id="2" name="Judul 1">
+            <a:extLst>
+              <a:ext uri="{FF2B5EF4-FFF2-40B4-BE49-F238E27FC236}">
+                <a16:creationId xmlns:a16="http://schemas.microsoft.com/office/drawing/2014/main" id="{EE6B2CF1-4B47-BF0E-656E-FE21F300D2EB}"/>
+              </a:ext>
+            </a:extLst>
+          </p:cNvPr>
+          <p:cNvSpPr>
+            <a:spLocks noGrp="1"/>
+          </p:cNvSpPr>
+          <p:nvPr>
+            <p:ph type="title"/>
+          </p:nvPr>
+        </p:nvSpPr>
+        <p:spPr>
+          <a:xfrm>
+            <a:off x="1167492" y="381000"/>
+            <a:ext cx="9779183" cy="1325563"/>
+          </a:xfrm>
+        </p:spPr>
+        <p:txBody>
+          <a:bodyPr rtlCol="0"/>
+          <a:lstStyle/>
+          <a:p>
+            <a:r>
+              <a:rPr lang="en-GB" dirty="0"/>
+              <a:t>Kesimpulan</a:t>
+            </a:r>
+            <a:endParaRPr lang="id-ID" dirty="0"/>
+          </a:p>
+        </p:txBody>
+      </p:sp>
+      <p:sp>
+        <p:nvSpPr>
+          <p:cNvPr id="4" name="Tampungan Konten 3">
+            <a:extLst>
+              <a:ext uri="{FF2B5EF4-FFF2-40B4-BE49-F238E27FC236}">
+                <a16:creationId xmlns:a16="http://schemas.microsoft.com/office/drawing/2014/main" id="{1DC8A93A-C50E-D83E-71CB-29084D6A9B5F}"/>
+              </a:ext>
+            </a:extLst>
+          </p:cNvPr>
+          <p:cNvSpPr>
+            <a:spLocks noGrp="1"/>
+          </p:cNvSpPr>
+          <p:nvPr>
+            <p:ph idx="1"/>
+          </p:nvPr>
+        </p:nvSpPr>
+        <p:spPr>
+          <a:xfrm>
+            <a:off x="1167492" y="2020529"/>
+            <a:ext cx="7888017" cy="3657600"/>
+          </a:xfrm>
+        </p:spPr>
+        <p:txBody>
+          <a:bodyPr vert="horz" lIns="91440" tIns="45720" rIns="91440" bIns="45720" rtlCol="0" anchor="t">
+            <a:normAutofit lnSpcReduction="10000"/>
+          </a:bodyPr>
+          <a:lstStyle/>
+          <a:p>
+            <a:r>
+              <a:rPr lang="id-ID" sz="3200" dirty="0"/>
+              <a:t>Penerapan </a:t>
+            </a:r>
+            <a:r>
+              <a:rPr lang="id-ID" sz="3200" dirty="0" err="1"/>
+              <a:t>LightGBM</a:t>
+            </a:r>
+            <a:r>
+              <a:rPr lang="id-ID" sz="3200" dirty="0"/>
+              <a:t> yang dioptimalkan berhasil menghasilkan model prediksi </a:t>
+            </a:r>
+            <a:r>
+              <a:rPr lang="id-ID" sz="3200" dirty="0" err="1"/>
+              <a:t>xG</a:t>
+            </a:r>
+            <a:r>
+              <a:rPr lang="id-ID" sz="3200" dirty="0"/>
+              <a:t> dengan akurasi dan keandalan probabilitas yang sangat tinggi. Dari segi komputasi, </a:t>
+            </a:r>
+            <a:r>
+              <a:rPr lang="id-ID" sz="3200" dirty="0" err="1"/>
+              <a:t>LightGBM</a:t>
+            </a:r>
+            <a:r>
+              <a:rPr lang="id-ID" sz="3200" dirty="0"/>
+              <a:t> juga terbukti jauh lebih efisien. Luaran dari penelitian ini tidak hanya berupa model, tetapi juga sebuah antarmuka aplikasi web interaktif yang fungsional untuk penerapan praktis.</a:t>
+            </a:r>
+          </a:p>
+        </p:txBody>
+      </p:sp>
+      <p:sp>
+        <p:nvSpPr>
+          <p:cNvPr id="9" name="Tampungan Nomor Slide 8">
+            <a:extLst>
+              <a:ext uri="{FF2B5EF4-FFF2-40B4-BE49-F238E27FC236}">
+                <a16:creationId xmlns:a16="http://schemas.microsoft.com/office/drawing/2014/main" id="{414C40D9-956D-F3DE-C569-43226D763FB1}"/>
+              </a:ext>
+            </a:extLst>
+          </p:cNvPr>
+          <p:cNvSpPr>
+            <a:spLocks noGrp="1"/>
+          </p:cNvSpPr>
+          <p:nvPr>
+            <p:ph type="sldNum" sz="quarter" idx="4"/>
+          </p:nvPr>
+        </p:nvSpPr>
+        <p:spPr>
+          <a:xfrm>
+            <a:off x="10153276" y="6356350"/>
+            <a:ext cx="1657723" cy="365125"/>
+          </a:xfrm>
+        </p:spPr>
+        <p:txBody>
+          <a:bodyPr rtlCol="0"/>
+          <a:lstStyle/>
+          <a:p>
+            <a:pPr rtl="0"/>
+            <a:fld id="{294A09A9-5501-47C1-A89A-A340965A2BE2}" type="slidenum">
+              <a:rPr lang="id-ID" smtClean="0"/>
+              <a:pPr rtl="0"/>
+              <a:t>40</a:t>
+            </a:fld>
+            <a:endParaRPr lang="id-ID" dirty="0"/>
+          </a:p>
+        </p:txBody>
+      </p:sp>
+    </p:spTree>
+    <p:extLst>
+      <p:ext uri="{BB962C8B-B14F-4D97-AF65-F5344CB8AC3E}">
+        <p14:creationId xmlns:p14="http://schemas.microsoft.com/office/powerpoint/2010/main" val="467050395"/>
+      </p:ext>
+    </p:extLst>
+  </p:cSld>
+  <p:clrMapOvr>
+    <a:masterClrMapping/>
+  </p:clrMapOvr>
+</p:sld>
+</file>
+
+<file path=ppt/slides/slide41.xml><?xml version="1.0" encoding="utf-8"?>
+<p:sld xmlns:a="http://schemas.openxmlformats.org/drawingml/2006/main" xmlns:r="http://schemas.openxmlformats.org/officeDocument/2006/relationships" xmlns:p="http://schemas.openxmlformats.org/presentationml/2006/main">
+  <p:cSld>
+    <p:spTree>
+      <p:nvGrpSpPr>
+        <p:cNvPr id="1" name=""/>
+        <p:cNvGrpSpPr/>
+        <p:nvPr/>
+      </p:nvGrpSpPr>
+      <p:grpSpPr>
+        <a:xfrm>
+          <a:off x="0" y="0"/>
+          <a:ext cx="0" cy="0"/>
+          <a:chOff x="0" y="0"/>
+          <a:chExt cx="0" cy="0"/>
+        </a:xfrm>
+      </p:grpSpPr>
+      <p:sp>
+        <p:nvSpPr>
+          <p:cNvPr id="2" name="Title 1">
+            <a:extLst>
+              <a:ext uri="{FF2B5EF4-FFF2-40B4-BE49-F238E27FC236}">
+                <a16:creationId xmlns:a16="http://schemas.microsoft.com/office/drawing/2014/main" id="{B9466093-D4AA-F632-85B3-59570CEDC2CE}"/>
+              </a:ext>
+            </a:extLst>
+          </p:cNvPr>
+          <p:cNvSpPr>
+            <a:spLocks noGrp="1"/>
+          </p:cNvSpPr>
+          <p:nvPr>
+            <p:ph type="title"/>
+          </p:nvPr>
+        </p:nvSpPr>
+        <p:spPr/>
+        <p:txBody>
+          <a:bodyPr/>
+          <a:lstStyle/>
+          <a:p>
+            <a:r>
+              <a:rPr lang="en-GB" dirty="0"/>
+              <a:t>Saran</a:t>
+            </a:r>
+            <a:endParaRPr lang="id-ID" dirty="0"/>
+          </a:p>
+        </p:txBody>
+      </p:sp>
+      <p:sp>
+        <p:nvSpPr>
+          <p:cNvPr id="3" name="Content Placeholder 2">
+            <a:extLst>
+              <a:ext uri="{FF2B5EF4-FFF2-40B4-BE49-F238E27FC236}">
+                <a16:creationId xmlns:a16="http://schemas.microsoft.com/office/drawing/2014/main" id="{79D8D027-F1C0-BD15-68D4-DC8C613ADD28}"/>
+              </a:ext>
+            </a:extLst>
+          </p:cNvPr>
+          <p:cNvSpPr>
+            <a:spLocks noGrp="1"/>
+          </p:cNvSpPr>
+          <p:nvPr>
+            <p:ph idx="1"/>
+          </p:nvPr>
+        </p:nvSpPr>
+        <p:spPr>
+          <a:xfrm>
+            <a:off x="1167492" y="1706563"/>
+            <a:ext cx="9893797" cy="3650253"/>
+          </a:xfrm>
+        </p:spPr>
+        <p:txBody>
+          <a:bodyPr/>
+          <a:lstStyle/>
+          <a:p>
+            <a:r>
+              <a:rPr lang="id-ID" sz="2800" dirty="0"/>
+              <a:t>Untuk penelitian selanjutnya, disarankan untuk memperkaya model dengan fitur yang lebih detail, seperti data posisi pemain bertahan saat tembakan terjadi. Pengembangan aplikasi juga dapat dilanjutkan dengan menambahkan fitur analisis performa pemain atau perbandingan taktik tim.</a:t>
+            </a:r>
+          </a:p>
+        </p:txBody>
+      </p:sp>
+      <p:sp>
+        <p:nvSpPr>
+          <p:cNvPr id="4" name="Date Placeholder 3">
+            <a:extLst>
+              <a:ext uri="{FF2B5EF4-FFF2-40B4-BE49-F238E27FC236}">
+                <a16:creationId xmlns:a16="http://schemas.microsoft.com/office/drawing/2014/main" id="{3CA90C15-EF3A-B529-724E-20961D1EA568}"/>
+              </a:ext>
+            </a:extLst>
+          </p:cNvPr>
+          <p:cNvSpPr>
+            <a:spLocks noGrp="1"/>
+          </p:cNvSpPr>
+          <p:nvPr>
+            <p:ph type="dt" sz="half" idx="2"/>
+          </p:nvPr>
+        </p:nvSpPr>
+        <p:spPr/>
+        <p:txBody>
+          <a:bodyPr/>
+          <a:lstStyle/>
+          <a:p>
+            <a:pPr rtl="0"/>
+            <a:fld id="{864F080E-00EF-45FB-879B-543FC5219789}" type="datetime1">
+              <a:rPr lang="id-ID" noProof="0" smtClean="0"/>
+              <a:t>14/10/2025</a:t>
+            </a:fld>
+            <a:endParaRPr lang="id-ID" noProof="0"/>
+          </a:p>
+        </p:txBody>
+      </p:sp>
+      <p:sp>
+        <p:nvSpPr>
+          <p:cNvPr id="6" name="Slide Number Placeholder 5">
+            <a:extLst>
+              <a:ext uri="{FF2B5EF4-FFF2-40B4-BE49-F238E27FC236}">
+                <a16:creationId xmlns:a16="http://schemas.microsoft.com/office/drawing/2014/main" id="{3BCA0E54-BD5E-43D9-25A3-856FF970BBC2}"/>
+              </a:ext>
+            </a:extLst>
+          </p:cNvPr>
+          <p:cNvSpPr>
+            <a:spLocks noGrp="1"/>
+          </p:cNvSpPr>
+          <p:nvPr>
+            <p:ph type="sldNum" sz="quarter" idx="4"/>
+          </p:nvPr>
+        </p:nvSpPr>
+        <p:spPr/>
+        <p:txBody>
+          <a:bodyPr/>
+          <a:lstStyle/>
+          <a:p>
+            <a:pPr rtl="0"/>
+            <a:fld id="{294A09A9-5501-47C1-A89A-A340965A2BE2}" type="slidenum">
+              <a:rPr lang="id-ID" noProof="0" smtClean="0"/>
+              <a:pPr rtl="0"/>
+              <a:t>41</a:t>
+            </a:fld>
+            <a:endParaRPr lang="id-ID" noProof="0"/>
+          </a:p>
+        </p:txBody>
+      </p:sp>
+    </p:spTree>
+    <p:extLst>
+      <p:ext uri="{BB962C8B-B14F-4D97-AF65-F5344CB8AC3E}">
+        <p14:creationId xmlns:p14="http://schemas.microsoft.com/office/powerpoint/2010/main" val="1657666987"/>
+      </p:ext>
+    </p:extLst>
+  </p:cSld>
+  <p:clrMapOvr>
+    <a:masterClrMapping/>
+  </p:clrMapOvr>
+</p:sld>
+</file>
+
+<file path=ppt/slides/slide42.xml><?xml version="1.0" encoding="utf-8"?>
 <p:sld xmlns:a="http://schemas.openxmlformats.org/drawingml/2006/main" xmlns:r="http://schemas.openxmlformats.org/officeDocument/2006/relationships" xmlns:p="http://schemas.openxmlformats.org/presentationml/2006/main">
   <p:cSld>
     <p:spTree>
@@ -31409,7 +31875,13 @@
   <p:cSld>
     <p:spTree>
       <p:nvGrpSpPr>
-        <p:cNvPr id="1" name=""/>
+        <p:cNvPr id="1" name="">
+          <a:extLst>
+            <a:ext uri="{FF2B5EF4-FFF2-40B4-BE49-F238E27FC236}">
+              <a16:creationId xmlns:a16="http://schemas.microsoft.com/office/drawing/2014/main" id="{A1251A22-4259-1094-CC64-61CC4CF539F8}"/>
+            </a:ext>
+          </a:extLst>
+        </p:cNvPr>
         <p:cNvGrpSpPr/>
         <p:nvPr/>
       </p:nvGrpSpPr>
@@ -31426,7 +31898,7 @@
           <p:cNvPr id="2" name="Judul 1">
             <a:extLst>
               <a:ext uri="{FF2B5EF4-FFF2-40B4-BE49-F238E27FC236}">
-                <a16:creationId xmlns:a16="http://schemas.microsoft.com/office/drawing/2014/main" id="{912DF434-28DB-4621-A497-D62C41CE0419}"/>
+                <a16:creationId xmlns:a16="http://schemas.microsoft.com/office/drawing/2014/main" id="{DE2AE2A3-FE13-169F-B0F0-1256BBAA6768}"/>
               </a:ext>
             </a:extLst>
           </p:cNvPr>
@@ -31465,7 +31937,7 @@
           <p:cNvPr id="3" name="Tampungan Konten 2">
             <a:extLst>
               <a:ext uri="{FF2B5EF4-FFF2-40B4-BE49-F238E27FC236}">
-                <a16:creationId xmlns:a16="http://schemas.microsoft.com/office/drawing/2014/main" id="{22788C46-D0BC-4307-AE55-7601A139E7CB}"/>
+                <a16:creationId xmlns:a16="http://schemas.microsoft.com/office/drawing/2014/main" id="{2AD2762D-9C48-81CF-CFF0-1A42FFAB9B9F}"/>
               </a:ext>
             </a:extLst>
           </p:cNvPr>
@@ -31473,18 +31945,18 @@
             <a:spLocks noGrp="1"/>
           </p:cNvSpPr>
           <p:nvPr>
-            <p:ph idx="1"/>
+            <p:ph type="body" idx="1"/>
           </p:nvPr>
         </p:nvSpPr>
         <p:spPr>
           <a:xfrm>
-            <a:off x="1167493" y="2017467"/>
-            <a:ext cx="9779182" cy="3526990"/>
+            <a:off x="1167492" y="2653167"/>
+            <a:ext cx="9779183" cy="3436483"/>
           </a:xfrm>
         </p:spPr>
         <p:txBody>
           <a:bodyPr vert="horz" lIns="91440" tIns="45720" rIns="91440" bIns="45720" rtlCol="0" anchor="t">
-            <a:normAutofit/>
+            <a:normAutofit fontScale="85000" lnSpcReduction="20000"/>
           </a:bodyPr>
           <a:lstStyle/>
           <a:p>
@@ -31493,98 +31965,42 @@
               <a:buChar char="•"/>
             </a:pPr>
             <a:r>
-              <a:rPr lang="id-ID" sz="2000" dirty="0"/>
-              <a:t>Tantangan utama dalam pemodelan </a:t>
-            </a:r>
-            <a:r>
-              <a:rPr lang="id-ID" sz="2000" dirty="0" err="1"/>
+              <a:rPr lang="id-ID" dirty="0"/>
+              <a:t>Sepak bola modern telah bertransformasi menjadi industri global di mana analisis data</a:t>
+            </a:r>
+            <a:r>
+              <a:rPr lang="en-GB" dirty="0"/>
+              <a:t> (data-driven)</a:t>
+            </a:r>
+            <a:r>
+              <a:rPr lang="id-ID" dirty="0"/>
+              <a:t> menjadi kunci untuk meraih keunggulan kompetitif. Dalam konteks ini, metrik analitis seperti </a:t>
+            </a:r>
+            <a:r>
+              <a:rPr lang="id-ID" i="1" dirty="0" err="1"/>
+              <a:t>Expected</a:t>
+            </a:r>
+            <a:r>
+              <a:rPr lang="id-ID" i="1" dirty="0"/>
+              <a:t> </a:t>
+            </a:r>
+            <a:r>
+              <a:rPr lang="id-ID" i="1" dirty="0" err="1"/>
+              <a:t>Goals</a:t>
+            </a:r>
+            <a:r>
+              <a:rPr lang="id-ID" dirty="0"/>
+              <a:t> (</a:t>
+            </a:r>
+            <a:r>
+              <a:rPr lang="id-ID" dirty="0" err="1"/>
               <a:t>xG</a:t>
             </a:r>
             <a:r>
-              <a:rPr lang="id-ID" sz="2000" dirty="0"/>
-              <a:t> adalah sifat data sepak bola yang sangat kompleks dan </a:t>
-            </a:r>
-            <a:r>
-              <a:rPr lang="id-ID" sz="2000" b="1" dirty="0"/>
-              <a:t>non-linear</a:t>
-            </a:r>
-            <a:r>
-              <a:rPr lang="id-ID" sz="2000" dirty="0"/>
-              <a:t>. Model linear (misalnya, Regresi Logistik) terbukti tidak memadai, sementara model non-linear yang lebih akurat </a:t>
-            </a:r>
-            <a:r>
-              <a:rPr lang="id-ID" sz="2000" dirty="0" err="1"/>
-              <a:t>seringkali</a:t>
-            </a:r>
-            <a:r>
-              <a:rPr lang="id-ID" sz="2000" dirty="0"/>
-              <a:t> mengorbankan </a:t>
-            </a:r>
-            <a:r>
-              <a:rPr lang="id-ID" sz="2000" b="1" dirty="0"/>
-              <a:t>efisiensi komputasi</a:t>
-            </a:r>
-            <a:r>
-              <a:rPr lang="id-ID" sz="2000" dirty="0"/>
-              <a:t> secara signifikan, menjadikannya lambat dan berat. (</a:t>
-            </a:r>
-            <a:r>
-              <a:rPr lang="id-ID" sz="2000" dirty="0" err="1"/>
-              <a:t>Anzer</a:t>
-            </a:r>
-            <a:r>
-              <a:rPr lang="id-ID" sz="2000" dirty="0"/>
-              <a:t> &amp; </a:t>
-            </a:r>
-            <a:r>
-              <a:rPr lang="id-ID" sz="2000" dirty="0" err="1"/>
-              <a:t>Bauer</a:t>
-            </a:r>
-            <a:r>
-              <a:rPr lang="id-ID" sz="2000" dirty="0"/>
-              <a:t>, 2021; </a:t>
-            </a:r>
-            <a:r>
-              <a:rPr lang="id-ID" sz="2000" dirty="0" err="1"/>
-              <a:t>Méndez</a:t>
-            </a:r>
-            <a:r>
-              <a:rPr lang="id-ID" sz="2000" dirty="0"/>
-              <a:t> </a:t>
-            </a:r>
-            <a:r>
-              <a:rPr lang="id-ID" sz="2000" dirty="0" err="1"/>
-              <a:t>et</a:t>
-            </a:r>
-            <a:r>
-              <a:rPr lang="id-ID" sz="2000" dirty="0"/>
-              <a:t> </a:t>
-            </a:r>
-            <a:r>
-              <a:rPr lang="id-ID" sz="2000" dirty="0" err="1"/>
-              <a:t>al.</a:t>
-            </a:r>
-            <a:r>
-              <a:rPr lang="id-ID" sz="2000" dirty="0"/>
-              <a:t>, 2023; </a:t>
-            </a:r>
-            <a:r>
-              <a:rPr lang="id-ID" sz="2000" dirty="0" err="1"/>
-              <a:t>Hewitt</a:t>
-            </a:r>
-            <a:r>
-              <a:rPr lang="id-ID" sz="2000" dirty="0"/>
-              <a:t> &amp; </a:t>
-            </a:r>
-            <a:r>
-              <a:rPr lang="id-ID" sz="2000" dirty="0" err="1"/>
-              <a:t>Karakuş</a:t>
-            </a:r>
-            <a:r>
-              <a:rPr lang="id-ID" sz="2000" dirty="0"/>
-              <a:t>, 2023).</a:t>
-            </a:r>
-            <a:endParaRPr lang="en-GB" sz="2000" dirty="0"/>
+              <a:rPr lang="id-ID" dirty="0"/>
+              <a:t>) menjadi fundamental.</a:t>
+            </a:r>
+            <a:endParaRPr lang="en-GB" dirty="0"/>
           </a:p>
           <a:p>
             <a:pPr marL="342900" indent="-342900">
@@ -31592,118 +32008,67 @@
               <a:buChar char="•"/>
             </a:pPr>
             <a:r>
-              <a:rPr lang="id-ID" sz="2000" b="1" dirty="0" err="1"/>
-              <a:t>LightGBM</a:t>
-            </a:r>
-            <a:r>
-              <a:rPr lang="id-ID" sz="2000" dirty="0"/>
-              <a:t> diajukan sebagai solusi ideal. Sebagai model yang berbasis </a:t>
-            </a:r>
-            <a:r>
-              <a:rPr lang="id-ID" sz="2000" i="1" dirty="0" err="1"/>
-              <a:t>decision</a:t>
-            </a:r>
-            <a:r>
-              <a:rPr lang="id-ID" sz="2000" i="1" dirty="0"/>
-              <a:t> </a:t>
-            </a:r>
-            <a:r>
-              <a:rPr lang="id-ID" sz="2000" i="1" dirty="0" err="1"/>
-              <a:t>tree</a:t>
-            </a:r>
-            <a:r>
-              <a:rPr lang="id-ID" sz="2000" dirty="0"/>
-              <a:t>, ia secara inheren bersifat </a:t>
-            </a:r>
-            <a:r>
-              <a:rPr lang="id-ID" sz="2000" b="1" dirty="0"/>
-              <a:t>non-linear</a:t>
-            </a:r>
-            <a:r>
-              <a:rPr lang="id-ID" sz="2000" dirty="0"/>
-              <a:t> karena kemampuannya </a:t>
-            </a:r>
-            <a:r>
-              <a:rPr lang="id-ID" sz="2000" dirty="0" err="1"/>
-              <a:t>mempartisi</a:t>
-            </a:r>
-            <a:r>
-              <a:rPr lang="id-ID" sz="2000" dirty="0"/>
-              <a:t> data ke dalam segmen-segmen kompleks, sehingga mampu menangkap hubungan antar variabel yang tidak lurus. Keunggulannya adalah kombinasi antara </a:t>
-            </a:r>
-            <a:r>
-              <a:rPr lang="id-ID" sz="2000" b="1" dirty="0"/>
-              <a:t>akurasi tinggi</a:t>
-            </a:r>
-            <a:r>
-              <a:rPr lang="id-ID" sz="2000" dirty="0"/>
-              <a:t> dan </a:t>
-            </a:r>
-            <a:r>
-              <a:rPr lang="id-ID" sz="2000" b="1" dirty="0"/>
-              <a:t>efisiensi luar biasa</a:t>
-            </a:r>
-            <a:r>
-              <a:rPr lang="id-ID" sz="2000" dirty="0"/>
-              <a:t>, dengan waktu pelatihan terbukti </a:t>
-            </a:r>
-            <a:r>
-              <a:rPr lang="id-ID" sz="2000" b="1" dirty="0"/>
-              <a:t>lebih dari 10 kali lebih cepat</a:t>
-            </a:r>
-            <a:r>
-              <a:rPr lang="id-ID" sz="2000" dirty="0"/>
-              <a:t> dibandingkan implementasi </a:t>
-            </a:r>
-            <a:r>
-              <a:rPr lang="id-ID" sz="2000" i="1" dirty="0" err="1"/>
-              <a:t>boosting</a:t>
-            </a:r>
-            <a:r>
-              <a:rPr lang="id-ID" sz="2000" dirty="0"/>
-              <a:t> populer lainnya. (Ke </a:t>
-            </a:r>
-            <a:r>
-              <a:rPr lang="id-ID" sz="2000" dirty="0" err="1"/>
-              <a:t>et</a:t>
-            </a:r>
-            <a:r>
-              <a:rPr lang="id-ID" sz="2000" dirty="0"/>
-              <a:t> </a:t>
-            </a:r>
-            <a:r>
-              <a:rPr lang="id-ID" sz="2000" dirty="0" err="1"/>
-              <a:t>al.</a:t>
-            </a:r>
-            <a:r>
-              <a:rPr lang="id-ID" sz="2000" dirty="0"/>
+              <a:rPr lang="id-ID" dirty="0"/>
+              <a:t>Secara sederhana, </a:t>
+            </a:r>
+            <a:r>
+              <a:rPr lang="id-ID" dirty="0" err="1"/>
+              <a:t>xG</a:t>
+            </a:r>
+            <a:r>
+              <a:rPr lang="id-ID" dirty="0"/>
+              <a:t> adalah skor yang mengukur kualitas sebuah peluang, dengan nilai </a:t>
+            </a:r>
+            <a:r>
+              <a:rPr lang="id-ID" b="1" dirty="0"/>
+              <a:t>dari</a:t>
+            </a:r>
+            <a:r>
+              <a:rPr lang="id-ID" dirty="0"/>
+              <a:t> 0 (tidak mungkin gol) </a:t>
+            </a:r>
+            <a:r>
+              <a:rPr lang="id-ID" b="1" dirty="0"/>
+              <a:t>hingga</a:t>
+            </a:r>
+            <a:r>
+              <a:rPr lang="id-ID" dirty="0"/>
+              <a:t> 1 (pasti gol). Skor ini dihitung dengan menganalisis ribuan data tembakan sejenis untuk menjawab pertanyaan: </a:t>
+            </a:r>
+            <a:r>
+              <a:rPr lang="id-ID" i="1" dirty="0"/>
+              <a:t>"Seberapa besar kemungkinan tembakan dari posisi dan situasi ini menjadi gol?"</a:t>
+            </a:r>
+            <a:r>
+              <a:rPr lang="id-ID" dirty="0"/>
+              <a:t> (</a:t>
+            </a:r>
+            <a:r>
+              <a:rPr lang="id-ID" dirty="0" err="1"/>
+              <a:t>Rathke</a:t>
+            </a:r>
+            <a:r>
+              <a:rPr lang="id-ID" dirty="0"/>
               <a:t>, 2017; </a:t>
             </a:r>
             <a:r>
-              <a:rPr lang="id-ID" sz="2000" dirty="0" err="1"/>
-              <a:t>Florek</a:t>
-            </a:r>
-            <a:r>
-              <a:rPr lang="id-ID" sz="2000" dirty="0"/>
-              <a:t> &amp; </a:t>
-            </a:r>
-            <a:r>
-              <a:rPr lang="id-ID" sz="2000" dirty="0" err="1"/>
-              <a:t>Zagdański</a:t>
-            </a:r>
-            <a:r>
-              <a:rPr lang="id-ID" sz="2000" dirty="0"/>
-              <a:t>, 2023).</a:t>
-            </a:r>
-          </a:p>
-        </p:txBody>
-      </p:sp>
-      <p:sp>
-        <p:nvSpPr>
-          <p:cNvPr id="4" name="Tampungan Tanggal 3">
-            <a:extLst>
-              <a:ext uri="{FF2B5EF4-FFF2-40B4-BE49-F238E27FC236}">
-                <a16:creationId xmlns:a16="http://schemas.microsoft.com/office/drawing/2014/main" id="{5739303D-13C0-6A41-947A-F998CC47B32E}"/>
+              <a:rPr lang="id-ID" dirty="0" err="1"/>
+              <a:t>Eggels</a:t>
+            </a:r>
+            <a:r>
+              <a:rPr lang="id-ID" dirty="0"/>
+              <a:t>, 2016).</a:t>
+            </a:r>
+            <a:endParaRPr lang="en-GB" dirty="0"/>
+          </a:p>
+        </p:txBody>
+      </p:sp>
+      <p:sp>
+        <p:nvSpPr>
+          <p:cNvPr id="6" name="Tampungan Nomor Slide 5">
+            <a:extLst>
+              <a:ext uri="{FF2B5EF4-FFF2-40B4-BE49-F238E27FC236}">
+                <a16:creationId xmlns:a16="http://schemas.microsoft.com/office/drawing/2014/main" id="{5698DF03-8674-39BD-80D8-50B5F9158BBA}"/>
               </a:ext>
             </a:extLst>
           </p:cNvPr>
@@ -31711,48 +32076,13 @@
             <a:spLocks noGrp="1"/>
           </p:cNvSpPr>
           <p:nvPr>
-            <p:ph type="dt" sz="half" idx="2"/>
+            <p:ph type="sldNum" sz="quarter" idx="12"/>
           </p:nvPr>
         </p:nvSpPr>
         <p:spPr>
           <a:xfrm>
-            <a:off x="381000" y="6356350"/>
-            <a:ext cx="2743200" cy="365125"/>
-          </a:xfrm>
-        </p:spPr>
-        <p:txBody>
-          <a:bodyPr rtlCol="0"/>
-          <a:lstStyle/>
-          <a:p>
-            <a:pPr rtl="0"/>
-            <a:fld id="{70C69C4D-CAFD-4E0E-94E0-4B1709D96441}" type="datetime1">
-              <a:rPr lang="id-ID" smtClean="0"/>
-              <a:t>11/09/2025</a:t>
-            </a:fld>
-            <a:endParaRPr lang="id-ID"/>
-          </a:p>
-        </p:txBody>
-      </p:sp>
-      <p:sp>
-        <p:nvSpPr>
-          <p:cNvPr id="6" name="Tampungan Nomor Slide 5">
-            <a:extLst>
-              <a:ext uri="{FF2B5EF4-FFF2-40B4-BE49-F238E27FC236}">
-                <a16:creationId xmlns:a16="http://schemas.microsoft.com/office/drawing/2014/main" id="{60D470D0-6D64-5E42-9515-048F8779CD5E}"/>
-              </a:ext>
-            </a:extLst>
-          </p:cNvPr>
-          <p:cNvSpPr>
-            <a:spLocks noGrp="1"/>
-          </p:cNvSpPr>
-          <p:nvPr>
-            <p:ph type="sldNum" sz="quarter" idx="4"/>
-          </p:nvPr>
-        </p:nvSpPr>
-        <p:spPr>
-          <a:xfrm>
-            <a:off x="10153276" y="6356350"/>
-            <a:ext cx="1657723" cy="365125"/>
+            <a:off x="10206318" y="6356350"/>
+            <a:ext cx="1604682" cy="365125"/>
           </a:xfrm>
         </p:spPr>
         <p:txBody>
@@ -31772,7 +32102,7 @@
     </p:spTree>
     <p:extLst>
       <p:ext uri="{BB962C8B-B14F-4D97-AF65-F5344CB8AC3E}">
-        <p14:creationId xmlns:p14="http://schemas.microsoft.com/office/powerpoint/2010/main" val="1325608595"/>
+        <p14:creationId xmlns:p14="http://schemas.microsoft.com/office/powerpoint/2010/main" val="3907771421"/>
       </p:ext>
     </p:extLst>
   </p:cSld>
@@ -31804,7 +32134,7 @@
           <p:cNvPr id="2" name="Judul 1">
             <a:extLst>
               <a:ext uri="{FF2B5EF4-FFF2-40B4-BE49-F238E27FC236}">
-                <a16:creationId xmlns:a16="http://schemas.microsoft.com/office/drawing/2014/main" id="{D543047E-FBFD-4F79-BCA5-10E69740F030}"/>
+                <a16:creationId xmlns:a16="http://schemas.microsoft.com/office/drawing/2014/main" id="{912DF434-28DB-4621-A497-D62C41CE0419}"/>
               </a:ext>
             </a:extLst>
           </p:cNvPr>
@@ -31815,7 +32145,12 @@
             <p:ph type="title"/>
           </p:nvPr>
         </p:nvSpPr>
-        <p:spPr/>
+        <p:spPr>
+          <a:xfrm>
+            <a:off x="1167492" y="381000"/>
+            <a:ext cx="9779183" cy="1325563"/>
+          </a:xfrm>
+        </p:spPr>
         <p:txBody>
           <a:bodyPr rtlCol="0"/>
           <a:lstStyle/>
@@ -31833,6 +32168,581 @@
           </a:p>
         </p:txBody>
       </p:sp>
+      <p:sp>
+        <p:nvSpPr>
+          <p:cNvPr id="3" name="Tampungan Konten 2">
+            <a:extLst>
+              <a:ext uri="{FF2B5EF4-FFF2-40B4-BE49-F238E27FC236}">
+                <a16:creationId xmlns:a16="http://schemas.microsoft.com/office/drawing/2014/main" id="{22788C46-D0BC-4307-AE55-7601A139E7CB}"/>
+              </a:ext>
+            </a:extLst>
+          </p:cNvPr>
+          <p:cNvSpPr>
+            <a:spLocks noGrp="1"/>
+          </p:cNvSpPr>
+          <p:nvPr>
+            <p:ph idx="1"/>
+          </p:nvPr>
+        </p:nvSpPr>
+        <p:spPr>
+          <a:xfrm>
+            <a:off x="1167493" y="2017467"/>
+            <a:ext cx="9779182" cy="3526990"/>
+          </a:xfrm>
+        </p:spPr>
+        <p:txBody>
+          <a:bodyPr vert="horz" lIns="91440" tIns="45720" rIns="91440" bIns="45720" rtlCol="0" anchor="t">
+            <a:normAutofit/>
+          </a:bodyPr>
+          <a:lstStyle/>
+          <a:p>
+            <a:pPr marL="342900" indent="-342900">
+              <a:buFont typeface="Arial" panose="020B0604020202020204" pitchFamily="34" charset="0"/>
+              <a:buChar char="•"/>
+            </a:pPr>
+            <a:r>
+              <a:rPr lang="id-ID" sz="2000" dirty="0"/>
+              <a:t>Tantangan utama dalam pemodelan </a:t>
+            </a:r>
+            <a:r>
+              <a:rPr lang="id-ID" sz="2000" dirty="0" err="1"/>
+              <a:t>xG</a:t>
+            </a:r>
+            <a:r>
+              <a:rPr lang="id-ID" sz="2000" dirty="0"/>
+              <a:t> adalah sifat data sepak bola yang sangat kompleks dan </a:t>
+            </a:r>
+            <a:r>
+              <a:rPr lang="id-ID" sz="2000" b="1" dirty="0"/>
+              <a:t>non-linear</a:t>
+            </a:r>
+            <a:r>
+              <a:rPr lang="id-ID" sz="2000" dirty="0"/>
+              <a:t>. Model linear (misalnya, Regresi Logistik) terbukti tidak memadai, sementara model non-linear yang lebih akurat </a:t>
+            </a:r>
+            <a:r>
+              <a:rPr lang="id-ID" sz="2000" dirty="0" err="1"/>
+              <a:t>seringkali</a:t>
+            </a:r>
+            <a:r>
+              <a:rPr lang="id-ID" sz="2000" dirty="0"/>
+              <a:t> mengorbankan </a:t>
+            </a:r>
+            <a:r>
+              <a:rPr lang="id-ID" sz="2000" b="1" dirty="0"/>
+              <a:t>efisiensi komputasi</a:t>
+            </a:r>
+            <a:r>
+              <a:rPr lang="id-ID" sz="2000" dirty="0"/>
+              <a:t> secara signifikan, menjadikannya lambat dan berat. (</a:t>
+            </a:r>
+            <a:r>
+              <a:rPr lang="id-ID" sz="2000" dirty="0" err="1"/>
+              <a:t>Anzer</a:t>
+            </a:r>
+            <a:r>
+              <a:rPr lang="id-ID" sz="2000" dirty="0"/>
+              <a:t> &amp; </a:t>
+            </a:r>
+            <a:r>
+              <a:rPr lang="id-ID" sz="2000" dirty="0" err="1"/>
+              <a:t>Bauer</a:t>
+            </a:r>
+            <a:r>
+              <a:rPr lang="id-ID" sz="2000" dirty="0"/>
+              <a:t>, 2021; </a:t>
+            </a:r>
+            <a:r>
+              <a:rPr lang="id-ID" sz="2000" dirty="0" err="1"/>
+              <a:t>Méndez</a:t>
+            </a:r>
+            <a:r>
+              <a:rPr lang="id-ID" sz="2000" dirty="0"/>
+              <a:t> </a:t>
+            </a:r>
+            <a:r>
+              <a:rPr lang="id-ID" sz="2000" dirty="0" err="1"/>
+              <a:t>et</a:t>
+            </a:r>
+            <a:r>
+              <a:rPr lang="id-ID" sz="2000" dirty="0"/>
+              <a:t> </a:t>
+            </a:r>
+            <a:r>
+              <a:rPr lang="id-ID" sz="2000" dirty="0" err="1"/>
+              <a:t>al.</a:t>
+            </a:r>
+            <a:r>
+              <a:rPr lang="id-ID" sz="2000" dirty="0"/>
+              <a:t>, 2023; </a:t>
+            </a:r>
+            <a:r>
+              <a:rPr lang="id-ID" sz="2000" dirty="0" err="1"/>
+              <a:t>Hewitt</a:t>
+            </a:r>
+            <a:r>
+              <a:rPr lang="id-ID" sz="2000" dirty="0"/>
+              <a:t> &amp; </a:t>
+            </a:r>
+            <a:r>
+              <a:rPr lang="id-ID" sz="2000" dirty="0" err="1"/>
+              <a:t>Karakuş</a:t>
+            </a:r>
+            <a:r>
+              <a:rPr lang="id-ID" sz="2000" dirty="0"/>
+              <a:t>, 2023).</a:t>
+            </a:r>
+            <a:endParaRPr lang="en-GB" sz="2000" dirty="0"/>
+          </a:p>
+          <a:p>
+            <a:pPr marL="342900" indent="-342900">
+              <a:buFont typeface="Arial" panose="020B0604020202020204" pitchFamily="34" charset="0"/>
+              <a:buChar char="•"/>
+            </a:pPr>
+            <a:r>
+              <a:rPr lang="id-ID" sz="2000" b="1" dirty="0" err="1"/>
+              <a:t>LightGBM</a:t>
+            </a:r>
+            <a:r>
+              <a:rPr lang="id-ID" sz="2000" dirty="0"/>
+              <a:t> diajukan sebagai solusi ideal. Sebagai model yang berbasis </a:t>
+            </a:r>
+            <a:r>
+              <a:rPr lang="id-ID" sz="2000" i="1" dirty="0" err="1"/>
+              <a:t>decision</a:t>
+            </a:r>
+            <a:r>
+              <a:rPr lang="id-ID" sz="2000" i="1" dirty="0"/>
+              <a:t> </a:t>
+            </a:r>
+            <a:r>
+              <a:rPr lang="id-ID" sz="2000" i="1" dirty="0" err="1"/>
+              <a:t>tree</a:t>
+            </a:r>
+            <a:r>
+              <a:rPr lang="id-ID" sz="2000" dirty="0"/>
+              <a:t>, ia secara inheren bersifat </a:t>
+            </a:r>
+            <a:r>
+              <a:rPr lang="id-ID" sz="2000" b="1" dirty="0"/>
+              <a:t>non-linear</a:t>
+            </a:r>
+            <a:r>
+              <a:rPr lang="id-ID" sz="2000" dirty="0"/>
+              <a:t> karena kemampuannya </a:t>
+            </a:r>
+            <a:r>
+              <a:rPr lang="id-ID" sz="2000" dirty="0" err="1"/>
+              <a:t>mempartisi</a:t>
+            </a:r>
+            <a:r>
+              <a:rPr lang="id-ID" sz="2000" dirty="0"/>
+              <a:t> data ke dalam segmen-segmen kompleks, sehingga mampu menangkap hubungan antar variabel yang tidak lurus. Keunggulannya adalah kombinasi antara </a:t>
+            </a:r>
+            <a:r>
+              <a:rPr lang="id-ID" sz="2000" b="1" dirty="0"/>
+              <a:t>akurasi tinggi</a:t>
+            </a:r>
+            <a:r>
+              <a:rPr lang="id-ID" sz="2000" dirty="0"/>
+              <a:t> dan </a:t>
+            </a:r>
+            <a:r>
+              <a:rPr lang="id-ID" sz="2000" b="1" dirty="0"/>
+              <a:t>efisiensi luar biasa</a:t>
+            </a:r>
+            <a:r>
+              <a:rPr lang="id-ID" sz="2000" dirty="0"/>
+              <a:t>, dengan waktu pelatihan terbukti </a:t>
+            </a:r>
+            <a:r>
+              <a:rPr lang="id-ID" sz="2000" b="1" dirty="0"/>
+              <a:t>lebih dari 10 kali lebih cepat</a:t>
+            </a:r>
+            <a:r>
+              <a:rPr lang="id-ID" sz="2000" dirty="0"/>
+              <a:t> dibandingkan implementasi </a:t>
+            </a:r>
+            <a:r>
+              <a:rPr lang="id-ID" sz="2000" i="1" dirty="0" err="1"/>
+              <a:t>boosting</a:t>
+            </a:r>
+            <a:r>
+              <a:rPr lang="id-ID" sz="2000" dirty="0"/>
+              <a:t> populer lainnya. (Ke </a:t>
+            </a:r>
+            <a:r>
+              <a:rPr lang="id-ID" sz="2000" dirty="0" err="1"/>
+              <a:t>et</a:t>
+            </a:r>
+            <a:r>
+              <a:rPr lang="id-ID" sz="2000" dirty="0"/>
+              <a:t> </a:t>
+            </a:r>
+            <a:r>
+              <a:rPr lang="id-ID" sz="2000" dirty="0" err="1"/>
+              <a:t>al.</a:t>
+            </a:r>
+            <a:r>
+              <a:rPr lang="id-ID" sz="2000" dirty="0"/>
+              <a:t>, 2017; </a:t>
+            </a:r>
+            <a:r>
+              <a:rPr lang="id-ID" sz="2000" dirty="0" err="1"/>
+              <a:t>Florek</a:t>
+            </a:r>
+            <a:r>
+              <a:rPr lang="id-ID" sz="2000" dirty="0"/>
+              <a:t> &amp; </a:t>
+            </a:r>
+            <a:r>
+              <a:rPr lang="id-ID" sz="2000" dirty="0" err="1"/>
+              <a:t>Zagdański</a:t>
+            </a:r>
+            <a:r>
+              <a:rPr lang="id-ID" sz="2000" dirty="0"/>
+              <a:t>, 2023).</a:t>
+            </a:r>
+          </a:p>
+        </p:txBody>
+      </p:sp>
+      <p:sp>
+        <p:nvSpPr>
+          <p:cNvPr id="4" name="Tampungan Tanggal 3">
+            <a:extLst>
+              <a:ext uri="{FF2B5EF4-FFF2-40B4-BE49-F238E27FC236}">
+                <a16:creationId xmlns:a16="http://schemas.microsoft.com/office/drawing/2014/main" id="{5739303D-13C0-6A41-947A-F998CC47B32E}"/>
+              </a:ext>
+            </a:extLst>
+          </p:cNvPr>
+          <p:cNvSpPr>
+            <a:spLocks noGrp="1"/>
+          </p:cNvSpPr>
+          <p:nvPr>
+            <p:ph type="dt" sz="half" idx="2"/>
+          </p:nvPr>
+        </p:nvSpPr>
+        <p:spPr>
+          <a:xfrm>
+            <a:off x="381000" y="6356350"/>
+            <a:ext cx="2743200" cy="365125"/>
+          </a:xfrm>
+        </p:spPr>
+        <p:txBody>
+          <a:bodyPr rtlCol="0"/>
+          <a:lstStyle/>
+          <a:p>
+            <a:pPr rtl="0"/>
+            <a:fld id="{70C69C4D-CAFD-4E0E-94E0-4B1709D96441}" type="datetime1">
+              <a:rPr lang="id-ID" smtClean="0"/>
+              <a:t>14/10/2025</a:t>
+            </a:fld>
+            <a:endParaRPr lang="id-ID"/>
+          </a:p>
+        </p:txBody>
+      </p:sp>
+      <p:sp>
+        <p:nvSpPr>
+          <p:cNvPr id="6" name="Tampungan Nomor Slide 5">
+            <a:extLst>
+              <a:ext uri="{FF2B5EF4-FFF2-40B4-BE49-F238E27FC236}">
+                <a16:creationId xmlns:a16="http://schemas.microsoft.com/office/drawing/2014/main" id="{60D470D0-6D64-5E42-9515-048F8779CD5E}"/>
+              </a:ext>
+            </a:extLst>
+          </p:cNvPr>
+          <p:cNvSpPr>
+            <a:spLocks noGrp="1"/>
+          </p:cNvSpPr>
+          <p:nvPr>
+            <p:ph type="sldNum" sz="quarter" idx="4"/>
+          </p:nvPr>
+        </p:nvSpPr>
+        <p:spPr>
+          <a:xfrm>
+            <a:off x="10153276" y="6356350"/>
+            <a:ext cx="1657723" cy="365125"/>
+          </a:xfrm>
+        </p:spPr>
+        <p:txBody>
+          <a:bodyPr rtlCol="0"/>
+          <a:lstStyle/>
+          <a:p>
+            <a:pPr rtl="0"/>
+            <a:fld id="{294A09A9-5501-47C1-A89A-A340965A2BE2}" type="slidenum">
+              <a:rPr lang="id-ID" smtClean="0"/>
+              <a:pPr rtl="0"/>
+              <a:t>6</a:t>
+            </a:fld>
+            <a:endParaRPr lang="id-ID"/>
+          </a:p>
+        </p:txBody>
+      </p:sp>
+    </p:spTree>
+    <p:extLst>
+      <p:ext uri="{BB962C8B-B14F-4D97-AF65-F5344CB8AC3E}">
+        <p14:creationId xmlns:p14="http://schemas.microsoft.com/office/powerpoint/2010/main" val="1325608595"/>
+      </p:ext>
+    </p:extLst>
+  </p:cSld>
+  <p:clrMapOvr>
+    <a:masterClrMapping/>
+  </p:clrMapOvr>
+</p:sld>
+</file>
+
+<file path=ppt/slides/slide7.xml><?xml version="1.0" encoding="utf-8"?>
+<p:sld xmlns:a="http://schemas.openxmlformats.org/drawingml/2006/main" xmlns:r="http://schemas.openxmlformats.org/officeDocument/2006/relationships" xmlns:p="http://schemas.openxmlformats.org/presentationml/2006/main">
+  <p:cSld>
+    <p:spTree>
+      <p:nvGrpSpPr>
+        <p:cNvPr id="1" name="">
+          <a:extLst>
+            <a:ext uri="{FF2B5EF4-FFF2-40B4-BE49-F238E27FC236}">
+              <a16:creationId xmlns:a16="http://schemas.microsoft.com/office/drawing/2014/main" id="{54D1C1B3-EA43-380C-A30B-62986EFE7690}"/>
+            </a:ext>
+          </a:extLst>
+        </p:cNvPr>
+        <p:cNvGrpSpPr/>
+        <p:nvPr/>
+      </p:nvGrpSpPr>
+      <p:grpSpPr>
+        <a:xfrm>
+          <a:off x="0" y="0"/>
+          <a:ext cx="0" cy="0"/>
+          <a:chOff x="0" y="0"/>
+          <a:chExt cx="0" cy="0"/>
+        </a:xfrm>
+      </p:grpSpPr>
+      <p:sp>
+        <p:nvSpPr>
+          <p:cNvPr id="2" name="Judul 1">
+            <a:extLst>
+              <a:ext uri="{FF2B5EF4-FFF2-40B4-BE49-F238E27FC236}">
+                <a16:creationId xmlns:a16="http://schemas.microsoft.com/office/drawing/2014/main" id="{E0F4E0BC-D929-D038-0131-4935F009E1B0}"/>
+              </a:ext>
+            </a:extLst>
+          </p:cNvPr>
+          <p:cNvSpPr>
+            <a:spLocks noGrp="1"/>
+          </p:cNvSpPr>
+          <p:nvPr>
+            <p:ph type="title"/>
+          </p:nvPr>
+        </p:nvSpPr>
+        <p:spPr>
+          <a:xfrm>
+            <a:off x="1167492" y="381000"/>
+            <a:ext cx="9779183" cy="1325563"/>
+          </a:xfrm>
+        </p:spPr>
+        <p:txBody>
+          <a:bodyPr rtlCol="0"/>
+          <a:lstStyle/>
+          <a:p>
+            <a:pPr rtl="0"/>
+            <a:r>
+              <a:rPr lang="en-GB" dirty="0" err="1"/>
+              <a:t>Identifikasi</a:t>
+            </a:r>
+            <a:r>
+              <a:rPr lang="en-GB" dirty="0"/>
+              <a:t> </a:t>
+            </a:r>
+            <a:r>
+              <a:rPr lang="en-GB" dirty="0" err="1"/>
+              <a:t>Masalah</a:t>
+            </a:r>
+            <a:endParaRPr lang="id-ID" dirty="0"/>
+          </a:p>
+        </p:txBody>
+      </p:sp>
+      <p:sp>
+        <p:nvSpPr>
+          <p:cNvPr id="4" name="Tampungan Konten 3">
+            <a:extLst>
+              <a:ext uri="{FF2B5EF4-FFF2-40B4-BE49-F238E27FC236}">
+                <a16:creationId xmlns:a16="http://schemas.microsoft.com/office/drawing/2014/main" id="{9D760D44-7E7A-26B5-6C89-92FAB0CD7182}"/>
+              </a:ext>
+            </a:extLst>
+          </p:cNvPr>
+          <p:cNvSpPr>
+            <a:spLocks noGrp="1"/>
+          </p:cNvSpPr>
+          <p:nvPr>
+            <p:ph idx="1"/>
+          </p:nvPr>
+        </p:nvSpPr>
+        <p:spPr>
+          <a:xfrm>
+            <a:off x="1167492" y="2020529"/>
+            <a:ext cx="9157607" cy="3347884"/>
+          </a:xfrm>
+        </p:spPr>
+        <p:txBody>
+          <a:bodyPr vert="horz" lIns="91440" tIns="45720" rIns="91440" bIns="45720" rtlCol="0" anchor="t">
+            <a:normAutofit/>
+          </a:bodyPr>
+          <a:lstStyle/>
+          <a:p>
+            <a:pPr marL="342900" indent="-342900">
+              <a:buFont typeface="Arial" panose="020B0604020202020204" pitchFamily="34" charset="0"/>
+              <a:buChar char="•"/>
+            </a:pPr>
+            <a:r>
+              <a:rPr lang="id-ID" sz="3200" dirty="0"/>
+              <a:t>Model yang umum digunakan (seperti Regresi Logistik) kesulitan menangkap </a:t>
+            </a:r>
+            <a:r>
+              <a:rPr lang="id-ID" sz="3200" b="1" dirty="0"/>
+              <a:t>pola data yang kompleks (non-linear)</a:t>
+            </a:r>
+            <a:r>
+              <a:rPr lang="id-ID" sz="3200" dirty="0"/>
+              <a:t> dalam sepak bola.</a:t>
+            </a:r>
+          </a:p>
+          <a:p>
+            <a:pPr marL="342900" indent="-342900">
+              <a:buFont typeface="Arial" panose="020B0604020202020204" pitchFamily="34" charset="0"/>
+              <a:buChar char="•"/>
+            </a:pPr>
+            <a:r>
+              <a:rPr lang="en-GB" sz="3200" dirty="0" err="1"/>
+              <a:t>Namun</a:t>
+            </a:r>
+            <a:r>
+              <a:rPr lang="en-GB" sz="3200" dirty="0"/>
+              <a:t>, a</a:t>
+            </a:r>
+            <a:r>
+              <a:rPr lang="id-ID" sz="3200" dirty="0" err="1"/>
+              <a:t>lgoritma</a:t>
+            </a:r>
+            <a:r>
+              <a:rPr lang="id-ID" sz="3200" dirty="0"/>
+              <a:t> yang lebih </a:t>
+            </a:r>
+            <a:r>
+              <a:rPr lang="en-GB" sz="3200" dirty="0" err="1"/>
+              <a:t>baik</a:t>
+            </a:r>
+            <a:r>
+              <a:rPr lang="en-GB" sz="3200" dirty="0"/>
+              <a:t> </a:t>
+            </a:r>
+            <a:r>
+              <a:rPr lang="en-GB" sz="3200" dirty="0" err="1"/>
+              <a:t>menangkap</a:t>
+            </a:r>
+            <a:r>
+              <a:rPr lang="en-GB" sz="3200" dirty="0"/>
+              <a:t> </a:t>
+            </a:r>
+            <a:r>
+              <a:rPr lang="en-GB" sz="3200" dirty="0" err="1"/>
+              <a:t>pola</a:t>
+            </a:r>
+            <a:r>
+              <a:rPr lang="en-GB" sz="3200" dirty="0"/>
+              <a:t> data non-linear</a:t>
+            </a:r>
+            <a:r>
+              <a:rPr lang="id-ID" sz="3200" dirty="0"/>
+              <a:t> </a:t>
+            </a:r>
+            <a:r>
+              <a:rPr lang="id-ID" sz="3200" dirty="0" err="1"/>
+              <a:t>seringkali</a:t>
+            </a:r>
+            <a:r>
+              <a:rPr lang="id-ID" sz="3200" dirty="0"/>
+              <a:t> </a:t>
+            </a:r>
+            <a:r>
+              <a:rPr lang="id-ID" sz="3200" b="1" dirty="0"/>
+              <a:t>tidak efisien</a:t>
+            </a:r>
+            <a:r>
+              <a:rPr lang="id-ID" sz="3200" dirty="0"/>
+              <a:t> dan </a:t>
+            </a:r>
+            <a:r>
+              <a:rPr lang="id-ID" sz="3200" b="1" dirty="0"/>
+              <a:t>lambat</a:t>
+            </a:r>
+            <a:r>
+              <a:rPr lang="id-ID" sz="3200" dirty="0"/>
+              <a:t> saat dihadapkan pada volume data yang besar.</a:t>
+            </a:r>
+          </a:p>
+        </p:txBody>
+      </p:sp>
+      <p:sp>
+        <p:nvSpPr>
+          <p:cNvPr id="9" name="Tampungan Nomor Slide 8">
+            <a:extLst>
+              <a:ext uri="{FF2B5EF4-FFF2-40B4-BE49-F238E27FC236}">
+                <a16:creationId xmlns:a16="http://schemas.microsoft.com/office/drawing/2014/main" id="{5540E92C-7DD9-66B5-6A13-9DE217B996E2}"/>
+              </a:ext>
+            </a:extLst>
+          </p:cNvPr>
+          <p:cNvSpPr>
+            <a:spLocks noGrp="1"/>
+          </p:cNvSpPr>
+          <p:nvPr>
+            <p:ph type="sldNum" sz="quarter" idx="4"/>
+          </p:nvPr>
+        </p:nvSpPr>
+        <p:spPr>
+          <a:xfrm>
+            <a:off x="10153276" y="6356350"/>
+            <a:ext cx="1657723" cy="365125"/>
+          </a:xfrm>
+        </p:spPr>
+        <p:txBody>
+          <a:bodyPr rtlCol="0"/>
+          <a:lstStyle/>
+          <a:p>
+            <a:pPr rtl="0"/>
+            <a:fld id="{294A09A9-5501-47C1-A89A-A340965A2BE2}" type="slidenum">
+              <a:rPr lang="id-ID" smtClean="0"/>
+              <a:pPr rtl="0"/>
+              <a:t>7</a:t>
+            </a:fld>
+            <a:endParaRPr lang="id-ID"/>
+          </a:p>
+        </p:txBody>
+      </p:sp>
+    </p:spTree>
+    <p:extLst>
+      <p:ext uri="{BB962C8B-B14F-4D97-AF65-F5344CB8AC3E}">
+        <p14:creationId xmlns:p14="http://schemas.microsoft.com/office/powerpoint/2010/main" val="2447019143"/>
+      </p:ext>
+    </p:extLst>
+  </p:cSld>
+  <p:clrMapOvr>
+    <a:masterClrMapping/>
+  </p:clrMapOvr>
+</p:sld>
+</file>
+
+<file path=ppt/slides/slide8.xml><?xml version="1.0" encoding="utf-8"?>
+<p:sld xmlns:a="http://schemas.openxmlformats.org/drawingml/2006/main" xmlns:r="http://schemas.openxmlformats.org/officeDocument/2006/relationships" xmlns:p="http://schemas.openxmlformats.org/presentationml/2006/main">
+  <p:cSld>
+    <p:spTree>
+      <p:nvGrpSpPr>
+        <p:cNvPr id="1" name=""/>
+        <p:cNvGrpSpPr/>
+        <p:nvPr/>
+      </p:nvGrpSpPr>
+      <p:grpSpPr>
+        <a:xfrm>
+          <a:off x="0" y="0"/>
+          <a:ext cx="0" cy="0"/>
+          <a:chOff x="0" y="0"/>
+          <a:chExt cx="0" cy="0"/>
+        </a:xfrm>
+      </p:grpSpPr>
       <p:sp>
         <p:nvSpPr>
           <p:cNvPr id="5" name="Tampungan Kaki 4">
@@ -31927,7 +32837,7 @@
             <a:fld id="{294A09A9-5501-47C1-A89A-A340965A2BE2}" type="slidenum">
               <a:rPr lang="id-ID" smtClean="0"/>
               <a:pPr rtl="0"/>
-              <a:t>6</a:t>
+              <a:t>8</a:t>
             </a:fld>
             <a:endParaRPr lang="id-ID" dirty="0"/>
           </a:p>
@@ -31948,14 +32858,14 @@
           <p:nvPr>
             <p:extLst>
               <p:ext uri="{D42A27DB-BD31-4B8C-83A1-F6EECF244321}">
-                <p14:modId xmlns:p14="http://schemas.microsoft.com/office/powerpoint/2010/main" val="1612815024"/>
+                <p14:modId xmlns:p14="http://schemas.microsoft.com/office/powerpoint/2010/main" val="3348498498"/>
               </p:ext>
             </p:extLst>
           </p:nvPr>
         </p:nvGraphicFramePr>
         <p:xfrm>
-          <a:off x="1593033" y="1803400"/>
-          <a:ext cx="9626511" cy="4001643"/>
+          <a:off x="1091381" y="1120878"/>
+          <a:ext cx="10128162" cy="4684165"/>
         </p:xfrm>
         <a:graphic>
           <a:graphicData uri="http://schemas.openxmlformats.org/drawingml/2006/table">
@@ -31964,21 +32874,21 @@
                 <a:tableStyleId>{5C22544A-7EE6-4342-B048-85BDC9FD1C3A}</a:tableStyleId>
               </a:tblPr>
               <a:tblGrid>
-                <a:gridCol w="3208837">
+                <a:gridCol w="3376054">
                   <a:extLst>
                     <a:ext uri="{9D8B030D-6E8A-4147-A177-3AD203B41FA5}">
                       <a16:colId xmlns:a16="http://schemas.microsoft.com/office/drawing/2014/main" val="3209082739"/>
                     </a:ext>
                   </a:extLst>
                 </a:gridCol>
-                <a:gridCol w="3208837">
+                <a:gridCol w="3376054">
                   <a:extLst>
                     <a:ext uri="{9D8B030D-6E8A-4147-A177-3AD203B41FA5}">
                       <a16:colId xmlns:a16="http://schemas.microsoft.com/office/drawing/2014/main" val="1888921284"/>
                     </a:ext>
                   </a:extLst>
                 </a:gridCol>
-                <a:gridCol w="3208837">
+                <a:gridCol w="3376054">
                   <a:extLst>
                     <a:ext uri="{9D8B030D-6E8A-4147-A177-3AD203B41FA5}">
                       <a16:colId xmlns:a16="http://schemas.microsoft.com/office/drawing/2014/main" val="4077521047"/>
@@ -31986,7 +32896,7 @@
                   </a:extLst>
                 </a:gridCol>
               </a:tblGrid>
-              <a:tr h="784860">
+              <a:tr h="1009261">
                 <a:tc>
                   <a:txBody>
                     <a:bodyPr/>
@@ -32077,7 +32987,7 @@
                   </a:ext>
                 </a:extLst>
               </a:tr>
-              <a:tr h="784860">
+              <a:tr h="918726">
                 <a:tc>
                   <a:txBody>
                     <a:bodyPr/>
@@ -32168,7 +33078,7 @@
                   </a:ext>
                 </a:extLst>
               </a:tr>
-              <a:tr h="784860">
+              <a:tr h="918726">
                 <a:tc>
                   <a:txBody>
                     <a:bodyPr/>
@@ -32267,7 +33177,7 @@
                   </a:ext>
                 </a:extLst>
               </a:tr>
-              <a:tr h="784860">
+              <a:tr h="918726">
                 <a:tc>
                   <a:txBody>
                     <a:bodyPr/>
@@ -32362,7 +33272,7 @@
                   </a:ext>
                 </a:extLst>
               </a:tr>
-              <a:tr h="784860">
+              <a:tr h="918726">
                 <a:tc>
                   <a:txBody>
                     <a:bodyPr/>
@@ -32470,7 +33380,7 @@
 </p:sld>
 </file>
 
-<file path=ppt/slides/slide7.xml><?xml version="1.0" encoding="utf-8"?>
+<file path=ppt/slides/slide9.xml><?xml version="1.0" encoding="utf-8"?>
 <p:sld xmlns:a="http://schemas.openxmlformats.org/drawingml/2006/main" xmlns:r="http://schemas.openxmlformats.org/officeDocument/2006/relationships" xmlns:p="http://schemas.openxmlformats.org/presentationml/2006/main">
   <p:cSld>
     <p:spTree>
@@ -32495,40 +33405,6 @@
       </p:grpSpPr>
       <p:sp>
         <p:nvSpPr>
-          <p:cNvPr id="2" name="Judul 1">
-            <a:extLst>
-              <a:ext uri="{FF2B5EF4-FFF2-40B4-BE49-F238E27FC236}">
-                <a16:creationId xmlns:a16="http://schemas.microsoft.com/office/drawing/2014/main" id="{C584F8A7-D836-556F-B9F1-1404EC19A8CD}"/>
-              </a:ext>
-            </a:extLst>
-          </p:cNvPr>
-          <p:cNvSpPr>
-            <a:spLocks noGrp="1"/>
-          </p:cNvSpPr>
-          <p:nvPr>
-            <p:ph type="title"/>
-          </p:nvPr>
-        </p:nvSpPr>
-        <p:spPr/>
-        <p:txBody>
-          <a:bodyPr rtlCol="0"/>
-          <a:lstStyle/>
-          <a:p>
-            <a:pPr rtl="0"/>
-            <a:r>
-              <a:rPr lang="en-GB" dirty="0"/>
-              <a:t>Latar </a:t>
-            </a:r>
-            <a:r>
-              <a:rPr lang="en-GB" dirty="0" err="1"/>
-              <a:t>Belakang</a:t>
-            </a:r>
-            <a:endParaRPr lang="id-ID" dirty="0"/>
-          </a:p>
-        </p:txBody>
-      </p:sp>
-      <p:sp>
-        <p:nvSpPr>
           <p:cNvPr id="5" name="Tampungan Kaki 4">
             <a:extLst>
               <a:ext uri="{FF2B5EF4-FFF2-40B4-BE49-F238E27FC236}">
@@ -32621,7 +33497,7 @@
             <a:fld id="{294A09A9-5501-47C1-A89A-A340965A2BE2}" type="slidenum">
               <a:rPr lang="id-ID" smtClean="0"/>
               <a:pPr rtl="0"/>
-              <a:t>7</a:t>
+              <a:t>9</a:t>
             </a:fld>
             <a:endParaRPr lang="id-ID" dirty="0"/>
           </a:p>
@@ -32639,11 +33515,17 @@
           <p:cNvGraphicFramePr>
             <a:graphicFrameLocks noGrp="1"/>
           </p:cNvGraphicFramePr>
-          <p:nvPr/>
+          <p:nvPr>
+            <p:extLst>
+              <p:ext uri="{D42A27DB-BD31-4B8C-83A1-F6EECF244321}">
+                <p14:modId xmlns:p14="http://schemas.microsoft.com/office/powerpoint/2010/main" val="3891162626"/>
+              </p:ext>
+            </p:extLst>
+          </p:nvPr>
         </p:nvGraphicFramePr>
         <p:xfrm>
-          <a:off x="1593033" y="1803400"/>
-          <a:ext cx="8928100" cy="4001643"/>
+          <a:off x="1076632" y="594742"/>
+          <a:ext cx="9444500" cy="5210303"/>
         </p:xfrm>
         <a:graphic>
           <a:graphicData uri="http://schemas.openxmlformats.org/drawingml/2006/table">
@@ -32652,35 +33534,35 @@
                 <a:tableStyleId>{5C22544A-7EE6-4342-B048-85BDC9FD1C3A}</a:tableStyleId>
               </a:tblPr>
               <a:tblGrid>
-                <a:gridCol w="1785620">
+                <a:gridCol w="1888900">
                   <a:extLst>
                     <a:ext uri="{9D8B030D-6E8A-4147-A177-3AD203B41FA5}">
                       <a16:colId xmlns:a16="http://schemas.microsoft.com/office/drawing/2014/main" val="3209082739"/>
                     </a:ext>
                   </a:extLst>
                 </a:gridCol>
-                <a:gridCol w="1785620">
+                <a:gridCol w="1888900">
                   <a:extLst>
                     <a:ext uri="{9D8B030D-6E8A-4147-A177-3AD203B41FA5}">
                       <a16:colId xmlns:a16="http://schemas.microsoft.com/office/drawing/2014/main" val="1888921284"/>
                     </a:ext>
                   </a:extLst>
                 </a:gridCol>
-                <a:gridCol w="1785620">
+                <a:gridCol w="1888900">
                   <a:extLst>
                     <a:ext uri="{9D8B030D-6E8A-4147-A177-3AD203B41FA5}">
                       <a16:colId xmlns:a16="http://schemas.microsoft.com/office/drawing/2014/main" val="4077521047"/>
                     </a:ext>
                   </a:extLst>
                 </a:gridCol>
-                <a:gridCol w="1785620">
+                <a:gridCol w="1888900">
                   <a:extLst>
                     <a:ext uri="{9D8B030D-6E8A-4147-A177-3AD203B41FA5}">
                       <a16:colId xmlns:a16="http://schemas.microsoft.com/office/drawing/2014/main" val="2736218579"/>
                     </a:ext>
                   </a:extLst>
                 </a:gridCol>
-                <a:gridCol w="1785620">
+                <a:gridCol w="1888900">
                   <a:extLst>
                     <a:ext uri="{9D8B030D-6E8A-4147-A177-3AD203B41FA5}">
                       <a16:colId xmlns:a16="http://schemas.microsoft.com/office/drawing/2014/main" val="2430063282"/>
@@ -32688,7 +33570,7 @@
                   </a:extLst>
                 </a:gridCol>
               </a:tblGrid>
-              <a:tr h="784860">
+              <a:tr h="1122623">
                 <a:tc>
                   <a:txBody>
                     <a:bodyPr/>
@@ -32845,7 +33727,7 @@
                   </a:ext>
                 </a:extLst>
               </a:tr>
-              <a:tr h="784860">
+              <a:tr h="1021920">
                 <a:tc>
                   <a:txBody>
                     <a:bodyPr/>
@@ -33014,7 +33896,7 @@
                   </a:ext>
                 </a:extLst>
               </a:tr>
-              <a:tr h="784860">
+              <a:tr h="1021920">
                 <a:tc>
                   <a:txBody>
                     <a:bodyPr/>
@@ -33171,7 +34053,7 @@
                   </a:ext>
                 </a:extLst>
               </a:tr>
-              <a:tr h="784860">
+              <a:tr h="1021920">
                 <a:tc>
                   <a:txBody>
                     <a:bodyPr/>
@@ -33328,7 +34210,7 @@
                   </a:ext>
                 </a:extLst>
               </a:tr>
-              <a:tr h="784860">
+              <a:tr h="1021920">
                 <a:tc>
                   <a:txBody>
                     <a:bodyPr/>
@@ -33341,12 +34223,12 @@
                         <a:buNone/>
                       </a:pPr>
                       <a:r>
-                        <a:rPr lang="id-ID" sz="2000" kern="0">
+                        <a:rPr lang="id-ID" sz="2000" kern="0" dirty="0">
                           <a:effectLst/>
                         </a:rPr>
                         <a:t>Leukemia</a:t>
                       </a:r>
-                      <a:endParaRPr lang="id-ID" sz="3200" kern="100">
+                      <a:endParaRPr lang="id-ID" sz="3200" kern="100" dirty="0">
                         <a:solidFill>
                           <a:srgbClr val="000000"/>
                         </a:solidFill>
@@ -33493,396 +34375,6 @@
     <p:extLst>
       <p:ext uri="{BB962C8B-B14F-4D97-AF65-F5344CB8AC3E}">
         <p14:creationId xmlns:p14="http://schemas.microsoft.com/office/powerpoint/2010/main" val="3776707092"/>
-      </p:ext>
-    </p:extLst>
-  </p:cSld>
-  <p:clrMapOvr>
-    <a:masterClrMapping/>
-  </p:clrMapOvr>
-</p:sld>
-</file>
-
-<file path=ppt/slides/slide8.xml><?xml version="1.0" encoding="utf-8"?>
-<p:sld xmlns:a="http://schemas.openxmlformats.org/drawingml/2006/main" xmlns:r="http://schemas.openxmlformats.org/officeDocument/2006/relationships" xmlns:p="http://schemas.openxmlformats.org/presentationml/2006/main">
-  <p:cSld>
-    <p:spTree>
-      <p:nvGrpSpPr>
-        <p:cNvPr id="1" name=""/>
-        <p:cNvGrpSpPr/>
-        <p:nvPr/>
-      </p:nvGrpSpPr>
-      <p:grpSpPr>
-        <a:xfrm>
-          <a:off x="0" y="0"/>
-          <a:ext cx="0" cy="0"/>
-          <a:chOff x="0" y="0"/>
-          <a:chExt cx="0" cy="0"/>
-        </a:xfrm>
-      </p:grpSpPr>
-      <p:sp>
-        <p:nvSpPr>
-          <p:cNvPr id="2" name="Judul 1">
-            <a:extLst>
-              <a:ext uri="{FF2B5EF4-FFF2-40B4-BE49-F238E27FC236}">
-                <a16:creationId xmlns:a16="http://schemas.microsoft.com/office/drawing/2014/main" id="{19256B7E-1633-44AB-8584-82DF5B726834}"/>
-              </a:ext>
-            </a:extLst>
-          </p:cNvPr>
-          <p:cNvSpPr>
-            <a:spLocks noGrp="1"/>
-          </p:cNvSpPr>
-          <p:nvPr>
-            <p:ph type="title"/>
-          </p:nvPr>
-        </p:nvSpPr>
-        <p:spPr>
-          <a:xfrm>
-            <a:off x="1167492" y="381000"/>
-            <a:ext cx="9779183" cy="1325563"/>
-          </a:xfrm>
-        </p:spPr>
-        <p:txBody>
-          <a:bodyPr rtlCol="0"/>
-          <a:lstStyle/>
-          <a:p>
-            <a:pPr rtl="0"/>
-            <a:r>
-              <a:rPr lang="en-GB" dirty="0" err="1"/>
-              <a:t>Identifikasi</a:t>
-            </a:r>
-            <a:r>
-              <a:rPr lang="en-GB" dirty="0"/>
-              <a:t> </a:t>
-            </a:r>
-            <a:r>
-              <a:rPr lang="en-GB" dirty="0" err="1"/>
-              <a:t>Masalah</a:t>
-            </a:r>
-            <a:endParaRPr lang="id-ID" dirty="0"/>
-          </a:p>
-        </p:txBody>
-      </p:sp>
-      <p:sp>
-        <p:nvSpPr>
-          <p:cNvPr id="4" name="Tampungan Konten 3">
-            <a:extLst>
-              <a:ext uri="{FF2B5EF4-FFF2-40B4-BE49-F238E27FC236}">
-                <a16:creationId xmlns:a16="http://schemas.microsoft.com/office/drawing/2014/main" id="{950677C9-3E42-427F-93B8-526692906471}"/>
-              </a:ext>
-            </a:extLst>
-          </p:cNvPr>
-          <p:cNvSpPr>
-            <a:spLocks noGrp="1"/>
-          </p:cNvSpPr>
-          <p:nvPr>
-            <p:ph idx="1"/>
-          </p:nvPr>
-        </p:nvSpPr>
-        <p:spPr>
-          <a:xfrm>
-            <a:off x="1167492" y="2020529"/>
-            <a:ext cx="9157607" cy="3347884"/>
-          </a:xfrm>
-        </p:spPr>
-        <p:txBody>
-          <a:bodyPr vert="horz" lIns="91440" tIns="45720" rIns="91440" bIns="45720" rtlCol="0" anchor="t">
-            <a:normAutofit/>
-          </a:bodyPr>
-          <a:lstStyle/>
-          <a:p>
-            <a:pPr marL="342900" indent="-342900">
-              <a:buFont typeface="Arial" panose="020B0604020202020204" pitchFamily="34" charset="0"/>
-              <a:buChar char="•"/>
-            </a:pPr>
-            <a:r>
-              <a:rPr lang="id-ID" sz="3200" dirty="0"/>
-              <a:t>Model yang umum digunakan (seperti Regresi Logistik) kesulitan menangkap </a:t>
-            </a:r>
-            <a:r>
-              <a:rPr lang="id-ID" sz="3200" b="1" dirty="0"/>
-              <a:t>pola data yang kompleks (non-linear)</a:t>
-            </a:r>
-            <a:r>
-              <a:rPr lang="id-ID" sz="3200" dirty="0"/>
-              <a:t> dalam sepak bola.</a:t>
-            </a:r>
-          </a:p>
-          <a:p>
-            <a:pPr marL="342900" indent="-342900">
-              <a:buFont typeface="Arial" panose="020B0604020202020204" pitchFamily="34" charset="0"/>
-              <a:buChar char="•"/>
-            </a:pPr>
-            <a:r>
-              <a:rPr lang="en-GB" sz="3200" dirty="0" err="1"/>
-              <a:t>Namun</a:t>
-            </a:r>
-            <a:r>
-              <a:rPr lang="en-GB" sz="3200" dirty="0"/>
-              <a:t>, a</a:t>
-            </a:r>
-            <a:r>
-              <a:rPr lang="id-ID" sz="3200" dirty="0" err="1"/>
-              <a:t>lgoritma</a:t>
-            </a:r>
-            <a:r>
-              <a:rPr lang="id-ID" sz="3200" dirty="0"/>
-              <a:t> yang lebih </a:t>
-            </a:r>
-            <a:r>
-              <a:rPr lang="en-GB" sz="3200" dirty="0" err="1"/>
-              <a:t>baik</a:t>
-            </a:r>
-            <a:r>
-              <a:rPr lang="en-GB" sz="3200" dirty="0"/>
-              <a:t> </a:t>
-            </a:r>
-            <a:r>
-              <a:rPr lang="en-GB" sz="3200" dirty="0" err="1"/>
-              <a:t>menangkap</a:t>
-            </a:r>
-            <a:r>
-              <a:rPr lang="en-GB" sz="3200" dirty="0"/>
-              <a:t> </a:t>
-            </a:r>
-            <a:r>
-              <a:rPr lang="en-GB" sz="3200" dirty="0" err="1"/>
-              <a:t>pola</a:t>
-            </a:r>
-            <a:r>
-              <a:rPr lang="en-GB" sz="3200" dirty="0"/>
-              <a:t> data non-linear</a:t>
-            </a:r>
-            <a:r>
-              <a:rPr lang="id-ID" sz="3200" dirty="0"/>
-              <a:t> </a:t>
-            </a:r>
-            <a:r>
-              <a:rPr lang="id-ID" sz="3200" dirty="0" err="1"/>
-              <a:t>seringkali</a:t>
-            </a:r>
-            <a:r>
-              <a:rPr lang="id-ID" sz="3200" dirty="0"/>
-              <a:t> </a:t>
-            </a:r>
-            <a:r>
-              <a:rPr lang="id-ID" sz="3200" b="1" dirty="0"/>
-              <a:t>tidak efisien</a:t>
-            </a:r>
-            <a:r>
-              <a:rPr lang="id-ID" sz="3200" dirty="0"/>
-              <a:t> dan </a:t>
-            </a:r>
-            <a:r>
-              <a:rPr lang="id-ID" sz="3200" b="1" dirty="0"/>
-              <a:t>lambat</a:t>
-            </a:r>
-            <a:r>
-              <a:rPr lang="id-ID" sz="3200" dirty="0"/>
-              <a:t> saat dihadapkan pada volume data yang besar.</a:t>
-            </a:r>
-          </a:p>
-        </p:txBody>
-      </p:sp>
-      <p:sp>
-        <p:nvSpPr>
-          <p:cNvPr id="9" name="Tampungan Nomor Slide 8">
-            <a:extLst>
-              <a:ext uri="{FF2B5EF4-FFF2-40B4-BE49-F238E27FC236}">
-                <a16:creationId xmlns:a16="http://schemas.microsoft.com/office/drawing/2014/main" id="{6FD448B0-743E-0045-8131-69B4EEC58365}"/>
-              </a:ext>
-            </a:extLst>
-          </p:cNvPr>
-          <p:cNvSpPr>
-            <a:spLocks noGrp="1"/>
-          </p:cNvSpPr>
-          <p:nvPr>
-            <p:ph type="sldNum" sz="quarter" idx="4"/>
-          </p:nvPr>
-        </p:nvSpPr>
-        <p:spPr>
-          <a:xfrm>
-            <a:off x="10153276" y="6356350"/>
-            <a:ext cx="1657723" cy="365125"/>
-          </a:xfrm>
-        </p:spPr>
-        <p:txBody>
-          <a:bodyPr rtlCol="0"/>
-          <a:lstStyle/>
-          <a:p>
-            <a:pPr rtl="0"/>
-            <a:fld id="{294A09A9-5501-47C1-A89A-A340965A2BE2}" type="slidenum">
-              <a:rPr lang="id-ID" smtClean="0"/>
-              <a:pPr rtl="0"/>
-              <a:t>8</a:t>
-            </a:fld>
-            <a:endParaRPr lang="id-ID"/>
-          </a:p>
-        </p:txBody>
-      </p:sp>
-    </p:spTree>
-    <p:extLst>
-      <p:ext uri="{BB962C8B-B14F-4D97-AF65-F5344CB8AC3E}">
-        <p14:creationId xmlns:p14="http://schemas.microsoft.com/office/powerpoint/2010/main" val="2563119616"/>
-      </p:ext>
-    </p:extLst>
-  </p:cSld>
-  <p:clrMapOvr>
-    <a:masterClrMapping/>
-  </p:clrMapOvr>
-</p:sld>
-</file>
-
-<file path=ppt/slides/slide9.xml><?xml version="1.0" encoding="utf-8"?>
-<p:sld xmlns:a="http://schemas.openxmlformats.org/drawingml/2006/main" xmlns:r="http://schemas.openxmlformats.org/officeDocument/2006/relationships" xmlns:p="http://schemas.openxmlformats.org/presentationml/2006/main">
-  <p:cSld>
-    <p:spTree>
-      <p:nvGrpSpPr>
-        <p:cNvPr id="1" name=""/>
-        <p:cNvGrpSpPr/>
-        <p:nvPr/>
-      </p:nvGrpSpPr>
-      <p:grpSpPr>
-        <a:xfrm>
-          <a:off x="0" y="0"/>
-          <a:ext cx="0" cy="0"/>
-          <a:chOff x="0" y="0"/>
-          <a:chExt cx="0" cy="0"/>
-        </a:xfrm>
-      </p:grpSpPr>
-      <p:sp>
-        <p:nvSpPr>
-          <p:cNvPr id="2" name="Judul 1">
-            <a:extLst>
-              <a:ext uri="{FF2B5EF4-FFF2-40B4-BE49-F238E27FC236}">
-                <a16:creationId xmlns:a16="http://schemas.microsoft.com/office/drawing/2014/main" id="{F96F75DE-8A44-4EC5-83C6-95BDDF10DFD9}"/>
-              </a:ext>
-            </a:extLst>
-          </p:cNvPr>
-          <p:cNvSpPr>
-            <a:spLocks noGrp="1"/>
-          </p:cNvSpPr>
-          <p:nvPr>
-            <p:ph type="title"/>
-          </p:nvPr>
-        </p:nvSpPr>
-        <p:spPr>
-          <a:xfrm>
-            <a:off x="1167492" y="522807"/>
-            <a:ext cx="9779183" cy="1325563"/>
-          </a:xfrm>
-        </p:spPr>
-        <p:txBody>
-          <a:bodyPr rtlCol="0"/>
-          <a:lstStyle/>
-          <a:p>
-            <a:pPr rtl="0"/>
-            <a:r>
-              <a:rPr lang="en-GB" sz="5400" dirty="0" err="1"/>
-              <a:t>Rumusan</a:t>
-            </a:r>
-            <a:r>
-              <a:rPr lang="en-GB" sz="5400" dirty="0"/>
-              <a:t> </a:t>
-            </a:r>
-            <a:r>
-              <a:rPr lang="en-GB" sz="5400" dirty="0" err="1"/>
-              <a:t>Masalah</a:t>
-            </a:r>
-            <a:endParaRPr lang="id-ID" sz="5400" dirty="0"/>
-          </a:p>
-        </p:txBody>
-      </p:sp>
-      <p:sp>
-        <p:nvSpPr>
-          <p:cNvPr id="6" name="Tampungan Nomor Slide 5">
-            <a:extLst>
-              <a:ext uri="{FF2B5EF4-FFF2-40B4-BE49-F238E27FC236}">
-                <a16:creationId xmlns:a16="http://schemas.microsoft.com/office/drawing/2014/main" id="{50B6C709-8794-DF4E-A15C-6E648F09DD12}"/>
-              </a:ext>
-            </a:extLst>
-          </p:cNvPr>
-          <p:cNvSpPr>
-            <a:spLocks noGrp="1"/>
-          </p:cNvSpPr>
-          <p:nvPr>
-            <p:ph type="sldNum" sz="quarter" idx="4"/>
-          </p:nvPr>
-        </p:nvSpPr>
-        <p:spPr/>
-        <p:txBody>
-          <a:bodyPr rtlCol="0"/>
-          <a:lstStyle/>
-          <a:p>
-            <a:pPr rtl="0"/>
-            <a:fld id="{294A09A9-5501-47C1-A89A-A340965A2BE2}" type="slidenum">
-              <a:rPr lang="id-ID" smtClean="0"/>
-              <a:pPr rtl="0"/>
-              <a:t>9</a:t>
-            </a:fld>
-            <a:endParaRPr lang="id-ID"/>
-          </a:p>
-        </p:txBody>
-      </p:sp>
-      <p:sp>
-        <p:nvSpPr>
-          <p:cNvPr id="8" name="Content Placeholder 7">
-            <a:extLst>
-              <a:ext uri="{FF2B5EF4-FFF2-40B4-BE49-F238E27FC236}">
-                <a16:creationId xmlns:a16="http://schemas.microsoft.com/office/drawing/2014/main" id="{5378EF9A-6DF2-1B01-4D25-5907CD183193}"/>
-              </a:ext>
-            </a:extLst>
-          </p:cNvPr>
-          <p:cNvSpPr>
-            <a:spLocks noGrp="1"/>
-          </p:cNvSpPr>
-          <p:nvPr>
-            <p:ph idx="1"/>
-          </p:nvPr>
-        </p:nvSpPr>
-        <p:spPr>
-          <a:xfrm>
-            <a:off x="1167493" y="2087563"/>
-            <a:ext cx="9437007" cy="2687637"/>
-          </a:xfrm>
-        </p:spPr>
-        <p:txBody>
-          <a:bodyPr/>
-          <a:lstStyle/>
-          <a:p>
-            <a:pPr marL="457200" indent="-457200">
-              <a:buFont typeface="Arial" panose="020B0604020202020204" pitchFamily="34" charset="0"/>
-              <a:buChar char="•"/>
-            </a:pPr>
-            <a:r>
-              <a:rPr lang="sv-SE" sz="4000" dirty="0"/>
-              <a:t>Bagaimana LightGBM dapat </a:t>
-            </a:r>
-            <a:r>
-              <a:rPr lang="sv-SE" sz="3600" dirty="0"/>
-              <a:t>meningkatkan</a:t>
-            </a:r>
-            <a:r>
-              <a:rPr lang="sv-SE" sz="4000" dirty="0"/>
-              <a:t> akurasi prediksi xG?</a:t>
-            </a:r>
-          </a:p>
-          <a:p>
-            <a:pPr marL="457200" indent="-457200">
-              <a:buFont typeface="Arial" panose="020B0604020202020204" pitchFamily="34" charset="0"/>
-              <a:buChar char="•"/>
-            </a:pPr>
-            <a:r>
-              <a:rPr lang="pt-BR" sz="4000" dirty="0"/>
-              <a:t>Seberapa efisien LightGBM dalam memproses data untuk prediksi xG?</a:t>
-            </a:r>
-            <a:endParaRPr lang="id-ID" sz="4000" dirty="0"/>
-          </a:p>
-        </p:txBody>
-      </p:sp>
-    </p:spTree>
-    <p:extLst>
-      <p:ext uri="{BB962C8B-B14F-4D97-AF65-F5344CB8AC3E}">
-        <p14:creationId xmlns:p14="http://schemas.microsoft.com/office/powerpoint/2010/main" val="4212917468"/>
       </p:ext>
     </p:extLst>
   </p:cSld>
